--- a/Proyecto1_Seminario2.pptx
+++ b/Proyecto1_Seminario2.pptx
@@ -10,9 +10,10 @@
     <p:sldId id="258" r:id="rId4"/>
     <p:sldId id="263" r:id="rId5"/>
     <p:sldId id="259" r:id="rId6"/>
-    <p:sldId id="261" r:id="rId7"/>
-    <p:sldId id="260" r:id="rId8"/>
-    <p:sldId id="262" r:id="rId9"/>
+    <p:sldId id="264" r:id="rId7"/>
+    <p:sldId id="261" r:id="rId8"/>
+    <p:sldId id="260" r:id="rId9"/>
+    <p:sldId id="262" r:id="rId10"/>
   </p:sldIdLst>
   <p:sldSz cx="12192000" cy="6858000"/>
   <p:notesSz cx="6858000" cy="9144000"/>
@@ -298,7 +299,7 @@
           <a:p>
             <a:fld id="{0F1556C4-DFC3-4611-A7CC-780699185E26}" type="slidenum">
               <a:rPr lang="es-ES" smtClean="0"/>
-              <a:t>‹#›</a:t>
+              <a:t>‹Nº›</a:t>
             </a:fld>
             <a:endParaRPr lang="es-ES"/>
           </a:p>
@@ -466,7 +467,7 @@
           <a:p>
             <a:fld id="{0F1556C4-DFC3-4611-A7CC-780699185E26}" type="slidenum">
               <a:rPr lang="es-ES" smtClean="0"/>
-              <a:t>‹#›</a:t>
+              <a:t>‹Nº›</a:t>
             </a:fld>
             <a:endParaRPr lang="es-ES"/>
           </a:p>
@@ -644,7 +645,7 @@
           <a:p>
             <a:fld id="{0F1556C4-DFC3-4611-A7CC-780699185E26}" type="slidenum">
               <a:rPr lang="es-ES" smtClean="0"/>
-              <a:t>‹#›</a:t>
+              <a:t>‹Nº›</a:t>
             </a:fld>
             <a:endParaRPr lang="es-ES"/>
           </a:p>
@@ -812,7 +813,7 @@
           <a:p>
             <a:fld id="{0F1556C4-DFC3-4611-A7CC-780699185E26}" type="slidenum">
               <a:rPr lang="es-ES" smtClean="0"/>
-              <a:t>‹#›</a:t>
+              <a:t>‹Nº›</a:t>
             </a:fld>
             <a:endParaRPr lang="es-ES"/>
           </a:p>
@@ -1057,7 +1058,7 @@
           <a:p>
             <a:fld id="{0F1556C4-DFC3-4611-A7CC-780699185E26}" type="slidenum">
               <a:rPr lang="es-ES" smtClean="0"/>
-              <a:t>‹#›</a:t>
+              <a:t>‹Nº›</a:t>
             </a:fld>
             <a:endParaRPr lang="es-ES"/>
           </a:p>
@@ -1286,7 +1287,7 @@
           <a:p>
             <a:fld id="{0F1556C4-DFC3-4611-A7CC-780699185E26}" type="slidenum">
               <a:rPr lang="es-ES" smtClean="0"/>
-              <a:t>‹#›</a:t>
+              <a:t>‹Nº›</a:t>
             </a:fld>
             <a:endParaRPr lang="es-ES"/>
           </a:p>
@@ -1650,7 +1651,7 @@
           <a:p>
             <a:fld id="{0F1556C4-DFC3-4611-A7CC-780699185E26}" type="slidenum">
               <a:rPr lang="es-ES" smtClean="0"/>
-              <a:t>‹#›</a:t>
+              <a:t>‹Nº›</a:t>
             </a:fld>
             <a:endParaRPr lang="es-ES"/>
           </a:p>
@@ -1767,7 +1768,7 @@
           <a:p>
             <a:fld id="{0F1556C4-DFC3-4611-A7CC-780699185E26}" type="slidenum">
               <a:rPr lang="es-ES" smtClean="0"/>
-              <a:t>‹#›</a:t>
+              <a:t>‹Nº›</a:t>
             </a:fld>
             <a:endParaRPr lang="es-ES"/>
           </a:p>
@@ -1862,7 +1863,7 @@
           <a:p>
             <a:fld id="{0F1556C4-DFC3-4611-A7CC-780699185E26}" type="slidenum">
               <a:rPr lang="es-ES" smtClean="0"/>
-              <a:t>‹#›</a:t>
+              <a:t>‹Nº›</a:t>
             </a:fld>
             <a:endParaRPr lang="es-ES"/>
           </a:p>
@@ -2137,7 +2138,7 @@
           <a:p>
             <a:fld id="{0F1556C4-DFC3-4611-A7CC-780699185E26}" type="slidenum">
               <a:rPr lang="es-ES" smtClean="0"/>
-              <a:t>‹#›</a:t>
+              <a:t>‹Nº›</a:t>
             </a:fld>
             <a:endParaRPr lang="es-ES"/>
           </a:p>
@@ -2389,7 +2390,7 @@
           <a:p>
             <a:fld id="{0F1556C4-DFC3-4611-A7CC-780699185E26}" type="slidenum">
               <a:rPr lang="es-ES" smtClean="0"/>
-              <a:t>‹#›</a:t>
+              <a:t>‹Nº›</a:t>
             </a:fld>
             <a:endParaRPr lang="es-ES"/>
           </a:p>
@@ -2636,7 +2637,7 @@
           <a:p>
             <a:fld id="{0F1556C4-DFC3-4611-A7CC-780699185E26}" type="slidenum">
               <a:rPr lang="es-ES" smtClean="0"/>
-              <a:t>‹#›</a:t>
+              <a:t>‹Nº›</a:t>
             </a:fld>
             <a:endParaRPr lang="es-ES"/>
           </a:p>
@@ -4576,7 +4577,7 @@
               <a:rPr lang="en-US" sz="1600" dirty="0" err="1"/>
               <a:t>usado</a:t>
             </a:r>
-            <a:endParaRPr lang="en-US" sz="1600"/>
+            <a:endParaRPr lang="en-US" sz="1600" dirty="0"/>
           </a:p>
         </p:txBody>
       </p:sp>
@@ -4594,6 +4595,507 @@
 </file>
 
 <file path=ppt/slides/slide6.xml><?xml version="1.0" encoding="utf-8"?>
+<p:sld xmlns:a="http://schemas.openxmlformats.org/drawingml/2006/main" xmlns:r="http://schemas.openxmlformats.org/officeDocument/2006/relationships" xmlns:p="http://schemas.openxmlformats.org/presentationml/2006/main">
+  <p:cSld>
+    <p:bg>
+      <p:bgPr>
+        <a:solidFill>
+          <a:schemeClr val="bg1"/>
+        </a:solidFill>
+        <a:effectLst/>
+      </p:bgPr>
+    </p:bg>
+    <p:spTree>
+      <p:nvGrpSpPr>
+        <p:cNvPr id="1" name=""/>
+        <p:cNvGrpSpPr/>
+        <p:nvPr/>
+      </p:nvGrpSpPr>
+      <p:grpSpPr>
+        <a:xfrm>
+          <a:off x="0" y="0"/>
+          <a:ext cx="0" cy="0"/>
+          <a:chOff x="0" y="0"/>
+          <a:chExt cx="0" cy="0"/>
+        </a:xfrm>
+      </p:grpSpPr>
+      <p:sp useBgFill="1">
+        <p:nvSpPr>
+          <p:cNvPr id="21" name="Rectangle 20">
+            <a:extLst>
+              <a:ext uri="{FF2B5EF4-FFF2-40B4-BE49-F238E27FC236}">
+                <a16:creationId xmlns:a16="http://schemas.microsoft.com/office/drawing/2014/main" id="{0B9EE3F3-89B7-43C3-8651-C4C96830993D}"/>
+              </a:ext>
+              <a:ext uri="{C183D7F6-B498-43B3-948B-1728B52AA6E4}">
+                <adec:decorative xmlns:adec="http://schemas.microsoft.com/office/drawing/2017/decorative" val="1"/>
+              </a:ext>
+            </a:extLst>
+          </p:cNvPr>
+          <p:cNvSpPr>
+            <a:spLocks noGrp="1" noRot="1" noChangeAspect="1" noMove="1" noResize="1" noEditPoints="1" noAdjustHandles="1" noChangeArrowheads="1" noChangeShapeType="1" noTextEdit="1"/>
+          </p:cNvSpPr>
+          <p:nvPr>
+            <p:extLst>
+              <p:ext uri="{386F3935-93C4-4BCD-93E2-E3B085C9AB24}">
+                <p16:designElem xmlns:p16="http://schemas.microsoft.com/office/powerpoint/2015/main" val="1"/>
+              </p:ext>
+            </p:extLst>
+          </p:nvPr>
+        </p:nvSpPr>
+        <p:spPr>
+          <a:xfrm>
+            <a:off x="0" y="0"/>
+            <a:ext cx="12192000" cy="6858000"/>
+          </a:xfrm>
+          <a:prstGeom prst="rect">
+            <a:avLst/>
+          </a:prstGeom>
+          <a:ln>
+            <a:noFill/>
+          </a:ln>
+        </p:spPr>
+        <p:style>
+          <a:lnRef idx="2">
+            <a:schemeClr val="accent1">
+              <a:shade val="50000"/>
+            </a:schemeClr>
+          </a:lnRef>
+          <a:fillRef idx="1">
+            <a:schemeClr val="accent1"/>
+          </a:fillRef>
+          <a:effectRef idx="0">
+            <a:schemeClr val="accent1"/>
+          </a:effectRef>
+          <a:fontRef idx="minor">
+            <a:schemeClr val="lt1"/>
+          </a:fontRef>
+        </p:style>
+        <p:txBody>
+          <a:bodyPr rtlCol="0" anchor="ctr"/>
+          <a:lstStyle/>
+          <a:p>
+            <a:pPr algn="ctr"/>
+            <a:endParaRPr lang="en-US"/>
+          </a:p>
+        </p:txBody>
+      </p:sp>
+      <p:sp>
+        <p:nvSpPr>
+          <p:cNvPr id="2" name="Título 1">
+            <a:extLst>
+              <a:ext uri="{FF2B5EF4-FFF2-40B4-BE49-F238E27FC236}">
+                <a16:creationId xmlns:a16="http://schemas.microsoft.com/office/drawing/2014/main" id="{357B8F08-64E1-BDCA-745A-0D80ABE25C62}"/>
+              </a:ext>
+            </a:extLst>
+          </p:cNvPr>
+          <p:cNvSpPr>
+            <a:spLocks noGrp="1"/>
+          </p:cNvSpPr>
+          <p:nvPr>
+            <p:ph type="title"/>
+          </p:nvPr>
+        </p:nvSpPr>
+        <p:spPr>
+          <a:xfrm>
+            <a:off x="411480" y="991443"/>
+            <a:ext cx="4443154" cy="1087819"/>
+          </a:xfrm>
+        </p:spPr>
+        <p:txBody>
+          <a:bodyPr anchor="b">
+            <a:normAutofit/>
+          </a:bodyPr>
+          <a:lstStyle/>
+          <a:p>
+            <a:r>
+              <a:rPr lang="es-GT" sz="3100" dirty="0"/>
+              <a:t>Influencia de la pandemia en el uso de bicicletas</a:t>
+            </a:r>
+          </a:p>
+        </p:txBody>
+      </p:sp>
+      <p:sp>
+        <p:nvSpPr>
+          <p:cNvPr id="23" name="Rectangle 22">
+            <a:extLst>
+              <a:ext uri="{FF2B5EF4-FFF2-40B4-BE49-F238E27FC236}">
+                <a16:creationId xmlns:a16="http://schemas.microsoft.com/office/drawing/2014/main" id="{33AE4636-AEEC-45D6-84D4-7AC2DA48ECF8}"/>
+              </a:ext>
+              <a:ext uri="{C183D7F6-B498-43B3-948B-1728B52AA6E4}">
+                <adec:decorative xmlns:adec="http://schemas.microsoft.com/office/drawing/2017/decorative" val="1"/>
+              </a:ext>
+            </a:extLst>
+          </p:cNvPr>
+          <p:cNvSpPr>
+            <a:spLocks noGrp="1" noRot="1" noChangeAspect="1" noMove="1" noResize="1" noEditPoints="1" noAdjustHandles="1" noChangeArrowheads="1" noChangeShapeType="1" noTextEdit="1"/>
+          </p:cNvSpPr>
+          <p:nvPr>
+            <p:extLst>
+              <p:ext uri="{386F3935-93C4-4BCD-93E2-E3B085C9AB24}">
+                <p16:designElem xmlns:p16="http://schemas.microsoft.com/office/powerpoint/2015/main" val="1"/>
+              </p:ext>
+            </p:extLst>
+          </p:nvPr>
+        </p:nvSpPr>
+        <p:spPr>
+          <a:xfrm rot="5400000">
+            <a:off x="649223" y="387939"/>
+            <a:ext cx="73152" cy="548640"/>
+          </a:xfrm>
+          <a:prstGeom prst="rect">
+            <a:avLst/>
+          </a:prstGeom>
+          <a:solidFill>
+            <a:schemeClr val="accent2"/>
+          </a:solidFill>
+          <a:ln>
+            <a:noFill/>
+          </a:ln>
+        </p:spPr>
+        <p:style>
+          <a:lnRef idx="2">
+            <a:schemeClr val="accent1">
+              <a:shade val="50000"/>
+            </a:schemeClr>
+          </a:lnRef>
+          <a:fillRef idx="1">
+            <a:schemeClr val="accent1"/>
+          </a:fillRef>
+          <a:effectRef idx="0">
+            <a:schemeClr val="accent1"/>
+          </a:effectRef>
+          <a:fontRef idx="minor">
+            <a:schemeClr val="lt1"/>
+          </a:fontRef>
+        </p:style>
+        <p:txBody>
+          <a:bodyPr rtlCol="0" anchor="ctr"/>
+          <a:lstStyle/>
+          <a:p>
+            <a:pPr algn="ctr"/>
+            <a:endParaRPr lang="en-US">
+              <a:solidFill>
+                <a:prstClr val="white"/>
+              </a:solidFill>
+              <a:latin typeface="Calibri" panose="020F0502020204030204"/>
+            </a:endParaRPr>
+          </a:p>
+        </p:txBody>
+      </p:sp>
+      <p:sp>
+        <p:nvSpPr>
+          <p:cNvPr id="25" name="Rectangle 24">
+            <a:extLst>
+              <a:ext uri="{FF2B5EF4-FFF2-40B4-BE49-F238E27FC236}">
+                <a16:creationId xmlns:a16="http://schemas.microsoft.com/office/drawing/2014/main" id="{8D9CE0F4-2EB2-4F1F-8AAC-DB3571D9FE10}"/>
+              </a:ext>
+              <a:ext uri="{C183D7F6-B498-43B3-948B-1728B52AA6E4}">
+                <adec:decorative xmlns:adec="http://schemas.microsoft.com/office/drawing/2017/decorative" val="1"/>
+              </a:ext>
+            </a:extLst>
+          </p:cNvPr>
+          <p:cNvSpPr>
+            <a:spLocks noGrp="1" noRot="1" noChangeAspect="1" noMove="1" noResize="1" noEditPoints="1" noAdjustHandles="1" noChangeArrowheads="1" noChangeShapeType="1" noTextEdit="1"/>
+          </p:cNvSpPr>
+          <p:nvPr>
+            <p:extLst>
+              <p:ext uri="{386F3935-93C4-4BCD-93E2-E3B085C9AB24}">
+                <p16:designElem xmlns:p16="http://schemas.microsoft.com/office/powerpoint/2015/main" val="1"/>
+              </p:ext>
+            </p:extLst>
+          </p:nvPr>
+        </p:nvSpPr>
+        <p:spPr>
+          <a:xfrm>
+            <a:off x="411480" y="2285541"/>
+            <a:ext cx="4389120" cy="18288"/>
+          </a:xfrm>
+          <a:prstGeom prst="rect">
+            <a:avLst/>
+          </a:prstGeom>
+          <a:solidFill>
+            <a:srgbClr val="D5D5D5"/>
+          </a:solidFill>
+          <a:ln w="3175">
+            <a:noFill/>
+          </a:ln>
+          <a:effectLst/>
+        </p:spPr>
+        <p:style>
+          <a:lnRef idx="2">
+            <a:schemeClr val="accent1">
+              <a:shade val="50000"/>
+            </a:schemeClr>
+          </a:lnRef>
+          <a:fillRef idx="1">
+            <a:schemeClr val="accent1"/>
+          </a:fillRef>
+          <a:effectRef idx="0">
+            <a:schemeClr val="accent1"/>
+          </a:effectRef>
+          <a:fontRef idx="minor">
+            <a:schemeClr val="lt1"/>
+          </a:fontRef>
+        </p:style>
+        <p:txBody>
+          <a:bodyPr rtlCol="0" anchor="ctr"/>
+          <a:lstStyle/>
+          <a:p>
+            <a:pPr algn="ctr"/>
+            <a:endParaRPr lang="en-US">
+              <a:solidFill>
+                <a:prstClr val="white"/>
+              </a:solidFill>
+              <a:latin typeface="Calibri" panose="020F0502020204030204"/>
+            </a:endParaRPr>
+          </a:p>
+        </p:txBody>
+      </p:sp>
+      <p:sp>
+        <p:nvSpPr>
+          <p:cNvPr id="9" name="Content Placeholder 8">
+            <a:extLst>
+              <a:ext uri="{FF2B5EF4-FFF2-40B4-BE49-F238E27FC236}">
+                <a16:creationId xmlns:a16="http://schemas.microsoft.com/office/drawing/2014/main" id="{FBC19EE0-9B19-4047-66B9-58DA7010886F}"/>
+              </a:ext>
+            </a:extLst>
+          </p:cNvPr>
+          <p:cNvSpPr>
+            <a:spLocks noGrp="1"/>
+          </p:cNvSpPr>
+          <p:nvPr>
+            <p:ph idx="1"/>
+          </p:nvPr>
+        </p:nvSpPr>
+        <p:spPr>
+          <a:xfrm>
+            <a:off x="411480" y="2684095"/>
+            <a:ext cx="4443154" cy="3492868"/>
+          </a:xfrm>
+        </p:spPr>
+        <p:txBody>
+          <a:bodyPr>
+            <a:normAutofit/>
+          </a:bodyPr>
+          <a:lstStyle/>
+          <a:p>
+            <a:r>
+              <a:rPr lang="en-US" sz="1800" dirty="0"/>
+              <a:t>Se </a:t>
+            </a:r>
+            <a:r>
+              <a:rPr lang="en-US" sz="1800" dirty="0" err="1"/>
+              <a:t>observa</a:t>
+            </a:r>
+            <a:r>
+              <a:rPr lang="en-US" sz="1800" dirty="0"/>
+              <a:t> </a:t>
+            </a:r>
+            <a:r>
+              <a:rPr lang="en-US" sz="1800" dirty="0" err="1"/>
+              <a:t>en</a:t>
+            </a:r>
+            <a:r>
+              <a:rPr lang="en-US" sz="1800" dirty="0"/>
+              <a:t> la imagen </a:t>
+            </a:r>
+            <a:r>
+              <a:rPr lang="en-US" sz="1800" dirty="0" err="1"/>
+              <a:t>que</a:t>
+            </a:r>
+            <a:r>
+              <a:rPr lang="en-US" sz="1800" dirty="0"/>
+              <a:t> </a:t>
+            </a:r>
+            <a:r>
+              <a:rPr lang="en-US" sz="1800" dirty="0" err="1"/>
+              <a:t>el</a:t>
+            </a:r>
+            <a:r>
+              <a:rPr lang="en-US" sz="1800" dirty="0"/>
+              <a:t> </a:t>
+            </a:r>
+            <a:r>
+              <a:rPr lang="en-US" sz="1800" dirty="0" err="1"/>
+              <a:t>uso</a:t>
+            </a:r>
+            <a:r>
+              <a:rPr lang="en-US" sz="1800" dirty="0"/>
+              <a:t> de las </a:t>
+            </a:r>
+            <a:r>
+              <a:rPr lang="en-US" sz="1800" dirty="0" err="1"/>
+              <a:t>bicicletas</a:t>
+            </a:r>
+            <a:r>
+              <a:rPr lang="en-US" sz="1800" dirty="0"/>
+              <a:t> </a:t>
+            </a:r>
+            <a:r>
+              <a:rPr lang="en-US" sz="1800" dirty="0" err="1"/>
+              <a:t>fue</a:t>
+            </a:r>
+            <a:r>
+              <a:rPr lang="en-US" sz="1800" dirty="0"/>
+              <a:t> mayor </a:t>
+            </a:r>
+            <a:r>
+              <a:rPr lang="en-US" sz="1800" dirty="0" err="1"/>
+              <a:t>después</a:t>
+            </a:r>
+            <a:r>
+              <a:rPr lang="en-US" sz="1800" dirty="0"/>
+              <a:t> de la pandemia </a:t>
+            </a:r>
+            <a:r>
+              <a:rPr lang="en-US" sz="1800" dirty="0" err="1"/>
+              <a:t>que</a:t>
+            </a:r>
+            <a:r>
+              <a:rPr lang="en-US" sz="1800" dirty="0"/>
+              <a:t> antes de la </a:t>
+            </a:r>
+            <a:r>
+              <a:rPr lang="en-US" sz="1800" dirty="0" err="1"/>
+              <a:t>misma</a:t>
+            </a:r>
+            <a:r>
+              <a:rPr lang="en-US" sz="1800" dirty="0"/>
+              <a:t>.</a:t>
+            </a:r>
+          </a:p>
+        </p:txBody>
+      </p:sp>
+      <p:pic>
+        <p:nvPicPr>
+          <p:cNvPr id="5" name="Marcador de contenido 4">
+            <a:extLst>
+              <a:ext uri="{FF2B5EF4-FFF2-40B4-BE49-F238E27FC236}">
+                <a16:creationId xmlns:a16="http://schemas.microsoft.com/office/drawing/2014/main" id="{01EC1150-20D1-2C04-2018-215E831ACDA2}"/>
+              </a:ext>
+            </a:extLst>
+          </p:cNvPr>
+          <p:cNvPicPr>
+            <a:picLocks noChangeAspect="1"/>
+          </p:cNvPicPr>
+          <p:nvPr/>
+        </p:nvPicPr>
+        <p:blipFill>
+          <a:blip r:embed="rId2"/>
+          <a:stretch>
+            <a:fillRect/>
+          </a:stretch>
+        </p:blipFill>
+        <p:spPr>
+          <a:xfrm>
+            <a:off x="5385816" y="1742914"/>
+            <a:ext cx="6440424" cy="3316818"/>
+          </a:xfrm>
+          <a:prstGeom prst="rect">
+            <a:avLst/>
+          </a:prstGeom>
+        </p:spPr>
+      </p:pic>
+      <p:sp>
+        <p:nvSpPr>
+          <p:cNvPr id="6" name="TextBox 4">
+            <a:extLst>
+              <a:ext uri="{FF2B5EF4-FFF2-40B4-BE49-F238E27FC236}">
+                <a16:creationId xmlns:a16="http://schemas.microsoft.com/office/drawing/2014/main" id="{E15F4B84-8A57-CD3F-DD4D-A8F67E221A9E}"/>
+              </a:ext>
+            </a:extLst>
+          </p:cNvPr>
+          <p:cNvSpPr txBox="1"/>
+          <p:nvPr/>
+        </p:nvSpPr>
+        <p:spPr>
+          <a:xfrm>
+            <a:off x="6552281" y="5181649"/>
+            <a:ext cx="4897400" cy="584775"/>
+          </a:xfrm>
+          <a:prstGeom prst="rect">
+            <a:avLst/>
+          </a:prstGeom>
+          <a:noFill/>
+        </p:spPr>
+        <p:txBody>
+          <a:bodyPr rot="0" spcFirstLastPara="0" vertOverflow="overflow" horzOverflow="overflow" vert="horz" wrap="square" lIns="91440" tIns="45720" rIns="91440" bIns="45720" numCol="1" spcCol="0" rtlCol="0" fromWordArt="0" anchor="t" anchorCtr="0" forceAA="0" compatLnSpc="1">
+            <a:prstTxWarp prst="textNoShape">
+              <a:avLst/>
+            </a:prstTxWarp>
+            <a:spAutoFit/>
+          </a:bodyPr>
+          <a:lstStyle/>
+          <a:p>
+            <a:r>
+              <a:rPr lang="en-US" sz="1600" dirty="0"/>
+              <a:t>Figura2. </a:t>
+            </a:r>
+            <a:r>
+              <a:rPr lang="en-US" sz="1600" dirty="0" err="1"/>
+              <a:t>Tendencia</a:t>
+            </a:r>
+            <a:r>
+              <a:rPr lang="en-US" sz="1600" dirty="0"/>
+              <a:t> </a:t>
+            </a:r>
+            <a:r>
+              <a:rPr lang="en-US" sz="1600" dirty="0" err="1"/>
+              <a:t>en</a:t>
+            </a:r>
+            <a:r>
+              <a:rPr lang="en-US" sz="1600" dirty="0"/>
+              <a:t> </a:t>
+            </a:r>
+            <a:r>
+              <a:rPr lang="en-US" sz="1600" dirty="0" err="1"/>
+              <a:t>los</a:t>
+            </a:r>
+            <a:r>
+              <a:rPr lang="en-US" sz="1600" dirty="0"/>
+              <a:t> </a:t>
+            </a:r>
+            <a:r>
+              <a:rPr lang="en-US" sz="1600" dirty="0" err="1"/>
+              <a:t>préstamos</a:t>
+            </a:r>
+            <a:r>
+              <a:rPr lang="en-US" sz="1600" dirty="0"/>
+              <a:t> </a:t>
+            </a:r>
+            <a:r>
+              <a:rPr lang="en-US" sz="1600" dirty="0" err="1"/>
+              <a:t>promedio</a:t>
+            </a:r>
+            <a:r>
+              <a:rPr lang="en-US" sz="1600" dirty="0"/>
+              <a:t> de </a:t>
+            </a:r>
+            <a:r>
+              <a:rPr lang="en-US" sz="1600" dirty="0" err="1"/>
+              <a:t>bicicletas</a:t>
+            </a:r>
+            <a:r>
+              <a:rPr lang="en-US" sz="1600" dirty="0"/>
+              <a:t>.</a:t>
+            </a:r>
+          </a:p>
+        </p:txBody>
+      </p:sp>
+    </p:spTree>
+    <p:extLst>
+      <p:ext uri="{BB962C8B-B14F-4D97-AF65-F5344CB8AC3E}">
+        <p14:creationId xmlns:p14="http://schemas.microsoft.com/office/powerpoint/2010/main" val="3910698323"/>
+      </p:ext>
+    </p:extLst>
+  </p:cSld>
+  <p:clrMapOvr>
+    <a:masterClrMapping/>
+  </p:clrMapOvr>
+</p:sld>
+</file>
+
+<file path=ppt/slides/slide7.xml><?xml version="1.0" encoding="utf-8"?>
 <p:sld xmlns:a="http://schemas.openxmlformats.org/drawingml/2006/main" xmlns:r="http://schemas.openxmlformats.org/officeDocument/2006/relationships" xmlns:p="http://schemas.openxmlformats.org/presentationml/2006/main">
   <p:cSld>
     <p:bg>
@@ -5177,6 +5679,100 @@
           </a:prstGeom>
         </p:spPr>
       </p:pic>
+      <p:sp>
+        <p:nvSpPr>
+          <p:cNvPr id="4" name="TextBox 4">
+            <a:extLst>
+              <a:ext uri="{FF2B5EF4-FFF2-40B4-BE49-F238E27FC236}">
+                <a16:creationId xmlns:a16="http://schemas.microsoft.com/office/drawing/2014/main" id="{478620BD-B298-B768-BA14-8163BE5746A8}"/>
+              </a:ext>
+            </a:extLst>
+          </p:cNvPr>
+          <p:cNvSpPr txBox="1"/>
+          <p:nvPr/>
+        </p:nvSpPr>
+        <p:spPr>
+          <a:xfrm>
+            <a:off x="5531555" y="5309239"/>
+            <a:ext cx="4897400" cy="584775"/>
+          </a:xfrm>
+          <a:prstGeom prst="rect">
+            <a:avLst/>
+          </a:prstGeom>
+          <a:noFill/>
+        </p:spPr>
+        <p:txBody>
+          <a:bodyPr rot="0" spcFirstLastPara="0" vertOverflow="overflow" horzOverflow="overflow" vert="horz" wrap="square" lIns="91440" tIns="45720" rIns="91440" bIns="45720" numCol="1" spcCol="0" rtlCol="0" fromWordArt="0" anchor="t" anchorCtr="0" forceAA="0" compatLnSpc="1">
+            <a:prstTxWarp prst="textNoShape">
+              <a:avLst/>
+            </a:prstTxWarp>
+            <a:spAutoFit/>
+          </a:bodyPr>
+          <a:lstStyle/>
+          <a:p>
+            <a:r>
+              <a:rPr lang="en-US" sz="1600" dirty="0"/>
+              <a:t>Figura3. </a:t>
+            </a:r>
+            <a:r>
+              <a:rPr lang="en-US" sz="1600" dirty="0" err="1"/>
+              <a:t>Demanda</a:t>
+            </a:r>
+            <a:r>
+              <a:rPr lang="en-US" sz="1600" dirty="0"/>
+              <a:t> </a:t>
+            </a:r>
+            <a:r>
+              <a:rPr lang="en-US" sz="1600" dirty="0" err="1"/>
+              <a:t>promedio</a:t>
+            </a:r>
+            <a:r>
+              <a:rPr lang="en-US" sz="1600" dirty="0"/>
+              <a:t> </a:t>
+            </a:r>
+            <a:r>
+              <a:rPr lang="en-US" sz="1600" dirty="0" err="1"/>
+              <a:t>en</a:t>
+            </a:r>
+            <a:r>
+              <a:rPr lang="en-US" sz="1600" dirty="0"/>
+              <a:t> </a:t>
+            </a:r>
+            <a:r>
+              <a:rPr lang="en-US" sz="1600" dirty="0" err="1"/>
+              <a:t>el</a:t>
+            </a:r>
+            <a:r>
+              <a:rPr lang="en-US" sz="1600" dirty="0"/>
+              <a:t> </a:t>
+            </a:r>
+            <a:r>
+              <a:rPr lang="en-US" sz="1600" dirty="0" err="1"/>
+              <a:t>préstamo</a:t>
+            </a:r>
+            <a:r>
+              <a:rPr lang="en-US" sz="1600" dirty="0"/>
+              <a:t> de </a:t>
+            </a:r>
+            <a:r>
+              <a:rPr lang="en-US" sz="1600" dirty="0" err="1"/>
+              <a:t>bicicletas</a:t>
+            </a:r>
+            <a:r>
+              <a:rPr lang="en-US" sz="1600" dirty="0"/>
+              <a:t> </a:t>
+            </a:r>
+            <a:r>
+              <a:rPr lang="en-US" sz="1600" dirty="0" err="1"/>
+              <a:t>durante</a:t>
+            </a:r>
+            <a:r>
+              <a:rPr lang="en-US" sz="1600" dirty="0"/>
+              <a:t> la Semana Santa.</a:t>
+            </a:r>
+          </a:p>
+        </p:txBody>
+      </p:sp>
     </p:spTree>
     <p:extLst>
       <p:ext uri="{BB962C8B-B14F-4D97-AF65-F5344CB8AC3E}">
@@ -5190,7 +5786,7 @@
 </p:sld>
 </file>
 
-<file path=ppt/slides/slide7.xml><?xml version="1.0" encoding="utf-8"?>
+<file path=ppt/slides/slide8.xml><?xml version="1.0" encoding="utf-8"?>
 <p:sld xmlns:a="http://schemas.openxmlformats.org/drawingml/2006/main" xmlns:r="http://schemas.openxmlformats.org/officeDocument/2006/relationships" xmlns:p="http://schemas.openxmlformats.org/presentationml/2006/main">
   <p:cSld>
     <p:spTree>
@@ -5343,6 +5939,141 @@
               <a:t>.</a:t>
             </a:r>
           </a:p>
+          <a:p>
+            <a:r>
+              <a:rPr lang="en-US" dirty="0"/>
+              <a:t>Se </a:t>
+            </a:r>
+            <a:r>
+              <a:rPr lang="en-US" dirty="0" err="1"/>
+              <a:t>tiene</a:t>
+            </a:r>
+            <a:r>
+              <a:rPr lang="en-US" dirty="0"/>
+              <a:t> </a:t>
+            </a:r>
+            <a:r>
+              <a:rPr lang="en-US" dirty="0" err="1"/>
+              <a:t>que</a:t>
+            </a:r>
+            <a:r>
+              <a:rPr lang="en-US" dirty="0"/>
+              <a:t> </a:t>
+            </a:r>
+            <a:r>
+              <a:rPr lang="en-US" dirty="0" err="1"/>
+              <a:t>el</a:t>
+            </a:r>
+            <a:r>
+              <a:rPr lang="en-US" dirty="0"/>
+              <a:t> </a:t>
+            </a:r>
+            <a:r>
+              <a:rPr lang="en-US" dirty="0" err="1"/>
+              <a:t>préstamo</a:t>
+            </a:r>
+            <a:r>
+              <a:rPr lang="en-US" dirty="0"/>
+              <a:t> de </a:t>
+            </a:r>
+            <a:r>
+              <a:rPr lang="en-US" dirty="0" err="1"/>
+              <a:t>bicicletas</a:t>
+            </a:r>
+            <a:r>
+              <a:rPr lang="en-US" dirty="0"/>
+              <a:t> ha </a:t>
+            </a:r>
+            <a:r>
+              <a:rPr lang="en-US" dirty="0" err="1"/>
+              <a:t>sido</a:t>
+            </a:r>
+            <a:r>
+              <a:rPr lang="en-US" dirty="0"/>
+              <a:t> </a:t>
+            </a:r>
+            <a:r>
+              <a:rPr lang="en-US" dirty="0" err="1"/>
+              <a:t>en</a:t>
+            </a:r>
+            <a:r>
+              <a:rPr lang="en-US" dirty="0"/>
+              <a:t> </a:t>
+            </a:r>
+            <a:r>
+              <a:rPr lang="en-US" dirty="0" err="1"/>
+              <a:t>los</a:t>
+            </a:r>
+            <a:r>
+              <a:rPr lang="en-US" dirty="0"/>
+              <a:t> </a:t>
+            </a:r>
+            <a:r>
+              <a:rPr lang="en-US" dirty="0" err="1"/>
+              <a:t>años</a:t>
+            </a:r>
+            <a:r>
+              <a:rPr lang="en-US" dirty="0"/>
+              <a:t> </a:t>
+            </a:r>
+            <a:r>
+              <a:rPr lang="en-US" dirty="0" err="1"/>
+              <a:t>siguientes</a:t>
+            </a:r>
+            <a:r>
+              <a:rPr lang="en-US" dirty="0"/>
+              <a:t> a la pandemia, </a:t>
+            </a:r>
+            <a:r>
+              <a:rPr lang="en-US" dirty="0" err="1"/>
+              <a:t>que</a:t>
+            </a:r>
+            <a:r>
+              <a:rPr lang="en-US" dirty="0"/>
+              <a:t> </a:t>
+            </a:r>
+            <a:r>
+              <a:rPr lang="en-US" dirty="0" err="1"/>
+              <a:t>en</a:t>
+            </a:r>
+            <a:r>
+              <a:rPr lang="en-US" dirty="0"/>
+              <a:t> </a:t>
+            </a:r>
+            <a:r>
+              <a:rPr lang="en-US" dirty="0" err="1"/>
+              <a:t>los</a:t>
+            </a:r>
+            <a:r>
+              <a:rPr lang="en-US" dirty="0"/>
+              <a:t> </a:t>
+            </a:r>
+            <a:r>
+              <a:rPr lang="en-US" dirty="0" err="1"/>
+              <a:t>años</a:t>
+            </a:r>
+            <a:r>
+              <a:rPr lang="en-US" dirty="0"/>
+              <a:t> </a:t>
+            </a:r>
+            <a:r>
+              <a:rPr lang="en-US" dirty="0" err="1"/>
+              <a:t>anteriores</a:t>
+            </a:r>
+            <a:r>
+              <a:rPr lang="en-US" dirty="0"/>
+              <a:t> a la </a:t>
+            </a:r>
+            <a:r>
+              <a:rPr lang="en-US" dirty="0" err="1"/>
+              <a:t>misma</a:t>
+            </a:r>
+            <a:r>
+              <a:rPr lang="en-US"/>
+              <a:t>.</a:t>
+            </a:r>
+            <a:endParaRPr lang="en-US" dirty="0"/>
+          </a:p>
         </p:txBody>
       </p:sp>
     </p:spTree>
@@ -5358,7 +6089,7 @@
 </p:sld>
 </file>
 
-<file path=ppt/slides/slide8.xml><?xml version="1.0" encoding="utf-8"?>
+<file path=ppt/slides/slide9.xml><?xml version="1.0" encoding="utf-8"?>
 <p:sld xmlns:a="http://schemas.openxmlformats.org/drawingml/2006/main" xmlns:r="http://schemas.openxmlformats.org/officeDocument/2006/relationships" xmlns:p="http://schemas.openxmlformats.org/presentationml/2006/main">
   <p:cSld>
     <p:spTree>

--- a/Proyecto1_Seminario2.pptx
+++ b/Proyecto1_Seminario2.pptx
@@ -8,10 +8,10 @@
     <p:sldId id="256" r:id="rId2"/>
     <p:sldId id="257" r:id="rId3"/>
     <p:sldId id="258" r:id="rId4"/>
-    <p:sldId id="263" r:id="rId5"/>
-    <p:sldId id="259" r:id="rId6"/>
-    <p:sldId id="264" r:id="rId7"/>
-    <p:sldId id="261" r:id="rId8"/>
+    <p:sldId id="264" r:id="rId5"/>
+    <p:sldId id="261" r:id="rId6"/>
+    <p:sldId id="263" r:id="rId7"/>
+    <p:sldId id="265" r:id="rId8"/>
     <p:sldId id="260" r:id="rId9"/>
     <p:sldId id="262" r:id="rId10"/>
   </p:sldIdLst>
@@ -257,7 +257,7 @@
           <a:p>
             <a:fld id="{40771E8B-6CA5-40B2-8038-0E112F3DAC1C}" type="datetimeFigureOut">
               <a:rPr lang="es-ES" smtClean="0"/>
-              <a:t>15/04/2026</a:t>
+              <a:t>17/04/2026</a:t>
             </a:fld>
             <a:endParaRPr lang="es-ES"/>
           </a:p>
@@ -425,7 +425,7 @@
           <a:p>
             <a:fld id="{40771E8B-6CA5-40B2-8038-0E112F3DAC1C}" type="datetimeFigureOut">
               <a:rPr lang="es-ES" smtClean="0"/>
-              <a:t>15/04/2026</a:t>
+              <a:t>17/04/2026</a:t>
             </a:fld>
             <a:endParaRPr lang="es-ES"/>
           </a:p>
@@ -603,7 +603,7 @@
           <a:p>
             <a:fld id="{40771E8B-6CA5-40B2-8038-0E112F3DAC1C}" type="datetimeFigureOut">
               <a:rPr lang="es-ES" smtClean="0"/>
-              <a:t>15/04/2026</a:t>
+              <a:t>17/04/2026</a:t>
             </a:fld>
             <a:endParaRPr lang="es-ES"/>
           </a:p>
@@ -771,7 +771,7 @@
           <a:p>
             <a:fld id="{40771E8B-6CA5-40B2-8038-0E112F3DAC1C}" type="datetimeFigureOut">
               <a:rPr lang="es-ES" smtClean="0"/>
-              <a:t>15/04/2026</a:t>
+              <a:t>17/04/2026</a:t>
             </a:fld>
             <a:endParaRPr lang="es-ES"/>
           </a:p>
@@ -1016,7 +1016,7 @@
           <a:p>
             <a:fld id="{40771E8B-6CA5-40B2-8038-0E112F3DAC1C}" type="datetimeFigureOut">
               <a:rPr lang="es-ES" smtClean="0"/>
-              <a:t>15/04/2026</a:t>
+              <a:t>17/04/2026</a:t>
             </a:fld>
             <a:endParaRPr lang="es-ES"/>
           </a:p>
@@ -1245,7 +1245,7 @@
           <a:p>
             <a:fld id="{40771E8B-6CA5-40B2-8038-0E112F3DAC1C}" type="datetimeFigureOut">
               <a:rPr lang="es-ES" smtClean="0"/>
-              <a:t>15/04/2026</a:t>
+              <a:t>17/04/2026</a:t>
             </a:fld>
             <a:endParaRPr lang="es-ES"/>
           </a:p>
@@ -1609,7 +1609,7 @@
           <a:p>
             <a:fld id="{40771E8B-6CA5-40B2-8038-0E112F3DAC1C}" type="datetimeFigureOut">
               <a:rPr lang="es-ES" smtClean="0"/>
-              <a:t>15/04/2026</a:t>
+              <a:t>17/04/2026</a:t>
             </a:fld>
             <a:endParaRPr lang="es-ES"/>
           </a:p>
@@ -1726,7 +1726,7 @@
           <a:p>
             <a:fld id="{40771E8B-6CA5-40B2-8038-0E112F3DAC1C}" type="datetimeFigureOut">
               <a:rPr lang="es-ES" smtClean="0"/>
-              <a:t>15/04/2026</a:t>
+              <a:t>17/04/2026</a:t>
             </a:fld>
             <a:endParaRPr lang="es-ES"/>
           </a:p>
@@ -1821,7 +1821,7 @@
           <a:p>
             <a:fld id="{40771E8B-6CA5-40B2-8038-0E112F3DAC1C}" type="datetimeFigureOut">
               <a:rPr lang="es-ES" smtClean="0"/>
-              <a:t>15/04/2026</a:t>
+              <a:t>17/04/2026</a:t>
             </a:fld>
             <a:endParaRPr lang="es-ES"/>
           </a:p>
@@ -2096,7 +2096,7 @@
           <a:p>
             <a:fld id="{40771E8B-6CA5-40B2-8038-0E112F3DAC1C}" type="datetimeFigureOut">
               <a:rPr lang="es-ES" smtClean="0"/>
-              <a:t>15/04/2026</a:t>
+              <a:t>17/04/2026</a:t>
             </a:fld>
             <a:endParaRPr lang="es-ES"/>
           </a:p>
@@ -2348,7 +2348,7 @@
           <a:p>
             <a:fld id="{40771E8B-6CA5-40B2-8038-0E112F3DAC1C}" type="datetimeFigureOut">
               <a:rPr lang="es-ES" smtClean="0"/>
-              <a:t>15/04/2026</a:t>
+              <a:t>17/04/2026</a:t>
             </a:fld>
             <a:endParaRPr lang="es-ES"/>
           </a:p>
@@ -2559,7 +2559,7 @@
           <a:p>
             <a:fld id="{40771E8B-6CA5-40B2-8038-0E112F3DAC1C}" type="datetimeFigureOut">
               <a:rPr lang="es-ES" smtClean="0"/>
-              <a:t>15/04/2026</a:t>
+              <a:t>17/04/2026</a:t>
             </a:fld>
             <a:endParaRPr lang="es-ES"/>
           </a:p>
@@ -3825,10 +3825,10 @@
       </p:grpSpPr>
       <p:sp useBgFill="1">
         <p:nvSpPr>
-          <p:cNvPr id="18" name="Rectangle 17">
+          <p:cNvPr id="30" name="Rectangle 29">
             <a:extLst>
               <a:ext uri="{FF2B5EF4-FFF2-40B4-BE49-F238E27FC236}">
-                <a16:creationId xmlns:a16="http://schemas.microsoft.com/office/drawing/2014/main" id="{B66D7F65-E9B6-4775-8355-D095CC73C1C8}"/>
+                <a16:creationId xmlns:a16="http://schemas.microsoft.com/office/drawing/2014/main" id="{2151139A-886F-4B97-8815-729AD3831BBD}"/>
               </a:ext>
               <a:ext uri="{C183D7F6-B498-43B3-948B-1728B52AA6E4}">
                 <adec:decorative xmlns:adec="http://schemas.microsoft.com/office/drawing/2017/decorative" val="1"/>
@@ -3848,15 +3848,31 @@
         </p:nvSpPr>
         <p:spPr>
           <a:xfrm>
-            <a:off x="0" y="2"/>
-            <a:ext cx="12192000" cy="6857997"/>
+            <a:off x="0" y="0"/>
+            <a:ext cx="12192000" cy="6858000"/>
           </a:xfrm>
           <a:prstGeom prst="rect">
             <a:avLst/>
           </a:prstGeom>
-          <a:ln>
+          <a:ln w="12700" cap="flat" cmpd="sng" algn="ctr">
             <a:noFill/>
+            <a:prstDash val="solid"/>
+            <a:miter lim="800000"/>
           </a:ln>
+          <a:effectLst/>
+          <a:extLst>
+            <a:ext uri="{91240B29-F687-4F45-9708-019B960494DF}">
+              <a14:hiddenLine xmlns:a14="http://schemas.microsoft.com/office/drawing/2010/main" w="12700" cap="flat" cmpd="sng" algn="ctr">
+                <a:solidFill>
+                  <a:schemeClr val="accent1">
+                    <a:shade val="50000"/>
+                  </a:schemeClr>
+                </a:solidFill>
+                <a:prstDash val="solid"/>
+                <a:miter lim="800000"/>
+              </a14:hiddenLine>
+            </a:ext>
+          </a:extLst>
         </p:spPr>
         <p:style>
           <a:lnRef idx="2">
@@ -3879,114 +3895,16 @@
           <a:lstStyle/>
           <a:p>
             <a:pPr algn="ctr"/>
-            <a:endParaRPr lang="en-US"/>
-          </a:p>
-        </p:txBody>
-      </p:sp>
-      <p:sp>
-        <p:nvSpPr>
-          <p:cNvPr id="2" name="Title 1">
+            <a:endParaRPr lang="en-US" sz="2000"/>
+          </a:p>
+        </p:txBody>
+      </p:sp>
+      <p:sp>
+        <p:nvSpPr>
+          <p:cNvPr id="32" name="Rectangle 31">
             <a:extLst>
               <a:ext uri="{FF2B5EF4-FFF2-40B4-BE49-F238E27FC236}">
-                <a16:creationId xmlns:a16="http://schemas.microsoft.com/office/drawing/2014/main" id="{266A3000-7648-F4A8-FD09-38C894BED430}"/>
-              </a:ext>
-            </a:extLst>
-          </p:cNvPr>
-          <p:cNvSpPr>
-            <a:spLocks noGrp="1"/>
-          </p:cNvSpPr>
-          <p:nvPr>
-            <p:ph type="title"/>
-          </p:nvPr>
-        </p:nvSpPr>
-        <p:spPr>
-          <a:xfrm>
-            <a:off x="1136396" y="502021"/>
-            <a:ext cx="6173262" cy="1655483"/>
-          </a:xfrm>
-        </p:spPr>
-        <p:txBody>
-          <a:bodyPr anchor="b">
-            <a:normAutofit/>
-          </a:bodyPr>
-          <a:lstStyle/>
-          <a:p>
-            <a:r>
-              <a:rPr lang="en-US" sz="4000"/>
-              <a:t>Mapa de calor de estaciones de retiro</a:t>
-            </a:r>
-          </a:p>
-        </p:txBody>
-      </p:sp>
-      <p:sp>
-        <p:nvSpPr>
-          <p:cNvPr id="15" name="Content Placeholder 14">
-            <a:extLst>
-              <a:ext uri="{FF2B5EF4-FFF2-40B4-BE49-F238E27FC236}">
-                <a16:creationId xmlns:a16="http://schemas.microsoft.com/office/drawing/2014/main" id="{1776977E-BACF-89CE-59C9-494EB124868A}"/>
-              </a:ext>
-            </a:extLst>
-          </p:cNvPr>
-          <p:cNvSpPr>
-            <a:spLocks noGrp="1"/>
-          </p:cNvSpPr>
-          <p:nvPr>
-            <p:ph idx="1"/>
-          </p:nvPr>
-        </p:nvSpPr>
-        <p:spPr>
-          <a:xfrm>
-            <a:off x="1136397" y="2408518"/>
-            <a:ext cx="6173262" cy="3535083"/>
-          </a:xfrm>
-        </p:spPr>
-        <p:txBody>
-          <a:bodyPr>
-            <a:normAutofit/>
-          </a:bodyPr>
-          <a:lstStyle/>
-          <a:p>
-            <a:endParaRPr lang="en-US" sz="2000"/>
-          </a:p>
-        </p:txBody>
-      </p:sp>
-      <p:pic>
-        <p:nvPicPr>
-          <p:cNvPr id="5" name="Content Placeholder 4">
-            <a:extLst>
-              <a:ext uri="{FF2B5EF4-FFF2-40B4-BE49-F238E27FC236}">
-                <a16:creationId xmlns:a16="http://schemas.microsoft.com/office/drawing/2014/main" id="{43D767D5-403E-EC3A-D888-C55A5FFCF34A}"/>
-              </a:ext>
-            </a:extLst>
-          </p:cNvPr>
-          <p:cNvPicPr>
-            <a:picLocks noChangeAspect="1"/>
-          </p:cNvPicPr>
-          <p:nvPr/>
-        </p:nvPicPr>
-        <p:blipFill>
-          <a:blip r:embed="rId2"/>
-          <a:srcRect l="1310" r="2" b="2"/>
-          <a:stretch>
-            <a:fillRect/>
-          </a:stretch>
-        </p:blipFill>
-        <p:spPr>
-          <a:xfrm>
-            <a:off x="8115300" y="-12515"/>
-            <a:ext cx="4076700" cy="6418631"/>
-          </a:xfrm>
-          <a:prstGeom prst="rect">
-            <a:avLst/>
-          </a:prstGeom>
-        </p:spPr>
-      </p:pic>
-      <p:sp>
-        <p:nvSpPr>
-          <p:cNvPr id="20" name="Rectangle 19">
-            <a:extLst>
-              <a:ext uri="{FF2B5EF4-FFF2-40B4-BE49-F238E27FC236}">
-                <a16:creationId xmlns:a16="http://schemas.microsoft.com/office/drawing/2014/main" id="{61707E60-CEC9-4661-AA82-69242EB4BDC3}"/>
+                <a16:creationId xmlns:a16="http://schemas.microsoft.com/office/drawing/2014/main" id="{AB5E08C4-8CDD-4623-A5B8-E998C6DEE3B7}"/>
               </a:ext>
               <a:ext uri="{C183D7F6-B498-43B3-948B-1728B52AA6E4}">
                 <adec:decorative xmlns:adec="http://schemas.microsoft.com/office/drawing/2017/decorative" val="1"/>
@@ -4006,8 +3924,8 @@
         </p:nvSpPr>
         <p:spPr>
           <a:xfrm flipH="1">
-            <a:off x="0" y="6406116"/>
-            <a:ext cx="12191998" cy="461774"/>
+            <a:off x="2" y="492"/>
+            <a:ext cx="12191998" cy="1575955"/>
           </a:xfrm>
           <a:prstGeom prst="rect">
             <a:avLst/>
@@ -4015,15 +3933,17 @@
           <a:gradFill>
             <a:gsLst>
               <a:gs pos="0">
-                <a:srgbClr val="000000"/>
+                <a:schemeClr val="accent1">
+                  <a:lumMod val="50000"/>
+                </a:schemeClr>
               </a:gs>
-              <a:gs pos="70000">
+              <a:gs pos="100000">
                 <a:schemeClr val="accent1">
                   <a:lumMod val="75000"/>
                 </a:schemeClr>
               </a:gs>
             </a:gsLst>
-            <a:lin ang="15600000" scaled="0"/>
+            <a:lin ang="8400000" scaled="0"/>
           </a:gradFill>
           <a:ln>
             <a:noFill/>
@@ -4056,10 +3976,10 @@
       </p:sp>
       <p:sp>
         <p:nvSpPr>
-          <p:cNvPr id="22" name="Rectangle 21">
+          <p:cNvPr id="34" name="Rectangle 33">
             <a:extLst>
               <a:ext uri="{FF2B5EF4-FFF2-40B4-BE49-F238E27FC236}">
-                <a16:creationId xmlns:a16="http://schemas.microsoft.com/office/drawing/2014/main" id="{8F035CD8-AE30-4146-96F2-036B0CE5E4F3}"/>
+                <a16:creationId xmlns:a16="http://schemas.microsoft.com/office/drawing/2014/main" id="{15F33878-D502-4FFA-8ACE-F2AECDB2A23F}"/>
               </a:ext>
               <a:ext uri="{C183D7F6-B498-43B3-948B-1728B52AA6E4}">
                 <adec:decorative xmlns:adec="http://schemas.microsoft.com/office/drawing/2017/decorative" val="1"/>
@@ -4078,9 +3998,9 @@
           </p:nvPr>
         </p:nvSpPr>
         <p:spPr>
-          <a:xfrm flipH="1">
-            <a:off x="8115300" y="6406115"/>
-            <a:ext cx="4076698" cy="464399"/>
+          <a:xfrm rot="10800000" flipH="1">
+            <a:off x="8128857" y="35"/>
+            <a:ext cx="4063143" cy="1576412"/>
           </a:xfrm>
           <a:prstGeom prst="rect">
             <a:avLst/>
@@ -4088,15 +4008,18 @@
           <a:gradFill>
             <a:gsLst>
               <a:gs pos="19000">
-                <a:srgbClr val="000000">
-                  <a:alpha val="46000"/>
-                </a:srgbClr>
+                <a:schemeClr val="accent1">
+                  <a:lumMod val="50000"/>
+                  <a:alpha val="68000"/>
+                </a:schemeClr>
               </a:gs>
-              <a:gs pos="99000">
-                <a:schemeClr val="accent1"/>
+              <a:gs pos="100000">
+                <a:schemeClr val="accent1">
+                  <a:alpha val="79000"/>
+                </a:schemeClr>
               </a:gs>
             </a:gsLst>
-            <a:lin ang="13200000" scaled="0"/>
+            <a:lin ang="19200000" scaled="0"/>
           </a:gradFill>
           <a:ln>
             <a:noFill/>
@@ -4127,239 +4050,21 @@
           </a:p>
         </p:txBody>
       </p:sp>
-    </p:spTree>
-    <p:extLst>
-      <p:ext uri="{BB962C8B-B14F-4D97-AF65-F5344CB8AC3E}">
-        <p14:creationId xmlns:p14="http://schemas.microsoft.com/office/powerpoint/2010/main" val="1999348669"/>
-      </p:ext>
-    </p:extLst>
-  </p:cSld>
-  <p:clrMapOvr>
-    <a:masterClrMapping/>
-  </p:clrMapOvr>
-</p:sld>
-</file>
-
-<file path=ppt/slides/slide5.xml><?xml version="1.0" encoding="utf-8"?>
-<p:sld xmlns:a="http://schemas.openxmlformats.org/drawingml/2006/main" xmlns:r="http://schemas.openxmlformats.org/officeDocument/2006/relationships" xmlns:p="http://schemas.openxmlformats.org/presentationml/2006/main">
-  <p:cSld>
-    <p:bg>
-      <p:bgPr>
-        <a:solidFill>
-          <a:schemeClr val="bg1"/>
-        </a:solidFill>
-        <a:effectLst/>
-      </p:bgPr>
-    </p:bg>
-    <p:spTree>
-      <p:nvGrpSpPr>
-        <p:cNvPr id="1" name=""/>
-        <p:cNvGrpSpPr/>
-        <p:nvPr/>
-      </p:nvGrpSpPr>
-      <p:grpSpPr>
-        <a:xfrm>
-          <a:off x="0" y="0"/>
-          <a:ext cx="0" cy="0"/>
-          <a:chOff x="0" y="0"/>
-          <a:chExt cx="0" cy="0"/>
-        </a:xfrm>
-      </p:grpSpPr>
-      <p:sp>
-        <p:nvSpPr>
-          <p:cNvPr id="2" name="Title 1">
+      <p:sp>
+        <p:nvSpPr>
+          <p:cNvPr id="36" name="Rectangle 35">
             <a:extLst>
               <a:ext uri="{FF2B5EF4-FFF2-40B4-BE49-F238E27FC236}">
-                <a16:creationId xmlns:a16="http://schemas.microsoft.com/office/drawing/2014/main" id="{A13306C9-CE7A-23A0-872C-0E567F4F6EC3}"/>
-              </a:ext>
-            </a:extLst>
-          </p:cNvPr>
-          <p:cNvSpPr>
-            <a:spLocks noGrp="1"/>
-          </p:cNvSpPr>
-          <p:nvPr>
-            <p:ph type="title"/>
-          </p:nvPr>
-        </p:nvSpPr>
-        <p:spPr>
-          <a:xfrm>
-            <a:off x="876693" y="741391"/>
-            <a:ext cx="3455821" cy="1616203"/>
-          </a:xfrm>
-        </p:spPr>
-        <p:txBody>
-          <a:bodyPr anchor="b">
-            <a:normAutofit/>
-          </a:bodyPr>
-          <a:lstStyle/>
-          <a:p>
-            <a:r>
-              <a:rPr lang="en-US" sz="3200" dirty="0" err="1"/>
-              <a:t>Visualización</a:t>
-            </a:r>
-            <a:r>
-              <a:rPr lang="en-US" sz="3200" dirty="0"/>
-              <a:t> de </a:t>
-            </a:r>
-            <a:r>
-              <a:rPr lang="en-US" sz="3200" dirty="0" err="1"/>
-              <a:t>los</a:t>
-            </a:r>
-            <a:r>
-              <a:rPr lang="en-US" sz="3200" dirty="0"/>
-              <a:t> </a:t>
-            </a:r>
-            <a:r>
-              <a:rPr lang="en-US" sz="3200" dirty="0" err="1"/>
-              <a:t>datos</a:t>
-            </a:r>
-          </a:p>
-        </p:txBody>
-      </p:sp>
-      <p:sp>
-        <p:nvSpPr>
-          <p:cNvPr id="8" name="Content Placeholder 7">
-            <a:extLst>
-              <a:ext uri="{FF2B5EF4-FFF2-40B4-BE49-F238E27FC236}">
-                <a16:creationId xmlns:a16="http://schemas.microsoft.com/office/drawing/2014/main" id="{D9678DC7-FA19-384D-41F0-6533B55D0B65}"/>
-              </a:ext>
-            </a:extLst>
-          </p:cNvPr>
-          <p:cNvSpPr>
-            <a:spLocks noGrp="1"/>
-          </p:cNvSpPr>
-          <p:nvPr>
-            <p:ph idx="1"/>
-          </p:nvPr>
-        </p:nvSpPr>
-        <p:spPr>
-          <a:xfrm>
-            <a:off x="876693" y="2533476"/>
-            <a:ext cx="3455821" cy="3447832"/>
-          </a:xfrm>
-        </p:spPr>
-        <p:txBody>
-          <a:bodyPr anchor="t">
-            <a:normAutofit/>
-          </a:bodyPr>
-          <a:lstStyle/>
-          <a:p>
-            <a:r>
-              <a:rPr lang="en-US" sz="2000" dirty="0"/>
-              <a:t>Es </a:t>
-            </a:r>
-            <a:r>
-              <a:rPr lang="en-US" sz="2000" dirty="0" err="1"/>
-              <a:t>posible</a:t>
-            </a:r>
-            <a:r>
-              <a:rPr lang="en-US" sz="2000" dirty="0"/>
-              <a:t> </a:t>
-            </a:r>
-            <a:r>
-              <a:rPr lang="en-US" sz="2000" dirty="0" err="1"/>
-              <a:t>observar</a:t>
-            </a:r>
-            <a:r>
-              <a:rPr lang="en-US" sz="2000" dirty="0"/>
-              <a:t> </a:t>
-            </a:r>
-            <a:r>
-              <a:rPr lang="en-US" sz="2000" dirty="0" err="1"/>
-              <a:t>que</a:t>
-            </a:r>
-            <a:r>
-              <a:rPr lang="en-US" sz="2000" dirty="0"/>
-              <a:t> </a:t>
-            </a:r>
-            <a:r>
-              <a:rPr lang="en-US" sz="2000" dirty="0" err="1"/>
-              <a:t>los</a:t>
-            </a:r>
-            <a:r>
-              <a:rPr lang="en-US" sz="2000" dirty="0"/>
-              <a:t> </a:t>
-            </a:r>
-            <a:r>
-              <a:rPr lang="en-US" sz="2000" dirty="0" err="1"/>
-              <a:t>datos</a:t>
-            </a:r>
-            <a:r>
-              <a:rPr lang="en-US" sz="2000" dirty="0"/>
-              <a:t> se </a:t>
-            </a:r>
-            <a:r>
-              <a:rPr lang="en-US" sz="2000" dirty="0" err="1"/>
-              <a:t>dividen</a:t>
-            </a:r>
-            <a:r>
-              <a:rPr lang="en-US" sz="2000" dirty="0"/>
-              <a:t> </a:t>
-            </a:r>
-            <a:r>
-              <a:rPr lang="en-US" sz="2000" dirty="0" err="1"/>
-              <a:t>en</a:t>
-            </a:r>
-            <a:r>
-              <a:rPr lang="en-US" sz="2000" dirty="0"/>
-              <a:t> dos conjuntos bien </a:t>
-            </a:r>
-            <a:r>
-              <a:rPr lang="en-US" sz="2000" dirty="0" err="1"/>
-              <a:t>diferenciados</a:t>
-            </a:r>
-            <a:r>
-              <a:rPr lang="en-US" sz="2000" dirty="0"/>
-              <a:t>.</a:t>
-            </a:r>
-          </a:p>
-        </p:txBody>
-      </p:sp>
-      <p:pic>
-        <p:nvPicPr>
-          <p:cNvPr id="4" name="Content Placeholder 3">
-            <a:extLst>
-              <a:ext uri="{FF2B5EF4-FFF2-40B4-BE49-F238E27FC236}">
-                <a16:creationId xmlns:a16="http://schemas.microsoft.com/office/drawing/2014/main" id="{F20DAE6F-2E2D-B070-56D2-3B9743617C73}"/>
-              </a:ext>
-            </a:extLst>
-          </p:cNvPr>
-          <p:cNvPicPr>
-            <a:picLocks noChangeAspect="1"/>
-          </p:cNvPicPr>
-          <p:nvPr/>
-        </p:nvPicPr>
-        <p:blipFill>
-          <a:blip r:embed="rId2"/>
-          <a:stretch>
-            <a:fillRect/>
-          </a:stretch>
-        </p:blipFill>
-        <p:spPr>
-          <a:xfrm>
-            <a:off x="4987672" y="1013690"/>
-            <a:ext cx="6128388" cy="4662477"/>
-          </a:xfrm>
-          <a:prstGeom prst="rect">
-            <a:avLst/>
-          </a:prstGeom>
-        </p:spPr>
-      </p:pic>
-      <p:grpSp>
-        <p:nvGrpSpPr>
-          <p:cNvPr id="11" name="Group 10">
-            <a:extLst>
-              <a:ext uri="{FF2B5EF4-FFF2-40B4-BE49-F238E27FC236}">
-                <a16:creationId xmlns:a16="http://schemas.microsoft.com/office/drawing/2014/main" id="{6258F736-B256-8039-9DC6-F4E49A5C5AD5}"/>
+                <a16:creationId xmlns:a16="http://schemas.microsoft.com/office/drawing/2014/main" id="{D3539FEE-81D3-4406-802E-60B20B16F4F6}"/>
               </a:ext>
               <a:ext uri="{C183D7F6-B498-43B3-948B-1728B52AA6E4}">
                 <adec:decorative xmlns:adec="http://schemas.microsoft.com/office/drawing/2017/decorative" val="1"/>
               </a:ext>
             </a:extLst>
           </p:cNvPr>
-          <p:cNvGrpSpPr>
-            <a:grpSpLocks noGrp="1" noUngrp="1" noRot="1" noChangeAspect="1" noMove="1" noResize="1"/>
-          </p:cNvGrpSpPr>
+          <p:cNvSpPr>
+            <a:spLocks noGrp="1" noRot="1" noChangeAspect="1" noMove="1" noResize="1" noEditPoints="1" noAdjustHandles="1" noChangeArrowheads="1" noChangeShapeType="1" noTextEdit="1"/>
+          </p:cNvSpPr>
           <p:nvPr>
             <p:extLst>
               <p:ext uri="{386F3935-93C4-4BCD-93E2-E3B085C9AB24}">
@@ -4367,289 +4072,30 @@
               </p:ext>
             </p:extLst>
           </p:nvPr>
-        </p:nvGrpSpPr>
-        <p:grpSpPr>
-          <a:xfrm flipH="1">
-            <a:off x="12068638" y="0"/>
-            <a:ext cx="123362" cy="6858000"/>
-            <a:chOff x="12068638" y="0"/>
-            <a:chExt cx="123362" cy="6858000"/>
-          </a:xfrm>
-        </p:grpSpPr>
-        <p:sp>
-          <p:nvSpPr>
-            <p:cNvPr id="12" name="Rectangle 11">
-              <a:extLst>
-                <a:ext uri="{FF2B5EF4-FFF2-40B4-BE49-F238E27FC236}">
-                  <a16:creationId xmlns:a16="http://schemas.microsoft.com/office/drawing/2014/main" id="{10B4520A-996E-330C-99DA-69CA4D89E906}"/>
-                </a:ext>
-                <a:ext uri="{C183D7F6-B498-43B3-948B-1728B52AA6E4}">
-                  <adec:decorative xmlns:adec="http://schemas.microsoft.com/office/drawing/2017/decorative" val="1"/>
-                </a:ext>
-              </a:extLst>
-            </p:cNvPr>
-            <p:cNvSpPr/>
-            <p:nvPr>
-              <p:extLst>
-                <p:ext uri="{386F3935-93C4-4BCD-93E2-E3B085C9AB24}">
-                  <p16:designElem xmlns:p16="http://schemas.microsoft.com/office/powerpoint/2015/main" val="1"/>
-                </p:ext>
-              </p:extLst>
-            </p:nvPr>
-          </p:nvSpPr>
-          <p:spPr>
-            <a:xfrm>
-              <a:off x="12068638" y="0"/>
-              <a:ext cx="123362" cy="6858000"/>
-            </a:xfrm>
-            <a:prstGeom prst="rect">
-              <a:avLst/>
-            </a:prstGeom>
-            <a:gradFill>
-              <a:gsLst>
-                <a:gs pos="0">
-                  <a:schemeClr val="accent2"/>
-                </a:gs>
-                <a:gs pos="100000">
-                  <a:schemeClr val="accent5"/>
-                </a:gs>
-              </a:gsLst>
-              <a:lin ang="1800000" scaled="0"/>
-            </a:gradFill>
-            <a:ln>
-              <a:noFill/>
-            </a:ln>
-          </p:spPr>
-          <p:style>
-            <a:lnRef idx="2">
-              <a:schemeClr val="accent1">
-                <a:shade val="50000"/>
-              </a:schemeClr>
-            </a:lnRef>
-            <a:fillRef idx="1">
-              <a:schemeClr val="accent1"/>
-            </a:fillRef>
-            <a:effectRef idx="0">
-              <a:schemeClr val="accent1"/>
-            </a:effectRef>
-            <a:fontRef idx="minor">
-              <a:schemeClr val="lt1"/>
-            </a:fontRef>
-          </p:style>
-          <p:txBody>
-            <a:bodyPr rtlCol="0" anchor="ctr"/>
-            <a:lstStyle/>
-            <a:p>
-              <a:pPr algn="ctr"/>
-              <a:endParaRPr lang="en-US"/>
-            </a:p>
-          </p:txBody>
-        </p:sp>
-        <p:sp>
-          <p:nvSpPr>
-            <p:cNvPr id="13" name="Rectangle 12">
-              <a:extLst>
-                <a:ext uri="{FF2B5EF4-FFF2-40B4-BE49-F238E27FC236}">
-                  <a16:creationId xmlns:a16="http://schemas.microsoft.com/office/drawing/2014/main" id="{EC8FA945-E356-695F-18D6-CAD4EF34FE4A}"/>
-                </a:ext>
-                <a:ext uri="{C183D7F6-B498-43B3-948B-1728B52AA6E4}">
-                  <adec:decorative xmlns:adec="http://schemas.microsoft.com/office/drawing/2017/decorative" val="1"/>
-                </a:ext>
-              </a:extLst>
-            </p:cNvPr>
-            <p:cNvSpPr/>
-            <p:nvPr>
-              <p:extLst>
-                <p:ext uri="{386F3935-93C4-4BCD-93E2-E3B085C9AB24}">
-                  <p16:designElem xmlns:p16="http://schemas.microsoft.com/office/powerpoint/2015/main" val="1"/>
-                </p:ext>
-              </p:extLst>
-            </p:nvPr>
-          </p:nvSpPr>
-          <p:spPr>
-            <a:xfrm>
-              <a:off x="12068638" y="3527553"/>
-              <a:ext cx="123362" cy="3330447"/>
-            </a:xfrm>
-            <a:prstGeom prst="rect">
-              <a:avLst/>
-            </a:prstGeom>
-            <a:gradFill>
-              <a:gsLst>
-                <a:gs pos="19000">
-                  <a:schemeClr val="accent5">
-                    <a:lumMod val="60000"/>
-                    <a:lumOff val="40000"/>
-                    <a:alpha val="0"/>
-                  </a:schemeClr>
-                </a:gs>
-                <a:gs pos="100000">
-                  <a:schemeClr val="accent5">
-                    <a:lumMod val="60000"/>
-                    <a:lumOff val="40000"/>
-                  </a:schemeClr>
-                </a:gs>
-              </a:gsLst>
-              <a:lin ang="600000" scaled="0"/>
-            </a:gradFill>
-            <a:ln>
-              <a:noFill/>
-            </a:ln>
-          </p:spPr>
-          <p:style>
-            <a:lnRef idx="2">
-              <a:schemeClr val="accent1">
-                <a:shade val="50000"/>
-              </a:schemeClr>
-            </a:lnRef>
-            <a:fillRef idx="1">
-              <a:schemeClr val="accent1"/>
-            </a:fillRef>
-            <a:effectRef idx="0">
-              <a:schemeClr val="accent1"/>
-            </a:effectRef>
-            <a:fontRef idx="minor">
-              <a:schemeClr val="lt1"/>
-            </a:fontRef>
-          </p:style>
-          <p:txBody>
-            <a:bodyPr rtlCol="0" anchor="ctr"/>
-            <a:lstStyle/>
-            <a:p>
-              <a:pPr algn="ctr"/>
-              <a:endParaRPr lang="en-US"/>
-            </a:p>
-          </p:txBody>
-        </p:sp>
-      </p:grpSp>
-      <p:sp>
-        <p:nvSpPr>
-          <p:cNvPr id="5" name="TextBox 4">
-            <a:extLst>
-              <a:ext uri="{FF2B5EF4-FFF2-40B4-BE49-F238E27FC236}">
-                <a16:creationId xmlns:a16="http://schemas.microsoft.com/office/drawing/2014/main" id="{F11294EC-74C2-68D6-F7FD-3E33FDF18C9F}"/>
-              </a:ext>
-            </a:extLst>
-          </p:cNvPr>
-          <p:cNvSpPr txBox="1"/>
-          <p:nvPr/>
         </p:nvSpPr>
         <p:spPr>
-          <a:xfrm>
-            <a:off x="5425230" y="5681379"/>
-            <a:ext cx="4897400" cy="584775"/>
+          <a:xfrm rot="5400000">
+            <a:off x="5307778" y="-5307777"/>
+            <a:ext cx="1576446" cy="12192001"/>
           </a:xfrm>
           <a:prstGeom prst="rect">
             <a:avLst/>
           </a:prstGeom>
-          <a:noFill/>
-        </p:spPr>
-        <p:txBody>
-          <a:bodyPr rot="0" spcFirstLastPara="0" vertOverflow="overflow" horzOverflow="overflow" vert="horz" wrap="square" lIns="91440" tIns="45720" rIns="91440" bIns="45720" numCol="1" spcCol="0" rtlCol="0" fromWordArt="0" anchor="t" anchorCtr="0" forceAA="0" compatLnSpc="1">
-            <a:prstTxWarp prst="textNoShape">
-              <a:avLst/>
-            </a:prstTxWarp>
-            <a:spAutoFit/>
-          </a:bodyPr>
-          <a:lstStyle/>
-          <a:p>
-            <a:r>
-              <a:rPr lang="en-US" sz="1600" dirty="0"/>
-              <a:t>Figura1. </a:t>
-            </a:r>
-            <a:r>
-              <a:rPr lang="en-US" sz="1600" dirty="0" err="1"/>
-              <a:t>Visualización</a:t>
-            </a:r>
-            <a:r>
-              <a:rPr lang="en-US" sz="1600" dirty="0"/>
-              <a:t> con PCA del conjunto de </a:t>
-            </a:r>
-            <a:r>
-              <a:rPr lang="en-US" sz="1600" dirty="0" err="1"/>
-              <a:t>datos</a:t>
-            </a:r>
-            <a:r>
-              <a:rPr lang="en-US" sz="1600" dirty="0"/>
-              <a:t> </a:t>
-            </a:r>
-            <a:r>
-              <a:rPr lang="en-US" sz="1600" dirty="0" err="1"/>
-              <a:t>usado</a:t>
-            </a:r>
-            <a:endParaRPr lang="en-US" sz="1600" dirty="0"/>
-          </a:p>
-        </p:txBody>
-      </p:sp>
-    </p:spTree>
-    <p:extLst>
-      <p:ext uri="{BB962C8B-B14F-4D97-AF65-F5344CB8AC3E}">
-        <p14:creationId xmlns:p14="http://schemas.microsoft.com/office/powerpoint/2010/main" val="2239044825"/>
-      </p:ext>
-    </p:extLst>
-  </p:cSld>
-  <p:clrMapOvr>
-    <a:masterClrMapping/>
-  </p:clrMapOvr>
-</p:sld>
-</file>
-
-<file path=ppt/slides/slide6.xml><?xml version="1.0" encoding="utf-8"?>
-<p:sld xmlns:a="http://schemas.openxmlformats.org/drawingml/2006/main" xmlns:r="http://schemas.openxmlformats.org/officeDocument/2006/relationships" xmlns:p="http://schemas.openxmlformats.org/presentationml/2006/main">
-  <p:cSld>
-    <p:bg>
-      <p:bgPr>
-        <a:solidFill>
-          <a:schemeClr val="bg1"/>
-        </a:solidFill>
-        <a:effectLst/>
-      </p:bgPr>
-    </p:bg>
-    <p:spTree>
-      <p:nvGrpSpPr>
-        <p:cNvPr id="1" name=""/>
-        <p:cNvGrpSpPr/>
-        <p:nvPr/>
-      </p:nvGrpSpPr>
-      <p:grpSpPr>
-        <a:xfrm>
-          <a:off x="0" y="0"/>
-          <a:ext cx="0" cy="0"/>
-          <a:chOff x="0" y="0"/>
-          <a:chExt cx="0" cy="0"/>
-        </a:xfrm>
-      </p:grpSpPr>
-      <p:sp useBgFill="1">
-        <p:nvSpPr>
-          <p:cNvPr id="21" name="Rectangle 20">
-            <a:extLst>
-              <a:ext uri="{FF2B5EF4-FFF2-40B4-BE49-F238E27FC236}">
-                <a16:creationId xmlns:a16="http://schemas.microsoft.com/office/drawing/2014/main" id="{0B9EE3F3-89B7-43C3-8651-C4C96830993D}"/>
-              </a:ext>
-              <a:ext uri="{C183D7F6-B498-43B3-948B-1728B52AA6E4}">
-                <adec:decorative xmlns:adec="http://schemas.microsoft.com/office/drawing/2017/decorative" val="1"/>
-              </a:ext>
-            </a:extLst>
-          </p:cNvPr>
-          <p:cNvSpPr>
-            <a:spLocks noGrp="1" noRot="1" noChangeAspect="1" noMove="1" noResize="1" noEditPoints="1" noAdjustHandles="1" noChangeArrowheads="1" noChangeShapeType="1" noTextEdit="1"/>
-          </p:cNvSpPr>
-          <p:nvPr>
-            <p:extLst>
-              <p:ext uri="{386F3935-93C4-4BCD-93E2-E3B085C9AB24}">
-                <p16:designElem xmlns:p16="http://schemas.microsoft.com/office/powerpoint/2015/main" val="1"/>
-              </p:ext>
-            </p:extLst>
-          </p:nvPr>
-        </p:nvSpPr>
-        <p:spPr>
-          <a:xfrm>
-            <a:off x="0" y="0"/>
-            <a:ext cx="12192000" cy="6858000"/>
-          </a:xfrm>
-          <a:prstGeom prst="rect">
-            <a:avLst/>
-          </a:prstGeom>
+          <a:gradFill>
+            <a:gsLst>
+              <a:gs pos="16000">
+                <a:srgbClr val="000000">
+                  <a:alpha val="0"/>
+                </a:srgbClr>
+              </a:gs>
+              <a:gs pos="99000">
+                <a:srgbClr val="000000">
+                  <a:alpha val="87000"/>
+                </a:srgbClr>
+              </a:gs>
+            </a:gsLst>
+            <a:lin ang="11400000" scaled="0"/>
+          </a:gradFill>
           <a:ln>
             <a:noFill/>
           </a:ln>
@@ -4675,51 +4121,16 @@
           <a:lstStyle/>
           <a:p>
             <a:pPr algn="ctr"/>
-            <a:endParaRPr lang="en-US"/>
-          </a:p>
-        </p:txBody>
-      </p:sp>
-      <p:sp>
-        <p:nvSpPr>
-          <p:cNvPr id="2" name="Título 1">
+            <a:endParaRPr lang="en-US" dirty="0"/>
+          </a:p>
+        </p:txBody>
+      </p:sp>
+      <p:sp>
+        <p:nvSpPr>
+          <p:cNvPr id="38" name="Rectangle 37">
             <a:extLst>
               <a:ext uri="{FF2B5EF4-FFF2-40B4-BE49-F238E27FC236}">
-                <a16:creationId xmlns:a16="http://schemas.microsoft.com/office/drawing/2014/main" id="{357B8F08-64E1-BDCA-745A-0D80ABE25C62}"/>
-              </a:ext>
-            </a:extLst>
-          </p:cNvPr>
-          <p:cNvSpPr>
-            <a:spLocks noGrp="1"/>
-          </p:cNvSpPr>
-          <p:nvPr>
-            <p:ph type="title"/>
-          </p:nvPr>
-        </p:nvSpPr>
-        <p:spPr>
-          <a:xfrm>
-            <a:off x="411480" y="991443"/>
-            <a:ext cx="4443154" cy="1087819"/>
-          </a:xfrm>
-        </p:spPr>
-        <p:txBody>
-          <a:bodyPr anchor="b">
-            <a:normAutofit/>
-          </a:bodyPr>
-          <a:lstStyle/>
-          <a:p>
-            <a:r>
-              <a:rPr lang="es-GT" sz="3100" dirty="0"/>
-              <a:t>Influencia de la pandemia en el uso de bicicletas</a:t>
-            </a:r>
-          </a:p>
-        </p:txBody>
-      </p:sp>
-      <p:sp>
-        <p:nvSpPr>
-          <p:cNvPr id="23" name="Rectangle 22">
-            <a:extLst>
-              <a:ext uri="{FF2B5EF4-FFF2-40B4-BE49-F238E27FC236}">
-                <a16:creationId xmlns:a16="http://schemas.microsoft.com/office/drawing/2014/main" id="{33AE4636-AEEC-45D6-84D4-7AC2DA48ECF8}"/>
+                <a16:creationId xmlns:a16="http://schemas.microsoft.com/office/drawing/2014/main" id="{DC701763-729E-462F-A5A8-E0DEFEB1E2E4}"/>
               </a:ext>
               <a:ext uri="{C183D7F6-B498-43B3-948B-1728B52AA6E4}">
                 <adec:decorative xmlns:adec="http://schemas.microsoft.com/office/drawing/2017/decorative" val="1"/>
@@ -4738,16 +4149,29 @@
           </p:nvPr>
         </p:nvSpPr>
         <p:spPr>
-          <a:xfrm rot="5400000">
-            <a:off x="649223" y="387939"/>
-            <a:ext cx="73152" cy="548640"/>
+          <a:xfrm>
+            <a:off x="3825434" y="986"/>
+            <a:ext cx="4303422" cy="1575461"/>
           </a:xfrm>
           <a:prstGeom prst="rect">
             <a:avLst/>
           </a:prstGeom>
-          <a:solidFill>
-            <a:schemeClr val="accent2"/>
-          </a:solidFill>
+          <a:gradFill>
+            <a:gsLst>
+              <a:gs pos="0">
+                <a:schemeClr val="accent1">
+                  <a:alpha val="17000"/>
+                </a:schemeClr>
+              </a:gs>
+              <a:gs pos="74000">
+                <a:schemeClr val="accent1">
+                  <a:lumMod val="50000"/>
+                  <a:alpha val="0"/>
+                </a:schemeClr>
+              </a:gs>
+            </a:gsLst>
+            <a:lin ang="14400000" scaled="0"/>
+          </a:gradFill>
           <a:ln>
             <a:noFill/>
           </a:ln>
@@ -4773,195 +4197,162 @@
           <a:lstStyle/>
           <a:p>
             <a:pPr algn="ctr"/>
-            <a:endParaRPr lang="en-US">
-              <a:solidFill>
-                <a:prstClr val="white"/>
-              </a:solidFill>
-              <a:latin typeface="Calibri" panose="020F0502020204030204"/>
-            </a:endParaRPr>
-          </a:p>
-        </p:txBody>
-      </p:sp>
-      <p:sp>
-        <p:nvSpPr>
-          <p:cNvPr id="25" name="Rectangle 24">
+            <a:endParaRPr lang="en-US"/>
+          </a:p>
+        </p:txBody>
+      </p:sp>
+      <p:sp>
+        <p:nvSpPr>
+          <p:cNvPr id="2" name="Título 1">
             <a:extLst>
               <a:ext uri="{FF2B5EF4-FFF2-40B4-BE49-F238E27FC236}">
-                <a16:creationId xmlns:a16="http://schemas.microsoft.com/office/drawing/2014/main" id="{8D9CE0F4-2EB2-4F1F-8AAC-DB3571D9FE10}"/>
-              </a:ext>
-              <a:ext uri="{C183D7F6-B498-43B3-948B-1728B52AA6E4}">
-                <adec:decorative xmlns:adec="http://schemas.microsoft.com/office/drawing/2017/decorative" val="1"/>
+                <a16:creationId xmlns:a16="http://schemas.microsoft.com/office/drawing/2014/main" id="{357B8F08-64E1-BDCA-745A-0D80ABE25C62}"/>
               </a:ext>
             </a:extLst>
           </p:cNvPr>
           <p:cNvSpPr>
-            <a:spLocks noGrp="1" noRot="1" noChangeAspect="1" noMove="1" noResize="1" noEditPoints="1" noAdjustHandles="1" noChangeArrowheads="1" noChangeShapeType="1" noTextEdit="1"/>
-          </p:cNvSpPr>
-          <p:nvPr>
-            <p:extLst>
-              <p:ext uri="{386F3935-93C4-4BCD-93E2-E3B085C9AB24}">
-                <p16:designElem xmlns:p16="http://schemas.microsoft.com/office/powerpoint/2015/main" val="1"/>
-              </p:ext>
-            </p:extLst>
+            <a:spLocks noGrp="1"/>
+          </p:cNvSpPr>
+          <p:nvPr>
+            <p:ph type="title"/>
           </p:nvPr>
         </p:nvSpPr>
         <p:spPr>
           <a:xfrm>
-            <a:off x="411480" y="2285541"/>
-            <a:ext cx="4389120" cy="18288"/>
+            <a:off x="699714" y="353160"/>
+            <a:ext cx="7091300" cy="898581"/>
+          </a:xfrm>
+        </p:spPr>
+        <p:txBody>
+          <a:bodyPr vert="horz" lIns="91440" tIns="45720" rIns="91440" bIns="45720" rtlCol="0" anchor="ctr">
+            <a:normAutofit/>
+          </a:bodyPr>
+          <a:lstStyle/>
+          <a:p>
+            <a:r>
+              <a:rPr lang="en-US" sz="2800">
+                <a:solidFill>
+                  <a:srgbClr val="FFFFFF"/>
+                </a:solidFill>
+              </a:rPr>
+              <a:t>Influencia de la pandemia en el uso de bicicletas</a:t>
+            </a:r>
+          </a:p>
+        </p:txBody>
+      </p:sp>
+      <p:sp>
+        <p:nvSpPr>
+          <p:cNvPr id="6" name="TextBox 4">
+            <a:extLst>
+              <a:ext uri="{FF2B5EF4-FFF2-40B4-BE49-F238E27FC236}">
+                <a16:creationId xmlns:a16="http://schemas.microsoft.com/office/drawing/2014/main" id="{E15F4B84-8A57-CD3F-DD4D-A8F67E221A9E}"/>
+              </a:ext>
+            </a:extLst>
+          </p:cNvPr>
+          <p:cNvSpPr txBox="1"/>
+          <p:nvPr/>
+        </p:nvSpPr>
+        <p:spPr>
+          <a:xfrm>
+            <a:off x="1306286" y="5431229"/>
+            <a:ext cx="4175572" cy="830453"/>
           </a:xfrm>
           <a:prstGeom prst="rect">
             <a:avLst/>
           </a:prstGeom>
-          <a:solidFill>
-            <a:srgbClr val="D5D5D5"/>
-          </a:solidFill>
-          <a:ln w="3175">
-            <a:noFill/>
-          </a:ln>
-          <a:effectLst/>
         </p:spPr>
-        <p:style>
-          <a:lnRef idx="2">
-            <a:schemeClr val="accent1">
-              <a:shade val="50000"/>
-            </a:schemeClr>
-          </a:lnRef>
-          <a:fillRef idx="1">
-            <a:schemeClr val="accent1"/>
-          </a:fillRef>
-          <a:effectRef idx="0">
-            <a:schemeClr val="accent1"/>
-          </a:effectRef>
-          <a:fontRef idx="minor">
-            <a:schemeClr val="lt1"/>
-          </a:fontRef>
-        </p:style>
-        <p:txBody>
-          <a:bodyPr rtlCol="0" anchor="ctr"/>
-          <a:lstStyle/>
-          <a:p>
-            <a:pPr algn="ctr"/>
-            <a:endParaRPr lang="en-US">
-              <a:solidFill>
-                <a:prstClr val="white"/>
-              </a:solidFill>
-              <a:latin typeface="Calibri" panose="020F0502020204030204"/>
-            </a:endParaRPr>
-          </a:p>
-        </p:txBody>
-      </p:sp>
-      <p:sp>
-        <p:nvSpPr>
-          <p:cNvPr id="9" name="Content Placeholder 8">
-            <a:extLst>
-              <a:ext uri="{FF2B5EF4-FFF2-40B4-BE49-F238E27FC236}">
-                <a16:creationId xmlns:a16="http://schemas.microsoft.com/office/drawing/2014/main" id="{FBC19EE0-9B19-4047-66B9-58DA7010886F}"/>
-              </a:ext>
-            </a:extLst>
-          </p:cNvPr>
-          <p:cNvSpPr>
-            <a:spLocks noGrp="1"/>
-          </p:cNvSpPr>
-          <p:nvPr>
-            <p:ph idx="1"/>
-          </p:nvPr>
-        </p:nvSpPr>
-        <p:spPr>
-          <a:xfrm>
-            <a:off x="411480" y="2684095"/>
-            <a:ext cx="4443154" cy="3492868"/>
-          </a:xfrm>
-        </p:spPr>
-        <p:txBody>
-          <a:bodyPr>
+        <p:txBody>
+          <a:bodyPr rot="0" spcFirstLastPara="0" vertOverflow="overflow" horzOverflow="overflow" vert="horz" lIns="91440" tIns="45720" rIns="91440" bIns="45720" numCol="1" spcCol="0" rtlCol="0" fromWordArt="0" anchor="ctr" anchorCtr="0" forceAA="0" compatLnSpc="1">
+            <a:prstTxWarp prst="textNoShape">
+              <a:avLst/>
+            </a:prstTxWarp>
             <a:normAutofit/>
           </a:bodyPr>
           <a:lstStyle/>
           <a:p>
-            <a:r>
-              <a:rPr lang="en-US" sz="1800" dirty="0"/>
-              <a:t>Se </a:t>
-            </a:r>
-            <a:r>
-              <a:rPr lang="en-US" sz="1800" dirty="0" err="1"/>
-              <a:t>observa</a:t>
-            </a:r>
-            <a:r>
-              <a:rPr lang="en-US" sz="1800" dirty="0"/>
+            <a:pPr>
+              <a:lnSpc>
+                <a:spcPct val="90000"/>
+              </a:lnSpc>
+              <a:spcBef>
+                <a:spcPts val="1000"/>
+              </a:spcBef>
+            </a:pPr>
+            <a:r>
+              <a:rPr lang="en-US" sz="1400" b="1" dirty="0" err="1"/>
+              <a:t>Figura</a:t>
+            </a:r>
+            <a:r>
+              <a:rPr lang="en-US" sz="1400" b="1" dirty="0"/>
+              <a:t> 1</a:t>
+            </a:r>
+            <a:r>
+              <a:rPr lang="en-US" sz="1400" dirty="0"/>
+              <a:t>. </a:t>
+            </a:r>
+            <a:r>
+              <a:rPr lang="en-US" sz="1400" dirty="0" err="1"/>
+              <a:t>Influencia</a:t>
+            </a:r>
+            <a:r>
+              <a:rPr lang="en-US" sz="1400" dirty="0"/>
+              <a:t> de la pandemia </a:t>
+            </a:r>
+            <a:r>
+              <a:rPr lang="en-US" sz="1400" dirty="0" err="1"/>
+              <a:t>en</a:t>
+            </a:r>
+            <a:r>
+              <a:rPr lang="en-US" sz="1400" dirty="0"/>
               <a:t> </a:t>
             </a:r>
             <a:r>
-              <a:rPr lang="en-US" sz="1800" dirty="0" err="1"/>
+              <a:rPr lang="en-US" sz="1400" dirty="0" err="1"/>
+              <a:t>el</a:t>
+            </a:r>
+            <a:r>
+              <a:rPr lang="en-US" sz="1400" dirty="0"/>
+              <a:t> </a:t>
+            </a:r>
+            <a:r>
+              <a:rPr lang="en-US" sz="1400" dirty="0" err="1"/>
+              <a:t>préstamo</a:t>
+            </a:r>
+            <a:r>
+              <a:rPr lang="en-US" sz="1400" dirty="0"/>
+              <a:t> de </a:t>
+            </a:r>
+            <a:r>
+              <a:rPr lang="en-US" sz="1400" dirty="0" err="1"/>
+              <a:t>bicicletas</a:t>
+            </a:r>
+            <a:r>
+              <a:rPr lang="en-US" sz="1400" dirty="0"/>
+              <a:t> </a:t>
+            </a:r>
+            <a:r>
+              <a:rPr lang="en-US" sz="1400" dirty="0" err="1"/>
               <a:t>en</a:t>
             </a:r>
             <a:r>
-              <a:rPr lang="en-US" sz="1800" dirty="0"/>
-              <a:t> la imagen </a:t>
-            </a:r>
-            <a:r>
-              <a:rPr lang="en-US" sz="1800" dirty="0" err="1"/>
-              <a:t>que</a:t>
-            </a:r>
-            <a:r>
-              <a:rPr lang="en-US" sz="1800" dirty="0"/>
+              <a:rPr lang="en-US" sz="1400" dirty="0"/>
+              <a:t> la Semana Santa de </a:t>
+            </a:r>
+            <a:r>
+              <a:rPr lang="en-US" sz="1400" dirty="0" err="1"/>
+              <a:t>los</a:t>
+            </a:r>
+            <a:r>
+              <a:rPr lang="en-US" sz="1400" dirty="0"/>
               <a:t> </a:t>
             </a:r>
             <a:r>
-              <a:rPr lang="en-US" sz="1800" dirty="0" err="1"/>
-              <a:t>el</a:t>
-            </a:r>
-            <a:r>
-              <a:rPr lang="en-US" sz="1800" dirty="0"/>
-              <a:t> </a:t>
-            </a:r>
-            <a:r>
-              <a:rPr lang="en-US" sz="1800" dirty="0" err="1"/>
-              <a:t>uso</a:t>
-            </a:r>
-            <a:r>
-              <a:rPr lang="en-US" sz="1800" dirty="0"/>
-              <a:t> de las </a:t>
-            </a:r>
-            <a:r>
-              <a:rPr lang="en-US" sz="1800" dirty="0" err="1"/>
-              <a:t>bicicletas</a:t>
-            </a:r>
-            <a:r>
-              <a:rPr lang="en-US" sz="1800" dirty="0"/>
-              <a:t> </a:t>
-            </a:r>
-            <a:r>
-              <a:rPr lang="en-US" sz="1800" dirty="0" err="1"/>
-              <a:t>fue</a:t>
-            </a:r>
-            <a:r>
-              <a:rPr lang="en-US" sz="1800" dirty="0"/>
-              <a:t> mayor </a:t>
-            </a:r>
-            <a:r>
-              <a:rPr lang="en-US" sz="1800" dirty="0" err="1"/>
-              <a:t>después</a:t>
-            </a:r>
-            <a:r>
-              <a:rPr lang="en-US" sz="1800" dirty="0"/>
-              <a:t> de la pandemia </a:t>
-            </a:r>
-            <a:r>
-              <a:rPr lang="en-US" sz="1800" dirty="0" err="1"/>
-              <a:t>que</a:t>
-            </a:r>
-            <a:r>
-              <a:rPr lang="en-US" sz="1800" dirty="0"/>
-              <a:t> antes de la </a:t>
-            </a:r>
-            <a:r>
-              <a:rPr lang="en-US" sz="1800" dirty="0" err="1"/>
-              <a:t>misma</a:t>
-            </a:r>
-            <a:r>
-              <a:rPr lang="en-US" sz="1800" dirty="0"/>
-              <a:t>.</a:t>
+              <a:rPr lang="en-US" sz="1400" dirty="0" err="1"/>
+              <a:t>años</a:t>
+            </a:r>
+            <a:r>
+              <a:rPr lang="en-US" sz="1400" dirty="0"/>
+              <a:t> 2015-2025</a:t>
             </a:r>
           </a:p>
         </p:txBody>
@@ -4988,20 +4379,52 @@
         </p:blipFill>
         <p:spPr>
           <a:xfrm>
-            <a:off x="5385816" y="1742914"/>
-            <a:ext cx="6440424" cy="3316818"/>
+            <a:off x="513100" y="2377303"/>
+            <a:ext cx="5929955" cy="3053926"/>
           </a:xfrm>
           <a:prstGeom prst="rect">
             <a:avLst/>
           </a:prstGeom>
         </p:spPr>
       </p:pic>
-      <p:sp>
-        <p:nvSpPr>
-          <p:cNvPr id="6" name="TextBox 4">
+      <p:pic>
+        <p:nvPicPr>
+          <p:cNvPr id="3" name="Marcador de contenido 2">
             <a:extLst>
               <a:ext uri="{FF2B5EF4-FFF2-40B4-BE49-F238E27FC236}">
-                <a16:creationId xmlns:a16="http://schemas.microsoft.com/office/drawing/2014/main" id="{E15F4B84-8A57-CD3F-DD4D-A8F67E221A9E}"/>
+                <a16:creationId xmlns:a16="http://schemas.microsoft.com/office/drawing/2014/main" id="{C8A9C486-0991-237C-142C-FA0A064BEF18}"/>
+              </a:ext>
+            </a:extLst>
+          </p:cNvPr>
+          <p:cNvPicPr>
+            <a:picLocks noGrp="1" noChangeAspect="1"/>
+          </p:cNvPicPr>
+          <p:nvPr>
+            <p:ph idx="1"/>
+          </p:nvPr>
+        </p:nvPicPr>
+        <p:blipFill>
+          <a:blip r:embed="rId3"/>
+          <a:stretch>
+            <a:fillRect/>
+          </a:stretch>
+        </p:blipFill>
+        <p:spPr>
+          <a:xfrm>
+            <a:off x="8774611" y="1905350"/>
+            <a:ext cx="1430894" cy="3997831"/>
+          </a:xfrm>
+          <a:prstGeom prst="rect">
+            <a:avLst/>
+          </a:prstGeom>
+        </p:spPr>
+      </p:pic>
+      <p:sp>
+        <p:nvSpPr>
+          <p:cNvPr id="7" name="TextBox 4">
+            <a:extLst>
+              <a:ext uri="{FF2B5EF4-FFF2-40B4-BE49-F238E27FC236}">
+                <a16:creationId xmlns:a16="http://schemas.microsoft.com/office/drawing/2014/main" id="{BF0CD938-E75F-A789-B89A-430304E64F95}"/>
               </a:ext>
             </a:extLst>
           </p:cNvPr>
@@ -5010,74 +4433,77 @@
         </p:nvSpPr>
         <p:spPr>
           <a:xfrm>
-            <a:off x="6552281" y="5181649"/>
-            <a:ext cx="4897400" cy="584775"/>
+            <a:off x="8016428" y="5776772"/>
+            <a:ext cx="4175572" cy="830453"/>
           </a:xfrm>
           <a:prstGeom prst="rect">
             <a:avLst/>
           </a:prstGeom>
-          <a:noFill/>
         </p:spPr>
         <p:txBody>
-          <a:bodyPr rot="0" spcFirstLastPara="0" vertOverflow="overflow" horzOverflow="overflow" vert="horz" wrap="square" lIns="91440" tIns="45720" rIns="91440" bIns="45720" numCol="1" spcCol="0" rtlCol="0" fromWordArt="0" anchor="t" anchorCtr="0" forceAA="0" compatLnSpc="1">
+          <a:bodyPr rot="0" spcFirstLastPara="0" vertOverflow="overflow" horzOverflow="overflow" vert="horz" lIns="91440" tIns="45720" rIns="91440" bIns="45720" numCol="1" spcCol="0" rtlCol="0" fromWordArt="0" anchor="ctr" anchorCtr="0" forceAA="0" compatLnSpc="1">
             <a:prstTxWarp prst="textNoShape">
               <a:avLst/>
             </a:prstTxWarp>
-            <a:spAutoFit/>
+            <a:normAutofit/>
           </a:bodyPr>
           <a:lstStyle/>
           <a:p>
-            <a:r>
-              <a:rPr lang="en-US" sz="1600" dirty="0"/>
-              <a:t>Figura2. </a:t>
-            </a:r>
-            <a:r>
-              <a:rPr lang="en-US" sz="1600" dirty="0" err="1"/>
-              <a:t>Tendencia</a:t>
-            </a:r>
-            <a:r>
-              <a:rPr lang="en-US" sz="1600" dirty="0"/>
-              <a:t> </a:t>
-            </a:r>
-            <a:r>
-              <a:rPr lang="en-US" sz="1600" dirty="0" err="1"/>
-              <a:t>en</a:t>
-            </a:r>
-            <a:r>
-              <a:rPr lang="en-US" sz="1600" dirty="0"/>
-              <a:t> </a:t>
-            </a:r>
-            <a:r>
-              <a:rPr lang="en-US" sz="1600" dirty="0" err="1"/>
-              <a:t>los</a:t>
-            </a:r>
-            <a:r>
-              <a:rPr lang="en-US" sz="1600" dirty="0"/>
-              <a:t> </a:t>
-            </a:r>
-            <a:r>
-              <a:rPr lang="en-US" sz="1600" dirty="0" err="1"/>
-              <a:t>préstamos</a:t>
-            </a:r>
-            <a:r>
-              <a:rPr lang="en-US" sz="1600" dirty="0"/>
-              <a:t> </a:t>
-            </a:r>
-            <a:r>
-              <a:rPr lang="en-US" sz="1600" dirty="0" err="1"/>
-              <a:t>promedio</a:t>
-            </a:r>
-            <a:r>
-              <a:rPr lang="en-US" sz="1600" dirty="0"/>
+            <a:pPr>
+              <a:lnSpc>
+                <a:spcPct val="90000"/>
+              </a:lnSpc>
+              <a:spcBef>
+                <a:spcPts val="1000"/>
+              </a:spcBef>
+            </a:pPr>
+            <a:r>
+              <a:rPr lang="en-US" sz="1400" b="1" dirty="0"/>
+              <a:t>Cuadro 1</a:t>
+            </a:r>
+            <a:r>
+              <a:rPr lang="en-US" sz="1400" dirty="0"/>
+              <a:t>. </a:t>
+            </a:r>
+            <a:r>
+              <a:rPr lang="en-US" sz="1400" dirty="0" err="1"/>
+              <a:t>Tabla</a:t>
+            </a:r>
+            <a:r>
+              <a:rPr lang="en-US" sz="1400" dirty="0"/>
+              <a:t> de la </a:t>
+            </a:r>
+            <a:r>
+              <a:rPr lang="en-US" sz="1400" dirty="0" err="1"/>
+              <a:t>cantidad</a:t>
+            </a:r>
+            <a:r>
+              <a:rPr lang="en-US" sz="1400" dirty="0"/>
               <a:t> de </a:t>
             </a:r>
             <a:r>
-              <a:rPr lang="en-US" sz="1600" dirty="0" err="1"/>
+              <a:rPr lang="en-US" sz="1400" dirty="0" err="1"/>
+              <a:t>retiros</a:t>
+            </a:r>
+            <a:r>
+              <a:rPr lang="en-US" sz="1400" dirty="0"/>
+              <a:t> de </a:t>
+            </a:r>
+            <a:r>
+              <a:rPr lang="en-US" sz="1400" dirty="0" err="1"/>
               <a:t>bicicletas</a:t>
             </a:r>
             <a:r>
-              <a:rPr lang="en-US" sz="1600" dirty="0"/>
-              <a:t>.</a:t>
+              <a:rPr lang="en-US" sz="1400" dirty="0"/>
+              <a:t> total </a:t>
+            </a:r>
+            <a:r>
+              <a:rPr lang="en-US" sz="1400" dirty="0" err="1"/>
+              <a:t>durante</a:t>
+            </a:r>
+            <a:r>
+              <a:rPr lang="en-US" sz="1400" dirty="0"/>
+              <a:t> Semana Santa.</a:t>
             </a:r>
           </a:p>
         </p:txBody>
@@ -5095,7 +4521,7 @@
 </p:sld>
 </file>
 
-<file path=ppt/slides/slide7.xml><?xml version="1.0" encoding="utf-8"?>
+<file path=ppt/slides/slide5.xml><?xml version="1.0" encoding="utf-8"?>
 <p:sld xmlns:a="http://schemas.openxmlformats.org/drawingml/2006/main" xmlns:r="http://schemas.openxmlformats.org/officeDocument/2006/relationships" xmlns:p="http://schemas.openxmlformats.org/presentationml/2006/main">
   <p:cSld>
     <p:bg>
@@ -5518,137 +4944,6 @@
           </a:p>
         </p:txBody>
       </p:sp>
-      <p:sp>
-        <p:nvSpPr>
-          <p:cNvPr id="8" name="Content Placeholder 7">
-            <a:extLst>
-              <a:ext uri="{FF2B5EF4-FFF2-40B4-BE49-F238E27FC236}">
-                <a16:creationId xmlns:a16="http://schemas.microsoft.com/office/drawing/2014/main" id="{E2210A55-7B50-8D9C-D0B2-79DE765DA64B}"/>
-              </a:ext>
-            </a:extLst>
-          </p:cNvPr>
-          <p:cNvSpPr>
-            <a:spLocks noGrp="1"/>
-          </p:cNvSpPr>
-          <p:nvPr>
-            <p:ph idx="1"/>
-          </p:nvPr>
-        </p:nvSpPr>
-        <p:spPr>
-          <a:xfrm>
-            <a:off x="630936" y="2807208"/>
-            <a:ext cx="3429000" cy="3410712"/>
-          </a:xfrm>
-        </p:spPr>
-        <p:txBody>
-          <a:bodyPr anchor="t">
-            <a:normAutofit/>
-          </a:bodyPr>
-          <a:lstStyle/>
-          <a:p>
-            <a:r>
-              <a:rPr lang="en-US" sz="2200" dirty="0"/>
-              <a:t>Se </a:t>
-            </a:r>
-            <a:r>
-              <a:rPr lang="en-US" sz="2200" dirty="0" err="1"/>
-              <a:t>observa</a:t>
-            </a:r>
-            <a:r>
-              <a:rPr lang="en-US" sz="2200" dirty="0"/>
-              <a:t> de la </a:t>
-            </a:r>
-            <a:r>
-              <a:rPr lang="en-US" sz="2200" dirty="0" err="1"/>
-              <a:t>figura</a:t>
-            </a:r>
-            <a:r>
-              <a:rPr lang="en-US" sz="2200" dirty="0"/>
-              <a:t> </a:t>
-            </a:r>
-            <a:r>
-              <a:rPr lang="en-US" sz="2200" dirty="0" err="1"/>
-              <a:t>que</a:t>
-            </a:r>
-            <a:r>
-              <a:rPr lang="en-US" sz="2200" dirty="0"/>
-              <a:t> </a:t>
-            </a:r>
-            <a:r>
-              <a:rPr lang="en-US" sz="2200" dirty="0" err="1"/>
-              <a:t>los</a:t>
-            </a:r>
-            <a:r>
-              <a:rPr lang="en-US" sz="2200" dirty="0"/>
-              <a:t> días lunes, martes y </a:t>
-            </a:r>
-            <a:r>
-              <a:rPr lang="en-US" sz="2200" dirty="0" err="1"/>
-              <a:t>miércoles</a:t>
-            </a:r>
-            <a:r>
-              <a:rPr lang="en-US" sz="2200" dirty="0"/>
-              <a:t> son </a:t>
-            </a:r>
-            <a:r>
-              <a:rPr lang="en-US" sz="2200" dirty="0" err="1"/>
-              <a:t>aquellos</a:t>
-            </a:r>
-            <a:r>
-              <a:rPr lang="en-US" sz="2200" dirty="0"/>
-              <a:t> </a:t>
-            </a:r>
-            <a:r>
-              <a:rPr lang="en-US" sz="2200" dirty="0" err="1"/>
-              <a:t>en</a:t>
-            </a:r>
-            <a:r>
-              <a:rPr lang="en-US" sz="2200" dirty="0"/>
-              <a:t> </a:t>
-            </a:r>
-            <a:r>
-              <a:rPr lang="en-US" sz="2200" dirty="0" err="1"/>
-              <a:t>que</a:t>
-            </a:r>
-            <a:r>
-              <a:rPr lang="en-US" sz="2200" dirty="0"/>
-              <a:t> se ha </a:t>
-            </a:r>
-            <a:r>
-              <a:rPr lang="en-US" sz="2200" dirty="0" err="1"/>
-              <a:t>realizado</a:t>
-            </a:r>
-            <a:r>
-              <a:rPr lang="en-US" sz="2200" dirty="0"/>
-              <a:t> mayor </a:t>
-            </a:r>
-            <a:r>
-              <a:rPr lang="en-US" sz="2200" dirty="0" err="1"/>
-              <a:t>número</a:t>
-            </a:r>
-            <a:r>
-              <a:rPr lang="en-US" sz="2200" dirty="0"/>
-              <a:t> de </a:t>
-            </a:r>
-            <a:r>
-              <a:rPr lang="en-US" sz="2200" dirty="0" err="1"/>
-              <a:t>retiros</a:t>
-            </a:r>
-            <a:r>
-              <a:rPr lang="en-US" sz="2200" dirty="0"/>
-              <a:t> de </a:t>
-            </a:r>
-            <a:r>
-              <a:rPr lang="en-US" sz="2200" dirty="0" err="1"/>
-              <a:t>bicletas</a:t>
-            </a:r>
-            <a:r>
-              <a:rPr lang="en-US" sz="2200" dirty="0"/>
-              <a:t>.</a:t>
-            </a:r>
-          </a:p>
-        </p:txBody>
-      </p:sp>
       <p:pic>
         <p:nvPicPr>
           <p:cNvPr id="3" name="Picture 2">
@@ -5679,12 +4974,50 @@
           </a:prstGeom>
         </p:spPr>
       </p:pic>
-      <p:sp>
-        <p:nvSpPr>
-          <p:cNvPr id="4" name="TextBox 4">
+      <p:pic>
+        <p:nvPicPr>
+          <p:cNvPr id="5" name="Marcador de contenido 4">
             <a:extLst>
               <a:ext uri="{FF2B5EF4-FFF2-40B4-BE49-F238E27FC236}">
-                <a16:creationId xmlns:a16="http://schemas.microsoft.com/office/drawing/2014/main" id="{478620BD-B298-B768-BA14-8163BE5746A8}"/>
+                <a16:creationId xmlns:a16="http://schemas.microsoft.com/office/drawing/2014/main" id="{AFB50825-FE3F-86E0-36A8-AE17B86DF275}"/>
+              </a:ext>
+            </a:extLst>
+          </p:cNvPr>
+          <p:cNvPicPr>
+            <a:picLocks noGrp="1" noChangeAspect="1"/>
+          </p:cNvPicPr>
+          <p:nvPr>
+            <p:ph idx="1"/>
+          </p:nvPr>
+        </p:nvPicPr>
+        <p:blipFill>
+          <a:blip r:embed="rId3">
+            <a:extLst>
+              <a:ext uri="{28A0092B-C50C-407E-A947-70E740481C1C}">
+                <a14:useLocalDpi xmlns:a14="http://schemas.microsoft.com/office/drawing/2010/main" val="0"/>
+              </a:ext>
+            </a:extLst>
+          </a:blip>
+          <a:stretch>
+            <a:fillRect/>
+          </a:stretch>
+        </p:blipFill>
+        <p:spPr>
+          <a:xfrm>
+            <a:off x="1011122" y="3016400"/>
+            <a:ext cx="3044806" cy="2662030"/>
+          </a:xfrm>
+          <a:prstGeom prst="rect">
+            <a:avLst/>
+          </a:prstGeom>
+        </p:spPr>
+      </p:pic>
+      <p:sp>
+        <p:nvSpPr>
+          <p:cNvPr id="6" name="TextBox 4">
+            <a:extLst>
+              <a:ext uri="{FF2B5EF4-FFF2-40B4-BE49-F238E27FC236}">
+                <a16:creationId xmlns:a16="http://schemas.microsoft.com/office/drawing/2014/main" id="{B9C9D231-BA5F-2DAD-31C9-238F06EC0339}"/>
               </a:ext>
             </a:extLst>
           </p:cNvPr>
@@ -5693,83 +5026,144 @@
         </p:nvSpPr>
         <p:spPr>
           <a:xfrm>
-            <a:off x="5531555" y="5309239"/>
-            <a:ext cx="4897400" cy="584775"/>
+            <a:off x="6354148" y="5232596"/>
+            <a:ext cx="4175572" cy="830453"/>
           </a:xfrm>
           <a:prstGeom prst="rect">
             <a:avLst/>
           </a:prstGeom>
-          <a:noFill/>
         </p:spPr>
         <p:txBody>
-          <a:bodyPr rot="0" spcFirstLastPara="0" vertOverflow="overflow" horzOverflow="overflow" vert="horz" wrap="square" lIns="91440" tIns="45720" rIns="91440" bIns="45720" numCol="1" spcCol="0" rtlCol="0" fromWordArt="0" anchor="t" anchorCtr="0" forceAA="0" compatLnSpc="1">
+          <a:bodyPr rot="0" spcFirstLastPara="0" vertOverflow="overflow" horzOverflow="overflow" vert="horz" lIns="91440" tIns="45720" rIns="91440" bIns="45720" numCol="1" spcCol="0" rtlCol="0" fromWordArt="0" anchor="ctr" anchorCtr="0" forceAA="0" compatLnSpc="1">
             <a:prstTxWarp prst="textNoShape">
               <a:avLst/>
             </a:prstTxWarp>
-            <a:spAutoFit/>
+            <a:normAutofit/>
           </a:bodyPr>
           <a:lstStyle/>
           <a:p>
-            <a:r>
-              <a:rPr lang="en-US" sz="1600" dirty="0"/>
-              <a:t>Figura3. </a:t>
-            </a:r>
-            <a:r>
-              <a:rPr lang="en-US" sz="1600" dirty="0" err="1"/>
-              <a:t>Demanda</a:t>
-            </a:r>
-            <a:r>
-              <a:rPr lang="en-US" sz="1600" dirty="0"/>
+            <a:pPr>
+              <a:lnSpc>
+                <a:spcPct val="90000"/>
+              </a:lnSpc>
+              <a:spcBef>
+                <a:spcPts val="1000"/>
+              </a:spcBef>
+            </a:pPr>
+            <a:r>
+              <a:rPr lang="en-US" sz="1400" b="1" dirty="0" err="1"/>
+              <a:t>Figura</a:t>
+            </a:r>
+            <a:r>
+              <a:rPr lang="en-US" sz="1400" b="1" dirty="0"/>
+              <a:t> 2</a:t>
+            </a:r>
+            <a:r>
+              <a:rPr lang="en-US" sz="1400" dirty="0"/>
+              <a:t>. </a:t>
+            </a:r>
+            <a:r>
+              <a:rPr lang="en-US" sz="1400" dirty="0" err="1"/>
+              <a:t>Patrón</a:t>
+            </a:r>
+            <a:r>
+              <a:rPr lang="en-US" sz="1400" dirty="0"/>
+              <a:t> de </a:t>
+            </a:r>
+            <a:r>
+              <a:rPr lang="en-US" sz="1400" dirty="0" err="1"/>
+              <a:t>retiros</a:t>
+            </a:r>
+            <a:r>
+              <a:rPr lang="en-US" sz="1400" dirty="0"/>
               <a:t> </a:t>
             </a:r>
             <a:r>
-              <a:rPr lang="en-US" sz="1600" dirty="0" err="1"/>
+              <a:rPr lang="en-US" sz="1400" dirty="0" err="1"/>
               <a:t>promedio</a:t>
             </a:r>
             <a:r>
-              <a:rPr lang="en-US" sz="1600" dirty="0"/>
+              <a:rPr lang="en-US" sz="1400" dirty="0"/>
+              <a:t> de </a:t>
+            </a:r>
+            <a:r>
+              <a:rPr lang="en-US" sz="1400" dirty="0" err="1"/>
+              <a:t>bicicletas</a:t>
+            </a:r>
+            <a:r>
+              <a:rPr lang="en-US" sz="1400" dirty="0"/>
               <a:t> </a:t>
             </a:r>
             <a:r>
-              <a:rPr lang="en-US" sz="1600" dirty="0" err="1"/>
+              <a:rPr lang="en-US" sz="1400" dirty="0" err="1"/>
               <a:t>en</a:t>
             </a:r>
             <a:r>
-              <a:rPr lang="en-US" sz="1600" dirty="0"/>
-              <a:t> </a:t>
-            </a:r>
-            <a:r>
-              <a:rPr lang="en-US" sz="1600" dirty="0" err="1"/>
-              <a:t>el</a:t>
-            </a:r>
-            <a:r>
-              <a:rPr lang="en-US" sz="1600" dirty="0"/>
-              <a:t> </a:t>
-            </a:r>
-            <a:r>
-              <a:rPr lang="en-US" sz="1600" dirty="0" err="1"/>
-              <a:t>préstamo</a:t>
-            </a:r>
-            <a:r>
-              <a:rPr lang="en-US" sz="1600" dirty="0"/>
-              <a:t> de </a:t>
-            </a:r>
-            <a:r>
-              <a:rPr lang="en-US" sz="1600" dirty="0" err="1"/>
-              <a:t>bicicletas</a:t>
-            </a:r>
-            <a:r>
-              <a:rPr lang="en-US" sz="1600" dirty="0"/>
-              <a:t> </a:t>
-            </a:r>
-            <a:r>
-              <a:rPr lang="en-US" sz="1600" dirty="0" err="1"/>
+              <a:rPr lang="en-US" sz="1400" dirty="0"/>
+              <a:t> Ciudad de México </a:t>
+            </a:r>
+            <a:r>
+              <a:rPr lang="en-US" sz="1400" dirty="0" err="1"/>
               <a:t>durante</a:t>
             </a:r>
             <a:r>
-              <a:rPr lang="en-US" sz="1600" dirty="0"/>
-              <a:t> la Semana Santa.</a:t>
-            </a:r>
+              <a:rPr lang="en-US" sz="1400" dirty="0"/>
+              <a:t> la Semana Santa</a:t>
+            </a:r>
+          </a:p>
+        </p:txBody>
+      </p:sp>
+      <p:sp>
+        <p:nvSpPr>
+          <p:cNvPr id="7" name="TextBox 4">
+            <a:extLst>
+              <a:ext uri="{FF2B5EF4-FFF2-40B4-BE49-F238E27FC236}">
+                <a16:creationId xmlns:a16="http://schemas.microsoft.com/office/drawing/2014/main" id="{1B0FABF0-8A63-602B-4327-338A1A1FBF0C}"/>
+              </a:ext>
+            </a:extLst>
+          </p:cNvPr>
+          <p:cNvSpPr txBox="1"/>
+          <p:nvPr/>
+        </p:nvSpPr>
+        <p:spPr>
+          <a:xfrm>
+            <a:off x="793102" y="5656952"/>
+            <a:ext cx="4175572" cy="830453"/>
+          </a:xfrm>
+          <a:prstGeom prst="rect">
+            <a:avLst/>
+          </a:prstGeom>
+        </p:spPr>
+        <p:txBody>
+          <a:bodyPr rot="0" spcFirstLastPara="0" vertOverflow="overflow" horzOverflow="overflow" vert="horz" lIns="91440" tIns="45720" rIns="91440" bIns="45720" numCol="1" spcCol="0" rtlCol="0" fromWordArt="0" anchor="ctr" anchorCtr="0" forceAA="0" compatLnSpc="1">
+            <a:prstTxWarp prst="textNoShape">
+              <a:avLst/>
+            </a:prstTxWarp>
+            <a:normAutofit/>
+          </a:bodyPr>
+          <a:lstStyle/>
+          <a:p>
+            <a:pPr>
+              <a:lnSpc>
+                <a:spcPct val="90000"/>
+              </a:lnSpc>
+              <a:spcBef>
+                <a:spcPts val="1000"/>
+              </a:spcBef>
+            </a:pPr>
+            <a:r>
+              <a:rPr lang="en-US" sz="1400" b="1" dirty="0"/>
+              <a:t>Cuadro 2</a:t>
+            </a:r>
+            <a:r>
+              <a:rPr lang="en-US" sz="1400" dirty="0"/>
+              <a:t>. </a:t>
+            </a:r>
+            <a:r>
+              <a:rPr lang="es-GT" sz="1400" dirty="0"/>
+              <a:t>Tabla de los días de la Semana Santa con mayores retiros de bicicletas en Ciudad de México</a:t>
+            </a:r>
+            <a:endParaRPr lang="en-US" sz="1400" dirty="0"/>
           </a:p>
         </p:txBody>
       </p:sp>
@@ -5777,6 +5171,1424 @@
     <p:extLst>
       <p:ext uri="{BB962C8B-B14F-4D97-AF65-F5344CB8AC3E}">
         <p14:creationId xmlns:p14="http://schemas.microsoft.com/office/powerpoint/2010/main" val="1925783779"/>
+      </p:ext>
+    </p:extLst>
+  </p:cSld>
+  <p:clrMapOvr>
+    <a:masterClrMapping/>
+  </p:clrMapOvr>
+</p:sld>
+</file>
+
+<file path=ppt/slides/slide6.xml><?xml version="1.0" encoding="utf-8"?>
+<p:sld xmlns:a="http://schemas.openxmlformats.org/drawingml/2006/main" xmlns:r="http://schemas.openxmlformats.org/officeDocument/2006/relationships" xmlns:p="http://schemas.openxmlformats.org/presentationml/2006/main">
+  <p:cSld>
+    <p:bg>
+      <p:bgPr>
+        <a:solidFill>
+          <a:schemeClr val="bg1"/>
+        </a:solidFill>
+        <a:effectLst/>
+      </p:bgPr>
+    </p:bg>
+    <p:spTree>
+      <p:nvGrpSpPr>
+        <p:cNvPr id="1" name=""/>
+        <p:cNvGrpSpPr/>
+        <p:nvPr/>
+      </p:nvGrpSpPr>
+      <p:grpSpPr>
+        <a:xfrm>
+          <a:off x="0" y="0"/>
+          <a:ext cx="0" cy="0"/>
+          <a:chOff x="0" y="0"/>
+          <a:chExt cx="0" cy="0"/>
+        </a:xfrm>
+      </p:grpSpPr>
+      <p:sp useBgFill="1">
+        <p:nvSpPr>
+          <p:cNvPr id="27" name="Rectangle 26">
+            <a:extLst>
+              <a:ext uri="{FF2B5EF4-FFF2-40B4-BE49-F238E27FC236}">
+                <a16:creationId xmlns:a16="http://schemas.microsoft.com/office/drawing/2014/main" id="{2151139A-886F-4B97-8815-729AD3831BBD}"/>
+              </a:ext>
+              <a:ext uri="{C183D7F6-B498-43B3-948B-1728B52AA6E4}">
+                <adec:decorative xmlns:adec="http://schemas.microsoft.com/office/drawing/2017/decorative" val="1"/>
+              </a:ext>
+            </a:extLst>
+          </p:cNvPr>
+          <p:cNvSpPr>
+            <a:spLocks noGrp="1" noRot="1" noChangeAspect="1" noMove="1" noResize="1" noEditPoints="1" noAdjustHandles="1" noChangeArrowheads="1" noChangeShapeType="1" noTextEdit="1"/>
+          </p:cNvSpPr>
+          <p:nvPr>
+            <p:extLst>
+              <p:ext uri="{386F3935-93C4-4BCD-93E2-E3B085C9AB24}">
+                <p16:designElem xmlns:p16="http://schemas.microsoft.com/office/powerpoint/2015/main" val="1"/>
+              </p:ext>
+            </p:extLst>
+          </p:nvPr>
+        </p:nvSpPr>
+        <p:spPr>
+          <a:xfrm>
+            <a:off x="0" y="0"/>
+            <a:ext cx="12192000" cy="6858000"/>
+          </a:xfrm>
+          <a:prstGeom prst="rect">
+            <a:avLst/>
+          </a:prstGeom>
+          <a:ln w="12700" cap="flat" cmpd="sng" algn="ctr">
+            <a:noFill/>
+            <a:prstDash val="solid"/>
+            <a:miter lim="800000"/>
+          </a:ln>
+          <a:effectLst/>
+          <a:extLst>
+            <a:ext uri="{91240B29-F687-4F45-9708-019B960494DF}">
+              <a14:hiddenLine xmlns:a14="http://schemas.microsoft.com/office/drawing/2010/main" w="12700" cap="flat" cmpd="sng" algn="ctr">
+                <a:solidFill>
+                  <a:schemeClr val="accent1">
+                    <a:shade val="50000"/>
+                  </a:schemeClr>
+                </a:solidFill>
+                <a:prstDash val="solid"/>
+                <a:miter lim="800000"/>
+              </a14:hiddenLine>
+            </a:ext>
+          </a:extLst>
+        </p:spPr>
+        <p:style>
+          <a:lnRef idx="2">
+            <a:schemeClr val="accent1">
+              <a:shade val="50000"/>
+            </a:schemeClr>
+          </a:lnRef>
+          <a:fillRef idx="1">
+            <a:schemeClr val="accent1"/>
+          </a:fillRef>
+          <a:effectRef idx="0">
+            <a:schemeClr val="accent1"/>
+          </a:effectRef>
+          <a:fontRef idx="minor">
+            <a:schemeClr val="lt1"/>
+          </a:fontRef>
+        </p:style>
+        <p:txBody>
+          <a:bodyPr rtlCol="0" anchor="ctr"/>
+          <a:lstStyle/>
+          <a:p>
+            <a:pPr algn="ctr"/>
+            <a:endParaRPr lang="en-US" sz="2000"/>
+          </a:p>
+        </p:txBody>
+      </p:sp>
+      <p:sp>
+        <p:nvSpPr>
+          <p:cNvPr id="29" name="Rectangle 28">
+            <a:extLst>
+              <a:ext uri="{FF2B5EF4-FFF2-40B4-BE49-F238E27FC236}">
+                <a16:creationId xmlns:a16="http://schemas.microsoft.com/office/drawing/2014/main" id="{AB5E08C4-8CDD-4623-A5B8-E998C6DEE3B7}"/>
+              </a:ext>
+              <a:ext uri="{C183D7F6-B498-43B3-948B-1728B52AA6E4}">
+                <adec:decorative xmlns:adec="http://schemas.microsoft.com/office/drawing/2017/decorative" val="1"/>
+              </a:ext>
+            </a:extLst>
+          </p:cNvPr>
+          <p:cNvSpPr>
+            <a:spLocks noGrp="1" noRot="1" noChangeAspect="1" noMove="1" noResize="1" noEditPoints="1" noAdjustHandles="1" noChangeArrowheads="1" noChangeShapeType="1" noTextEdit="1"/>
+          </p:cNvSpPr>
+          <p:nvPr>
+            <p:extLst>
+              <p:ext uri="{386F3935-93C4-4BCD-93E2-E3B085C9AB24}">
+                <p16:designElem xmlns:p16="http://schemas.microsoft.com/office/powerpoint/2015/main" val="1"/>
+              </p:ext>
+            </p:extLst>
+          </p:nvPr>
+        </p:nvSpPr>
+        <p:spPr>
+          <a:xfrm flipH="1">
+            <a:off x="2" y="492"/>
+            <a:ext cx="12191998" cy="1575955"/>
+          </a:xfrm>
+          <a:prstGeom prst="rect">
+            <a:avLst/>
+          </a:prstGeom>
+          <a:gradFill>
+            <a:gsLst>
+              <a:gs pos="0">
+                <a:schemeClr val="accent1">
+                  <a:lumMod val="50000"/>
+                </a:schemeClr>
+              </a:gs>
+              <a:gs pos="100000">
+                <a:schemeClr val="accent1">
+                  <a:lumMod val="75000"/>
+                </a:schemeClr>
+              </a:gs>
+            </a:gsLst>
+            <a:lin ang="8400000" scaled="0"/>
+          </a:gradFill>
+          <a:ln>
+            <a:noFill/>
+          </a:ln>
+        </p:spPr>
+        <p:style>
+          <a:lnRef idx="2">
+            <a:schemeClr val="accent1">
+              <a:shade val="50000"/>
+            </a:schemeClr>
+          </a:lnRef>
+          <a:fillRef idx="1">
+            <a:schemeClr val="accent1"/>
+          </a:fillRef>
+          <a:effectRef idx="0">
+            <a:schemeClr val="accent1"/>
+          </a:effectRef>
+          <a:fontRef idx="minor">
+            <a:schemeClr val="lt1"/>
+          </a:fontRef>
+        </p:style>
+        <p:txBody>
+          <a:bodyPr rtlCol="0" anchor="ctr"/>
+          <a:lstStyle/>
+          <a:p>
+            <a:pPr algn="ctr"/>
+            <a:endParaRPr lang="en-US"/>
+          </a:p>
+        </p:txBody>
+      </p:sp>
+      <p:sp>
+        <p:nvSpPr>
+          <p:cNvPr id="31" name="Rectangle 30">
+            <a:extLst>
+              <a:ext uri="{FF2B5EF4-FFF2-40B4-BE49-F238E27FC236}">
+                <a16:creationId xmlns:a16="http://schemas.microsoft.com/office/drawing/2014/main" id="{15F33878-D502-4FFA-8ACE-F2AECDB2A23F}"/>
+              </a:ext>
+              <a:ext uri="{C183D7F6-B498-43B3-948B-1728B52AA6E4}">
+                <adec:decorative xmlns:adec="http://schemas.microsoft.com/office/drawing/2017/decorative" val="1"/>
+              </a:ext>
+            </a:extLst>
+          </p:cNvPr>
+          <p:cNvSpPr>
+            <a:spLocks noGrp="1" noRot="1" noChangeAspect="1" noMove="1" noResize="1" noEditPoints="1" noAdjustHandles="1" noChangeArrowheads="1" noChangeShapeType="1" noTextEdit="1"/>
+          </p:cNvSpPr>
+          <p:nvPr>
+            <p:extLst>
+              <p:ext uri="{386F3935-93C4-4BCD-93E2-E3B085C9AB24}">
+                <p16:designElem xmlns:p16="http://schemas.microsoft.com/office/powerpoint/2015/main" val="1"/>
+              </p:ext>
+            </p:extLst>
+          </p:nvPr>
+        </p:nvSpPr>
+        <p:spPr>
+          <a:xfrm rot="10800000" flipH="1">
+            <a:off x="8128857" y="35"/>
+            <a:ext cx="4063143" cy="1576412"/>
+          </a:xfrm>
+          <a:prstGeom prst="rect">
+            <a:avLst/>
+          </a:prstGeom>
+          <a:gradFill>
+            <a:gsLst>
+              <a:gs pos="19000">
+                <a:schemeClr val="accent1">
+                  <a:lumMod val="50000"/>
+                  <a:alpha val="68000"/>
+                </a:schemeClr>
+              </a:gs>
+              <a:gs pos="100000">
+                <a:schemeClr val="accent1">
+                  <a:alpha val="79000"/>
+                </a:schemeClr>
+              </a:gs>
+            </a:gsLst>
+            <a:lin ang="19200000" scaled="0"/>
+          </a:gradFill>
+          <a:ln>
+            <a:noFill/>
+          </a:ln>
+        </p:spPr>
+        <p:style>
+          <a:lnRef idx="2">
+            <a:schemeClr val="accent1">
+              <a:shade val="50000"/>
+            </a:schemeClr>
+          </a:lnRef>
+          <a:fillRef idx="1">
+            <a:schemeClr val="accent1"/>
+          </a:fillRef>
+          <a:effectRef idx="0">
+            <a:schemeClr val="accent1"/>
+          </a:effectRef>
+          <a:fontRef idx="minor">
+            <a:schemeClr val="lt1"/>
+          </a:fontRef>
+        </p:style>
+        <p:txBody>
+          <a:bodyPr rtlCol="0" anchor="ctr"/>
+          <a:lstStyle/>
+          <a:p>
+            <a:pPr algn="ctr"/>
+            <a:endParaRPr lang="en-US"/>
+          </a:p>
+        </p:txBody>
+      </p:sp>
+      <p:sp>
+        <p:nvSpPr>
+          <p:cNvPr id="33" name="Rectangle 32">
+            <a:extLst>
+              <a:ext uri="{FF2B5EF4-FFF2-40B4-BE49-F238E27FC236}">
+                <a16:creationId xmlns:a16="http://schemas.microsoft.com/office/drawing/2014/main" id="{D3539FEE-81D3-4406-802E-60B20B16F4F6}"/>
+              </a:ext>
+              <a:ext uri="{C183D7F6-B498-43B3-948B-1728B52AA6E4}">
+                <adec:decorative xmlns:adec="http://schemas.microsoft.com/office/drawing/2017/decorative" val="1"/>
+              </a:ext>
+            </a:extLst>
+          </p:cNvPr>
+          <p:cNvSpPr>
+            <a:spLocks noGrp="1" noRot="1" noChangeAspect="1" noMove="1" noResize="1" noEditPoints="1" noAdjustHandles="1" noChangeArrowheads="1" noChangeShapeType="1" noTextEdit="1"/>
+          </p:cNvSpPr>
+          <p:nvPr>
+            <p:extLst>
+              <p:ext uri="{386F3935-93C4-4BCD-93E2-E3B085C9AB24}">
+                <p16:designElem xmlns:p16="http://schemas.microsoft.com/office/powerpoint/2015/main" val="1"/>
+              </p:ext>
+            </p:extLst>
+          </p:nvPr>
+        </p:nvSpPr>
+        <p:spPr>
+          <a:xfrm rot="5400000">
+            <a:off x="5307778" y="-5307777"/>
+            <a:ext cx="1576446" cy="12192001"/>
+          </a:xfrm>
+          <a:prstGeom prst="rect">
+            <a:avLst/>
+          </a:prstGeom>
+          <a:gradFill>
+            <a:gsLst>
+              <a:gs pos="16000">
+                <a:srgbClr val="000000">
+                  <a:alpha val="0"/>
+                </a:srgbClr>
+              </a:gs>
+              <a:gs pos="99000">
+                <a:srgbClr val="000000">
+                  <a:alpha val="87000"/>
+                </a:srgbClr>
+              </a:gs>
+            </a:gsLst>
+            <a:lin ang="11400000" scaled="0"/>
+          </a:gradFill>
+          <a:ln>
+            <a:noFill/>
+          </a:ln>
+        </p:spPr>
+        <p:style>
+          <a:lnRef idx="2">
+            <a:schemeClr val="accent1">
+              <a:shade val="50000"/>
+            </a:schemeClr>
+          </a:lnRef>
+          <a:fillRef idx="1">
+            <a:schemeClr val="accent1"/>
+          </a:fillRef>
+          <a:effectRef idx="0">
+            <a:schemeClr val="accent1"/>
+          </a:effectRef>
+          <a:fontRef idx="minor">
+            <a:schemeClr val="lt1"/>
+          </a:fontRef>
+        </p:style>
+        <p:txBody>
+          <a:bodyPr rtlCol="0" anchor="ctr"/>
+          <a:lstStyle/>
+          <a:p>
+            <a:pPr algn="ctr"/>
+            <a:endParaRPr lang="en-US" dirty="0"/>
+          </a:p>
+        </p:txBody>
+      </p:sp>
+      <p:sp>
+        <p:nvSpPr>
+          <p:cNvPr id="35" name="Rectangle 34">
+            <a:extLst>
+              <a:ext uri="{FF2B5EF4-FFF2-40B4-BE49-F238E27FC236}">
+                <a16:creationId xmlns:a16="http://schemas.microsoft.com/office/drawing/2014/main" id="{DC701763-729E-462F-A5A8-E0DEFEB1E2E4}"/>
+              </a:ext>
+              <a:ext uri="{C183D7F6-B498-43B3-948B-1728B52AA6E4}">
+                <adec:decorative xmlns:adec="http://schemas.microsoft.com/office/drawing/2017/decorative" val="1"/>
+              </a:ext>
+            </a:extLst>
+          </p:cNvPr>
+          <p:cNvSpPr>
+            <a:spLocks noGrp="1" noRot="1" noChangeAspect="1" noMove="1" noResize="1" noEditPoints="1" noAdjustHandles="1" noChangeArrowheads="1" noChangeShapeType="1" noTextEdit="1"/>
+          </p:cNvSpPr>
+          <p:nvPr>
+            <p:extLst>
+              <p:ext uri="{386F3935-93C4-4BCD-93E2-E3B085C9AB24}">
+                <p16:designElem xmlns:p16="http://schemas.microsoft.com/office/powerpoint/2015/main" val="1"/>
+              </p:ext>
+            </p:extLst>
+          </p:nvPr>
+        </p:nvSpPr>
+        <p:spPr>
+          <a:xfrm>
+            <a:off x="3825434" y="986"/>
+            <a:ext cx="4303422" cy="1575461"/>
+          </a:xfrm>
+          <a:prstGeom prst="rect">
+            <a:avLst/>
+          </a:prstGeom>
+          <a:gradFill>
+            <a:gsLst>
+              <a:gs pos="0">
+                <a:schemeClr val="accent1">
+                  <a:alpha val="17000"/>
+                </a:schemeClr>
+              </a:gs>
+              <a:gs pos="74000">
+                <a:schemeClr val="accent1">
+                  <a:lumMod val="50000"/>
+                  <a:alpha val="0"/>
+                </a:schemeClr>
+              </a:gs>
+            </a:gsLst>
+            <a:lin ang="14400000" scaled="0"/>
+          </a:gradFill>
+          <a:ln>
+            <a:noFill/>
+          </a:ln>
+        </p:spPr>
+        <p:style>
+          <a:lnRef idx="2">
+            <a:schemeClr val="accent1">
+              <a:shade val="50000"/>
+            </a:schemeClr>
+          </a:lnRef>
+          <a:fillRef idx="1">
+            <a:schemeClr val="accent1"/>
+          </a:fillRef>
+          <a:effectRef idx="0">
+            <a:schemeClr val="accent1"/>
+          </a:effectRef>
+          <a:fontRef idx="minor">
+            <a:schemeClr val="lt1"/>
+          </a:fontRef>
+        </p:style>
+        <p:txBody>
+          <a:bodyPr rtlCol="0" anchor="ctr"/>
+          <a:lstStyle/>
+          <a:p>
+            <a:pPr algn="ctr"/>
+            <a:endParaRPr lang="en-US"/>
+          </a:p>
+        </p:txBody>
+      </p:sp>
+      <p:sp>
+        <p:nvSpPr>
+          <p:cNvPr id="2" name="Title 1">
+            <a:extLst>
+              <a:ext uri="{FF2B5EF4-FFF2-40B4-BE49-F238E27FC236}">
+                <a16:creationId xmlns:a16="http://schemas.microsoft.com/office/drawing/2014/main" id="{266A3000-7648-F4A8-FD09-38C894BED430}"/>
+              </a:ext>
+            </a:extLst>
+          </p:cNvPr>
+          <p:cNvSpPr>
+            <a:spLocks noGrp="1"/>
+          </p:cNvSpPr>
+          <p:nvPr>
+            <p:ph type="title"/>
+          </p:nvPr>
+        </p:nvSpPr>
+        <p:spPr>
+          <a:xfrm>
+            <a:off x="699714" y="353160"/>
+            <a:ext cx="7091300" cy="898581"/>
+          </a:xfrm>
+        </p:spPr>
+        <p:txBody>
+          <a:bodyPr vert="horz" lIns="91440" tIns="45720" rIns="91440" bIns="45720" rtlCol="0" anchor="ctr">
+            <a:normAutofit/>
+          </a:bodyPr>
+          <a:lstStyle/>
+          <a:p>
+            <a:r>
+              <a:rPr lang="en-US" sz="3400">
+                <a:solidFill>
+                  <a:srgbClr val="FFFFFF"/>
+                </a:solidFill>
+              </a:rPr>
+              <a:t>Mapa de calor de estaciones de retiro</a:t>
+            </a:r>
+          </a:p>
+        </p:txBody>
+      </p:sp>
+      <p:pic>
+        <p:nvPicPr>
+          <p:cNvPr id="3" name="Marcador de contenido 2">
+            <a:extLst>
+              <a:ext uri="{FF2B5EF4-FFF2-40B4-BE49-F238E27FC236}">
+                <a16:creationId xmlns:a16="http://schemas.microsoft.com/office/drawing/2014/main" id="{8201D0B7-B6C2-CBD4-BBE7-5FF280F75BC1}"/>
+              </a:ext>
+            </a:extLst>
+          </p:cNvPr>
+          <p:cNvPicPr>
+            <a:picLocks noGrp="1" noChangeAspect="1"/>
+          </p:cNvPicPr>
+          <p:nvPr>
+            <p:ph idx="1"/>
+          </p:nvPr>
+        </p:nvPicPr>
+        <p:blipFill>
+          <a:blip r:embed="rId2">
+            <a:extLst>
+              <a:ext uri="{28A0092B-C50C-407E-A947-70E740481C1C}">
+                <a14:useLocalDpi xmlns:a14="http://schemas.microsoft.com/office/drawing/2010/main" val="0"/>
+              </a:ext>
+            </a:extLst>
+          </a:blip>
+          <a:stretch>
+            <a:fillRect/>
+          </a:stretch>
+        </p:blipFill>
+        <p:spPr>
+          <a:xfrm>
+            <a:off x="964912" y="2181328"/>
+            <a:ext cx="5131088" cy="3514795"/>
+          </a:xfrm>
+          <a:prstGeom prst="rect">
+            <a:avLst/>
+          </a:prstGeom>
+        </p:spPr>
+      </p:pic>
+      <p:pic>
+        <p:nvPicPr>
+          <p:cNvPr id="5" name="Content Placeholder 4">
+            <a:extLst>
+              <a:ext uri="{FF2B5EF4-FFF2-40B4-BE49-F238E27FC236}">
+                <a16:creationId xmlns:a16="http://schemas.microsoft.com/office/drawing/2014/main" id="{43D767D5-403E-EC3A-D888-C55A5FFCF34A}"/>
+              </a:ext>
+            </a:extLst>
+          </p:cNvPr>
+          <p:cNvPicPr>
+            <a:picLocks noChangeAspect="1"/>
+          </p:cNvPicPr>
+          <p:nvPr/>
+        </p:nvPicPr>
+        <p:blipFill>
+          <a:blip r:embed="rId3"/>
+          <a:srcRect l="1310" r="2" b="2"/>
+          <a:stretch>
+            <a:fillRect/>
+          </a:stretch>
+        </p:blipFill>
+        <p:spPr>
+          <a:xfrm>
+            <a:off x="8502272" y="1796172"/>
+            <a:ext cx="2534957" cy="3997831"/>
+          </a:xfrm>
+          <a:prstGeom prst="rect">
+            <a:avLst/>
+          </a:prstGeom>
+        </p:spPr>
+      </p:pic>
+      <p:sp>
+        <p:nvSpPr>
+          <p:cNvPr id="4" name="TextBox 4">
+            <a:extLst>
+              <a:ext uri="{FF2B5EF4-FFF2-40B4-BE49-F238E27FC236}">
+                <a16:creationId xmlns:a16="http://schemas.microsoft.com/office/drawing/2014/main" id="{351BC7B9-9BF1-148C-6D7A-2939E8524A4B}"/>
+              </a:ext>
+            </a:extLst>
+          </p:cNvPr>
+          <p:cNvSpPr txBox="1"/>
+          <p:nvPr/>
+        </p:nvSpPr>
+        <p:spPr>
+          <a:xfrm>
+            <a:off x="7791014" y="5794003"/>
+            <a:ext cx="4175572" cy="830453"/>
+          </a:xfrm>
+          <a:prstGeom prst="rect">
+            <a:avLst/>
+          </a:prstGeom>
+        </p:spPr>
+        <p:txBody>
+          <a:bodyPr rot="0" spcFirstLastPara="0" vertOverflow="overflow" horzOverflow="overflow" vert="horz" lIns="91440" tIns="45720" rIns="91440" bIns="45720" numCol="1" spcCol="0" rtlCol="0" fromWordArt="0" anchor="ctr" anchorCtr="0" forceAA="0" compatLnSpc="1">
+            <a:prstTxWarp prst="textNoShape">
+              <a:avLst/>
+            </a:prstTxWarp>
+            <a:normAutofit/>
+          </a:bodyPr>
+          <a:lstStyle/>
+          <a:p>
+            <a:pPr>
+              <a:lnSpc>
+                <a:spcPct val="90000"/>
+              </a:lnSpc>
+              <a:spcBef>
+                <a:spcPts val="1000"/>
+              </a:spcBef>
+            </a:pPr>
+            <a:r>
+              <a:rPr lang="en-US" sz="1400" b="1" dirty="0" err="1"/>
+              <a:t>Figura</a:t>
+            </a:r>
+            <a:r>
+              <a:rPr lang="en-US" sz="1400" b="1" dirty="0"/>
+              <a:t> 3</a:t>
+            </a:r>
+            <a:r>
+              <a:rPr lang="en-US" sz="1400" dirty="0"/>
+              <a:t>. Mapa de </a:t>
+            </a:r>
+            <a:r>
+              <a:rPr lang="en-US" sz="1400" dirty="0" err="1"/>
+              <a:t>calor</a:t>
+            </a:r>
+            <a:r>
+              <a:rPr lang="en-US" sz="1400" dirty="0"/>
+              <a:t> de </a:t>
+            </a:r>
+            <a:r>
+              <a:rPr lang="en-US" sz="1400" dirty="0" err="1"/>
+              <a:t>estaciones</a:t>
+            </a:r>
+            <a:r>
+              <a:rPr lang="en-US" sz="1400" dirty="0"/>
+              <a:t> de </a:t>
+            </a:r>
+            <a:r>
+              <a:rPr lang="en-US" sz="1400" dirty="0" err="1"/>
+              <a:t>retiro</a:t>
+            </a:r>
+            <a:r>
+              <a:rPr lang="en-US" sz="1400" dirty="0"/>
+              <a:t> </a:t>
+            </a:r>
+            <a:r>
+              <a:rPr lang="en-US" sz="1400" dirty="0" err="1"/>
+              <a:t>en</a:t>
+            </a:r>
+            <a:r>
+              <a:rPr lang="en-US" sz="1400" dirty="0"/>
+              <a:t> Ciudad de México.</a:t>
+            </a:r>
+          </a:p>
+        </p:txBody>
+      </p:sp>
+      <p:sp>
+        <p:nvSpPr>
+          <p:cNvPr id="6" name="TextBox 4">
+            <a:extLst>
+              <a:ext uri="{FF2B5EF4-FFF2-40B4-BE49-F238E27FC236}">
+                <a16:creationId xmlns:a16="http://schemas.microsoft.com/office/drawing/2014/main" id="{E3F74F53-31D3-2874-C032-73F104221758}"/>
+              </a:ext>
+            </a:extLst>
+          </p:cNvPr>
+          <p:cNvSpPr txBox="1"/>
+          <p:nvPr/>
+        </p:nvSpPr>
+        <p:spPr>
+          <a:xfrm>
+            <a:off x="1296956" y="5674387"/>
+            <a:ext cx="4175572" cy="830453"/>
+          </a:xfrm>
+          <a:prstGeom prst="rect">
+            <a:avLst/>
+          </a:prstGeom>
+        </p:spPr>
+        <p:txBody>
+          <a:bodyPr rot="0" spcFirstLastPara="0" vertOverflow="overflow" horzOverflow="overflow" vert="horz" lIns="91440" tIns="45720" rIns="91440" bIns="45720" numCol="1" spcCol="0" rtlCol="0" fromWordArt="0" anchor="ctr" anchorCtr="0" forceAA="0" compatLnSpc="1">
+            <a:prstTxWarp prst="textNoShape">
+              <a:avLst/>
+            </a:prstTxWarp>
+            <a:normAutofit/>
+          </a:bodyPr>
+          <a:lstStyle/>
+          <a:p>
+            <a:pPr>
+              <a:lnSpc>
+                <a:spcPct val="90000"/>
+              </a:lnSpc>
+              <a:spcBef>
+                <a:spcPts val="1000"/>
+              </a:spcBef>
+            </a:pPr>
+            <a:r>
+              <a:rPr lang="en-US" sz="1400" b="1" dirty="0"/>
+              <a:t>Cuadro 3</a:t>
+            </a:r>
+            <a:r>
+              <a:rPr lang="en-US" sz="1400" dirty="0"/>
+              <a:t>. 10 </a:t>
+            </a:r>
+            <a:r>
+              <a:rPr lang="en-US" sz="1400" dirty="0" err="1"/>
+              <a:t>estaciones</a:t>
+            </a:r>
+            <a:r>
+              <a:rPr lang="en-US" sz="1400" dirty="0"/>
+              <a:t> con mayor </a:t>
+            </a:r>
+            <a:r>
+              <a:rPr lang="en-US" sz="1400" dirty="0" err="1"/>
+              <a:t>cantidad</a:t>
+            </a:r>
+            <a:r>
+              <a:rPr lang="en-US" sz="1400" dirty="0"/>
+              <a:t> de </a:t>
+            </a:r>
+            <a:r>
+              <a:rPr lang="en-US" sz="1400" dirty="0" err="1"/>
+              <a:t>retiros</a:t>
+            </a:r>
+            <a:r>
+              <a:rPr lang="en-US" sz="1400" dirty="0"/>
+              <a:t>.</a:t>
+            </a:r>
+          </a:p>
+        </p:txBody>
+      </p:sp>
+    </p:spTree>
+    <p:extLst>
+      <p:ext uri="{BB962C8B-B14F-4D97-AF65-F5344CB8AC3E}">
+        <p14:creationId xmlns:p14="http://schemas.microsoft.com/office/powerpoint/2010/main" val="1999348669"/>
+      </p:ext>
+    </p:extLst>
+  </p:cSld>
+  <p:clrMapOvr>
+    <a:masterClrMapping/>
+  </p:clrMapOvr>
+</p:sld>
+</file>
+
+<file path=ppt/slides/slide7.xml><?xml version="1.0" encoding="utf-8"?>
+<p:sld xmlns:a="http://schemas.openxmlformats.org/drawingml/2006/main" xmlns:r="http://schemas.openxmlformats.org/officeDocument/2006/relationships" xmlns:p="http://schemas.openxmlformats.org/presentationml/2006/main">
+  <p:cSld>
+    <p:bg>
+      <p:bgPr>
+        <a:solidFill>
+          <a:schemeClr val="bg1"/>
+        </a:solidFill>
+        <a:effectLst/>
+      </p:bgPr>
+    </p:bg>
+    <p:spTree>
+      <p:nvGrpSpPr>
+        <p:cNvPr id="1" name="">
+          <a:extLst>
+            <a:ext uri="{FF2B5EF4-FFF2-40B4-BE49-F238E27FC236}">
+              <a16:creationId xmlns:a16="http://schemas.microsoft.com/office/drawing/2014/main" id="{83A6A5E8-C994-D282-49EF-2A7146DDDCF3}"/>
+            </a:ext>
+          </a:extLst>
+        </p:cNvPr>
+        <p:cNvGrpSpPr/>
+        <p:nvPr/>
+      </p:nvGrpSpPr>
+      <p:grpSpPr>
+        <a:xfrm>
+          <a:off x="0" y="0"/>
+          <a:ext cx="0" cy="0"/>
+          <a:chOff x="0" y="0"/>
+          <a:chExt cx="0" cy="0"/>
+        </a:xfrm>
+      </p:grpSpPr>
+      <p:sp useBgFill="1">
+        <p:nvSpPr>
+          <p:cNvPr id="27" name="Rectangle 26">
+            <a:extLst>
+              <a:ext uri="{FF2B5EF4-FFF2-40B4-BE49-F238E27FC236}">
+                <a16:creationId xmlns:a16="http://schemas.microsoft.com/office/drawing/2014/main" id="{F2C8913E-50D7-A16E-DFF4-509478BBB9BA}"/>
+              </a:ext>
+              <a:ext uri="{C183D7F6-B498-43B3-948B-1728B52AA6E4}">
+                <adec:decorative xmlns:adec="http://schemas.microsoft.com/office/drawing/2017/decorative" val="1"/>
+              </a:ext>
+            </a:extLst>
+          </p:cNvPr>
+          <p:cNvSpPr>
+            <a:spLocks noGrp="1" noRot="1" noChangeAspect="1" noMove="1" noResize="1" noEditPoints="1" noAdjustHandles="1" noChangeArrowheads="1" noChangeShapeType="1" noTextEdit="1"/>
+          </p:cNvSpPr>
+          <p:nvPr>
+            <p:extLst>
+              <p:ext uri="{386F3935-93C4-4BCD-93E2-E3B085C9AB24}">
+                <p16:designElem xmlns:p16="http://schemas.microsoft.com/office/powerpoint/2015/main" val="1"/>
+              </p:ext>
+            </p:extLst>
+          </p:nvPr>
+        </p:nvSpPr>
+        <p:spPr>
+          <a:xfrm>
+            <a:off x="0" y="0"/>
+            <a:ext cx="12192000" cy="6858000"/>
+          </a:xfrm>
+          <a:prstGeom prst="rect">
+            <a:avLst/>
+          </a:prstGeom>
+          <a:ln w="12700" cap="flat" cmpd="sng" algn="ctr">
+            <a:noFill/>
+            <a:prstDash val="solid"/>
+            <a:miter lim="800000"/>
+          </a:ln>
+          <a:effectLst/>
+          <a:extLst>
+            <a:ext uri="{91240B29-F687-4F45-9708-019B960494DF}">
+              <a14:hiddenLine xmlns:a14="http://schemas.microsoft.com/office/drawing/2010/main" w="12700" cap="flat" cmpd="sng" algn="ctr">
+                <a:solidFill>
+                  <a:schemeClr val="accent1">
+                    <a:shade val="50000"/>
+                  </a:schemeClr>
+                </a:solidFill>
+                <a:prstDash val="solid"/>
+                <a:miter lim="800000"/>
+              </a14:hiddenLine>
+            </a:ext>
+          </a:extLst>
+        </p:spPr>
+        <p:style>
+          <a:lnRef idx="2">
+            <a:schemeClr val="accent1">
+              <a:shade val="50000"/>
+            </a:schemeClr>
+          </a:lnRef>
+          <a:fillRef idx="1">
+            <a:schemeClr val="accent1"/>
+          </a:fillRef>
+          <a:effectRef idx="0">
+            <a:schemeClr val="accent1"/>
+          </a:effectRef>
+          <a:fontRef idx="minor">
+            <a:schemeClr val="lt1"/>
+          </a:fontRef>
+        </p:style>
+        <p:txBody>
+          <a:bodyPr rtlCol="0" anchor="ctr"/>
+          <a:lstStyle/>
+          <a:p>
+            <a:pPr algn="ctr"/>
+            <a:endParaRPr lang="en-US" sz="2000"/>
+          </a:p>
+        </p:txBody>
+      </p:sp>
+      <p:sp>
+        <p:nvSpPr>
+          <p:cNvPr id="29" name="Rectangle 28">
+            <a:extLst>
+              <a:ext uri="{FF2B5EF4-FFF2-40B4-BE49-F238E27FC236}">
+                <a16:creationId xmlns:a16="http://schemas.microsoft.com/office/drawing/2014/main" id="{50690EA5-F2B1-D984-E90F-F0376DD0E69D}"/>
+              </a:ext>
+              <a:ext uri="{C183D7F6-B498-43B3-948B-1728B52AA6E4}">
+                <adec:decorative xmlns:adec="http://schemas.microsoft.com/office/drawing/2017/decorative" val="1"/>
+              </a:ext>
+            </a:extLst>
+          </p:cNvPr>
+          <p:cNvSpPr>
+            <a:spLocks noGrp="1" noRot="1" noChangeAspect="1" noMove="1" noResize="1" noEditPoints="1" noAdjustHandles="1" noChangeArrowheads="1" noChangeShapeType="1" noTextEdit="1"/>
+          </p:cNvSpPr>
+          <p:nvPr>
+            <p:extLst>
+              <p:ext uri="{386F3935-93C4-4BCD-93E2-E3B085C9AB24}">
+                <p16:designElem xmlns:p16="http://schemas.microsoft.com/office/powerpoint/2015/main" val="1"/>
+              </p:ext>
+            </p:extLst>
+          </p:nvPr>
+        </p:nvSpPr>
+        <p:spPr>
+          <a:xfrm flipH="1">
+            <a:off x="2" y="492"/>
+            <a:ext cx="12191998" cy="1575955"/>
+          </a:xfrm>
+          <a:prstGeom prst="rect">
+            <a:avLst/>
+          </a:prstGeom>
+          <a:gradFill>
+            <a:gsLst>
+              <a:gs pos="0">
+                <a:schemeClr val="accent1">
+                  <a:lumMod val="50000"/>
+                </a:schemeClr>
+              </a:gs>
+              <a:gs pos="100000">
+                <a:schemeClr val="accent1">
+                  <a:lumMod val="75000"/>
+                </a:schemeClr>
+              </a:gs>
+            </a:gsLst>
+            <a:lin ang="8400000" scaled="0"/>
+          </a:gradFill>
+          <a:ln>
+            <a:noFill/>
+          </a:ln>
+        </p:spPr>
+        <p:style>
+          <a:lnRef idx="2">
+            <a:schemeClr val="accent1">
+              <a:shade val="50000"/>
+            </a:schemeClr>
+          </a:lnRef>
+          <a:fillRef idx="1">
+            <a:schemeClr val="accent1"/>
+          </a:fillRef>
+          <a:effectRef idx="0">
+            <a:schemeClr val="accent1"/>
+          </a:effectRef>
+          <a:fontRef idx="minor">
+            <a:schemeClr val="lt1"/>
+          </a:fontRef>
+        </p:style>
+        <p:txBody>
+          <a:bodyPr rtlCol="0" anchor="ctr"/>
+          <a:lstStyle/>
+          <a:p>
+            <a:pPr algn="ctr"/>
+            <a:endParaRPr lang="en-US"/>
+          </a:p>
+        </p:txBody>
+      </p:sp>
+      <p:sp>
+        <p:nvSpPr>
+          <p:cNvPr id="31" name="Rectangle 30">
+            <a:extLst>
+              <a:ext uri="{FF2B5EF4-FFF2-40B4-BE49-F238E27FC236}">
+                <a16:creationId xmlns:a16="http://schemas.microsoft.com/office/drawing/2014/main" id="{425B4B2A-CAD1-A46C-CE5A-CE33F0CDB9E3}"/>
+              </a:ext>
+              <a:ext uri="{C183D7F6-B498-43B3-948B-1728B52AA6E4}">
+                <adec:decorative xmlns:adec="http://schemas.microsoft.com/office/drawing/2017/decorative" val="1"/>
+              </a:ext>
+            </a:extLst>
+          </p:cNvPr>
+          <p:cNvSpPr>
+            <a:spLocks noGrp="1" noRot="1" noChangeAspect="1" noMove="1" noResize="1" noEditPoints="1" noAdjustHandles="1" noChangeArrowheads="1" noChangeShapeType="1" noTextEdit="1"/>
+          </p:cNvSpPr>
+          <p:nvPr>
+            <p:extLst>
+              <p:ext uri="{386F3935-93C4-4BCD-93E2-E3B085C9AB24}">
+                <p16:designElem xmlns:p16="http://schemas.microsoft.com/office/powerpoint/2015/main" val="1"/>
+              </p:ext>
+            </p:extLst>
+          </p:nvPr>
+        </p:nvSpPr>
+        <p:spPr>
+          <a:xfrm rot="10800000" flipH="1">
+            <a:off x="8128857" y="35"/>
+            <a:ext cx="4063143" cy="1576412"/>
+          </a:xfrm>
+          <a:prstGeom prst="rect">
+            <a:avLst/>
+          </a:prstGeom>
+          <a:gradFill>
+            <a:gsLst>
+              <a:gs pos="19000">
+                <a:schemeClr val="accent1">
+                  <a:lumMod val="50000"/>
+                  <a:alpha val="68000"/>
+                </a:schemeClr>
+              </a:gs>
+              <a:gs pos="100000">
+                <a:schemeClr val="accent1">
+                  <a:alpha val="79000"/>
+                </a:schemeClr>
+              </a:gs>
+            </a:gsLst>
+            <a:lin ang="19200000" scaled="0"/>
+          </a:gradFill>
+          <a:ln>
+            <a:noFill/>
+          </a:ln>
+        </p:spPr>
+        <p:style>
+          <a:lnRef idx="2">
+            <a:schemeClr val="accent1">
+              <a:shade val="50000"/>
+            </a:schemeClr>
+          </a:lnRef>
+          <a:fillRef idx="1">
+            <a:schemeClr val="accent1"/>
+          </a:fillRef>
+          <a:effectRef idx="0">
+            <a:schemeClr val="accent1"/>
+          </a:effectRef>
+          <a:fontRef idx="minor">
+            <a:schemeClr val="lt1"/>
+          </a:fontRef>
+        </p:style>
+        <p:txBody>
+          <a:bodyPr rtlCol="0" anchor="ctr"/>
+          <a:lstStyle/>
+          <a:p>
+            <a:pPr algn="ctr"/>
+            <a:endParaRPr lang="en-US"/>
+          </a:p>
+        </p:txBody>
+      </p:sp>
+      <p:sp>
+        <p:nvSpPr>
+          <p:cNvPr id="33" name="Rectangle 32">
+            <a:extLst>
+              <a:ext uri="{FF2B5EF4-FFF2-40B4-BE49-F238E27FC236}">
+                <a16:creationId xmlns:a16="http://schemas.microsoft.com/office/drawing/2014/main" id="{10984913-92B8-86CB-AD56-A5AF34014A07}"/>
+              </a:ext>
+              <a:ext uri="{C183D7F6-B498-43B3-948B-1728B52AA6E4}">
+                <adec:decorative xmlns:adec="http://schemas.microsoft.com/office/drawing/2017/decorative" val="1"/>
+              </a:ext>
+            </a:extLst>
+          </p:cNvPr>
+          <p:cNvSpPr>
+            <a:spLocks noGrp="1" noRot="1" noChangeAspect="1" noMove="1" noResize="1" noEditPoints="1" noAdjustHandles="1" noChangeArrowheads="1" noChangeShapeType="1" noTextEdit="1"/>
+          </p:cNvSpPr>
+          <p:nvPr>
+            <p:extLst>
+              <p:ext uri="{386F3935-93C4-4BCD-93E2-E3B085C9AB24}">
+                <p16:designElem xmlns:p16="http://schemas.microsoft.com/office/powerpoint/2015/main" val="1"/>
+              </p:ext>
+            </p:extLst>
+          </p:nvPr>
+        </p:nvSpPr>
+        <p:spPr>
+          <a:xfrm rot="5400000">
+            <a:off x="5307778" y="-5307777"/>
+            <a:ext cx="1576446" cy="12192001"/>
+          </a:xfrm>
+          <a:prstGeom prst="rect">
+            <a:avLst/>
+          </a:prstGeom>
+          <a:gradFill>
+            <a:gsLst>
+              <a:gs pos="16000">
+                <a:srgbClr val="000000">
+                  <a:alpha val="0"/>
+                </a:srgbClr>
+              </a:gs>
+              <a:gs pos="99000">
+                <a:srgbClr val="000000">
+                  <a:alpha val="87000"/>
+                </a:srgbClr>
+              </a:gs>
+            </a:gsLst>
+            <a:lin ang="11400000" scaled="0"/>
+          </a:gradFill>
+          <a:ln>
+            <a:noFill/>
+          </a:ln>
+        </p:spPr>
+        <p:style>
+          <a:lnRef idx="2">
+            <a:schemeClr val="accent1">
+              <a:shade val="50000"/>
+            </a:schemeClr>
+          </a:lnRef>
+          <a:fillRef idx="1">
+            <a:schemeClr val="accent1"/>
+          </a:fillRef>
+          <a:effectRef idx="0">
+            <a:schemeClr val="accent1"/>
+          </a:effectRef>
+          <a:fontRef idx="minor">
+            <a:schemeClr val="lt1"/>
+          </a:fontRef>
+        </p:style>
+        <p:txBody>
+          <a:bodyPr rtlCol="0" anchor="ctr"/>
+          <a:lstStyle/>
+          <a:p>
+            <a:pPr algn="ctr"/>
+            <a:endParaRPr lang="en-US" dirty="0"/>
+          </a:p>
+        </p:txBody>
+      </p:sp>
+      <p:sp>
+        <p:nvSpPr>
+          <p:cNvPr id="35" name="Rectangle 34">
+            <a:extLst>
+              <a:ext uri="{FF2B5EF4-FFF2-40B4-BE49-F238E27FC236}">
+                <a16:creationId xmlns:a16="http://schemas.microsoft.com/office/drawing/2014/main" id="{CF4ECEB9-06F0-7999-7836-533195574FD9}"/>
+              </a:ext>
+              <a:ext uri="{C183D7F6-B498-43B3-948B-1728B52AA6E4}">
+                <adec:decorative xmlns:adec="http://schemas.microsoft.com/office/drawing/2017/decorative" val="1"/>
+              </a:ext>
+            </a:extLst>
+          </p:cNvPr>
+          <p:cNvSpPr>
+            <a:spLocks noGrp="1" noRot="1" noChangeAspect="1" noMove="1" noResize="1" noEditPoints="1" noAdjustHandles="1" noChangeArrowheads="1" noChangeShapeType="1" noTextEdit="1"/>
+          </p:cNvSpPr>
+          <p:nvPr>
+            <p:extLst>
+              <p:ext uri="{386F3935-93C4-4BCD-93E2-E3B085C9AB24}">
+                <p16:designElem xmlns:p16="http://schemas.microsoft.com/office/powerpoint/2015/main" val="1"/>
+              </p:ext>
+            </p:extLst>
+          </p:nvPr>
+        </p:nvSpPr>
+        <p:spPr>
+          <a:xfrm>
+            <a:off x="3825434" y="986"/>
+            <a:ext cx="4303422" cy="1575461"/>
+          </a:xfrm>
+          <a:prstGeom prst="rect">
+            <a:avLst/>
+          </a:prstGeom>
+          <a:gradFill>
+            <a:gsLst>
+              <a:gs pos="0">
+                <a:schemeClr val="accent1">
+                  <a:alpha val="17000"/>
+                </a:schemeClr>
+              </a:gs>
+              <a:gs pos="74000">
+                <a:schemeClr val="accent1">
+                  <a:lumMod val="50000"/>
+                  <a:alpha val="0"/>
+                </a:schemeClr>
+              </a:gs>
+            </a:gsLst>
+            <a:lin ang="14400000" scaled="0"/>
+          </a:gradFill>
+          <a:ln>
+            <a:noFill/>
+          </a:ln>
+        </p:spPr>
+        <p:style>
+          <a:lnRef idx="2">
+            <a:schemeClr val="accent1">
+              <a:shade val="50000"/>
+            </a:schemeClr>
+          </a:lnRef>
+          <a:fillRef idx="1">
+            <a:schemeClr val="accent1"/>
+          </a:fillRef>
+          <a:effectRef idx="0">
+            <a:schemeClr val="accent1"/>
+          </a:effectRef>
+          <a:fontRef idx="minor">
+            <a:schemeClr val="lt1"/>
+          </a:fontRef>
+        </p:style>
+        <p:txBody>
+          <a:bodyPr rtlCol="0" anchor="ctr"/>
+          <a:lstStyle/>
+          <a:p>
+            <a:pPr algn="ctr"/>
+            <a:endParaRPr lang="en-US"/>
+          </a:p>
+        </p:txBody>
+      </p:sp>
+      <p:sp>
+        <p:nvSpPr>
+          <p:cNvPr id="2" name="Title 1">
+            <a:extLst>
+              <a:ext uri="{FF2B5EF4-FFF2-40B4-BE49-F238E27FC236}">
+                <a16:creationId xmlns:a16="http://schemas.microsoft.com/office/drawing/2014/main" id="{3A28A983-FBD4-0E1A-D2CA-04EED1B66C66}"/>
+              </a:ext>
+            </a:extLst>
+          </p:cNvPr>
+          <p:cNvSpPr>
+            <a:spLocks noGrp="1"/>
+          </p:cNvSpPr>
+          <p:nvPr>
+            <p:ph type="title"/>
+          </p:nvPr>
+        </p:nvSpPr>
+        <p:spPr>
+          <a:xfrm>
+            <a:off x="699714" y="353160"/>
+            <a:ext cx="7091300" cy="898581"/>
+          </a:xfrm>
+        </p:spPr>
+        <p:txBody>
+          <a:bodyPr vert="horz" lIns="91440" tIns="45720" rIns="91440" bIns="45720" rtlCol="0" anchor="ctr">
+            <a:normAutofit/>
+          </a:bodyPr>
+          <a:lstStyle/>
+          <a:p>
+            <a:r>
+              <a:rPr lang="en-US" sz="3400" dirty="0">
+                <a:solidFill>
+                  <a:srgbClr val="FFFFFF"/>
+                </a:solidFill>
+              </a:rPr>
+              <a:t>Mapa de </a:t>
+            </a:r>
+            <a:r>
+              <a:rPr lang="en-US" sz="3400" dirty="0" err="1">
+                <a:solidFill>
+                  <a:srgbClr val="FFFFFF"/>
+                </a:solidFill>
+              </a:rPr>
+              <a:t>calor</a:t>
+            </a:r>
+            <a:r>
+              <a:rPr lang="en-US" sz="3400" dirty="0">
+                <a:solidFill>
+                  <a:srgbClr val="FFFFFF"/>
+                </a:solidFill>
+              </a:rPr>
+              <a:t> de </a:t>
+            </a:r>
+            <a:r>
+              <a:rPr lang="en-US" sz="3400" dirty="0" err="1">
+                <a:solidFill>
+                  <a:srgbClr val="FFFFFF"/>
+                </a:solidFill>
+              </a:rPr>
+              <a:t>estaciones</a:t>
+            </a:r>
+            <a:r>
+              <a:rPr lang="en-US" sz="3400" dirty="0">
+                <a:solidFill>
+                  <a:srgbClr val="FFFFFF"/>
+                </a:solidFill>
+              </a:rPr>
+              <a:t> de </a:t>
+            </a:r>
+            <a:r>
+              <a:rPr lang="en-US" sz="3400" dirty="0" err="1">
+                <a:solidFill>
+                  <a:srgbClr val="FFFFFF"/>
+                </a:solidFill>
+              </a:rPr>
+              <a:t>arribo</a:t>
+            </a:r>
+            <a:endParaRPr lang="en-US" sz="3400" dirty="0">
+              <a:solidFill>
+                <a:srgbClr val="FFFFFF"/>
+              </a:solidFill>
+            </a:endParaRPr>
+          </a:p>
+        </p:txBody>
+      </p:sp>
+      <p:pic>
+        <p:nvPicPr>
+          <p:cNvPr id="4" name="Imagen 3">
+            <a:extLst>
+              <a:ext uri="{FF2B5EF4-FFF2-40B4-BE49-F238E27FC236}">
+                <a16:creationId xmlns:a16="http://schemas.microsoft.com/office/drawing/2014/main" id="{2268B393-4A59-C28C-70AA-64FB4CE7FAF6}"/>
+              </a:ext>
+            </a:extLst>
+          </p:cNvPr>
+          <p:cNvPicPr>
+            <a:picLocks noChangeAspect="1"/>
+          </p:cNvPicPr>
+          <p:nvPr/>
+        </p:nvPicPr>
+        <p:blipFill>
+          <a:blip r:embed="rId2" cstate="print">
+            <a:extLst>
+              <a:ext uri="{28A0092B-C50C-407E-A947-70E740481C1C}">
+                <a14:useLocalDpi xmlns:a14="http://schemas.microsoft.com/office/drawing/2010/main" val="0"/>
+              </a:ext>
+            </a:extLst>
+          </a:blip>
+          <a:stretch>
+            <a:fillRect/>
+          </a:stretch>
+        </p:blipFill>
+        <p:spPr>
+          <a:xfrm>
+            <a:off x="8752114" y="2030161"/>
+            <a:ext cx="2395907" cy="3500514"/>
+          </a:xfrm>
+          <a:prstGeom prst="rect">
+            <a:avLst/>
+          </a:prstGeom>
+        </p:spPr>
+      </p:pic>
+      <p:pic>
+        <p:nvPicPr>
+          <p:cNvPr id="8" name="Imagen 7">
+            <a:extLst>
+              <a:ext uri="{FF2B5EF4-FFF2-40B4-BE49-F238E27FC236}">
+                <a16:creationId xmlns:a16="http://schemas.microsoft.com/office/drawing/2014/main" id="{03E81CE5-3C71-F632-1D77-77E22217C1EF}"/>
+              </a:ext>
+            </a:extLst>
+          </p:cNvPr>
+          <p:cNvPicPr>
+            <a:picLocks noChangeAspect="1"/>
+          </p:cNvPicPr>
+          <p:nvPr/>
+        </p:nvPicPr>
+        <p:blipFill>
+          <a:blip r:embed="rId3">
+            <a:extLst>
+              <a:ext uri="{28A0092B-C50C-407E-A947-70E740481C1C}">
+                <a14:useLocalDpi xmlns:a14="http://schemas.microsoft.com/office/drawing/2010/main" val="0"/>
+              </a:ext>
+            </a:extLst>
+          </a:blip>
+          <a:stretch>
+            <a:fillRect/>
+          </a:stretch>
+        </p:blipFill>
+        <p:spPr>
+          <a:xfrm>
+            <a:off x="809909" y="2099387"/>
+            <a:ext cx="5553569" cy="3450361"/>
+          </a:xfrm>
+          <a:prstGeom prst="rect">
+            <a:avLst/>
+          </a:prstGeom>
+        </p:spPr>
+      </p:pic>
+      <p:sp>
+        <p:nvSpPr>
+          <p:cNvPr id="9" name="TextBox 4">
+            <a:extLst>
+              <a:ext uri="{FF2B5EF4-FFF2-40B4-BE49-F238E27FC236}">
+                <a16:creationId xmlns:a16="http://schemas.microsoft.com/office/drawing/2014/main" id="{B47209F1-9D3E-6FE9-EAFD-A182B1AB2659}"/>
+              </a:ext>
+            </a:extLst>
+          </p:cNvPr>
+          <p:cNvSpPr txBox="1"/>
+          <p:nvPr/>
+        </p:nvSpPr>
+        <p:spPr>
+          <a:xfrm>
+            <a:off x="7716417" y="5549748"/>
+            <a:ext cx="4175572" cy="830453"/>
+          </a:xfrm>
+          <a:prstGeom prst="rect">
+            <a:avLst/>
+          </a:prstGeom>
+        </p:spPr>
+        <p:txBody>
+          <a:bodyPr rot="0" spcFirstLastPara="0" vertOverflow="overflow" horzOverflow="overflow" vert="horz" lIns="91440" tIns="45720" rIns="91440" bIns="45720" numCol="1" spcCol="0" rtlCol="0" fromWordArt="0" anchor="ctr" anchorCtr="0" forceAA="0" compatLnSpc="1">
+            <a:prstTxWarp prst="textNoShape">
+              <a:avLst/>
+            </a:prstTxWarp>
+            <a:normAutofit/>
+          </a:bodyPr>
+          <a:lstStyle/>
+          <a:p>
+            <a:pPr>
+              <a:lnSpc>
+                <a:spcPct val="90000"/>
+              </a:lnSpc>
+              <a:spcBef>
+                <a:spcPts val="1000"/>
+              </a:spcBef>
+            </a:pPr>
+            <a:r>
+              <a:rPr lang="en-US" sz="1400" b="1" dirty="0" err="1"/>
+              <a:t>Figura</a:t>
+            </a:r>
+            <a:r>
+              <a:rPr lang="en-US" sz="1400" b="1" dirty="0"/>
+              <a:t> 4</a:t>
+            </a:r>
+            <a:r>
+              <a:rPr lang="en-US" sz="1400" dirty="0"/>
+              <a:t>. Mapa de </a:t>
+            </a:r>
+            <a:r>
+              <a:rPr lang="en-US" sz="1400" dirty="0" err="1"/>
+              <a:t>calor</a:t>
+            </a:r>
+            <a:r>
+              <a:rPr lang="en-US" sz="1400" dirty="0"/>
+              <a:t> de </a:t>
+            </a:r>
+            <a:r>
+              <a:rPr lang="en-US" sz="1400" dirty="0" err="1"/>
+              <a:t>estaciones</a:t>
+            </a:r>
+            <a:r>
+              <a:rPr lang="en-US" sz="1400" dirty="0"/>
+              <a:t> de </a:t>
+            </a:r>
+            <a:r>
+              <a:rPr lang="en-US" sz="1400" dirty="0" err="1"/>
+              <a:t>arribo</a:t>
+            </a:r>
+            <a:r>
+              <a:rPr lang="en-US" sz="1400" dirty="0"/>
+              <a:t> </a:t>
+            </a:r>
+            <a:r>
+              <a:rPr lang="en-US" sz="1400" dirty="0" err="1"/>
+              <a:t>en</a:t>
+            </a:r>
+            <a:r>
+              <a:rPr lang="en-US" sz="1400" dirty="0"/>
+              <a:t> Ciudad de México</a:t>
+            </a:r>
+          </a:p>
+        </p:txBody>
+      </p:sp>
+      <p:sp>
+        <p:nvSpPr>
+          <p:cNvPr id="10" name="TextBox 4">
+            <a:extLst>
+              <a:ext uri="{FF2B5EF4-FFF2-40B4-BE49-F238E27FC236}">
+                <a16:creationId xmlns:a16="http://schemas.microsoft.com/office/drawing/2014/main" id="{C1F82835-069E-3EC9-013E-2FA95CFF5FCB}"/>
+              </a:ext>
+            </a:extLst>
+          </p:cNvPr>
+          <p:cNvSpPr txBox="1"/>
+          <p:nvPr/>
+        </p:nvSpPr>
+        <p:spPr>
+          <a:xfrm>
+            <a:off x="1604866" y="5549748"/>
+            <a:ext cx="4175572" cy="830453"/>
+          </a:xfrm>
+          <a:prstGeom prst="rect">
+            <a:avLst/>
+          </a:prstGeom>
+        </p:spPr>
+        <p:txBody>
+          <a:bodyPr rot="0" spcFirstLastPara="0" vertOverflow="overflow" horzOverflow="overflow" vert="horz" lIns="91440" tIns="45720" rIns="91440" bIns="45720" numCol="1" spcCol="0" rtlCol="0" fromWordArt="0" anchor="ctr" anchorCtr="0" forceAA="0" compatLnSpc="1">
+            <a:prstTxWarp prst="textNoShape">
+              <a:avLst/>
+            </a:prstTxWarp>
+            <a:normAutofit/>
+          </a:bodyPr>
+          <a:lstStyle/>
+          <a:p>
+            <a:pPr>
+              <a:lnSpc>
+                <a:spcPct val="90000"/>
+              </a:lnSpc>
+              <a:spcBef>
+                <a:spcPts val="1000"/>
+              </a:spcBef>
+            </a:pPr>
+            <a:r>
+              <a:rPr lang="en-US" sz="1400" b="1" dirty="0"/>
+              <a:t>Cuadro 4</a:t>
+            </a:r>
+            <a:r>
+              <a:rPr lang="en-US" sz="1400" dirty="0"/>
+              <a:t>. 10 </a:t>
+            </a:r>
+            <a:r>
+              <a:rPr lang="en-US" sz="1400" dirty="0" err="1"/>
+              <a:t>estaciones</a:t>
+            </a:r>
+            <a:r>
+              <a:rPr lang="en-US" sz="1400" dirty="0"/>
+              <a:t> con mayor </a:t>
+            </a:r>
+            <a:r>
+              <a:rPr lang="en-US" sz="1400" dirty="0" err="1"/>
+              <a:t>cantidad</a:t>
+            </a:r>
+            <a:r>
+              <a:rPr lang="en-US" sz="1400" dirty="0"/>
+              <a:t> de </a:t>
+            </a:r>
+            <a:r>
+              <a:rPr lang="en-US" sz="1400" dirty="0" err="1"/>
+              <a:t>arribos</a:t>
+            </a:r>
+            <a:r>
+              <a:rPr lang="en-US" sz="1400" dirty="0"/>
+              <a:t>.</a:t>
+            </a:r>
+          </a:p>
+        </p:txBody>
+      </p:sp>
+    </p:spTree>
+    <p:extLst>
+      <p:ext uri="{BB962C8B-B14F-4D97-AF65-F5344CB8AC3E}">
+        <p14:creationId xmlns:p14="http://schemas.microsoft.com/office/powerpoint/2010/main" val="1268314289"/>
       </p:ext>
     </p:extLst>
   </p:cSld>
@@ -5850,7 +6662,7 @@
         <p:spPr/>
         <p:txBody>
           <a:bodyPr vert="horz" lIns="91440" tIns="45720" rIns="91440" bIns="45720" rtlCol="0" anchor="t">
-            <a:normAutofit/>
+            <a:normAutofit fontScale="92500"/>
           </a:bodyPr>
           <a:lstStyle/>
           <a:p>
@@ -6069,9 +6881,25 @@
               <a:t>misma</a:t>
             </a:r>
             <a:r>
-              <a:rPr lang="en-US"/>
+              <a:rPr lang="en-US" dirty="0"/>
               <a:t>.</a:t>
             </a:r>
+          </a:p>
+          <a:p>
+            <a:pPr lvl="0"/>
+            <a:r>
+              <a:rPr lang="es-GT" dirty="0"/>
+              <a:t>La estación en Ciudad de México, desde la que se hace el mayor número de retiros de bicicletas durante Semana Santa es la estación en CE-271-272 Jesús García – Carlos J. Meneses con 8008 retiros.</a:t>
+            </a:r>
+          </a:p>
+          <a:p>
+            <a:pPr lvl="0"/>
+            <a:r>
+              <a:rPr lang="es-GT" dirty="0"/>
+              <a:t>La estación en Ciudad de México a la que arriba la mayor cantidad de bicicletas durante la Ciudad de México es la estación en CE-271-272 Jesús García – Carlos J. Meneses con 12213 arribos.</a:t>
+            </a:r>
+          </a:p>
+          <a:p>
             <a:endParaRPr lang="en-US" dirty="0"/>
           </a:p>
         </p:txBody>
@@ -6155,7 +6983,51 @@
           <a:bodyPr/>
           <a:lstStyle/>
           <a:p>
-            <a:endParaRPr lang="en-US"/>
+            <a:pPr lvl="0"/>
+            <a:r>
+              <a:rPr lang="es-GT" dirty="0"/>
+              <a:t>Procuraduría Federal de la Defensa del Trabajo. (2025, abril 8). </a:t>
+            </a:r>
+            <a:r>
+              <a:rPr lang="es-GT" i="1" dirty="0"/>
+              <a:t>Los días de Semana Santa 2025 ¿son días de descanso obligatorio?</a:t>
+            </a:r>
+            <a:r>
+              <a:rPr lang="es-GT" dirty="0"/>
+              <a:t> Gobierno de México. </a:t>
+            </a:r>
+            <a:r>
+              <a:rPr lang="es-GT" u="sng" dirty="0">
+                <a:hlinkClick r:id="rId2"/>
+              </a:rPr>
+              <a:t>https://www.gob.mx/profedet/articulos/los-dias-de-semana-santa-2025-son-dias-de-descanso-obligatorio</a:t>
+            </a:r>
+            <a:endParaRPr lang="es-GT" dirty="0"/>
+          </a:p>
+          <a:p>
+            <a:pPr lvl="0"/>
+            <a:r>
+              <a:rPr lang="es-GT" dirty="0"/>
+              <a:t>ECOBICI. (s.f.). </a:t>
+            </a:r>
+            <a:r>
+              <a:rPr lang="es-GT" i="1" dirty="0"/>
+              <a:t>Datos abiertos</a:t>
+            </a:r>
+            <a:r>
+              <a:rPr lang="es-GT" dirty="0"/>
+              <a:t>. Gobierno de la Ciudad de México. </a:t>
+            </a:r>
+            <a:r>
+              <a:rPr lang="es-GT" u="sng" dirty="0">
+                <a:hlinkClick r:id="rId3"/>
+              </a:rPr>
+              <a:t>https://ecobici.cdmx.gob.mx/datos-abiertos/</a:t>
+            </a:r>
+            <a:endParaRPr lang="es-GT" dirty="0"/>
+          </a:p>
+          <a:p>
+            <a:endParaRPr lang="en-US" dirty="0"/>
           </a:p>
         </p:txBody>
       </p:sp>

--- a/Proyecto1_Seminario2.pptx
+++ b/Proyecto1_Seminario2.pptx
@@ -9,11 +9,14 @@
     <p:sldId id="257" r:id="rId3"/>
     <p:sldId id="258" r:id="rId4"/>
     <p:sldId id="263" r:id="rId5"/>
-    <p:sldId id="259" r:id="rId6"/>
-    <p:sldId id="264" r:id="rId7"/>
-    <p:sldId id="261" r:id="rId8"/>
-    <p:sldId id="260" r:id="rId9"/>
-    <p:sldId id="262" r:id="rId10"/>
+    <p:sldId id="265" r:id="rId6"/>
+    <p:sldId id="266" r:id="rId7"/>
+    <p:sldId id="267" r:id="rId8"/>
+    <p:sldId id="259" r:id="rId9"/>
+    <p:sldId id="264" r:id="rId10"/>
+    <p:sldId id="261" r:id="rId11"/>
+    <p:sldId id="260" r:id="rId12"/>
+    <p:sldId id="262" r:id="rId13"/>
   </p:sldIdLst>
   <p:sldSz cx="12192000" cy="6858000"/>
   <p:notesSz cx="6858000" cy="9144000"/>
@@ -257,7 +260,7 @@
           <a:p>
             <a:fld id="{40771E8B-6CA5-40B2-8038-0E112F3DAC1C}" type="datetimeFigureOut">
               <a:rPr lang="es-ES" smtClean="0"/>
-              <a:t>15/04/2026</a:t>
+              <a:t>16/04/2026</a:t>
             </a:fld>
             <a:endParaRPr lang="es-ES"/>
           </a:p>
@@ -425,7 +428,7 @@
           <a:p>
             <a:fld id="{40771E8B-6CA5-40B2-8038-0E112F3DAC1C}" type="datetimeFigureOut">
               <a:rPr lang="es-ES" smtClean="0"/>
-              <a:t>15/04/2026</a:t>
+              <a:t>16/04/2026</a:t>
             </a:fld>
             <a:endParaRPr lang="es-ES"/>
           </a:p>
@@ -603,7 +606,7 @@
           <a:p>
             <a:fld id="{40771E8B-6CA5-40B2-8038-0E112F3DAC1C}" type="datetimeFigureOut">
               <a:rPr lang="es-ES" smtClean="0"/>
-              <a:t>15/04/2026</a:t>
+              <a:t>16/04/2026</a:t>
             </a:fld>
             <a:endParaRPr lang="es-ES"/>
           </a:p>
@@ -771,7 +774,7 @@
           <a:p>
             <a:fld id="{40771E8B-6CA5-40B2-8038-0E112F3DAC1C}" type="datetimeFigureOut">
               <a:rPr lang="es-ES" smtClean="0"/>
-              <a:t>15/04/2026</a:t>
+              <a:t>16/04/2026</a:t>
             </a:fld>
             <a:endParaRPr lang="es-ES"/>
           </a:p>
@@ -1016,7 +1019,7 @@
           <a:p>
             <a:fld id="{40771E8B-6CA5-40B2-8038-0E112F3DAC1C}" type="datetimeFigureOut">
               <a:rPr lang="es-ES" smtClean="0"/>
-              <a:t>15/04/2026</a:t>
+              <a:t>16/04/2026</a:t>
             </a:fld>
             <a:endParaRPr lang="es-ES"/>
           </a:p>
@@ -1245,7 +1248,7 @@
           <a:p>
             <a:fld id="{40771E8B-6CA5-40B2-8038-0E112F3DAC1C}" type="datetimeFigureOut">
               <a:rPr lang="es-ES" smtClean="0"/>
-              <a:t>15/04/2026</a:t>
+              <a:t>16/04/2026</a:t>
             </a:fld>
             <a:endParaRPr lang="es-ES"/>
           </a:p>
@@ -1609,7 +1612,7 @@
           <a:p>
             <a:fld id="{40771E8B-6CA5-40B2-8038-0E112F3DAC1C}" type="datetimeFigureOut">
               <a:rPr lang="es-ES" smtClean="0"/>
-              <a:t>15/04/2026</a:t>
+              <a:t>16/04/2026</a:t>
             </a:fld>
             <a:endParaRPr lang="es-ES"/>
           </a:p>
@@ -1726,7 +1729,7 @@
           <a:p>
             <a:fld id="{40771E8B-6CA5-40B2-8038-0E112F3DAC1C}" type="datetimeFigureOut">
               <a:rPr lang="es-ES" smtClean="0"/>
-              <a:t>15/04/2026</a:t>
+              <a:t>16/04/2026</a:t>
             </a:fld>
             <a:endParaRPr lang="es-ES"/>
           </a:p>
@@ -1821,7 +1824,7 @@
           <a:p>
             <a:fld id="{40771E8B-6CA5-40B2-8038-0E112F3DAC1C}" type="datetimeFigureOut">
               <a:rPr lang="es-ES" smtClean="0"/>
-              <a:t>15/04/2026</a:t>
+              <a:t>16/04/2026</a:t>
             </a:fld>
             <a:endParaRPr lang="es-ES"/>
           </a:p>
@@ -2096,7 +2099,7 @@
           <a:p>
             <a:fld id="{40771E8B-6CA5-40B2-8038-0E112F3DAC1C}" type="datetimeFigureOut">
               <a:rPr lang="es-ES" smtClean="0"/>
-              <a:t>15/04/2026</a:t>
+              <a:t>16/04/2026</a:t>
             </a:fld>
             <a:endParaRPr lang="es-ES"/>
           </a:p>
@@ -2348,7 +2351,7 @@
           <a:p>
             <a:fld id="{40771E8B-6CA5-40B2-8038-0E112F3DAC1C}" type="datetimeFigureOut">
               <a:rPr lang="es-ES" smtClean="0"/>
-              <a:t>15/04/2026</a:t>
+              <a:t>16/04/2026</a:t>
             </a:fld>
             <a:endParaRPr lang="es-ES"/>
           </a:p>
@@ -2559,7 +2562,7 @@
           <a:p>
             <a:fld id="{40771E8B-6CA5-40B2-8038-0E112F3DAC1C}" type="datetimeFigureOut">
               <a:rPr lang="es-ES" smtClean="0"/>
-              <a:t>15/04/2026</a:t>
+              <a:t>16/04/2026</a:t>
             </a:fld>
             <a:endParaRPr lang="es-ES"/>
           </a:p>
@@ -3030,2072 +3033,7 @@
 </p:sld>
 </file>
 
-<file path=ppt/slides/slide2.xml><?xml version="1.0" encoding="utf-8"?>
-<p:sld xmlns:a="http://schemas.openxmlformats.org/drawingml/2006/main" xmlns:r="http://schemas.openxmlformats.org/officeDocument/2006/relationships" xmlns:p="http://schemas.openxmlformats.org/presentationml/2006/main">
-  <p:cSld>
-    <p:spTree>
-      <p:nvGrpSpPr>
-        <p:cNvPr id="1" name=""/>
-        <p:cNvGrpSpPr/>
-        <p:nvPr/>
-      </p:nvGrpSpPr>
-      <p:grpSpPr>
-        <a:xfrm>
-          <a:off x="0" y="0"/>
-          <a:ext cx="0" cy="0"/>
-          <a:chOff x="0" y="0"/>
-          <a:chExt cx="0" cy="0"/>
-        </a:xfrm>
-      </p:grpSpPr>
-      <p:sp>
-        <p:nvSpPr>
-          <p:cNvPr id="2" name="Title 1">
-            <a:extLst>
-              <a:ext uri="{FF2B5EF4-FFF2-40B4-BE49-F238E27FC236}">
-                <a16:creationId xmlns:a16="http://schemas.microsoft.com/office/drawing/2014/main" id="{53881BC3-D3E5-BF85-1689-0DB736917FB7}"/>
-              </a:ext>
-            </a:extLst>
-          </p:cNvPr>
-          <p:cNvSpPr>
-            <a:spLocks noGrp="1"/>
-          </p:cNvSpPr>
-          <p:nvPr>
-            <p:ph type="title"/>
-          </p:nvPr>
-        </p:nvSpPr>
-        <p:spPr/>
-        <p:txBody>
-          <a:bodyPr/>
-          <a:lstStyle/>
-          <a:p>
-            <a:r>
-              <a:rPr lang="en-US" dirty="0" err="1"/>
-              <a:t>Preguntas</a:t>
-            </a:r>
-            <a:r>
-              <a:rPr lang="en-US" dirty="0"/>
-              <a:t> de </a:t>
-            </a:r>
-            <a:r>
-              <a:rPr lang="en-US" dirty="0" err="1"/>
-              <a:t>investigación</a:t>
-            </a:r>
-          </a:p>
-        </p:txBody>
-      </p:sp>
-      <p:sp>
-        <p:nvSpPr>
-          <p:cNvPr id="3" name="Content Placeholder 2">
-            <a:extLst>
-              <a:ext uri="{FF2B5EF4-FFF2-40B4-BE49-F238E27FC236}">
-                <a16:creationId xmlns:a16="http://schemas.microsoft.com/office/drawing/2014/main" id="{0ABCF7AA-D9BE-D440-F244-2E2A071147FB}"/>
-              </a:ext>
-            </a:extLst>
-          </p:cNvPr>
-          <p:cNvSpPr>
-            <a:spLocks noGrp="1"/>
-          </p:cNvSpPr>
-          <p:nvPr>
-            <p:ph idx="1"/>
-          </p:nvPr>
-        </p:nvSpPr>
-        <p:spPr/>
-        <p:txBody>
-          <a:bodyPr vert="horz" lIns="91440" tIns="45720" rIns="91440" bIns="45720" rtlCol="0" anchor="t">
-            <a:normAutofit/>
-          </a:bodyPr>
-          <a:lstStyle/>
-          <a:p>
-            <a:pPr marL="514350" indent="-514350">
-              <a:buAutoNum type="arabicPeriod"/>
-            </a:pPr>
-            <a:r>
-              <a:rPr lang="en-US" dirty="0"/>
-              <a:t>¿</a:t>
-            </a:r>
-            <a:r>
-              <a:rPr lang="en-US" dirty="0" err="1"/>
-              <a:t>Cómo</a:t>
-            </a:r>
-            <a:r>
-              <a:rPr lang="en-US" dirty="0"/>
-              <a:t> se </a:t>
-            </a:r>
-            <a:r>
-              <a:rPr lang="en-US" dirty="0" err="1"/>
-              <a:t>vio</a:t>
-            </a:r>
-            <a:r>
-              <a:rPr lang="en-US" dirty="0"/>
-              <a:t> </a:t>
-            </a:r>
-            <a:r>
-              <a:rPr lang="en-US" dirty="0" err="1"/>
-              <a:t>afectado</a:t>
-            </a:r>
-            <a:r>
-              <a:rPr lang="en-US" dirty="0"/>
-              <a:t> </a:t>
-            </a:r>
-            <a:r>
-              <a:rPr lang="en-US" dirty="0" err="1"/>
-              <a:t>el</a:t>
-            </a:r>
-            <a:r>
-              <a:rPr lang="en-US" dirty="0"/>
-              <a:t> </a:t>
-            </a:r>
-            <a:r>
-              <a:rPr lang="en-US" dirty="0" err="1"/>
-              <a:t>uso</a:t>
-            </a:r>
-            <a:r>
-              <a:rPr lang="en-US" dirty="0"/>
-              <a:t> de </a:t>
-            </a:r>
-            <a:r>
-              <a:rPr lang="en-US" dirty="0" err="1"/>
-              <a:t>biciletas</a:t>
-            </a:r>
-            <a:r>
-              <a:rPr lang="en-US" dirty="0"/>
-              <a:t> </a:t>
-            </a:r>
-            <a:r>
-              <a:rPr lang="en-US" dirty="0" err="1"/>
-              <a:t>en</a:t>
-            </a:r>
-            <a:r>
-              <a:rPr lang="en-US" dirty="0"/>
-              <a:t> la </a:t>
-            </a:r>
-            <a:r>
-              <a:rPr lang="en-US" dirty="0" err="1"/>
-              <a:t>época</a:t>
-            </a:r>
-            <a:r>
-              <a:rPr lang="en-US" dirty="0"/>
-              <a:t> del COVID-19?</a:t>
-            </a:r>
-          </a:p>
-          <a:p>
-            <a:pPr marL="514350" indent="-514350">
-              <a:buAutoNum type="arabicPeriod"/>
-            </a:pPr>
-            <a:r>
-              <a:rPr lang="en-US" dirty="0"/>
-              <a:t>¿</a:t>
-            </a:r>
-            <a:r>
-              <a:rPr lang="en-US" dirty="0" err="1"/>
-              <a:t>Cuáles</a:t>
-            </a:r>
-            <a:r>
-              <a:rPr lang="en-US" dirty="0"/>
-              <a:t> días son </a:t>
-            </a:r>
-            <a:r>
-              <a:rPr lang="en-US" dirty="0" err="1"/>
-              <a:t>en</a:t>
-            </a:r>
-            <a:r>
-              <a:rPr lang="en-US" dirty="0"/>
-              <a:t> </a:t>
-            </a:r>
-            <a:r>
-              <a:rPr lang="en-US" dirty="0" err="1"/>
-              <a:t>los</a:t>
-            </a:r>
-            <a:r>
-              <a:rPr lang="en-US" dirty="0"/>
-              <a:t> </a:t>
-            </a:r>
-            <a:r>
-              <a:rPr lang="en-US" dirty="0" err="1"/>
-              <a:t>que</a:t>
-            </a:r>
-            <a:r>
-              <a:rPr lang="en-US" dirty="0"/>
-              <a:t> se </a:t>
-            </a:r>
-            <a:r>
-              <a:rPr lang="en-US" dirty="0" err="1"/>
-              <a:t>prestan</a:t>
-            </a:r>
-            <a:r>
-              <a:rPr lang="en-US" dirty="0"/>
-              <a:t> </a:t>
-            </a:r>
-            <a:r>
-              <a:rPr lang="en-US" dirty="0" err="1"/>
-              <a:t>más</a:t>
-            </a:r>
-            <a:r>
-              <a:rPr lang="en-US" dirty="0"/>
-              <a:t> </a:t>
-            </a:r>
-            <a:r>
-              <a:rPr lang="en-US" dirty="0" err="1"/>
-              <a:t>bicicletas</a:t>
-            </a:r>
-            <a:r>
-              <a:rPr lang="en-US" dirty="0"/>
-              <a:t>?</a:t>
-            </a:r>
-          </a:p>
-          <a:p>
-            <a:pPr marL="514350" indent="-514350">
-              <a:buAutoNum type="arabicPeriod"/>
-            </a:pPr>
-            <a:r>
-              <a:rPr lang="en-US" dirty="0"/>
-              <a:t>¿Las </a:t>
-            </a:r>
-            <a:r>
-              <a:rPr lang="en-US" dirty="0" err="1"/>
-              <a:t>frecuencias</a:t>
-            </a:r>
-            <a:r>
-              <a:rPr lang="en-US" dirty="0"/>
-              <a:t> de </a:t>
-            </a:r>
-            <a:r>
-              <a:rPr lang="en-US" dirty="0" err="1"/>
-              <a:t>arribo</a:t>
-            </a:r>
-            <a:r>
-              <a:rPr lang="en-US" dirty="0"/>
-              <a:t> y </a:t>
-            </a:r>
-            <a:r>
-              <a:rPr lang="en-US" dirty="0" err="1"/>
-              <a:t>retiro</a:t>
-            </a:r>
-            <a:r>
-              <a:rPr lang="en-US" dirty="0"/>
-              <a:t> </a:t>
-            </a:r>
-            <a:r>
-              <a:rPr lang="en-US" dirty="0" err="1"/>
-              <a:t>serán</a:t>
-            </a:r>
-            <a:r>
-              <a:rPr lang="en-US" dirty="0"/>
-              <a:t> </a:t>
-            </a:r>
-            <a:r>
-              <a:rPr lang="en-US" dirty="0" err="1"/>
-              <a:t>mayores</a:t>
-            </a:r>
-            <a:r>
-              <a:rPr lang="en-US" dirty="0"/>
-              <a:t> </a:t>
-            </a:r>
-            <a:r>
-              <a:rPr lang="en-US" dirty="0" err="1"/>
-              <a:t>en</a:t>
-            </a:r>
-            <a:r>
-              <a:rPr lang="en-US" dirty="0"/>
-              <a:t> </a:t>
-            </a:r>
-            <a:r>
-              <a:rPr lang="en-US" dirty="0" err="1"/>
-              <a:t>el</a:t>
-            </a:r>
-            <a:r>
-              <a:rPr lang="en-US" dirty="0"/>
-              <a:t> </a:t>
-            </a:r>
-            <a:r>
-              <a:rPr lang="en-US" dirty="0" err="1"/>
-              <a:t>centro</a:t>
-            </a:r>
-            <a:r>
-              <a:rPr lang="en-US" dirty="0"/>
-              <a:t> del </a:t>
-            </a:r>
-            <a:r>
-              <a:rPr lang="en-US" dirty="0" err="1"/>
-              <a:t>mapa</a:t>
-            </a:r>
-            <a:r>
-              <a:rPr lang="en-US" dirty="0"/>
-              <a:t> de </a:t>
-            </a:r>
-            <a:r>
-              <a:rPr lang="en-US" dirty="0" err="1"/>
-              <a:t>estaciones</a:t>
-            </a:r>
-            <a:r>
-              <a:rPr lang="en-US" dirty="0"/>
-              <a:t> de ECOBICI?</a:t>
-            </a:r>
-          </a:p>
-          <a:p>
-            <a:pPr marL="514350" indent="-514350">
-              <a:buAutoNum type="arabicPeriod"/>
-            </a:pPr>
-            <a:r>
-              <a:rPr lang="en-US" dirty="0"/>
-              <a:t>¿</a:t>
-            </a:r>
-            <a:r>
-              <a:rPr lang="en-US" dirty="0" err="1"/>
-              <a:t>Cuáles</a:t>
-            </a:r>
-            <a:r>
-              <a:rPr lang="en-US" dirty="0"/>
-              <a:t> son las </a:t>
-            </a:r>
-            <a:r>
-              <a:rPr lang="en-US" dirty="0" err="1"/>
-              <a:t>estaciones</a:t>
-            </a:r>
-            <a:r>
-              <a:rPr lang="en-US" dirty="0"/>
-              <a:t> </a:t>
-            </a:r>
-            <a:r>
-              <a:rPr lang="en-US" dirty="0" err="1"/>
-              <a:t>en</a:t>
-            </a:r>
-            <a:r>
-              <a:rPr lang="en-US" dirty="0"/>
-              <a:t> las </a:t>
-            </a:r>
-            <a:r>
-              <a:rPr lang="en-US" dirty="0" err="1"/>
-              <a:t>que</a:t>
-            </a:r>
-            <a:r>
-              <a:rPr lang="en-US" dirty="0"/>
-              <a:t> </a:t>
-            </a:r>
-            <a:r>
-              <a:rPr lang="en-US" dirty="0" err="1"/>
-              <a:t>más</a:t>
-            </a:r>
-            <a:r>
-              <a:rPr lang="en-US" dirty="0"/>
-              <a:t> se </a:t>
-            </a:r>
-            <a:r>
-              <a:rPr lang="en-US" dirty="0" err="1"/>
-              <a:t>prestan</a:t>
-            </a:r>
-            <a:r>
-              <a:rPr lang="en-US" dirty="0"/>
-              <a:t> </a:t>
-            </a:r>
-            <a:r>
-              <a:rPr lang="en-US" dirty="0" err="1"/>
-              <a:t>bicicletas</a:t>
-            </a:r>
-            <a:r>
-              <a:rPr lang="en-US" dirty="0"/>
-              <a:t>?</a:t>
-            </a:r>
-          </a:p>
-          <a:p>
-            <a:pPr marL="514350" indent="-514350">
-              <a:buAutoNum type="arabicPeriod"/>
-            </a:pPr>
-            <a:r>
-              <a:rPr lang="en-US" dirty="0"/>
-              <a:t>¿</a:t>
-            </a:r>
-            <a:r>
-              <a:rPr lang="en-US" dirty="0" err="1"/>
-              <a:t>Cuáles</a:t>
-            </a:r>
-            <a:r>
-              <a:rPr lang="en-US" dirty="0"/>
-              <a:t> son las </a:t>
-            </a:r>
-            <a:r>
-              <a:rPr lang="en-US" dirty="0" err="1"/>
-              <a:t>estaciones</a:t>
-            </a:r>
-            <a:r>
-              <a:rPr lang="en-US" dirty="0"/>
-              <a:t> </a:t>
-            </a:r>
-            <a:r>
-              <a:rPr lang="en-US" dirty="0" err="1"/>
-              <a:t>en</a:t>
-            </a:r>
-            <a:r>
-              <a:rPr lang="en-US" dirty="0"/>
-              <a:t> la </a:t>
-            </a:r>
-            <a:r>
-              <a:rPr lang="en-US" dirty="0" err="1"/>
-              <a:t>que</a:t>
-            </a:r>
-            <a:r>
-              <a:rPr lang="en-US" dirty="0"/>
-              <a:t> </a:t>
-            </a:r>
-            <a:r>
-              <a:rPr lang="en-US" dirty="0" err="1"/>
-              <a:t>más</a:t>
-            </a:r>
-            <a:r>
-              <a:rPr lang="en-US" dirty="0"/>
-              <a:t> </a:t>
-            </a:r>
-            <a:r>
-              <a:rPr lang="en-US" dirty="0" err="1"/>
-              <a:t>dejan</a:t>
-            </a:r>
-            <a:r>
-              <a:rPr lang="en-US" dirty="0"/>
-              <a:t> </a:t>
-            </a:r>
-            <a:r>
-              <a:rPr lang="en-US" dirty="0" err="1"/>
-              <a:t>bicicletas</a:t>
-            </a:r>
-            <a:r>
-              <a:rPr lang="en-US" dirty="0"/>
-              <a:t>?</a:t>
-            </a:r>
-          </a:p>
-        </p:txBody>
-      </p:sp>
-    </p:spTree>
-    <p:extLst>
-      <p:ext uri="{BB962C8B-B14F-4D97-AF65-F5344CB8AC3E}">
-        <p14:creationId xmlns:p14="http://schemas.microsoft.com/office/powerpoint/2010/main" val="3336810955"/>
-      </p:ext>
-    </p:extLst>
-  </p:cSld>
-  <p:clrMapOvr>
-    <a:masterClrMapping/>
-  </p:clrMapOvr>
-</p:sld>
-</file>
-
-<file path=ppt/slides/slide3.xml><?xml version="1.0" encoding="utf-8"?>
-<p:sld xmlns:a="http://schemas.openxmlformats.org/drawingml/2006/main" xmlns:r="http://schemas.openxmlformats.org/officeDocument/2006/relationships" xmlns:p="http://schemas.openxmlformats.org/presentationml/2006/main">
-  <p:cSld>
-    <p:spTree>
-      <p:nvGrpSpPr>
-        <p:cNvPr id="1" name=""/>
-        <p:cNvGrpSpPr/>
-        <p:nvPr/>
-      </p:nvGrpSpPr>
-      <p:grpSpPr>
-        <a:xfrm>
-          <a:off x="0" y="0"/>
-          <a:ext cx="0" cy="0"/>
-          <a:chOff x="0" y="0"/>
-          <a:chExt cx="0" cy="0"/>
-        </a:xfrm>
-      </p:grpSpPr>
-      <p:sp>
-        <p:nvSpPr>
-          <p:cNvPr id="2" name="Title 1">
-            <a:extLst>
-              <a:ext uri="{FF2B5EF4-FFF2-40B4-BE49-F238E27FC236}">
-                <a16:creationId xmlns:a16="http://schemas.microsoft.com/office/drawing/2014/main" id="{1F0CA0D9-E23A-434F-85BE-7CE0C79947EF}"/>
-              </a:ext>
-            </a:extLst>
-          </p:cNvPr>
-          <p:cNvSpPr>
-            <a:spLocks noGrp="1"/>
-          </p:cNvSpPr>
-          <p:nvPr>
-            <p:ph type="title"/>
-          </p:nvPr>
-        </p:nvSpPr>
-        <p:spPr/>
-        <p:txBody>
-          <a:bodyPr/>
-          <a:lstStyle/>
-          <a:p>
-            <a:r>
-              <a:rPr lang="en-US" dirty="0" err="1"/>
-              <a:t>Descripción</a:t>
-            </a:r>
-            <a:r>
-              <a:rPr lang="en-US" dirty="0"/>
-              <a:t> de </a:t>
-            </a:r>
-            <a:r>
-              <a:rPr lang="en-US" dirty="0" err="1"/>
-              <a:t>los</a:t>
-            </a:r>
-            <a:r>
-              <a:rPr lang="en-US" dirty="0"/>
-              <a:t> </a:t>
-            </a:r>
-            <a:r>
-              <a:rPr lang="en-US" dirty="0" err="1"/>
-              <a:t>datos</a:t>
-            </a:r>
-          </a:p>
-        </p:txBody>
-      </p:sp>
-      <p:sp>
-        <p:nvSpPr>
-          <p:cNvPr id="3" name="Content Placeholder 2">
-            <a:extLst>
-              <a:ext uri="{FF2B5EF4-FFF2-40B4-BE49-F238E27FC236}">
-                <a16:creationId xmlns:a16="http://schemas.microsoft.com/office/drawing/2014/main" id="{AC6D1742-1A0E-6DDB-549A-CBC319F339F4}"/>
-              </a:ext>
-            </a:extLst>
-          </p:cNvPr>
-          <p:cNvSpPr>
-            <a:spLocks noGrp="1"/>
-          </p:cNvSpPr>
-          <p:nvPr>
-            <p:ph idx="1"/>
-          </p:nvPr>
-        </p:nvSpPr>
-        <p:spPr/>
-        <p:txBody>
-          <a:bodyPr vert="horz" lIns="91440" tIns="45720" rIns="91440" bIns="45720" rtlCol="0" anchor="t">
-            <a:normAutofit/>
-          </a:bodyPr>
-          <a:lstStyle/>
-          <a:p>
-            <a:r>
-              <a:rPr lang="en-US" dirty="0"/>
-              <a:t>Se </a:t>
-            </a:r>
-            <a:r>
-              <a:rPr lang="en-US" dirty="0" err="1"/>
-              <a:t>han</a:t>
-            </a:r>
-            <a:r>
-              <a:rPr lang="en-US" dirty="0"/>
-              <a:t> </a:t>
-            </a:r>
-            <a:r>
-              <a:rPr lang="en-US" dirty="0" err="1"/>
-              <a:t>usado</a:t>
-            </a:r>
-            <a:r>
-              <a:rPr lang="en-US" dirty="0"/>
-              <a:t> </a:t>
-            </a:r>
-            <a:r>
-              <a:rPr lang="en-US" dirty="0" err="1"/>
-              <a:t>los</a:t>
-            </a:r>
-            <a:r>
-              <a:rPr lang="en-US" dirty="0"/>
-              <a:t> </a:t>
-            </a:r>
-            <a:r>
-              <a:rPr lang="en-US" dirty="0" err="1"/>
-              <a:t>datos</a:t>
-            </a:r>
-            <a:r>
-              <a:rPr lang="en-US" dirty="0"/>
-              <a:t> </a:t>
-            </a:r>
-            <a:r>
-              <a:rPr lang="en-US" dirty="0" err="1"/>
-              <a:t>históricos</a:t>
-            </a:r>
-            <a:r>
-              <a:rPr lang="en-US" dirty="0"/>
-              <a:t> de ECOBICI </a:t>
-            </a:r>
-            <a:r>
-              <a:rPr lang="en-US" dirty="0" err="1"/>
-              <a:t>correspondientes</a:t>
-            </a:r>
-            <a:r>
-              <a:rPr lang="en-US" dirty="0"/>
-              <a:t> a la Semana Santa </a:t>
-            </a:r>
-            <a:r>
-              <a:rPr lang="en-US" dirty="0" err="1"/>
-              <a:t>desde</a:t>
-            </a:r>
-            <a:r>
-              <a:rPr lang="en-US" dirty="0"/>
-              <a:t> </a:t>
-            </a:r>
-            <a:r>
-              <a:rPr lang="en-US" dirty="0" err="1"/>
-              <a:t>el</a:t>
-            </a:r>
-            <a:r>
-              <a:rPr lang="en-US" dirty="0"/>
-              <a:t> 2015 al 2025.</a:t>
-            </a:r>
-          </a:p>
-          <a:p>
-            <a:r>
-              <a:rPr lang="en-US" dirty="0"/>
-              <a:t>Las variables </a:t>
-            </a:r>
-            <a:r>
-              <a:rPr lang="en-US" dirty="0" err="1"/>
-              <a:t>consideradas</a:t>
-            </a:r>
-            <a:r>
-              <a:rPr lang="en-US" dirty="0"/>
-              <a:t> para </a:t>
-            </a:r>
-            <a:r>
-              <a:rPr lang="en-US" dirty="0" err="1"/>
-              <a:t>el</a:t>
-            </a:r>
-            <a:r>
-              <a:rPr lang="en-US" dirty="0"/>
-              <a:t> </a:t>
-            </a:r>
-            <a:r>
-              <a:rPr lang="en-US" dirty="0" err="1"/>
-              <a:t>análisis</a:t>
-            </a:r>
-            <a:r>
-              <a:rPr lang="en-US" dirty="0"/>
-              <a:t> </a:t>
-            </a:r>
-            <a:r>
-              <a:rPr lang="en-US" dirty="0" err="1"/>
-              <a:t>fueron</a:t>
-            </a:r>
-            <a:r>
-              <a:rPr lang="en-US" dirty="0"/>
-              <a:t>: </a:t>
-            </a:r>
-            <a:r>
-              <a:rPr lang="en-US" dirty="0" err="1"/>
-              <a:t>Fecha</a:t>
-            </a:r>
-            <a:r>
-              <a:rPr lang="en-US" dirty="0"/>
-              <a:t> de </a:t>
-            </a:r>
-            <a:r>
-              <a:rPr lang="en-US" dirty="0" err="1"/>
-              <a:t>retiro</a:t>
-            </a:r>
-            <a:r>
-              <a:rPr lang="en-US" dirty="0"/>
-              <a:t> de </a:t>
-            </a:r>
-            <a:r>
-              <a:rPr lang="en-US" dirty="0" err="1"/>
-              <a:t>bicicletas</a:t>
-            </a:r>
-            <a:r>
-              <a:rPr lang="en-US" dirty="0"/>
-              <a:t>, </a:t>
-            </a:r>
-            <a:r>
-              <a:rPr lang="en-US" dirty="0" err="1"/>
-              <a:t>fecha</a:t>
-            </a:r>
-            <a:r>
-              <a:rPr lang="en-US" dirty="0"/>
-              <a:t> de </a:t>
-            </a:r>
-            <a:r>
-              <a:rPr lang="en-US" dirty="0" err="1"/>
-              <a:t>arribo</a:t>
-            </a:r>
-            <a:r>
-              <a:rPr lang="en-US" dirty="0"/>
-              <a:t> de la </a:t>
-            </a:r>
-            <a:r>
-              <a:rPr lang="en-US" dirty="0" err="1"/>
-              <a:t>bicicleta</a:t>
-            </a:r>
-            <a:r>
-              <a:rPr lang="en-US" dirty="0"/>
-              <a:t>, </a:t>
-            </a:r>
-            <a:r>
-              <a:rPr lang="en-US" dirty="0" err="1"/>
-              <a:t>nombre</a:t>
-            </a:r>
-            <a:r>
-              <a:rPr lang="en-US" dirty="0"/>
-              <a:t> de </a:t>
-            </a:r>
-            <a:r>
-              <a:rPr lang="en-US" dirty="0" err="1"/>
-              <a:t>estación</a:t>
-            </a:r>
-            <a:r>
-              <a:rPr lang="en-US" dirty="0"/>
-              <a:t>, </a:t>
-            </a:r>
-            <a:r>
-              <a:rPr lang="en-US" dirty="0" err="1"/>
-              <a:t>coordenadas</a:t>
-            </a:r>
-            <a:r>
-              <a:rPr lang="en-US" dirty="0"/>
-              <a:t> de la </a:t>
-            </a:r>
-            <a:r>
-              <a:rPr lang="en-US" dirty="0" err="1"/>
-              <a:t>estación</a:t>
-            </a:r>
-            <a:endParaRPr lang="en-US" dirty="0"/>
-          </a:p>
-          <a:p>
-            <a:r>
-              <a:rPr lang="en-US" dirty="0"/>
-              <a:t>Los </a:t>
-            </a:r>
-            <a:r>
-              <a:rPr lang="en-US" dirty="0" err="1"/>
-              <a:t>datos</a:t>
-            </a:r>
-            <a:r>
-              <a:rPr lang="en-US" dirty="0"/>
-              <a:t> no </a:t>
-            </a:r>
-            <a:r>
-              <a:rPr lang="en-US" dirty="0" err="1"/>
-              <a:t>contaban</a:t>
-            </a:r>
-            <a:r>
-              <a:rPr lang="en-US" dirty="0"/>
-              <a:t> con </a:t>
-            </a:r>
-            <a:r>
-              <a:rPr lang="en-US" dirty="0" err="1"/>
-              <a:t>datos</a:t>
-            </a:r>
-            <a:r>
-              <a:rPr lang="en-US" dirty="0"/>
-              <a:t> </a:t>
-            </a:r>
-            <a:r>
-              <a:rPr lang="en-US" dirty="0" err="1"/>
-              <a:t>faltantes</a:t>
-            </a:r>
-            <a:r>
-              <a:rPr lang="en-US" dirty="0"/>
-              <a:t>.</a:t>
-            </a:r>
-          </a:p>
-        </p:txBody>
-      </p:sp>
-    </p:spTree>
-    <p:extLst>
-      <p:ext uri="{BB962C8B-B14F-4D97-AF65-F5344CB8AC3E}">
-        <p14:creationId xmlns:p14="http://schemas.microsoft.com/office/powerpoint/2010/main" val="1632834163"/>
-      </p:ext>
-    </p:extLst>
-  </p:cSld>
-  <p:clrMapOvr>
-    <a:masterClrMapping/>
-  </p:clrMapOvr>
-</p:sld>
-</file>
-
-<file path=ppt/slides/slide4.xml><?xml version="1.0" encoding="utf-8"?>
-<p:sld xmlns:a="http://schemas.openxmlformats.org/drawingml/2006/main" xmlns:r="http://schemas.openxmlformats.org/officeDocument/2006/relationships" xmlns:p="http://schemas.openxmlformats.org/presentationml/2006/main">
-  <p:cSld>
-    <p:bg>
-      <p:bgPr>
-        <a:solidFill>
-          <a:schemeClr val="bg1"/>
-        </a:solidFill>
-        <a:effectLst/>
-      </p:bgPr>
-    </p:bg>
-    <p:spTree>
-      <p:nvGrpSpPr>
-        <p:cNvPr id="1" name=""/>
-        <p:cNvGrpSpPr/>
-        <p:nvPr/>
-      </p:nvGrpSpPr>
-      <p:grpSpPr>
-        <a:xfrm>
-          <a:off x="0" y="0"/>
-          <a:ext cx="0" cy="0"/>
-          <a:chOff x="0" y="0"/>
-          <a:chExt cx="0" cy="0"/>
-        </a:xfrm>
-      </p:grpSpPr>
-      <p:sp useBgFill="1">
-        <p:nvSpPr>
-          <p:cNvPr id="18" name="Rectangle 17">
-            <a:extLst>
-              <a:ext uri="{FF2B5EF4-FFF2-40B4-BE49-F238E27FC236}">
-                <a16:creationId xmlns:a16="http://schemas.microsoft.com/office/drawing/2014/main" id="{B66D7F65-E9B6-4775-8355-D095CC73C1C8}"/>
-              </a:ext>
-              <a:ext uri="{C183D7F6-B498-43B3-948B-1728B52AA6E4}">
-                <adec:decorative xmlns:adec="http://schemas.microsoft.com/office/drawing/2017/decorative" val="1"/>
-              </a:ext>
-            </a:extLst>
-          </p:cNvPr>
-          <p:cNvSpPr>
-            <a:spLocks noGrp="1" noRot="1" noChangeAspect="1" noMove="1" noResize="1" noEditPoints="1" noAdjustHandles="1" noChangeArrowheads="1" noChangeShapeType="1" noTextEdit="1"/>
-          </p:cNvSpPr>
-          <p:nvPr>
-            <p:extLst>
-              <p:ext uri="{386F3935-93C4-4BCD-93E2-E3B085C9AB24}">
-                <p16:designElem xmlns:p16="http://schemas.microsoft.com/office/powerpoint/2015/main" val="1"/>
-              </p:ext>
-            </p:extLst>
-          </p:nvPr>
-        </p:nvSpPr>
-        <p:spPr>
-          <a:xfrm>
-            <a:off x="0" y="2"/>
-            <a:ext cx="12192000" cy="6857997"/>
-          </a:xfrm>
-          <a:prstGeom prst="rect">
-            <a:avLst/>
-          </a:prstGeom>
-          <a:ln>
-            <a:noFill/>
-          </a:ln>
-        </p:spPr>
-        <p:style>
-          <a:lnRef idx="2">
-            <a:schemeClr val="accent1">
-              <a:shade val="50000"/>
-            </a:schemeClr>
-          </a:lnRef>
-          <a:fillRef idx="1">
-            <a:schemeClr val="accent1"/>
-          </a:fillRef>
-          <a:effectRef idx="0">
-            <a:schemeClr val="accent1"/>
-          </a:effectRef>
-          <a:fontRef idx="minor">
-            <a:schemeClr val="lt1"/>
-          </a:fontRef>
-        </p:style>
-        <p:txBody>
-          <a:bodyPr rtlCol="0" anchor="ctr"/>
-          <a:lstStyle/>
-          <a:p>
-            <a:pPr algn="ctr"/>
-            <a:endParaRPr lang="en-US"/>
-          </a:p>
-        </p:txBody>
-      </p:sp>
-      <p:sp>
-        <p:nvSpPr>
-          <p:cNvPr id="2" name="Title 1">
-            <a:extLst>
-              <a:ext uri="{FF2B5EF4-FFF2-40B4-BE49-F238E27FC236}">
-                <a16:creationId xmlns:a16="http://schemas.microsoft.com/office/drawing/2014/main" id="{266A3000-7648-F4A8-FD09-38C894BED430}"/>
-              </a:ext>
-            </a:extLst>
-          </p:cNvPr>
-          <p:cNvSpPr>
-            <a:spLocks noGrp="1"/>
-          </p:cNvSpPr>
-          <p:nvPr>
-            <p:ph type="title"/>
-          </p:nvPr>
-        </p:nvSpPr>
-        <p:spPr>
-          <a:xfrm>
-            <a:off x="1136396" y="502021"/>
-            <a:ext cx="6173262" cy="1655483"/>
-          </a:xfrm>
-        </p:spPr>
-        <p:txBody>
-          <a:bodyPr anchor="b">
-            <a:normAutofit/>
-          </a:bodyPr>
-          <a:lstStyle/>
-          <a:p>
-            <a:r>
-              <a:rPr lang="en-US" sz="4000"/>
-              <a:t>Mapa de calor de estaciones de retiro</a:t>
-            </a:r>
-          </a:p>
-        </p:txBody>
-      </p:sp>
-      <p:sp>
-        <p:nvSpPr>
-          <p:cNvPr id="15" name="Content Placeholder 14">
-            <a:extLst>
-              <a:ext uri="{FF2B5EF4-FFF2-40B4-BE49-F238E27FC236}">
-                <a16:creationId xmlns:a16="http://schemas.microsoft.com/office/drawing/2014/main" id="{1776977E-BACF-89CE-59C9-494EB124868A}"/>
-              </a:ext>
-            </a:extLst>
-          </p:cNvPr>
-          <p:cNvSpPr>
-            <a:spLocks noGrp="1"/>
-          </p:cNvSpPr>
-          <p:nvPr>
-            <p:ph idx="1"/>
-          </p:nvPr>
-        </p:nvSpPr>
-        <p:spPr>
-          <a:xfrm>
-            <a:off x="1136397" y="2408518"/>
-            <a:ext cx="6173262" cy="3535083"/>
-          </a:xfrm>
-        </p:spPr>
-        <p:txBody>
-          <a:bodyPr>
-            <a:normAutofit/>
-          </a:bodyPr>
-          <a:lstStyle/>
-          <a:p>
-            <a:endParaRPr lang="en-US" sz="2000"/>
-          </a:p>
-        </p:txBody>
-      </p:sp>
-      <p:pic>
-        <p:nvPicPr>
-          <p:cNvPr id="5" name="Content Placeholder 4">
-            <a:extLst>
-              <a:ext uri="{FF2B5EF4-FFF2-40B4-BE49-F238E27FC236}">
-                <a16:creationId xmlns:a16="http://schemas.microsoft.com/office/drawing/2014/main" id="{43D767D5-403E-EC3A-D888-C55A5FFCF34A}"/>
-              </a:ext>
-            </a:extLst>
-          </p:cNvPr>
-          <p:cNvPicPr>
-            <a:picLocks noChangeAspect="1"/>
-          </p:cNvPicPr>
-          <p:nvPr/>
-        </p:nvPicPr>
-        <p:blipFill>
-          <a:blip r:embed="rId2"/>
-          <a:srcRect l="1310" r="2" b="2"/>
-          <a:stretch>
-            <a:fillRect/>
-          </a:stretch>
-        </p:blipFill>
-        <p:spPr>
-          <a:xfrm>
-            <a:off x="8115300" y="-12515"/>
-            <a:ext cx="4076700" cy="6418631"/>
-          </a:xfrm>
-          <a:prstGeom prst="rect">
-            <a:avLst/>
-          </a:prstGeom>
-        </p:spPr>
-      </p:pic>
-      <p:sp>
-        <p:nvSpPr>
-          <p:cNvPr id="20" name="Rectangle 19">
-            <a:extLst>
-              <a:ext uri="{FF2B5EF4-FFF2-40B4-BE49-F238E27FC236}">
-                <a16:creationId xmlns:a16="http://schemas.microsoft.com/office/drawing/2014/main" id="{61707E60-CEC9-4661-AA82-69242EB4BDC3}"/>
-              </a:ext>
-              <a:ext uri="{C183D7F6-B498-43B3-948B-1728B52AA6E4}">
-                <adec:decorative xmlns:adec="http://schemas.microsoft.com/office/drawing/2017/decorative" val="1"/>
-              </a:ext>
-            </a:extLst>
-          </p:cNvPr>
-          <p:cNvSpPr>
-            <a:spLocks noGrp="1" noRot="1" noChangeAspect="1" noMove="1" noResize="1" noEditPoints="1" noAdjustHandles="1" noChangeArrowheads="1" noChangeShapeType="1" noTextEdit="1"/>
-          </p:cNvSpPr>
-          <p:nvPr>
-            <p:extLst>
-              <p:ext uri="{386F3935-93C4-4BCD-93E2-E3B085C9AB24}">
-                <p16:designElem xmlns:p16="http://schemas.microsoft.com/office/powerpoint/2015/main" val="1"/>
-              </p:ext>
-            </p:extLst>
-          </p:nvPr>
-        </p:nvSpPr>
-        <p:spPr>
-          <a:xfrm flipH="1">
-            <a:off x="0" y="6406116"/>
-            <a:ext cx="12191998" cy="461774"/>
-          </a:xfrm>
-          <a:prstGeom prst="rect">
-            <a:avLst/>
-          </a:prstGeom>
-          <a:gradFill>
-            <a:gsLst>
-              <a:gs pos="0">
-                <a:srgbClr val="000000"/>
-              </a:gs>
-              <a:gs pos="70000">
-                <a:schemeClr val="accent1">
-                  <a:lumMod val="75000"/>
-                </a:schemeClr>
-              </a:gs>
-            </a:gsLst>
-            <a:lin ang="15600000" scaled="0"/>
-          </a:gradFill>
-          <a:ln>
-            <a:noFill/>
-          </a:ln>
-        </p:spPr>
-        <p:style>
-          <a:lnRef idx="2">
-            <a:schemeClr val="accent1">
-              <a:shade val="50000"/>
-            </a:schemeClr>
-          </a:lnRef>
-          <a:fillRef idx="1">
-            <a:schemeClr val="accent1"/>
-          </a:fillRef>
-          <a:effectRef idx="0">
-            <a:schemeClr val="accent1"/>
-          </a:effectRef>
-          <a:fontRef idx="minor">
-            <a:schemeClr val="lt1"/>
-          </a:fontRef>
-        </p:style>
-        <p:txBody>
-          <a:bodyPr rtlCol="0" anchor="ctr"/>
-          <a:lstStyle/>
-          <a:p>
-            <a:pPr algn="ctr"/>
-            <a:endParaRPr lang="en-US"/>
-          </a:p>
-        </p:txBody>
-      </p:sp>
-      <p:sp>
-        <p:nvSpPr>
-          <p:cNvPr id="22" name="Rectangle 21">
-            <a:extLst>
-              <a:ext uri="{FF2B5EF4-FFF2-40B4-BE49-F238E27FC236}">
-                <a16:creationId xmlns:a16="http://schemas.microsoft.com/office/drawing/2014/main" id="{8F035CD8-AE30-4146-96F2-036B0CE5E4F3}"/>
-              </a:ext>
-              <a:ext uri="{C183D7F6-B498-43B3-948B-1728B52AA6E4}">
-                <adec:decorative xmlns:adec="http://schemas.microsoft.com/office/drawing/2017/decorative" val="1"/>
-              </a:ext>
-            </a:extLst>
-          </p:cNvPr>
-          <p:cNvSpPr>
-            <a:spLocks noGrp="1" noRot="1" noChangeAspect="1" noMove="1" noResize="1" noEditPoints="1" noAdjustHandles="1" noChangeArrowheads="1" noChangeShapeType="1" noTextEdit="1"/>
-          </p:cNvSpPr>
-          <p:nvPr>
-            <p:extLst>
-              <p:ext uri="{386F3935-93C4-4BCD-93E2-E3B085C9AB24}">
-                <p16:designElem xmlns:p16="http://schemas.microsoft.com/office/powerpoint/2015/main" val="1"/>
-              </p:ext>
-            </p:extLst>
-          </p:nvPr>
-        </p:nvSpPr>
-        <p:spPr>
-          <a:xfrm flipH="1">
-            <a:off x="8115300" y="6406115"/>
-            <a:ext cx="4076698" cy="464399"/>
-          </a:xfrm>
-          <a:prstGeom prst="rect">
-            <a:avLst/>
-          </a:prstGeom>
-          <a:gradFill>
-            <a:gsLst>
-              <a:gs pos="19000">
-                <a:srgbClr val="000000">
-                  <a:alpha val="46000"/>
-                </a:srgbClr>
-              </a:gs>
-              <a:gs pos="99000">
-                <a:schemeClr val="accent1"/>
-              </a:gs>
-            </a:gsLst>
-            <a:lin ang="13200000" scaled="0"/>
-          </a:gradFill>
-          <a:ln>
-            <a:noFill/>
-          </a:ln>
-        </p:spPr>
-        <p:style>
-          <a:lnRef idx="2">
-            <a:schemeClr val="accent1">
-              <a:shade val="50000"/>
-            </a:schemeClr>
-          </a:lnRef>
-          <a:fillRef idx="1">
-            <a:schemeClr val="accent1"/>
-          </a:fillRef>
-          <a:effectRef idx="0">
-            <a:schemeClr val="accent1"/>
-          </a:effectRef>
-          <a:fontRef idx="minor">
-            <a:schemeClr val="lt1"/>
-          </a:fontRef>
-        </p:style>
-        <p:txBody>
-          <a:bodyPr rtlCol="0" anchor="ctr"/>
-          <a:lstStyle/>
-          <a:p>
-            <a:pPr algn="ctr"/>
-            <a:endParaRPr lang="en-US"/>
-          </a:p>
-        </p:txBody>
-      </p:sp>
-    </p:spTree>
-    <p:extLst>
-      <p:ext uri="{BB962C8B-B14F-4D97-AF65-F5344CB8AC3E}">
-        <p14:creationId xmlns:p14="http://schemas.microsoft.com/office/powerpoint/2010/main" val="1999348669"/>
-      </p:ext>
-    </p:extLst>
-  </p:cSld>
-  <p:clrMapOvr>
-    <a:masterClrMapping/>
-  </p:clrMapOvr>
-</p:sld>
-</file>
-
-<file path=ppt/slides/slide5.xml><?xml version="1.0" encoding="utf-8"?>
-<p:sld xmlns:a="http://schemas.openxmlformats.org/drawingml/2006/main" xmlns:r="http://schemas.openxmlformats.org/officeDocument/2006/relationships" xmlns:p="http://schemas.openxmlformats.org/presentationml/2006/main">
-  <p:cSld>
-    <p:bg>
-      <p:bgPr>
-        <a:solidFill>
-          <a:schemeClr val="bg1"/>
-        </a:solidFill>
-        <a:effectLst/>
-      </p:bgPr>
-    </p:bg>
-    <p:spTree>
-      <p:nvGrpSpPr>
-        <p:cNvPr id="1" name=""/>
-        <p:cNvGrpSpPr/>
-        <p:nvPr/>
-      </p:nvGrpSpPr>
-      <p:grpSpPr>
-        <a:xfrm>
-          <a:off x="0" y="0"/>
-          <a:ext cx="0" cy="0"/>
-          <a:chOff x="0" y="0"/>
-          <a:chExt cx="0" cy="0"/>
-        </a:xfrm>
-      </p:grpSpPr>
-      <p:sp>
-        <p:nvSpPr>
-          <p:cNvPr id="2" name="Title 1">
-            <a:extLst>
-              <a:ext uri="{FF2B5EF4-FFF2-40B4-BE49-F238E27FC236}">
-                <a16:creationId xmlns:a16="http://schemas.microsoft.com/office/drawing/2014/main" id="{A13306C9-CE7A-23A0-872C-0E567F4F6EC3}"/>
-              </a:ext>
-            </a:extLst>
-          </p:cNvPr>
-          <p:cNvSpPr>
-            <a:spLocks noGrp="1"/>
-          </p:cNvSpPr>
-          <p:nvPr>
-            <p:ph type="title"/>
-          </p:nvPr>
-        </p:nvSpPr>
-        <p:spPr>
-          <a:xfrm>
-            <a:off x="876693" y="741391"/>
-            <a:ext cx="3455821" cy="1616203"/>
-          </a:xfrm>
-        </p:spPr>
-        <p:txBody>
-          <a:bodyPr anchor="b">
-            <a:normAutofit/>
-          </a:bodyPr>
-          <a:lstStyle/>
-          <a:p>
-            <a:r>
-              <a:rPr lang="en-US" sz="3200" dirty="0" err="1"/>
-              <a:t>Visualización</a:t>
-            </a:r>
-            <a:r>
-              <a:rPr lang="en-US" sz="3200" dirty="0"/>
-              <a:t> de </a:t>
-            </a:r>
-            <a:r>
-              <a:rPr lang="en-US" sz="3200" dirty="0" err="1"/>
-              <a:t>los</a:t>
-            </a:r>
-            <a:r>
-              <a:rPr lang="en-US" sz="3200" dirty="0"/>
-              <a:t> </a:t>
-            </a:r>
-            <a:r>
-              <a:rPr lang="en-US" sz="3200" dirty="0" err="1"/>
-              <a:t>datos</a:t>
-            </a:r>
-          </a:p>
-        </p:txBody>
-      </p:sp>
-      <p:sp>
-        <p:nvSpPr>
-          <p:cNvPr id="8" name="Content Placeholder 7">
-            <a:extLst>
-              <a:ext uri="{FF2B5EF4-FFF2-40B4-BE49-F238E27FC236}">
-                <a16:creationId xmlns:a16="http://schemas.microsoft.com/office/drawing/2014/main" id="{D9678DC7-FA19-384D-41F0-6533B55D0B65}"/>
-              </a:ext>
-            </a:extLst>
-          </p:cNvPr>
-          <p:cNvSpPr>
-            <a:spLocks noGrp="1"/>
-          </p:cNvSpPr>
-          <p:nvPr>
-            <p:ph idx="1"/>
-          </p:nvPr>
-        </p:nvSpPr>
-        <p:spPr>
-          <a:xfrm>
-            <a:off x="876693" y="2533476"/>
-            <a:ext cx="3455821" cy="3447832"/>
-          </a:xfrm>
-        </p:spPr>
-        <p:txBody>
-          <a:bodyPr anchor="t">
-            <a:normAutofit/>
-          </a:bodyPr>
-          <a:lstStyle/>
-          <a:p>
-            <a:r>
-              <a:rPr lang="en-US" sz="2000" dirty="0"/>
-              <a:t>Es </a:t>
-            </a:r>
-            <a:r>
-              <a:rPr lang="en-US" sz="2000" dirty="0" err="1"/>
-              <a:t>posible</a:t>
-            </a:r>
-            <a:r>
-              <a:rPr lang="en-US" sz="2000" dirty="0"/>
-              <a:t> </a:t>
-            </a:r>
-            <a:r>
-              <a:rPr lang="en-US" sz="2000" dirty="0" err="1"/>
-              <a:t>observar</a:t>
-            </a:r>
-            <a:r>
-              <a:rPr lang="en-US" sz="2000" dirty="0"/>
-              <a:t> </a:t>
-            </a:r>
-            <a:r>
-              <a:rPr lang="en-US" sz="2000" dirty="0" err="1"/>
-              <a:t>que</a:t>
-            </a:r>
-            <a:r>
-              <a:rPr lang="en-US" sz="2000" dirty="0"/>
-              <a:t> </a:t>
-            </a:r>
-            <a:r>
-              <a:rPr lang="en-US" sz="2000" dirty="0" err="1"/>
-              <a:t>los</a:t>
-            </a:r>
-            <a:r>
-              <a:rPr lang="en-US" sz="2000" dirty="0"/>
-              <a:t> </a:t>
-            </a:r>
-            <a:r>
-              <a:rPr lang="en-US" sz="2000" dirty="0" err="1"/>
-              <a:t>datos</a:t>
-            </a:r>
-            <a:r>
-              <a:rPr lang="en-US" sz="2000" dirty="0"/>
-              <a:t> se </a:t>
-            </a:r>
-            <a:r>
-              <a:rPr lang="en-US" sz="2000" dirty="0" err="1"/>
-              <a:t>dividen</a:t>
-            </a:r>
-            <a:r>
-              <a:rPr lang="en-US" sz="2000" dirty="0"/>
-              <a:t> </a:t>
-            </a:r>
-            <a:r>
-              <a:rPr lang="en-US" sz="2000" dirty="0" err="1"/>
-              <a:t>en</a:t>
-            </a:r>
-            <a:r>
-              <a:rPr lang="en-US" sz="2000" dirty="0"/>
-              <a:t> dos conjuntos bien </a:t>
-            </a:r>
-            <a:r>
-              <a:rPr lang="en-US" sz="2000" dirty="0" err="1"/>
-              <a:t>diferenciados</a:t>
-            </a:r>
-            <a:r>
-              <a:rPr lang="en-US" sz="2000" dirty="0"/>
-              <a:t>.</a:t>
-            </a:r>
-          </a:p>
-        </p:txBody>
-      </p:sp>
-      <p:pic>
-        <p:nvPicPr>
-          <p:cNvPr id="4" name="Content Placeholder 3">
-            <a:extLst>
-              <a:ext uri="{FF2B5EF4-FFF2-40B4-BE49-F238E27FC236}">
-                <a16:creationId xmlns:a16="http://schemas.microsoft.com/office/drawing/2014/main" id="{F20DAE6F-2E2D-B070-56D2-3B9743617C73}"/>
-              </a:ext>
-            </a:extLst>
-          </p:cNvPr>
-          <p:cNvPicPr>
-            <a:picLocks noChangeAspect="1"/>
-          </p:cNvPicPr>
-          <p:nvPr/>
-        </p:nvPicPr>
-        <p:blipFill>
-          <a:blip r:embed="rId2"/>
-          <a:stretch>
-            <a:fillRect/>
-          </a:stretch>
-        </p:blipFill>
-        <p:spPr>
-          <a:xfrm>
-            <a:off x="4987672" y="1013690"/>
-            <a:ext cx="6128388" cy="4662477"/>
-          </a:xfrm>
-          <a:prstGeom prst="rect">
-            <a:avLst/>
-          </a:prstGeom>
-        </p:spPr>
-      </p:pic>
-      <p:grpSp>
-        <p:nvGrpSpPr>
-          <p:cNvPr id="11" name="Group 10">
-            <a:extLst>
-              <a:ext uri="{FF2B5EF4-FFF2-40B4-BE49-F238E27FC236}">
-                <a16:creationId xmlns:a16="http://schemas.microsoft.com/office/drawing/2014/main" id="{6258F736-B256-8039-9DC6-F4E49A5C5AD5}"/>
-              </a:ext>
-              <a:ext uri="{C183D7F6-B498-43B3-948B-1728B52AA6E4}">
-                <adec:decorative xmlns:adec="http://schemas.microsoft.com/office/drawing/2017/decorative" val="1"/>
-              </a:ext>
-            </a:extLst>
-          </p:cNvPr>
-          <p:cNvGrpSpPr>
-            <a:grpSpLocks noGrp="1" noUngrp="1" noRot="1" noChangeAspect="1" noMove="1" noResize="1"/>
-          </p:cNvGrpSpPr>
-          <p:nvPr>
-            <p:extLst>
-              <p:ext uri="{386F3935-93C4-4BCD-93E2-E3B085C9AB24}">
-                <p16:designElem xmlns:p16="http://schemas.microsoft.com/office/powerpoint/2015/main" val="1"/>
-              </p:ext>
-            </p:extLst>
-          </p:nvPr>
-        </p:nvGrpSpPr>
-        <p:grpSpPr>
-          <a:xfrm flipH="1">
-            <a:off x="12068638" y="0"/>
-            <a:ext cx="123362" cy="6858000"/>
-            <a:chOff x="12068638" y="0"/>
-            <a:chExt cx="123362" cy="6858000"/>
-          </a:xfrm>
-        </p:grpSpPr>
-        <p:sp>
-          <p:nvSpPr>
-            <p:cNvPr id="12" name="Rectangle 11">
-              <a:extLst>
-                <a:ext uri="{FF2B5EF4-FFF2-40B4-BE49-F238E27FC236}">
-                  <a16:creationId xmlns:a16="http://schemas.microsoft.com/office/drawing/2014/main" id="{10B4520A-996E-330C-99DA-69CA4D89E906}"/>
-                </a:ext>
-                <a:ext uri="{C183D7F6-B498-43B3-948B-1728B52AA6E4}">
-                  <adec:decorative xmlns:adec="http://schemas.microsoft.com/office/drawing/2017/decorative" val="1"/>
-                </a:ext>
-              </a:extLst>
-            </p:cNvPr>
-            <p:cNvSpPr/>
-            <p:nvPr>
-              <p:extLst>
-                <p:ext uri="{386F3935-93C4-4BCD-93E2-E3B085C9AB24}">
-                  <p16:designElem xmlns:p16="http://schemas.microsoft.com/office/powerpoint/2015/main" val="1"/>
-                </p:ext>
-              </p:extLst>
-            </p:nvPr>
-          </p:nvSpPr>
-          <p:spPr>
-            <a:xfrm>
-              <a:off x="12068638" y="0"/>
-              <a:ext cx="123362" cy="6858000"/>
-            </a:xfrm>
-            <a:prstGeom prst="rect">
-              <a:avLst/>
-            </a:prstGeom>
-            <a:gradFill>
-              <a:gsLst>
-                <a:gs pos="0">
-                  <a:schemeClr val="accent2"/>
-                </a:gs>
-                <a:gs pos="100000">
-                  <a:schemeClr val="accent5"/>
-                </a:gs>
-              </a:gsLst>
-              <a:lin ang="1800000" scaled="0"/>
-            </a:gradFill>
-            <a:ln>
-              <a:noFill/>
-            </a:ln>
-          </p:spPr>
-          <p:style>
-            <a:lnRef idx="2">
-              <a:schemeClr val="accent1">
-                <a:shade val="50000"/>
-              </a:schemeClr>
-            </a:lnRef>
-            <a:fillRef idx="1">
-              <a:schemeClr val="accent1"/>
-            </a:fillRef>
-            <a:effectRef idx="0">
-              <a:schemeClr val="accent1"/>
-            </a:effectRef>
-            <a:fontRef idx="minor">
-              <a:schemeClr val="lt1"/>
-            </a:fontRef>
-          </p:style>
-          <p:txBody>
-            <a:bodyPr rtlCol="0" anchor="ctr"/>
-            <a:lstStyle/>
-            <a:p>
-              <a:pPr algn="ctr"/>
-              <a:endParaRPr lang="en-US"/>
-            </a:p>
-          </p:txBody>
-        </p:sp>
-        <p:sp>
-          <p:nvSpPr>
-            <p:cNvPr id="13" name="Rectangle 12">
-              <a:extLst>
-                <a:ext uri="{FF2B5EF4-FFF2-40B4-BE49-F238E27FC236}">
-                  <a16:creationId xmlns:a16="http://schemas.microsoft.com/office/drawing/2014/main" id="{EC8FA945-E356-695F-18D6-CAD4EF34FE4A}"/>
-                </a:ext>
-                <a:ext uri="{C183D7F6-B498-43B3-948B-1728B52AA6E4}">
-                  <adec:decorative xmlns:adec="http://schemas.microsoft.com/office/drawing/2017/decorative" val="1"/>
-                </a:ext>
-              </a:extLst>
-            </p:cNvPr>
-            <p:cNvSpPr/>
-            <p:nvPr>
-              <p:extLst>
-                <p:ext uri="{386F3935-93C4-4BCD-93E2-E3B085C9AB24}">
-                  <p16:designElem xmlns:p16="http://schemas.microsoft.com/office/powerpoint/2015/main" val="1"/>
-                </p:ext>
-              </p:extLst>
-            </p:nvPr>
-          </p:nvSpPr>
-          <p:spPr>
-            <a:xfrm>
-              <a:off x="12068638" y="3527553"/>
-              <a:ext cx="123362" cy="3330447"/>
-            </a:xfrm>
-            <a:prstGeom prst="rect">
-              <a:avLst/>
-            </a:prstGeom>
-            <a:gradFill>
-              <a:gsLst>
-                <a:gs pos="19000">
-                  <a:schemeClr val="accent5">
-                    <a:lumMod val="60000"/>
-                    <a:lumOff val="40000"/>
-                    <a:alpha val="0"/>
-                  </a:schemeClr>
-                </a:gs>
-                <a:gs pos="100000">
-                  <a:schemeClr val="accent5">
-                    <a:lumMod val="60000"/>
-                    <a:lumOff val="40000"/>
-                  </a:schemeClr>
-                </a:gs>
-              </a:gsLst>
-              <a:lin ang="600000" scaled="0"/>
-            </a:gradFill>
-            <a:ln>
-              <a:noFill/>
-            </a:ln>
-          </p:spPr>
-          <p:style>
-            <a:lnRef idx="2">
-              <a:schemeClr val="accent1">
-                <a:shade val="50000"/>
-              </a:schemeClr>
-            </a:lnRef>
-            <a:fillRef idx="1">
-              <a:schemeClr val="accent1"/>
-            </a:fillRef>
-            <a:effectRef idx="0">
-              <a:schemeClr val="accent1"/>
-            </a:effectRef>
-            <a:fontRef idx="minor">
-              <a:schemeClr val="lt1"/>
-            </a:fontRef>
-          </p:style>
-          <p:txBody>
-            <a:bodyPr rtlCol="0" anchor="ctr"/>
-            <a:lstStyle/>
-            <a:p>
-              <a:pPr algn="ctr"/>
-              <a:endParaRPr lang="en-US"/>
-            </a:p>
-          </p:txBody>
-        </p:sp>
-      </p:grpSp>
-      <p:sp>
-        <p:nvSpPr>
-          <p:cNvPr id="5" name="TextBox 4">
-            <a:extLst>
-              <a:ext uri="{FF2B5EF4-FFF2-40B4-BE49-F238E27FC236}">
-                <a16:creationId xmlns:a16="http://schemas.microsoft.com/office/drawing/2014/main" id="{F11294EC-74C2-68D6-F7FD-3E33FDF18C9F}"/>
-              </a:ext>
-            </a:extLst>
-          </p:cNvPr>
-          <p:cNvSpPr txBox="1"/>
-          <p:nvPr/>
-        </p:nvSpPr>
-        <p:spPr>
-          <a:xfrm>
-            <a:off x="5425230" y="5681379"/>
-            <a:ext cx="4897400" cy="584775"/>
-          </a:xfrm>
-          <a:prstGeom prst="rect">
-            <a:avLst/>
-          </a:prstGeom>
-          <a:noFill/>
-        </p:spPr>
-        <p:txBody>
-          <a:bodyPr rot="0" spcFirstLastPara="0" vertOverflow="overflow" horzOverflow="overflow" vert="horz" wrap="square" lIns="91440" tIns="45720" rIns="91440" bIns="45720" numCol="1" spcCol="0" rtlCol="0" fromWordArt="0" anchor="t" anchorCtr="0" forceAA="0" compatLnSpc="1">
-            <a:prstTxWarp prst="textNoShape">
-              <a:avLst/>
-            </a:prstTxWarp>
-            <a:spAutoFit/>
-          </a:bodyPr>
-          <a:lstStyle/>
-          <a:p>
-            <a:r>
-              <a:rPr lang="en-US" sz="1600" dirty="0"/>
-              <a:t>Figura1. </a:t>
-            </a:r>
-            <a:r>
-              <a:rPr lang="en-US" sz="1600" dirty="0" err="1"/>
-              <a:t>Visualización</a:t>
-            </a:r>
-            <a:r>
-              <a:rPr lang="en-US" sz="1600" dirty="0"/>
-              <a:t> con PCA del conjunto de </a:t>
-            </a:r>
-            <a:r>
-              <a:rPr lang="en-US" sz="1600" dirty="0" err="1"/>
-              <a:t>datos</a:t>
-            </a:r>
-            <a:r>
-              <a:rPr lang="en-US" sz="1600" dirty="0"/>
-              <a:t> </a:t>
-            </a:r>
-            <a:r>
-              <a:rPr lang="en-US" sz="1600" dirty="0" err="1"/>
-              <a:t>usado</a:t>
-            </a:r>
-            <a:endParaRPr lang="en-US" sz="1600" dirty="0"/>
-          </a:p>
-        </p:txBody>
-      </p:sp>
-    </p:spTree>
-    <p:extLst>
-      <p:ext uri="{BB962C8B-B14F-4D97-AF65-F5344CB8AC3E}">
-        <p14:creationId xmlns:p14="http://schemas.microsoft.com/office/powerpoint/2010/main" val="2239044825"/>
-      </p:ext>
-    </p:extLst>
-  </p:cSld>
-  <p:clrMapOvr>
-    <a:masterClrMapping/>
-  </p:clrMapOvr>
-</p:sld>
-</file>
-
-<file path=ppt/slides/slide6.xml><?xml version="1.0" encoding="utf-8"?>
-<p:sld xmlns:a="http://schemas.openxmlformats.org/drawingml/2006/main" xmlns:r="http://schemas.openxmlformats.org/officeDocument/2006/relationships" xmlns:p="http://schemas.openxmlformats.org/presentationml/2006/main">
-  <p:cSld>
-    <p:bg>
-      <p:bgPr>
-        <a:solidFill>
-          <a:schemeClr val="bg1"/>
-        </a:solidFill>
-        <a:effectLst/>
-      </p:bgPr>
-    </p:bg>
-    <p:spTree>
-      <p:nvGrpSpPr>
-        <p:cNvPr id="1" name=""/>
-        <p:cNvGrpSpPr/>
-        <p:nvPr/>
-      </p:nvGrpSpPr>
-      <p:grpSpPr>
-        <a:xfrm>
-          <a:off x="0" y="0"/>
-          <a:ext cx="0" cy="0"/>
-          <a:chOff x="0" y="0"/>
-          <a:chExt cx="0" cy="0"/>
-        </a:xfrm>
-      </p:grpSpPr>
-      <p:sp useBgFill="1">
-        <p:nvSpPr>
-          <p:cNvPr id="21" name="Rectangle 20">
-            <a:extLst>
-              <a:ext uri="{FF2B5EF4-FFF2-40B4-BE49-F238E27FC236}">
-                <a16:creationId xmlns:a16="http://schemas.microsoft.com/office/drawing/2014/main" id="{0B9EE3F3-89B7-43C3-8651-C4C96830993D}"/>
-              </a:ext>
-              <a:ext uri="{C183D7F6-B498-43B3-948B-1728B52AA6E4}">
-                <adec:decorative xmlns:adec="http://schemas.microsoft.com/office/drawing/2017/decorative" val="1"/>
-              </a:ext>
-            </a:extLst>
-          </p:cNvPr>
-          <p:cNvSpPr>
-            <a:spLocks noGrp="1" noRot="1" noChangeAspect="1" noMove="1" noResize="1" noEditPoints="1" noAdjustHandles="1" noChangeArrowheads="1" noChangeShapeType="1" noTextEdit="1"/>
-          </p:cNvSpPr>
-          <p:nvPr>
-            <p:extLst>
-              <p:ext uri="{386F3935-93C4-4BCD-93E2-E3B085C9AB24}">
-                <p16:designElem xmlns:p16="http://schemas.microsoft.com/office/powerpoint/2015/main" val="1"/>
-              </p:ext>
-            </p:extLst>
-          </p:nvPr>
-        </p:nvSpPr>
-        <p:spPr>
-          <a:xfrm>
-            <a:off x="0" y="0"/>
-            <a:ext cx="12192000" cy="6858000"/>
-          </a:xfrm>
-          <a:prstGeom prst="rect">
-            <a:avLst/>
-          </a:prstGeom>
-          <a:ln>
-            <a:noFill/>
-          </a:ln>
-        </p:spPr>
-        <p:style>
-          <a:lnRef idx="2">
-            <a:schemeClr val="accent1">
-              <a:shade val="50000"/>
-            </a:schemeClr>
-          </a:lnRef>
-          <a:fillRef idx="1">
-            <a:schemeClr val="accent1"/>
-          </a:fillRef>
-          <a:effectRef idx="0">
-            <a:schemeClr val="accent1"/>
-          </a:effectRef>
-          <a:fontRef idx="minor">
-            <a:schemeClr val="lt1"/>
-          </a:fontRef>
-        </p:style>
-        <p:txBody>
-          <a:bodyPr rtlCol="0" anchor="ctr"/>
-          <a:lstStyle/>
-          <a:p>
-            <a:pPr algn="ctr"/>
-            <a:endParaRPr lang="en-US"/>
-          </a:p>
-        </p:txBody>
-      </p:sp>
-      <p:sp>
-        <p:nvSpPr>
-          <p:cNvPr id="2" name="Título 1">
-            <a:extLst>
-              <a:ext uri="{FF2B5EF4-FFF2-40B4-BE49-F238E27FC236}">
-                <a16:creationId xmlns:a16="http://schemas.microsoft.com/office/drawing/2014/main" id="{357B8F08-64E1-BDCA-745A-0D80ABE25C62}"/>
-              </a:ext>
-            </a:extLst>
-          </p:cNvPr>
-          <p:cNvSpPr>
-            <a:spLocks noGrp="1"/>
-          </p:cNvSpPr>
-          <p:nvPr>
-            <p:ph type="title"/>
-          </p:nvPr>
-        </p:nvSpPr>
-        <p:spPr>
-          <a:xfrm>
-            <a:off x="411480" y="991443"/>
-            <a:ext cx="4443154" cy="1087819"/>
-          </a:xfrm>
-        </p:spPr>
-        <p:txBody>
-          <a:bodyPr anchor="b">
-            <a:normAutofit/>
-          </a:bodyPr>
-          <a:lstStyle/>
-          <a:p>
-            <a:r>
-              <a:rPr lang="es-GT" sz="3100" dirty="0"/>
-              <a:t>Influencia de la pandemia en el uso de bicicletas</a:t>
-            </a:r>
-          </a:p>
-        </p:txBody>
-      </p:sp>
-      <p:sp>
-        <p:nvSpPr>
-          <p:cNvPr id="23" name="Rectangle 22">
-            <a:extLst>
-              <a:ext uri="{FF2B5EF4-FFF2-40B4-BE49-F238E27FC236}">
-                <a16:creationId xmlns:a16="http://schemas.microsoft.com/office/drawing/2014/main" id="{33AE4636-AEEC-45D6-84D4-7AC2DA48ECF8}"/>
-              </a:ext>
-              <a:ext uri="{C183D7F6-B498-43B3-948B-1728B52AA6E4}">
-                <adec:decorative xmlns:adec="http://schemas.microsoft.com/office/drawing/2017/decorative" val="1"/>
-              </a:ext>
-            </a:extLst>
-          </p:cNvPr>
-          <p:cNvSpPr>
-            <a:spLocks noGrp="1" noRot="1" noChangeAspect="1" noMove="1" noResize="1" noEditPoints="1" noAdjustHandles="1" noChangeArrowheads="1" noChangeShapeType="1" noTextEdit="1"/>
-          </p:cNvSpPr>
-          <p:nvPr>
-            <p:extLst>
-              <p:ext uri="{386F3935-93C4-4BCD-93E2-E3B085C9AB24}">
-                <p16:designElem xmlns:p16="http://schemas.microsoft.com/office/powerpoint/2015/main" val="1"/>
-              </p:ext>
-            </p:extLst>
-          </p:nvPr>
-        </p:nvSpPr>
-        <p:spPr>
-          <a:xfrm rot="5400000">
-            <a:off x="649223" y="387939"/>
-            <a:ext cx="73152" cy="548640"/>
-          </a:xfrm>
-          <a:prstGeom prst="rect">
-            <a:avLst/>
-          </a:prstGeom>
-          <a:solidFill>
-            <a:schemeClr val="accent2"/>
-          </a:solidFill>
-          <a:ln>
-            <a:noFill/>
-          </a:ln>
-        </p:spPr>
-        <p:style>
-          <a:lnRef idx="2">
-            <a:schemeClr val="accent1">
-              <a:shade val="50000"/>
-            </a:schemeClr>
-          </a:lnRef>
-          <a:fillRef idx="1">
-            <a:schemeClr val="accent1"/>
-          </a:fillRef>
-          <a:effectRef idx="0">
-            <a:schemeClr val="accent1"/>
-          </a:effectRef>
-          <a:fontRef idx="minor">
-            <a:schemeClr val="lt1"/>
-          </a:fontRef>
-        </p:style>
-        <p:txBody>
-          <a:bodyPr rtlCol="0" anchor="ctr"/>
-          <a:lstStyle/>
-          <a:p>
-            <a:pPr algn="ctr"/>
-            <a:endParaRPr lang="en-US">
-              <a:solidFill>
-                <a:prstClr val="white"/>
-              </a:solidFill>
-              <a:latin typeface="Calibri" panose="020F0502020204030204"/>
-            </a:endParaRPr>
-          </a:p>
-        </p:txBody>
-      </p:sp>
-      <p:sp>
-        <p:nvSpPr>
-          <p:cNvPr id="25" name="Rectangle 24">
-            <a:extLst>
-              <a:ext uri="{FF2B5EF4-FFF2-40B4-BE49-F238E27FC236}">
-                <a16:creationId xmlns:a16="http://schemas.microsoft.com/office/drawing/2014/main" id="{8D9CE0F4-2EB2-4F1F-8AAC-DB3571D9FE10}"/>
-              </a:ext>
-              <a:ext uri="{C183D7F6-B498-43B3-948B-1728B52AA6E4}">
-                <adec:decorative xmlns:adec="http://schemas.microsoft.com/office/drawing/2017/decorative" val="1"/>
-              </a:ext>
-            </a:extLst>
-          </p:cNvPr>
-          <p:cNvSpPr>
-            <a:spLocks noGrp="1" noRot="1" noChangeAspect="1" noMove="1" noResize="1" noEditPoints="1" noAdjustHandles="1" noChangeArrowheads="1" noChangeShapeType="1" noTextEdit="1"/>
-          </p:cNvSpPr>
-          <p:nvPr>
-            <p:extLst>
-              <p:ext uri="{386F3935-93C4-4BCD-93E2-E3B085C9AB24}">
-                <p16:designElem xmlns:p16="http://schemas.microsoft.com/office/powerpoint/2015/main" val="1"/>
-              </p:ext>
-            </p:extLst>
-          </p:nvPr>
-        </p:nvSpPr>
-        <p:spPr>
-          <a:xfrm>
-            <a:off x="411480" y="2285541"/>
-            <a:ext cx="4389120" cy="18288"/>
-          </a:xfrm>
-          <a:prstGeom prst="rect">
-            <a:avLst/>
-          </a:prstGeom>
-          <a:solidFill>
-            <a:srgbClr val="D5D5D5"/>
-          </a:solidFill>
-          <a:ln w="3175">
-            <a:noFill/>
-          </a:ln>
-          <a:effectLst/>
-        </p:spPr>
-        <p:style>
-          <a:lnRef idx="2">
-            <a:schemeClr val="accent1">
-              <a:shade val="50000"/>
-            </a:schemeClr>
-          </a:lnRef>
-          <a:fillRef idx="1">
-            <a:schemeClr val="accent1"/>
-          </a:fillRef>
-          <a:effectRef idx="0">
-            <a:schemeClr val="accent1"/>
-          </a:effectRef>
-          <a:fontRef idx="minor">
-            <a:schemeClr val="lt1"/>
-          </a:fontRef>
-        </p:style>
-        <p:txBody>
-          <a:bodyPr rtlCol="0" anchor="ctr"/>
-          <a:lstStyle/>
-          <a:p>
-            <a:pPr algn="ctr"/>
-            <a:endParaRPr lang="en-US">
-              <a:solidFill>
-                <a:prstClr val="white"/>
-              </a:solidFill>
-              <a:latin typeface="Calibri" panose="020F0502020204030204"/>
-            </a:endParaRPr>
-          </a:p>
-        </p:txBody>
-      </p:sp>
-      <p:sp>
-        <p:nvSpPr>
-          <p:cNvPr id="9" name="Content Placeholder 8">
-            <a:extLst>
-              <a:ext uri="{FF2B5EF4-FFF2-40B4-BE49-F238E27FC236}">
-                <a16:creationId xmlns:a16="http://schemas.microsoft.com/office/drawing/2014/main" id="{FBC19EE0-9B19-4047-66B9-58DA7010886F}"/>
-              </a:ext>
-            </a:extLst>
-          </p:cNvPr>
-          <p:cNvSpPr>
-            <a:spLocks noGrp="1"/>
-          </p:cNvSpPr>
-          <p:nvPr>
-            <p:ph idx="1"/>
-          </p:nvPr>
-        </p:nvSpPr>
-        <p:spPr>
-          <a:xfrm>
-            <a:off x="411480" y="2684095"/>
-            <a:ext cx="4443154" cy="3492868"/>
-          </a:xfrm>
-        </p:spPr>
-        <p:txBody>
-          <a:bodyPr>
-            <a:normAutofit/>
-          </a:bodyPr>
-          <a:lstStyle/>
-          <a:p>
-            <a:r>
-              <a:rPr lang="en-US" sz="1800" dirty="0"/>
-              <a:t>Se </a:t>
-            </a:r>
-            <a:r>
-              <a:rPr lang="en-US" sz="1800" dirty="0" err="1"/>
-              <a:t>observa</a:t>
-            </a:r>
-            <a:r>
-              <a:rPr lang="en-US" sz="1800" dirty="0"/>
-              <a:t> </a:t>
-            </a:r>
-            <a:r>
-              <a:rPr lang="en-US" sz="1800" dirty="0" err="1"/>
-              <a:t>en</a:t>
-            </a:r>
-            <a:r>
-              <a:rPr lang="en-US" sz="1800" dirty="0"/>
-              <a:t> la imagen </a:t>
-            </a:r>
-            <a:r>
-              <a:rPr lang="en-US" sz="1800" dirty="0" err="1"/>
-              <a:t>que</a:t>
-            </a:r>
-            <a:r>
-              <a:rPr lang="en-US" sz="1800" dirty="0"/>
-              <a:t> </a:t>
-            </a:r>
-            <a:r>
-              <a:rPr lang="en-US" sz="1800" dirty="0" err="1"/>
-              <a:t>el</a:t>
-            </a:r>
-            <a:r>
-              <a:rPr lang="en-US" sz="1800" dirty="0"/>
-              <a:t> </a:t>
-            </a:r>
-            <a:r>
-              <a:rPr lang="en-US" sz="1800" dirty="0" err="1"/>
-              <a:t>uso</a:t>
-            </a:r>
-            <a:r>
-              <a:rPr lang="en-US" sz="1800" dirty="0"/>
-              <a:t> de las </a:t>
-            </a:r>
-            <a:r>
-              <a:rPr lang="en-US" sz="1800" dirty="0" err="1"/>
-              <a:t>bicicletas</a:t>
-            </a:r>
-            <a:r>
-              <a:rPr lang="en-US" sz="1800" dirty="0"/>
-              <a:t> </a:t>
-            </a:r>
-            <a:r>
-              <a:rPr lang="en-US" sz="1800" dirty="0" err="1"/>
-              <a:t>fue</a:t>
-            </a:r>
-            <a:r>
-              <a:rPr lang="en-US" sz="1800" dirty="0"/>
-              <a:t> mayor </a:t>
-            </a:r>
-            <a:r>
-              <a:rPr lang="en-US" sz="1800" dirty="0" err="1"/>
-              <a:t>después</a:t>
-            </a:r>
-            <a:r>
-              <a:rPr lang="en-US" sz="1800" dirty="0"/>
-              <a:t> de la pandemia </a:t>
-            </a:r>
-            <a:r>
-              <a:rPr lang="en-US" sz="1800" dirty="0" err="1"/>
-              <a:t>que</a:t>
-            </a:r>
-            <a:r>
-              <a:rPr lang="en-US" sz="1800" dirty="0"/>
-              <a:t> antes de la </a:t>
-            </a:r>
-            <a:r>
-              <a:rPr lang="en-US" sz="1800" dirty="0" err="1"/>
-              <a:t>misma</a:t>
-            </a:r>
-            <a:r>
-              <a:rPr lang="en-US" sz="1800" dirty="0"/>
-              <a:t>.</a:t>
-            </a:r>
-          </a:p>
-        </p:txBody>
-      </p:sp>
-      <p:pic>
-        <p:nvPicPr>
-          <p:cNvPr id="5" name="Marcador de contenido 4">
-            <a:extLst>
-              <a:ext uri="{FF2B5EF4-FFF2-40B4-BE49-F238E27FC236}">
-                <a16:creationId xmlns:a16="http://schemas.microsoft.com/office/drawing/2014/main" id="{01EC1150-20D1-2C04-2018-215E831ACDA2}"/>
-              </a:ext>
-            </a:extLst>
-          </p:cNvPr>
-          <p:cNvPicPr>
-            <a:picLocks noChangeAspect="1"/>
-          </p:cNvPicPr>
-          <p:nvPr/>
-        </p:nvPicPr>
-        <p:blipFill>
-          <a:blip r:embed="rId2"/>
-          <a:stretch>
-            <a:fillRect/>
-          </a:stretch>
-        </p:blipFill>
-        <p:spPr>
-          <a:xfrm>
-            <a:off x="5385816" y="1742914"/>
-            <a:ext cx="6440424" cy="3316818"/>
-          </a:xfrm>
-          <a:prstGeom prst="rect">
-            <a:avLst/>
-          </a:prstGeom>
-        </p:spPr>
-      </p:pic>
-      <p:sp>
-        <p:nvSpPr>
-          <p:cNvPr id="6" name="TextBox 4">
-            <a:extLst>
-              <a:ext uri="{FF2B5EF4-FFF2-40B4-BE49-F238E27FC236}">
-                <a16:creationId xmlns:a16="http://schemas.microsoft.com/office/drawing/2014/main" id="{E15F4B84-8A57-CD3F-DD4D-A8F67E221A9E}"/>
-              </a:ext>
-            </a:extLst>
-          </p:cNvPr>
-          <p:cNvSpPr txBox="1"/>
-          <p:nvPr/>
-        </p:nvSpPr>
-        <p:spPr>
-          <a:xfrm>
-            <a:off x="6552281" y="5181649"/>
-            <a:ext cx="4897400" cy="584775"/>
-          </a:xfrm>
-          <a:prstGeom prst="rect">
-            <a:avLst/>
-          </a:prstGeom>
-          <a:noFill/>
-        </p:spPr>
-        <p:txBody>
-          <a:bodyPr rot="0" spcFirstLastPara="0" vertOverflow="overflow" horzOverflow="overflow" vert="horz" wrap="square" lIns="91440" tIns="45720" rIns="91440" bIns="45720" numCol="1" spcCol="0" rtlCol="0" fromWordArt="0" anchor="t" anchorCtr="0" forceAA="0" compatLnSpc="1">
-            <a:prstTxWarp prst="textNoShape">
-              <a:avLst/>
-            </a:prstTxWarp>
-            <a:spAutoFit/>
-          </a:bodyPr>
-          <a:lstStyle/>
-          <a:p>
-            <a:r>
-              <a:rPr lang="en-US" sz="1600" dirty="0"/>
-              <a:t>Figura2. </a:t>
-            </a:r>
-            <a:r>
-              <a:rPr lang="en-US" sz="1600" dirty="0" err="1"/>
-              <a:t>Tendencia</a:t>
-            </a:r>
-            <a:r>
-              <a:rPr lang="en-US" sz="1600" dirty="0"/>
-              <a:t> </a:t>
-            </a:r>
-            <a:r>
-              <a:rPr lang="en-US" sz="1600" dirty="0" err="1"/>
-              <a:t>en</a:t>
-            </a:r>
-            <a:r>
-              <a:rPr lang="en-US" sz="1600" dirty="0"/>
-              <a:t> </a:t>
-            </a:r>
-            <a:r>
-              <a:rPr lang="en-US" sz="1600" dirty="0" err="1"/>
-              <a:t>los</a:t>
-            </a:r>
-            <a:r>
-              <a:rPr lang="en-US" sz="1600" dirty="0"/>
-              <a:t> </a:t>
-            </a:r>
-            <a:r>
-              <a:rPr lang="en-US" sz="1600" dirty="0" err="1"/>
-              <a:t>préstamos</a:t>
-            </a:r>
-            <a:r>
-              <a:rPr lang="en-US" sz="1600" dirty="0"/>
-              <a:t> </a:t>
-            </a:r>
-            <a:r>
-              <a:rPr lang="en-US" sz="1600" dirty="0" err="1"/>
-              <a:t>promedio</a:t>
-            </a:r>
-            <a:r>
-              <a:rPr lang="en-US" sz="1600" dirty="0"/>
-              <a:t> de </a:t>
-            </a:r>
-            <a:r>
-              <a:rPr lang="en-US" sz="1600" dirty="0" err="1"/>
-              <a:t>bicicletas</a:t>
-            </a:r>
-            <a:r>
-              <a:rPr lang="en-US" sz="1600" dirty="0"/>
-              <a:t>.</a:t>
-            </a:r>
-          </a:p>
-        </p:txBody>
-      </p:sp>
-    </p:spTree>
-    <p:extLst>
-      <p:ext uri="{BB962C8B-B14F-4D97-AF65-F5344CB8AC3E}">
-        <p14:creationId xmlns:p14="http://schemas.microsoft.com/office/powerpoint/2010/main" val="3910698323"/>
-      </p:ext>
-    </p:extLst>
-  </p:cSld>
-  <p:clrMapOvr>
-    <a:masterClrMapping/>
-  </p:clrMapOvr>
-</p:sld>
-</file>
-
-<file path=ppt/slides/slide7.xml><?xml version="1.0" encoding="utf-8"?>
+<file path=ppt/slides/slide10.xml><?xml version="1.0" encoding="utf-8"?>
 <p:sld xmlns:a="http://schemas.openxmlformats.org/drawingml/2006/main" xmlns:r="http://schemas.openxmlformats.org/officeDocument/2006/relationships" xmlns:p="http://schemas.openxmlformats.org/presentationml/2006/main">
   <p:cSld>
     <p:bg>
@@ -5786,7 +3724,7 @@
 </p:sld>
 </file>
 
-<file path=ppt/slides/slide8.xml><?xml version="1.0" encoding="utf-8"?>
+<file path=ppt/slides/slide11.xml><?xml version="1.0" encoding="utf-8"?>
 <p:sld xmlns:a="http://schemas.openxmlformats.org/drawingml/2006/main" xmlns:r="http://schemas.openxmlformats.org/officeDocument/2006/relationships" xmlns:p="http://schemas.openxmlformats.org/presentationml/2006/main">
   <p:cSld>
     <p:spTree>
@@ -5854,225 +3792,57 @@
           </a:bodyPr>
           <a:lstStyle/>
           <a:p>
-            <a:r>
-              <a:rPr lang="en-US" dirty="0"/>
-              <a:t>Durante la Semana Santa, se </a:t>
-            </a:r>
-            <a:r>
-              <a:rPr lang="en-US" dirty="0" err="1"/>
-              <a:t>hacen</a:t>
-            </a:r>
-            <a:r>
-              <a:rPr lang="en-US" dirty="0"/>
-              <a:t> </a:t>
-            </a:r>
-            <a:r>
-              <a:rPr lang="en-US" dirty="0" err="1"/>
-              <a:t>menos</a:t>
-            </a:r>
-            <a:r>
-              <a:rPr lang="en-US" dirty="0"/>
-              <a:t> </a:t>
-            </a:r>
-            <a:r>
-              <a:rPr lang="en-US" dirty="0" err="1"/>
-              <a:t>retiros</a:t>
-            </a:r>
-            <a:r>
-              <a:rPr lang="en-US" dirty="0"/>
-              <a:t> </a:t>
-            </a:r>
-            <a:r>
-              <a:rPr lang="en-US" dirty="0" err="1"/>
-              <a:t>desde</a:t>
-            </a:r>
-            <a:r>
-              <a:rPr lang="en-US" dirty="0"/>
-              <a:t> </a:t>
-            </a:r>
-            <a:r>
-              <a:rPr lang="en-US" dirty="0" err="1"/>
-              <a:t>el</a:t>
-            </a:r>
-            <a:r>
-              <a:rPr lang="en-US" dirty="0"/>
-              <a:t> Jueves Santo a Domingo de </a:t>
-            </a:r>
-            <a:r>
-              <a:rPr lang="en-US" dirty="0" err="1"/>
+            <a:pPr algn="just"/>
+            <a:r>
+              <a:rPr lang="es-GT" noProof="0" dirty="0"/>
+              <a:t>Durante la Semana Santa, se hacen menos retiros desde el Jueves Santo a Domingo de </a:t>
+            </a:r>
+            <a:r>
+              <a:rPr lang="es-GT" noProof="0" dirty="0" err="1"/>
               <a:t>Resurección</a:t>
             </a:r>
             <a:r>
-              <a:rPr lang="en-US" dirty="0"/>
-              <a:t> </a:t>
-            </a:r>
-            <a:r>
-              <a:rPr lang="en-US" dirty="0" err="1"/>
-              <a:t>que</a:t>
-            </a:r>
-            <a:r>
-              <a:rPr lang="en-US" dirty="0"/>
-              <a:t> </a:t>
-            </a:r>
-            <a:r>
-              <a:rPr lang="en-US" dirty="0" err="1"/>
-              <a:t>en</a:t>
-            </a:r>
-            <a:r>
-              <a:rPr lang="en-US" dirty="0"/>
-              <a:t> </a:t>
-            </a:r>
-            <a:r>
-              <a:rPr lang="en-US" dirty="0" err="1"/>
-              <a:t>el</a:t>
-            </a:r>
-            <a:r>
-              <a:rPr lang="en-US" dirty="0"/>
-              <a:t> resto de la </a:t>
-            </a:r>
-            <a:r>
-              <a:rPr lang="en-US" dirty="0" err="1"/>
-              <a:t>semana</a:t>
-            </a:r>
-            <a:r>
-              <a:rPr lang="en-US" dirty="0"/>
-              <a:t>.</a:t>
-            </a:r>
-          </a:p>
-          <a:p>
-            <a:r>
-              <a:rPr lang="en-US" dirty="0"/>
-              <a:t>Se </a:t>
-            </a:r>
-            <a:r>
-              <a:rPr lang="en-US" dirty="0" err="1"/>
-              <a:t>tiene</a:t>
-            </a:r>
-            <a:r>
-              <a:rPr lang="en-US" dirty="0"/>
-              <a:t> </a:t>
-            </a:r>
-            <a:r>
-              <a:rPr lang="en-US" dirty="0" err="1"/>
-              <a:t>que</a:t>
-            </a:r>
-            <a:r>
-              <a:rPr lang="en-US" dirty="0"/>
-              <a:t> </a:t>
-            </a:r>
-            <a:r>
-              <a:rPr lang="en-US" dirty="0" err="1"/>
-              <a:t>el</a:t>
-            </a:r>
-            <a:r>
-              <a:rPr lang="en-US" dirty="0"/>
-              <a:t> </a:t>
-            </a:r>
-            <a:r>
-              <a:rPr lang="en-US" dirty="0" err="1"/>
-              <a:t>préstamo</a:t>
-            </a:r>
-            <a:r>
-              <a:rPr lang="en-US" dirty="0"/>
-              <a:t> de </a:t>
-            </a:r>
-            <a:r>
-              <a:rPr lang="en-US" dirty="0" err="1"/>
-              <a:t>bicicletas</a:t>
-            </a:r>
-            <a:r>
-              <a:rPr lang="en-US" dirty="0"/>
-              <a:t> ha </a:t>
-            </a:r>
-            <a:r>
-              <a:rPr lang="en-US" dirty="0" err="1"/>
-              <a:t>sido</a:t>
-            </a:r>
-            <a:r>
-              <a:rPr lang="en-US" dirty="0"/>
-              <a:t> </a:t>
-            </a:r>
-            <a:r>
-              <a:rPr lang="en-US" dirty="0" err="1"/>
-              <a:t>en</a:t>
-            </a:r>
-            <a:r>
-              <a:rPr lang="en-US" dirty="0"/>
-              <a:t> </a:t>
-            </a:r>
-            <a:r>
-              <a:rPr lang="en-US" dirty="0" err="1"/>
-              <a:t>los</a:t>
-            </a:r>
-            <a:r>
-              <a:rPr lang="en-US" dirty="0"/>
-              <a:t> </a:t>
-            </a:r>
-            <a:r>
-              <a:rPr lang="en-US" dirty="0" err="1"/>
-              <a:t>años</a:t>
-            </a:r>
-            <a:r>
-              <a:rPr lang="en-US" dirty="0"/>
-              <a:t> </a:t>
-            </a:r>
-            <a:r>
-              <a:rPr lang="en-US" dirty="0" err="1"/>
-              <a:t>siguientes</a:t>
-            </a:r>
-            <a:r>
-              <a:rPr lang="en-US" dirty="0"/>
-              <a:t> a la pandemia, </a:t>
-            </a:r>
-            <a:r>
-              <a:rPr lang="en-US" dirty="0" err="1"/>
-              <a:t>que</a:t>
-            </a:r>
-            <a:r>
-              <a:rPr lang="en-US" dirty="0"/>
-              <a:t> </a:t>
-            </a:r>
-            <a:r>
-              <a:rPr lang="en-US" dirty="0" err="1"/>
-              <a:t>en</a:t>
-            </a:r>
-            <a:r>
-              <a:rPr lang="en-US" dirty="0"/>
-              <a:t> </a:t>
-            </a:r>
-            <a:r>
-              <a:rPr lang="en-US" dirty="0" err="1"/>
-              <a:t>los</a:t>
-            </a:r>
-            <a:r>
-              <a:rPr lang="en-US" dirty="0"/>
-              <a:t> </a:t>
-            </a:r>
-            <a:r>
-              <a:rPr lang="en-US" dirty="0" err="1"/>
-              <a:t>años</a:t>
-            </a:r>
-            <a:r>
-              <a:rPr lang="en-US" dirty="0"/>
-              <a:t> </a:t>
-            </a:r>
-            <a:r>
-              <a:rPr lang="en-US" dirty="0" err="1"/>
-              <a:t>anteriores</a:t>
-            </a:r>
-            <a:r>
-              <a:rPr lang="en-US" dirty="0"/>
-              <a:t> a la </a:t>
-            </a:r>
-            <a:r>
-              <a:rPr lang="en-US" dirty="0" err="1"/>
-              <a:t>misma</a:t>
-            </a:r>
-            <a:r>
-              <a:rPr lang="en-US"/>
-              <a:t>.</a:t>
-            </a:r>
-            <a:endParaRPr lang="en-US" dirty="0"/>
+              <a:rPr lang="es-GT" noProof="0" dirty="0"/>
+              <a:t> que en el resto de la semana.</a:t>
+            </a:r>
+          </a:p>
+          <a:p>
+            <a:pPr algn="just"/>
+            <a:r>
+              <a:rPr lang="es-GT" noProof="0" dirty="0"/>
+              <a:t>Se tiene que el préstamo de bicicletas ha sido en los años siguientes a la pandemia, que en los años anteriores a la misma.</a:t>
+            </a:r>
+          </a:p>
+          <a:p>
+            <a:pPr algn="just"/>
+            <a:r>
+              <a:rPr lang="es-GT" noProof="0" dirty="0"/>
+              <a:t>Las estaciones más cercanas al centro del mapa son las que mayor frecuencia de préstamos y recepción</a:t>
+            </a:r>
+            <a:r>
+              <a:rPr lang="es-GT" dirty="0"/>
+              <a:t> de bicicletas tienen.</a:t>
+            </a:r>
+          </a:p>
+          <a:p>
+            <a:pPr algn="just"/>
+            <a:r>
+              <a:rPr lang="es-GT" noProof="0" dirty="0"/>
+              <a:t>La estación que más recibe y pre</a:t>
+            </a:r>
+            <a:r>
+              <a:rPr lang="es-GT" dirty="0" err="1"/>
+              <a:t>sta</a:t>
+            </a:r>
+            <a:r>
+              <a:rPr lang="es-GT" dirty="0"/>
+              <a:t> bicicletas es </a:t>
+            </a:r>
+            <a:r>
+              <a:rPr lang="es-ES" dirty="0"/>
+              <a:t>CE-271-272 Jesús García - Carlos J. Meneses.</a:t>
+            </a:r>
+            <a:endParaRPr lang="es-GT" noProof="0" dirty="0"/>
           </a:p>
         </p:txBody>
       </p:sp>
@@ -6089,7 +3859,7 @@
 </p:sld>
 </file>
 
-<file path=ppt/slides/slide9.xml><?xml version="1.0" encoding="utf-8"?>
+<file path=ppt/slides/slide12.xml><?xml version="1.0" encoding="utf-8"?>
 <p:sld xmlns:a="http://schemas.openxmlformats.org/drawingml/2006/main" xmlns:r="http://schemas.openxmlformats.org/officeDocument/2006/relationships" xmlns:p="http://schemas.openxmlformats.org/presentationml/2006/main">
   <p:cSld>
     <p:spTree>
@@ -6155,7 +3925,31 @@
           <a:bodyPr/>
           <a:lstStyle/>
           <a:p>
-            <a:endParaRPr lang="en-US"/>
+            <a:r>
+              <a:rPr lang="es-ES" dirty="0" err="1"/>
+              <a:t>OpenAI</a:t>
+            </a:r>
+            <a:r>
+              <a:rPr lang="es-ES" dirty="0"/>
+              <a:t>. (10 de abril de 2026). </a:t>
+            </a:r>
+            <a:r>
+              <a:rPr lang="es-ES" i="1" dirty="0"/>
+              <a:t>Ayuda con código de mapa de Calor de ECOBICI.</a:t>
+            </a:r>
+            <a:r>
+              <a:rPr lang="es-ES" dirty="0"/>
+              <a:t> [Chat con IA generativa]. </a:t>
+            </a:r>
+            <a:r>
+              <a:rPr lang="es-ES" dirty="0" err="1"/>
+              <a:t>ChatGPT</a:t>
+            </a:r>
+            <a:r>
+              <a:rPr lang="es-ES" dirty="0"/>
+              <a:t>.</a:t>
+            </a:r>
+            <a:endParaRPr lang="en-US" dirty="0"/>
           </a:p>
         </p:txBody>
       </p:sp>
@@ -6163,6 +3957,2841 @@
     <p:extLst>
       <p:ext uri="{BB962C8B-B14F-4D97-AF65-F5344CB8AC3E}">
         <p14:creationId xmlns:p14="http://schemas.microsoft.com/office/powerpoint/2010/main" val="2631313994"/>
+      </p:ext>
+    </p:extLst>
+  </p:cSld>
+  <p:clrMapOvr>
+    <a:masterClrMapping/>
+  </p:clrMapOvr>
+</p:sld>
+</file>
+
+<file path=ppt/slides/slide2.xml><?xml version="1.0" encoding="utf-8"?>
+<p:sld xmlns:a="http://schemas.openxmlformats.org/drawingml/2006/main" xmlns:r="http://schemas.openxmlformats.org/officeDocument/2006/relationships" xmlns:p="http://schemas.openxmlformats.org/presentationml/2006/main">
+  <p:cSld>
+    <p:spTree>
+      <p:nvGrpSpPr>
+        <p:cNvPr id="1" name=""/>
+        <p:cNvGrpSpPr/>
+        <p:nvPr/>
+      </p:nvGrpSpPr>
+      <p:grpSpPr>
+        <a:xfrm>
+          <a:off x="0" y="0"/>
+          <a:ext cx="0" cy="0"/>
+          <a:chOff x="0" y="0"/>
+          <a:chExt cx="0" cy="0"/>
+        </a:xfrm>
+      </p:grpSpPr>
+      <p:sp>
+        <p:nvSpPr>
+          <p:cNvPr id="2" name="Title 1">
+            <a:extLst>
+              <a:ext uri="{FF2B5EF4-FFF2-40B4-BE49-F238E27FC236}">
+                <a16:creationId xmlns:a16="http://schemas.microsoft.com/office/drawing/2014/main" id="{53881BC3-D3E5-BF85-1689-0DB736917FB7}"/>
+              </a:ext>
+            </a:extLst>
+          </p:cNvPr>
+          <p:cNvSpPr>
+            <a:spLocks noGrp="1"/>
+          </p:cNvSpPr>
+          <p:nvPr>
+            <p:ph type="title"/>
+          </p:nvPr>
+        </p:nvSpPr>
+        <p:spPr/>
+        <p:txBody>
+          <a:bodyPr/>
+          <a:lstStyle/>
+          <a:p>
+            <a:r>
+              <a:rPr lang="en-US" dirty="0" err="1"/>
+              <a:t>Preguntas</a:t>
+            </a:r>
+            <a:r>
+              <a:rPr lang="en-US" dirty="0"/>
+              <a:t> de </a:t>
+            </a:r>
+            <a:r>
+              <a:rPr lang="en-US" dirty="0" err="1"/>
+              <a:t>investigación</a:t>
+            </a:r>
+          </a:p>
+        </p:txBody>
+      </p:sp>
+      <p:sp>
+        <p:nvSpPr>
+          <p:cNvPr id="3" name="Content Placeholder 2">
+            <a:extLst>
+              <a:ext uri="{FF2B5EF4-FFF2-40B4-BE49-F238E27FC236}">
+                <a16:creationId xmlns:a16="http://schemas.microsoft.com/office/drawing/2014/main" id="{0ABCF7AA-D9BE-D440-F244-2E2A071147FB}"/>
+              </a:ext>
+            </a:extLst>
+          </p:cNvPr>
+          <p:cNvSpPr>
+            <a:spLocks noGrp="1"/>
+          </p:cNvSpPr>
+          <p:nvPr>
+            <p:ph idx="1"/>
+          </p:nvPr>
+        </p:nvSpPr>
+        <p:spPr/>
+        <p:txBody>
+          <a:bodyPr vert="horz" lIns="91440" tIns="45720" rIns="91440" bIns="45720" rtlCol="0" anchor="t">
+            <a:normAutofit/>
+          </a:bodyPr>
+          <a:lstStyle/>
+          <a:p>
+            <a:pPr marL="514350" indent="-514350">
+              <a:buAutoNum type="arabicPeriod"/>
+            </a:pPr>
+            <a:r>
+              <a:rPr lang="en-US" dirty="0"/>
+              <a:t>¿</a:t>
+            </a:r>
+            <a:r>
+              <a:rPr lang="en-US" dirty="0" err="1"/>
+              <a:t>Cómo</a:t>
+            </a:r>
+            <a:r>
+              <a:rPr lang="en-US" dirty="0"/>
+              <a:t> se </a:t>
+            </a:r>
+            <a:r>
+              <a:rPr lang="en-US" dirty="0" err="1"/>
+              <a:t>vio</a:t>
+            </a:r>
+            <a:r>
+              <a:rPr lang="en-US" dirty="0"/>
+              <a:t> </a:t>
+            </a:r>
+            <a:r>
+              <a:rPr lang="en-US" dirty="0" err="1"/>
+              <a:t>afectado</a:t>
+            </a:r>
+            <a:r>
+              <a:rPr lang="en-US" dirty="0"/>
+              <a:t> </a:t>
+            </a:r>
+            <a:r>
+              <a:rPr lang="en-US" dirty="0" err="1"/>
+              <a:t>el</a:t>
+            </a:r>
+            <a:r>
+              <a:rPr lang="en-US" dirty="0"/>
+              <a:t> </a:t>
+            </a:r>
+            <a:r>
+              <a:rPr lang="en-US" dirty="0" err="1"/>
+              <a:t>uso</a:t>
+            </a:r>
+            <a:r>
+              <a:rPr lang="en-US" dirty="0"/>
+              <a:t> de </a:t>
+            </a:r>
+            <a:r>
+              <a:rPr lang="en-US" dirty="0" err="1"/>
+              <a:t>biciletas</a:t>
+            </a:r>
+            <a:r>
+              <a:rPr lang="en-US" dirty="0"/>
+              <a:t> </a:t>
+            </a:r>
+            <a:r>
+              <a:rPr lang="en-US" dirty="0" err="1"/>
+              <a:t>en</a:t>
+            </a:r>
+            <a:r>
+              <a:rPr lang="en-US" dirty="0"/>
+              <a:t> la </a:t>
+            </a:r>
+            <a:r>
+              <a:rPr lang="en-US" dirty="0" err="1"/>
+              <a:t>época</a:t>
+            </a:r>
+            <a:r>
+              <a:rPr lang="en-US" dirty="0"/>
+              <a:t> del COVID-19?</a:t>
+            </a:r>
+          </a:p>
+          <a:p>
+            <a:pPr marL="514350" indent="-514350">
+              <a:buAutoNum type="arabicPeriod"/>
+            </a:pPr>
+            <a:r>
+              <a:rPr lang="en-US" dirty="0"/>
+              <a:t>¿</a:t>
+            </a:r>
+            <a:r>
+              <a:rPr lang="en-US" dirty="0" err="1"/>
+              <a:t>Cuáles</a:t>
+            </a:r>
+            <a:r>
+              <a:rPr lang="en-US" dirty="0"/>
+              <a:t> días son </a:t>
+            </a:r>
+            <a:r>
+              <a:rPr lang="en-US" dirty="0" err="1"/>
+              <a:t>en</a:t>
+            </a:r>
+            <a:r>
+              <a:rPr lang="en-US" dirty="0"/>
+              <a:t> </a:t>
+            </a:r>
+            <a:r>
+              <a:rPr lang="en-US" dirty="0" err="1"/>
+              <a:t>los</a:t>
+            </a:r>
+            <a:r>
+              <a:rPr lang="en-US" dirty="0"/>
+              <a:t> </a:t>
+            </a:r>
+            <a:r>
+              <a:rPr lang="en-US" dirty="0" err="1"/>
+              <a:t>que</a:t>
+            </a:r>
+            <a:r>
+              <a:rPr lang="en-US" dirty="0"/>
+              <a:t> se </a:t>
+            </a:r>
+            <a:r>
+              <a:rPr lang="en-US" dirty="0" err="1"/>
+              <a:t>prestan</a:t>
+            </a:r>
+            <a:r>
+              <a:rPr lang="en-US" dirty="0"/>
+              <a:t> </a:t>
+            </a:r>
+            <a:r>
+              <a:rPr lang="en-US" dirty="0" err="1"/>
+              <a:t>más</a:t>
+            </a:r>
+            <a:r>
+              <a:rPr lang="en-US" dirty="0"/>
+              <a:t> </a:t>
+            </a:r>
+            <a:r>
+              <a:rPr lang="en-US" dirty="0" err="1"/>
+              <a:t>bicicletas</a:t>
+            </a:r>
+            <a:r>
+              <a:rPr lang="en-US" dirty="0"/>
+              <a:t>?</a:t>
+            </a:r>
+          </a:p>
+          <a:p>
+            <a:pPr marL="514350" indent="-514350">
+              <a:buAutoNum type="arabicPeriod"/>
+            </a:pPr>
+            <a:r>
+              <a:rPr lang="en-US" dirty="0"/>
+              <a:t>¿Las </a:t>
+            </a:r>
+            <a:r>
+              <a:rPr lang="en-US" dirty="0" err="1"/>
+              <a:t>frecuencias</a:t>
+            </a:r>
+            <a:r>
+              <a:rPr lang="en-US" dirty="0"/>
+              <a:t> de </a:t>
+            </a:r>
+            <a:r>
+              <a:rPr lang="en-US" dirty="0" err="1"/>
+              <a:t>arribo</a:t>
+            </a:r>
+            <a:r>
+              <a:rPr lang="en-US" dirty="0"/>
+              <a:t> y </a:t>
+            </a:r>
+            <a:r>
+              <a:rPr lang="en-US" dirty="0" err="1"/>
+              <a:t>retiro</a:t>
+            </a:r>
+            <a:r>
+              <a:rPr lang="en-US" dirty="0"/>
+              <a:t> </a:t>
+            </a:r>
+            <a:r>
+              <a:rPr lang="en-US" dirty="0" err="1"/>
+              <a:t>serán</a:t>
+            </a:r>
+            <a:r>
+              <a:rPr lang="en-US" dirty="0"/>
+              <a:t> </a:t>
+            </a:r>
+            <a:r>
+              <a:rPr lang="en-US" dirty="0" err="1"/>
+              <a:t>mayores</a:t>
+            </a:r>
+            <a:r>
+              <a:rPr lang="en-US" dirty="0"/>
+              <a:t> </a:t>
+            </a:r>
+            <a:r>
+              <a:rPr lang="en-US" dirty="0" err="1"/>
+              <a:t>en</a:t>
+            </a:r>
+            <a:r>
+              <a:rPr lang="en-US" dirty="0"/>
+              <a:t> </a:t>
+            </a:r>
+            <a:r>
+              <a:rPr lang="en-US" dirty="0" err="1"/>
+              <a:t>el</a:t>
+            </a:r>
+            <a:r>
+              <a:rPr lang="en-US" dirty="0"/>
+              <a:t> </a:t>
+            </a:r>
+            <a:r>
+              <a:rPr lang="en-US" dirty="0" err="1"/>
+              <a:t>centro</a:t>
+            </a:r>
+            <a:r>
+              <a:rPr lang="en-US" dirty="0"/>
+              <a:t> del </a:t>
+            </a:r>
+            <a:r>
+              <a:rPr lang="en-US" dirty="0" err="1"/>
+              <a:t>mapa</a:t>
+            </a:r>
+            <a:r>
+              <a:rPr lang="en-US" dirty="0"/>
+              <a:t> de </a:t>
+            </a:r>
+            <a:r>
+              <a:rPr lang="en-US" dirty="0" err="1"/>
+              <a:t>estaciones</a:t>
+            </a:r>
+            <a:r>
+              <a:rPr lang="en-US" dirty="0"/>
+              <a:t> de ECOBICI?</a:t>
+            </a:r>
+          </a:p>
+          <a:p>
+            <a:pPr marL="514350" indent="-514350">
+              <a:buAutoNum type="arabicPeriod"/>
+            </a:pPr>
+            <a:r>
+              <a:rPr lang="en-US" dirty="0"/>
+              <a:t>¿</a:t>
+            </a:r>
+            <a:r>
+              <a:rPr lang="en-US" dirty="0" err="1"/>
+              <a:t>Cuáles</a:t>
+            </a:r>
+            <a:r>
+              <a:rPr lang="en-US" dirty="0"/>
+              <a:t> son las </a:t>
+            </a:r>
+            <a:r>
+              <a:rPr lang="en-US" dirty="0" err="1"/>
+              <a:t>estaciones</a:t>
+            </a:r>
+            <a:r>
+              <a:rPr lang="en-US" dirty="0"/>
+              <a:t> </a:t>
+            </a:r>
+            <a:r>
+              <a:rPr lang="en-US" dirty="0" err="1"/>
+              <a:t>en</a:t>
+            </a:r>
+            <a:r>
+              <a:rPr lang="en-US" dirty="0"/>
+              <a:t> las </a:t>
+            </a:r>
+            <a:r>
+              <a:rPr lang="en-US" dirty="0" err="1"/>
+              <a:t>que</a:t>
+            </a:r>
+            <a:r>
+              <a:rPr lang="en-US" dirty="0"/>
+              <a:t> </a:t>
+            </a:r>
+            <a:r>
+              <a:rPr lang="en-US" dirty="0" err="1"/>
+              <a:t>más</a:t>
+            </a:r>
+            <a:r>
+              <a:rPr lang="en-US" dirty="0"/>
+              <a:t> se </a:t>
+            </a:r>
+            <a:r>
+              <a:rPr lang="en-US" dirty="0" err="1"/>
+              <a:t>prestan</a:t>
+            </a:r>
+            <a:r>
+              <a:rPr lang="en-US" dirty="0"/>
+              <a:t> </a:t>
+            </a:r>
+            <a:r>
+              <a:rPr lang="en-US" dirty="0" err="1"/>
+              <a:t>bicicletas</a:t>
+            </a:r>
+            <a:r>
+              <a:rPr lang="en-US" dirty="0"/>
+              <a:t>?</a:t>
+            </a:r>
+          </a:p>
+          <a:p>
+            <a:pPr marL="514350" indent="-514350">
+              <a:buAutoNum type="arabicPeriod"/>
+            </a:pPr>
+            <a:r>
+              <a:rPr lang="en-US" dirty="0"/>
+              <a:t>¿</a:t>
+            </a:r>
+            <a:r>
+              <a:rPr lang="en-US" dirty="0" err="1"/>
+              <a:t>Cuáles</a:t>
+            </a:r>
+            <a:r>
+              <a:rPr lang="en-US" dirty="0"/>
+              <a:t> son las </a:t>
+            </a:r>
+            <a:r>
+              <a:rPr lang="en-US" dirty="0" err="1"/>
+              <a:t>estaciones</a:t>
+            </a:r>
+            <a:r>
+              <a:rPr lang="en-US" dirty="0"/>
+              <a:t> </a:t>
+            </a:r>
+            <a:r>
+              <a:rPr lang="en-US" dirty="0" err="1"/>
+              <a:t>en</a:t>
+            </a:r>
+            <a:r>
+              <a:rPr lang="en-US" dirty="0"/>
+              <a:t> la </a:t>
+            </a:r>
+            <a:r>
+              <a:rPr lang="en-US" dirty="0" err="1"/>
+              <a:t>que</a:t>
+            </a:r>
+            <a:r>
+              <a:rPr lang="en-US" dirty="0"/>
+              <a:t> </a:t>
+            </a:r>
+            <a:r>
+              <a:rPr lang="en-US" dirty="0" err="1"/>
+              <a:t>más</a:t>
+            </a:r>
+            <a:r>
+              <a:rPr lang="en-US" dirty="0"/>
+              <a:t> </a:t>
+            </a:r>
+            <a:r>
+              <a:rPr lang="en-US" dirty="0" err="1"/>
+              <a:t>dejan</a:t>
+            </a:r>
+            <a:r>
+              <a:rPr lang="en-US" dirty="0"/>
+              <a:t> </a:t>
+            </a:r>
+            <a:r>
+              <a:rPr lang="en-US" dirty="0" err="1"/>
+              <a:t>bicicletas</a:t>
+            </a:r>
+            <a:r>
+              <a:rPr lang="en-US" dirty="0"/>
+              <a:t>?</a:t>
+            </a:r>
+          </a:p>
+        </p:txBody>
+      </p:sp>
+    </p:spTree>
+    <p:extLst>
+      <p:ext uri="{BB962C8B-B14F-4D97-AF65-F5344CB8AC3E}">
+        <p14:creationId xmlns:p14="http://schemas.microsoft.com/office/powerpoint/2010/main" val="3336810955"/>
+      </p:ext>
+    </p:extLst>
+  </p:cSld>
+  <p:clrMapOvr>
+    <a:masterClrMapping/>
+  </p:clrMapOvr>
+</p:sld>
+</file>
+
+<file path=ppt/slides/slide3.xml><?xml version="1.0" encoding="utf-8"?>
+<p:sld xmlns:a="http://schemas.openxmlformats.org/drawingml/2006/main" xmlns:r="http://schemas.openxmlformats.org/officeDocument/2006/relationships" xmlns:p="http://schemas.openxmlformats.org/presentationml/2006/main">
+  <p:cSld>
+    <p:spTree>
+      <p:nvGrpSpPr>
+        <p:cNvPr id="1" name=""/>
+        <p:cNvGrpSpPr/>
+        <p:nvPr/>
+      </p:nvGrpSpPr>
+      <p:grpSpPr>
+        <a:xfrm>
+          <a:off x="0" y="0"/>
+          <a:ext cx="0" cy="0"/>
+          <a:chOff x="0" y="0"/>
+          <a:chExt cx="0" cy="0"/>
+        </a:xfrm>
+      </p:grpSpPr>
+      <p:sp>
+        <p:nvSpPr>
+          <p:cNvPr id="2" name="Title 1">
+            <a:extLst>
+              <a:ext uri="{FF2B5EF4-FFF2-40B4-BE49-F238E27FC236}">
+                <a16:creationId xmlns:a16="http://schemas.microsoft.com/office/drawing/2014/main" id="{1F0CA0D9-E23A-434F-85BE-7CE0C79947EF}"/>
+              </a:ext>
+            </a:extLst>
+          </p:cNvPr>
+          <p:cNvSpPr>
+            <a:spLocks noGrp="1"/>
+          </p:cNvSpPr>
+          <p:nvPr>
+            <p:ph type="title"/>
+          </p:nvPr>
+        </p:nvSpPr>
+        <p:spPr/>
+        <p:txBody>
+          <a:bodyPr/>
+          <a:lstStyle/>
+          <a:p>
+            <a:r>
+              <a:rPr lang="en-US" dirty="0" err="1"/>
+              <a:t>Descripción</a:t>
+            </a:r>
+            <a:r>
+              <a:rPr lang="en-US" dirty="0"/>
+              <a:t> de </a:t>
+            </a:r>
+            <a:r>
+              <a:rPr lang="en-US" dirty="0" err="1"/>
+              <a:t>los</a:t>
+            </a:r>
+            <a:r>
+              <a:rPr lang="en-US" dirty="0"/>
+              <a:t> </a:t>
+            </a:r>
+            <a:r>
+              <a:rPr lang="en-US" dirty="0" err="1"/>
+              <a:t>datos</a:t>
+            </a:r>
+          </a:p>
+        </p:txBody>
+      </p:sp>
+      <p:sp>
+        <p:nvSpPr>
+          <p:cNvPr id="3" name="Content Placeholder 2">
+            <a:extLst>
+              <a:ext uri="{FF2B5EF4-FFF2-40B4-BE49-F238E27FC236}">
+                <a16:creationId xmlns:a16="http://schemas.microsoft.com/office/drawing/2014/main" id="{AC6D1742-1A0E-6DDB-549A-CBC319F339F4}"/>
+              </a:ext>
+            </a:extLst>
+          </p:cNvPr>
+          <p:cNvSpPr>
+            <a:spLocks noGrp="1"/>
+          </p:cNvSpPr>
+          <p:nvPr>
+            <p:ph idx="1"/>
+          </p:nvPr>
+        </p:nvSpPr>
+        <p:spPr/>
+        <p:txBody>
+          <a:bodyPr vert="horz" lIns="91440" tIns="45720" rIns="91440" bIns="45720" rtlCol="0" anchor="t">
+            <a:normAutofit/>
+          </a:bodyPr>
+          <a:lstStyle/>
+          <a:p>
+            <a:r>
+              <a:rPr lang="en-US" dirty="0"/>
+              <a:t>Se </a:t>
+            </a:r>
+            <a:r>
+              <a:rPr lang="en-US" dirty="0" err="1"/>
+              <a:t>han</a:t>
+            </a:r>
+            <a:r>
+              <a:rPr lang="en-US" dirty="0"/>
+              <a:t> </a:t>
+            </a:r>
+            <a:r>
+              <a:rPr lang="en-US" dirty="0" err="1"/>
+              <a:t>usado</a:t>
+            </a:r>
+            <a:r>
+              <a:rPr lang="en-US" dirty="0"/>
+              <a:t> </a:t>
+            </a:r>
+            <a:r>
+              <a:rPr lang="en-US" dirty="0" err="1"/>
+              <a:t>los</a:t>
+            </a:r>
+            <a:r>
+              <a:rPr lang="en-US" dirty="0"/>
+              <a:t> </a:t>
+            </a:r>
+            <a:r>
+              <a:rPr lang="en-US" dirty="0" err="1"/>
+              <a:t>datos</a:t>
+            </a:r>
+            <a:r>
+              <a:rPr lang="en-US" dirty="0"/>
+              <a:t> </a:t>
+            </a:r>
+            <a:r>
+              <a:rPr lang="en-US" dirty="0" err="1"/>
+              <a:t>históricos</a:t>
+            </a:r>
+            <a:r>
+              <a:rPr lang="en-US" dirty="0"/>
+              <a:t> de ECOBICI </a:t>
+            </a:r>
+            <a:r>
+              <a:rPr lang="en-US" dirty="0" err="1"/>
+              <a:t>correspondientes</a:t>
+            </a:r>
+            <a:r>
+              <a:rPr lang="en-US" dirty="0"/>
+              <a:t> a la Semana Santa </a:t>
+            </a:r>
+            <a:r>
+              <a:rPr lang="en-US" dirty="0" err="1"/>
+              <a:t>desde</a:t>
+            </a:r>
+            <a:r>
+              <a:rPr lang="en-US" dirty="0"/>
+              <a:t> </a:t>
+            </a:r>
+            <a:r>
+              <a:rPr lang="en-US" dirty="0" err="1"/>
+              <a:t>el</a:t>
+            </a:r>
+            <a:r>
+              <a:rPr lang="en-US" dirty="0"/>
+              <a:t> 2015 al 2025.</a:t>
+            </a:r>
+          </a:p>
+          <a:p>
+            <a:r>
+              <a:rPr lang="en-US" dirty="0"/>
+              <a:t>Las variables </a:t>
+            </a:r>
+            <a:r>
+              <a:rPr lang="en-US" dirty="0" err="1"/>
+              <a:t>consideradas</a:t>
+            </a:r>
+            <a:r>
+              <a:rPr lang="en-US" dirty="0"/>
+              <a:t> para </a:t>
+            </a:r>
+            <a:r>
+              <a:rPr lang="en-US" dirty="0" err="1"/>
+              <a:t>el</a:t>
+            </a:r>
+            <a:r>
+              <a:rPr lang="en-US" dirty="0"/>
+              <a:t> </a:t>
+            </a:r>
+            <a:r>
+              <a:rPr lang="en-US" dirty="0" err="1"/>
+              <a:t>análisis</a:t>
+            </a:r>
+            <a:r>
+              <a:rPr lang="en-US" dirty="0"/>
+              <a:t> </a:t>
+            </a:r>
+            <a:r>
+              <a:rPr lang="en-US" dirty="0" err="1"/>
+              <a:t>fueron</a:t>
+            </a:r>
+            <a:r>
+              <a:rPr lang="en-US" dirty="0"/>
+              <a:t>: </a:t>
+            </a:r>
+            <a:r>
+              <a:rPr lang="en-US" dirty="0" err="1"/>
+              <a:t>Fecha</a:t>
+            </a:r>
+            <a:r>
+              <a:rPr lang="en-US" dirty="0"/>
+              <a:t> de </a:t>
+            </a:r>
+            <a:r>
+              <a:rPr lang="en-US" dirty="0" err="1"/>
+              <a:t>retiro</a:t>
+            </a:r>
+            <a:r>
+              <a:rPr lang="en-US" dirty="0"/>
+              <a:t> de </a:t>
+            </a:r>
+            <a:r>
+              <a:rPr lang="en-US" dirty="0" err="1"/>
+              <a:t>bicicletas</a:t>
+            </a:r>
+            <a:r>
+              <a:rPr lang="en-US" dirty="0"/>
+              <a:t>, </a:t>
+            </a:r>
+            <a:r>
+              <a:rPr lang="en-US" dirty="0" err="1"/>
+              <a:t>fecha</a:t>
+            </a:r>
+            <a:r>
+              <a:rPr lang="en-US" dirty="0"/>
+              <a:t> de </a:t>
+            </a:r>
+            <a:r>
+              <a:rPr lang="en-US" dirty="0" err="1"/>
+              <a:t>arribo</a:t>
+            </a:r>
+            <a:r>
+              <a:rPr lang="en-US" dirty="0"/>
+              <a:t> de la </a:t>
+            </a:r>
+            <a:r>
+              <a:rPr lang="en-US" dirty="0" err="1"/>
+              <a:t>bicicleta</a:t>
+            </a:r>
+            <a:r>
+              <a:rPr lang="en-US" dirty="0"/>
+              <a:t>, </a:t>
+            </a:r>
+            <a:r>
+              <a:rPr lang="en-US" dirty="0" err="1"/>
+              <a:t>nombre</a:t>
+            </a:r>
+            <a:r>
+              <a:rPr lang="en-US" dirty="0"/>
+              <a:t> de </a:t>
+            </a:r>
+            <a:r>
+              <a:rPr lang="en-US" dirty="0" err="1"/>
+              <a:t>estación</a:t>
+            </a:r>
+            <a:r>
+              <a:rPr lang="en-US" dirty="0"/>
+              <a:t>, </a:t>
+            </a:r>
+            <a:r>
+              <a:rPr lang="en-US" dirty="0" err="1"/>
+              <a:t>coordenadas</a:t>
+            </a:r>
+            <a:r>
+              <a:rPr lang="en-US" dirty="0"/>
+              <a:t> de la </a:t>
+            </a:r>
+            <a:r>
+              <a:rPr lang="en-US" dirty="0" err="1"/>
+              <a:t>estación</a:t>
+            </a:r>
+            <a:endParaRPr lang="en-US" dirty="0"/>
+          </a:p>
+          <a:p>
+            <a:r>
+              <a:rPr lang="en-US" dirty="0"/>
+              <a:t>Los </a:t>
+            </a:r>
+            <a:r>
+              <a:rPr lang="en-US" dirty="0" err="1"/>
+              <a:t>datos</a:t>
+            </a:r>
+            <a:r>
+              <a:rPr lang="en-US" dirty="0"/>
+              <a:t> no </a:t>
+            </a:r>
+            <a:r>
+              <a:rPr lang="en-US" dirty="0" err="1"/>
+              <a:t>contaban</a:t>
+            </a:r>
+            <a:r>
+              <a:rPr lang="en-US" dirty="0"/>
+              <a:t> con </a:t>
+            </a:r>
+            <a:r>
+              <a:rPr lang="en-US" dirty="0" err="1"/>
+              <a:t>datos</a:t>
+            </a:r>
+            <a:r>
+              <a:rPr lang="en-US" dirty="0"/>
+              <a:t> </a:t>
+            </a:r>
+            <a:r>
+              <a:rPr lang="en-US" dirty="0" err="1"/>
+              <a:t>faltantes</a:t>
+            </a:r>
+            <a:r>
+              <a:rPr lang="en-US" dirty="0"/>
+              <a:t>.</a:t>
+            </a:r>
+          </a:p>
+        </p:txBody>
+      </p:sp>
+    </p:spTree>
+    <p:extLst>
+      <p:ext uri="{BB962C8B-B14F-4D97-AF65-F5344CB8AC3E}">
+        <p14:creationId xmlns:p14="http://schemas.microsoft.com/office/powerpoint/2010/main" val="1632834163"/>
+      </p:ext>
+    </p:extLst>
+  </p:cSld>
+  <p:clrMapOvr>
+    <a:masterClrMapping/>
+  </p:clrMapOvr>
+</p:sld>
+</file>
+
+<file path=ppt/slides/slide4.xml><?xml version="1.0" encoding="utf-8"?>
+<p:sld xmlns:a="http://schemas.openxmlformats.org/drawingml/2006/main" xmlns:r="http://schemas.openxmlformats.org/officeDocument/2006/relationships" xmlns:p="http://schemas.openxmlformats.org/presentationml/2006/main">
+  <p:cSld>
+    <p:bg>
+      <p:bgPr>
+        <a:solidFill>
+          <a:schemeClr val="bg1"/>
+        </a:solidFill>
+        <a:effectLst/>
+      </p:bgPr>
+    </p:bg>
+    <p:spTree>
+      <p:nvGrpSpPr>
+        <p:cNvPr id="1" name=""/>
+        <p:cNvGrpSpPr/>
+        <p:nvPr/>
+      </p:nvGrpSpPr>
+      <p:grpSpPr>
+        <a:xfrm>
+          <a:off x="0" y="0"/>
+          <a:ext cx="0" cy="0"/>
+          <a:chOff x="0" y="0"/>
+          <a:chExt cx="0" cy="0"/>
+        </a:xfrm>
+      </p:grpSpPr>
+      <p:sp useBgFill="1">
+        <p:nvSpPr>
+          <p:cNvPr id="18" name="Rectangle 17">
+            <a:extLst>
+              <a:ext uri="{FF2B5EF4-FFF2-40B4-BE49-F238E27FC236}">
+                <a16:creationId xmlns:a16="http://schemas.microsoft.com/office/drawing/2014/main" id="{B66D7F65-E9B6-4775-8355-D095CC73C1C8}"/>
+              </a:ext>
+              <a:ext uri="{C183D7F6-B498-43B3-948B-1728B52AA6E4}">
+                <adec:decorative xmlns:adec="http://schemas.microsoft.com/office/drawing/2017/decorative" val="1"/>
+              </a:ext>
+            </a:extLst>
+          </p:cNvPr>
+          <p:cNvSpPr>
+            <a:spLocks noGrp="1" noRot="1" noChangeAspect="1" noMove="1" noResize="1" noEditPoints="1" noAdjustHandles="1" noChangeArrowheads="1" noChangeShapeType="1" noTextEdit="1"/>
+          </p:cNvSpPr>
+          <p:nvPr>
+            <p:extLst>
+              <p:ext uri="{386F3935-93C4-4BCD-93E2-E3B085C9AB24}">
+                <p16:designElem xmlns:p16="http://schemas.microsoft.com/office/powerpoint/2015/main" val="1"/>
+              </p:ext>
+            </p:extLst>
+          </p:nvPr>
+        </p:nvSpPr>
+        <p:spPr>
+          <a:xfrm>
+            <a:off x="0" y="2"/>
+            <a:ext cx="12192000" cy="6857997"/>
+          </a:xfrm>
+          <a:prstGeom prst="rect">
+            <a:avLst/>
+          </a:prstGeom>
+          <a:ln>
+            <a:noFill/>
+          </a:ln>
+        </p:spPr>
+        <p:style>
+          <a:lnRef idx="2">
+            <a:schemeClr val="accent1">
+              <a:shade val="50000"/>
+            </a:schemeClr>
+          </a:lnRef>
+          <a:fillRef idx="1">
+            <a:schemeClr val="accent1"/>
+          </a:fillRef>
+          <a:effectRef idx="0">
+            <a:schemeClr val="accent1"/>
+          </a:effectRef>
+          <a:fontRef idx="minor">
+            <a:schemeClr val="lt1"/>
+          </a:fontRef>
+        </p:style>
+        <p:txBody>
+          <a:bodyPr rtlCol="0" anchor="ctr"/>
+          <a:lstStyle/>
+          <a:p>
+            <a:pPr algn="ctr"/>
+            <a:endParaRPr lang="en-US"/>
+          </a:p>
+        </p:txBody>
+      </p:sp>
+      <p:sp>
+        <p:nvSpPr>
+          <p:cNvPr id="2" name="Title 1">
+            <a:extLst>
+              <a:ext uri="{FF2B5EF4-FFF2-40B4-BE49-F238E27FC236}">
+                <a16:creationId xmlns:a16="http://schemas.microsoft.com/office/drawing/2014/main" id="{266A3000-7648-F4A8-FD09-38C894BED430}"/>
+              </a:ext>
+            </a:extLst>
+          </p:cNvPr>
+          <p:cNvSpPr>
+            <a:spLocks noGrp="1"/>
+          </p:cNvSpPr>
+          <p:nvPr>
+            <p:ph type="title"/>
+          </p:nvPr>
+        </p:nvSpPr>
+        <p:spPr>
+          <a:xfrm>
+            <a:off x="1136396" y="502021"/>
+            <a:ext cx="6173262" cy="1655483"/>
+          </a:xfrm>
+        </p:spPr>
+        <p:txBody>
+          <a:bodyPr anchor="b">
+            <a:normAutofit/>
+          </a:bodyPr>
+          <a:lstStyle/>
+          <a:p>
+            <a:r>
+              <a:rPr lang="en-US" sz="4000"/>
+              <a:t>Mapa de calor de estaciones de retiro</a:t>
+            </a:r>
+          </a:p>
+        </p:txBody>
+      </p:sp>
+      <p:sp>
+        <p:nvSpPr>
+          <p:cNvPr id="15" name="Content Placeholder 14">
+            <a:extLst>
+              <a:ext uri="{FF2B5EF4-FFF2-40B4-BE49-F238E27FC236}">
+                <a16:creationId xmlns:a16="http://schemas.microsoft.com/office/drawing/2014/main" id="{1776977E-BACF-89CE-59C9-494EB124868A}"/>
+              </a:ext>
+            </a:extLst>
+          </p:cNvPr>
+          <p:cNvSpPr>
+            <a:spLocks noGrp="1"/>
+          </p:cNvSpPr>
+          <p:nvPr>
+            <p:ph idx="1"/>
+          </p:nvPr>
+        </p:nvSpPr>
+        <p:spPr>
+          <a:xfrm>
+            <a:off x="1136397" y="2930979"/>
+            <a:ext cx="6173262" cy="1012371"/>
+          </a:xfrm>
+        </p:spPr>
+        <p:txBody>
+          <a:bodyPr>
+            <a:normAutofit/>
+          </a:bodyPr>
+          <a:lstStyle/>
+          <a:p>
+            <a:pPr marL="0" indent="0" algn="just">
+              <a:buNone/>
+            </a:pPr>
+            <a:r>
+              <a:rPr lang="es-GT" sz="2000" noProof="0" dirty="0"/>
+              <a:t>Se puede observar que las estaciones cercanas al centro del mapa son en las que más se retiran bicicletas.</a:t>
+            </a:r>
+          </a:p>
+        </p:txBody>
+      </p:sp>
+      <p:pic>
+        <p:nvPicPr>
+          <p:cNvPr id="5" name="Content Placeholder 4">
+            <a:extLst>
+              <a:ext uri="{FF2B5EF4-FFF2-40B4-BE49-F238E27FC236}">
+                <a16:creationId xmlns:a16="http://schemas.microsoft.com/office/drawing/2014/main" id="{43D767D5-403E-EC3A-D888-C55A5FFCF34A}"/>
+              </a:ext>
+            </a:extLst>
+          </p:cNvPr>
+          <p:cNvPicPr>
+            <a:picLocks noChangeAspect="1"/>
+          </p:cNvPicPr>
+          <p:nvPr/>
+        </p:nvPicPr>
+        <p:blipFill>
+          <a:blip r:embed="rId2"/>
+          <a:srcRect l="1310" r="2" b="2"/>
+          <a:stretch>
+            <a:fillRect/>
+          </a:stretch>
+        </p:blipFill>
+        <p:spPr>
+          <a:xfrm>
+            <a:off x="8115298" y="-25031"/>
+            <a:ext cx="4076700" cy="6418631"/>
+          </a:xfrm>
+          <a:prstGeom prst="rect">
+            <a:avLst/>
+          </a:prstGeom>
+        </p:spPr>
+      </p:pic>
+      <p:sp>
+        <p:nvSpPr>
+          <p:cNvPr id="20" name="Rectangle 19">
+            <a:extLst>
+              <a:ext uri="{FF2B5EF4-FFF2-40B4-BE49-F238E27FC236}">
+                <a16:creationId xmlns:a16="http://schemas.microsoft.com/office/drawing/2014/main" id="{61707E60-CEC9-4661-AA82-69242EB4BDC3}"/>
+              </a:ext>
+              <a:ext uri="{C183D7F6-B498-43B3-948B-1728B52AA6E4}">
+                <adec:decorative xmlns:adec="http://schemas.microsoft.com/office/drawing/2017/decorative" val="1"/>
+              </a:ext>
+            </a:extLst>
+          </p:cNvPr>
+          <p:cNvSpPr>
+            <a:spLocks noGrp="1" noRot="1" noChangeAspect="1" noMove="1" noResize="1" noEditPoints="1" noAdjustHandles="1" noChangeArrowheads="1" noChangeShapeType="1" noTextEdit="1"/>
+          </p:cNvSpPr>
+          <p:nvPr>
+            <p:extLst>
+              <p:ext uri="{386F3935-93C4-4BCD-93E2-E3B085C9AB24}">
+                <p16:designElem xmlns:p16="http://schemas.microsoft.com/office/powerpoint/2015/main" val="1"/>
+              </p:ext>
+            </p:extLst>
+          </p:nvPr>
+        </p:nvSpPr>
+        <p:spPr>
+          <a:xfrm flipH="1">
+            <a:off x="0" y="6406116"/>
+            <a:ext cx="12191998" cy="461774"/>
+          </a:xfrm>
+          <a:prstGeom prst="rect">
+            <a:avLst/>
+          </a:prstGeom>
+          <a:gradFill>
+            <a:gsLst>
+              <a:gs pos="0">
+                <a:srgbClr val="000000"/>
+              </a:gs>
+              <a:gs pos="70000">
+                <a:schemeClr val="accent1">
+                  <a:lumMod val="75000"/>
+                </a:schemeClr>
+              </a:gs>
+            </a:gsLst>
+            <a:lin ang="15600000" scaled="0"/>
+          </a:gradFill>
+          <a:ln>
+            <a:noFill/>
+          </a:ln>
+        </p:spPr>
+        <p:style>
+          <a:lnRef idx="2">
+            <a:schemeClr val="accent1">
+              <a:shade val="50000"/>
+            </a:schemeClr>
+          </a:lnRef>
+          <a:fillRef idx="1">
+            <a:schemeClr val="accent1"/>
+          </a:fillRef>
+          <a:effectRef idx="0">
+            <a:schemeClr val="accent1"/>
+          </a:effectRef>
+          <a:fontRef idx="minor">
+            <a:schemeClr val="lt1"/>
+          </a:fontRef>
+        </p:style>
+        <p:txBody>
+          <a:bodyPr rtlCol="0" anchor="ctr"/>
+          <a:lstStyle/>
+          <a:p>
+            <a:pPr algn="ctr"/>
+            <a:endParaRPr lang="en-US"/>
+          </a:p>
+        </p:txBody>
+      </p:sp>
+      <p:sp>
+        <p:nvSpPr>
+          <p:cNvPr id="22" name="Rectangle 21">
+            <a:extLst>
+              <a:ext uri="{FF2B5EF4-FFF2-40B4-BE49-F238E27FC236}">
+                <a16:creationId xmlns:a16="http://schemas.microsoft.com/office/drawing/2014/main" id="{8F035CD8-AE30-4146-96F2-036B0CE5E4F3}"/>
+              </a:ext>
+              <a:ext uri="{C183D7F6-B498-43B3-948B-1728B52AA6E4}">
+                <adec:decorative xmlns:adec="http://schemas.microsoft.com/office/drawing/2017/decorative" val="1"/>
+              </a:ext>
+            </a:extLst>
+          </p:cNvPr>
+          <p:cNvSpPr>
+            <a:spLocks noGrp="1" noRot="1" noChangeAspect="1" noMove="1" noResize="1" noEditPoints="1" noAdjustHandles="1" noChangeArrowheads="1" noChangeShapeType="1" noTextEdit="1"/>
+          </p:cNvSpPr>
+          <p:nvPr>
+            <p:extLst>
+              <p:ext uri="{386F3935-93C4-4BCD-93E2-E3B085C9AB24}">
+                <p16:designElem xmlns:p16="http://schemas.microsoft.com/office/powerpoint/2015/main" val="1"/>
+              </p:ext>
+            </p:extLst>
+          </p:nvPr>
+        </p:nvSpPr>
+        <p:spPr>
+          <a:xfrm flipH="1">
+            <a:off x="8115300" y="6406115"/>
+            <a:ext cx="4076698" cy="464399"/>
+          </a:xfrm>
+          <a:prstGeom prst="rect">
+            <a:avLst/>
+          </a:prstGeom>
+          <a:gradFill>
+            <a:gsLst>
+              <a:gs pos="19000">
+                <a:srgbClr val="000000">
+                  <a:alpha val="46000"/>
+                </a:srgbClr>
+              </a:gs>
+              <a:gs pos="99000">
+                <a:schemeClr val="accent1"/>
+              </a:gs>
+            </a:gsLst>
+            <a:lin ang="13200000" scaled="0"/>
+          </a:gradFill>
+          <a:ln>
+            <a:noFill/>
+          </a:ln>
+        </p:spPr>
+        <p:style>
+          <a:lnRef idx="2">
+            <a:schemeClr val="accent1">
+              <a:shade val="50000"/>
+            </a:schemeClr>
+          </a:lnRef>
+          <a:fillRef idx="1">
+            <a:schemeClr val="accent1"/>
+          </a:fillRef>
+          <a:effectRef idx="0">
+            <a:schemeClr val="accent1"/>
+          </a:effectRef>
+          <a:fontRef idx="minor">
+            <a:schemeClr val="lt1"/>
+          </a:fontRef>
+        </p:style>
+        <p:txBody>
+          <a:bodyPr rtlCol="0" anchor="ctr"/>
+          <a:lstStyle/>
+          <a:p>
+            <a:pPr algn="ctr"/>
+            <a:endParaRPr lang="en-US"/>
+          </a:p>
+        </p:txBody>
+      </p:sp>
+    </p:spTree>
+    <p:extLst>
+      <p:ext uri="{BB962C8B-B14F-4D97-AF65-F5344CB8AC3E}">
+        <p14:creationId xmlns:p14="http://schemas.microsoft.com/office/powerpoint/2010/main" val="1999348669"/>
+      </p:ext>
+    </p:extLst>
+  </p:cSld>
+  <p:clrMapOvr>
+    <a:masterClrMapping/>
+  </p:clrMapOvr>
+</p:sld>
+</file>
+
+<file path=ppt/slides/slide5.xml><?xml version="1.0" encoding="utf-8"?>
+<p:sld xmlns:a="http://schemas.openxmlformats.org/drawingml/2006/main" xmlns:r="http://schemas.openxmlformats.org/officeDocument/2006/relationships" xmlns:p="http://schemas.openxmlformats.org/presentationml/2006/main">
+  <p:cSld>
+    <p:bg>
+      <p:bgPr>
+        <a:solidFill>
+          <a:schemeClr val="bg1"/>
+        </a:solidFill>
+        <a:effectLst/>
+      </p:bgPr>
+    </p:bg>
+    <p:spTree>
+      <p:nvGrpSpPr>
+        <p:cNvPr id="1" name="">
+          <a:extLst>
+            <a:ext uri="{FF2B5EF4-FFF2-40B4-BE49-F238E27FC236}">
+              <a16:creationId xmlns:a16="http://schemas.microsoft.com/office/drawing/2014/main" id="{FF4203DA-8189-DF68-0AAC-77D786186231}"/>
+            </a:ext>
+          </a:extLst>
+        </p:cNvPr>
+        <p:cNvGrpSpPr/>
+        <p:nvPr/>
+      </p:nvGrpSpPr>
+      <p:grpSpPr>
+        <a:xfrm>
+          <a:off x="0" y="0"/>
+          <a:ext cx="0" cy="0"/>
+          <a:chOff x="0" y="0"/>
+          <a:chExt cx="0" cy="0"/>
+        </a:xfrm>
+      </p:grpSpPr>
+      <p:sp useBgFill="1">
+        <p:nvSpPr>
+          <p:cNvPr id="18" name="Rectangle 17">
+            <a:extLst>
+              <a:ext uri="{FF2B5EF4-FFF2-40B4-BE49-F238E27FC236}">
+                <a16:creationId xmlns:a16="http://schemas.microsoft.com/office/drawing/2014/main" id="{9D5CB6B2-6858-E2C2-E74B-423FBF071240}"/>
+              </a:ext>
+              <a:ext uri="{C183D7F6-B498-43B3-948B-1728B52AA6E4}">
+                <adec:decorative xmlns:adec="http://schemas.microsoft.com/office/drawing/2017/decorative" val="1"/>
+              </a:ext>
+            </a:extLst>
+          </p:cNvPr>
+          <p:cNvSpPr>
+            <a:spLocks noGrp="1" noRot="1" noChangeAspect="1" noMove="1" noResize="1" noEditPoints="1" noAdjustHandles="1" noChangeArrowheads="1" noChangeShapeType="1" noTextEdit="1"/>
+          </p:cNvSpPr>
+          <p:nvPr>
+            <p:extLst>
+              <p:ext uri="{386F3935-93C4-4BCD-93E2-E3B085C9AB24}">
+                <p16:designElem xmlns:p16="http://schemas.microsoft.com/office/powerpoint/2015/main" val="1"/>
+              </p:ext>
+            </p:extLst>
+          </p:nvPr>
+        </p:nvSpPr>
+        <p:spPr>
+          <a:xfrm>
+            <a:off x="0" y="2"/>
+            <a:ext cx="12192000" cy="6857997"/>
+          </a:xfrm>
+          <a:prstGeom prst="rect">
+            <a:avLst/>
+          </a:prstGeom>
+          <a:ln>
+            <a:noFill/>
+          </a:ln>
+        </p:spPr>
+        <p:style>
+          <a:lnRef idx="2">
+            <a:schemeClr val="accent1">
+              <a:shade val="50000"/>
+            </a:schemeClr>
+          </a:lnRef>
+          <a:fillRef idx="1">
+            <a:schemeClr val="accent1"/>
+          </a:fillRef>
+          <a:effectRef idx="0">
+            <a:schemeClr val="accent1"/>
+          </a:effectRef>
+          <a:fontRef idx="minor">
+            <a:schemeClr val="lt1"/>
+          </a:fontRef>
+        </p:style>
+        <p:txBody>
+          <a:bodyPr rtlCol="0" anchor="ctr"/>
+          <a:lstStyle/>
+          <a:p>
+            <a:pPr algn="ctr"/>
+            <a:endParaRPr lang="en-US"/>
+          </a:p>
+        </p:txBody>
+      </p:sp>
+      <p:sp>
+        <p:nvSpPr>
+          <p:cNvPr id="2" name="Title 1">
+            <a:extLst>
+              <a:ext uri="{FF2B5EF4-FFF2-40B4-BE49-F238E27FC236}">
+                <a16:creationId xmlns:a16="http://schemas.microsoft.com/office/drawing/2014/main" id="{AA72FDE9-3413-AC7E-49E3-15BE7AC1C934}"/>
+              </a:ext>
+            </a:extLst>
+          </p:cNvPr>
+          <p:cNvSpPr>
+            <a:spLocks noGrp="1"/>
+          </p:cNvSpPr>
+          <p:nvPr>
+            <p:ph type="title"/>
+          </p:nvPr>
+        </p:nvSpPr>
+        <p:spPr>
+          <a:xfrm>
+            <a:off x="1136396" y="502021"/>
+            <a:ext cx="6173262" cy="1655483"/>
+          </a:xfrm>
+        </p:spPr>
+        <p:txBody>
+          <a:bodyPr anchor="b">
+            <a:normAutofit/>
+          </a:bodyPr>
+          <a:lstStyle/>
+          <a:p>
+            <a:r>
+              <a:rPr lang="en-US" sz="4000" dirty="0"/>
+              <a:t>Mapa de </a:t>
+            </a:r>
+            <a:r>
+              <a:rPr lang="en-US" sz="4000" dirty="0" err="1"/>
+              <a:t>calor</a:t>
+            </a:r>
+            <a:r>
+              <a:rPr lang="en-US" sz="4000" dirty="0"/>
+              <a:t> de </a:t>
+            </a:r>
+            <a:r>
+              <a:rPr lang="en-US" sz="4000" dirty="0" err="1"/>
+              <a:t>estaciones</a:t>
+            </a:r>
+            <a:r>
+              <a:rPr lang="en-US" sz="4000" dirty="0"/>
+              <a:t> de </a:t>
+            </a:r>
+            <a:r>
+              <a:rPr lang="en-US" sz="4000" dirty="0" err="1"/>
+              <a:t>arribo</a:t>
+            </a:r>
+            <a:endParaRPr lang="en-US" sz="4000" dirty="0"/>
+          </a:p>
+        </p:txBody>
+      </p:sp>
+      <p:sp>
+        <p:nvSpPr>
+          <p:cNvPr id="20" name="Rectangle 19">
+            <a:extLst>
+              <a:ext uri="{FF2B5EF4-FFF2-40B4-BE49-F238E27FC236}">
+                <a16:creationId xmlns:a16="http://schemas.microsoft.com/office/drawing/2014/main" id="{BCD2888A-B069-069A-793C-8E0F236F50D9}"/>
+              </a:ext>
+              <a:ext uri="{C183D7F6-B498-43B3-948B-1728B52AA6E4}">
+                <adec:decorative xmlns:adec="http://schemas.microsoft.com/office/drawing/2017/decorative" val="1"/>
+              </a:ext>
+            </a:extLst>
+          </p:cNvPr>
+          <p:cNvSpPr>
+            <a:spLocks noGrp="1" noRot="1" noChangeAspect="1" noMove="1" noResize="1" noEditPoints="1" noAdjustHandles="1" noChangeArrowheads="1" noChangeShapeType="1" noTextEdit="1"/>
+          </p:cNvSpPr>
+          <p:nvPr>
+            <p:extLst>
+              <p:ext uri="{386F3935-93C4-4BCD-93E2-E3B085C9AB24}">
+                <p16:designElem xmlns:p16="http://schemas.microsoft.com/office/powerpoint/2015/main" val="1"/>
+              </p:ext>
+            </p:extLst>
+          </p:nvPr>
+        </p:nvSpPr>
+        <p:spPr>
+          <a:xfrm flipH="1">
+            <a:off x="0" y="6406116"/>
+            <a:ext cx="12191998" cy="461774"/>
+          </a:xfrm>
+          <a:prstGeom prst="rect">
+            <a:avLst/>
+          </a:prstGeom>
+          <a:gradFill>
+            <a:gsLst>
+              <a:gs pos="0">
+                <a:srgbClr val="000000"/>
+              </a:gs>
+              <a:gs pos="70000">
+                <a:schemeClr val="accent1">
+                  <a:lumMod val="75000"/>
+                </a:schemeClr>
+              </a:gs>
+            </a:gsLst>
+            <a:lin ang="15600000" scaled="0"/>
+          </a:gradFill>
+          <a:ln>
+            <a:noFill/>
+          </a:ln>
+        </p:spPr>
+        <p:style>
+          <a:lnRef idx="2">
+            <a:schemeClr val="accent1">
+              <a:shade val="50000"/>
+            </a:schemeClr>
+          </a:lnRef>
+          <a:fillRef idx="1">
+            <a:schemeClr val="accent1"/>
+          </a:fillRef>
+          <a:effectRef idx="0">
+            <a:schemeClr val="accent1"/>
+          </a:effectRef>
+          <a:fontRef idx="minor">
+            <a:schemeClr val="lt1"/>
+          </a:fontRef>
+        </p:style>
+        <p:txBody>
+          <a:bodyPr rtlCol="0" anchor="ctr"/>
+          <a:lstStyle/>
+          <a:p>
+            <a:pPr algn="ctr"/>
+            <a:endParaRPr lang="en-US"/>
+          </a:p>
+        </p:txBody>
+      </p:sp>
+      <p:sp>
+        <p:nvSpPr>
+          <p:cNvPr id="22" name="Rectangle 21">
+            <a:extLst>
+              <a:ext uri="{FF2B5EF4-FFF2-40B4-BE49-F238E27FC236}">
+                <a16:creationId xmlns:a16="http://schemas.microsoft.com/office/drawing/2014/main" id="{1EC413D8-B984-1560-5454-D23A722C0BCF}"/>
+              </a:ext>
+              <a:ext uri="{C183D7F6-B498-43B3-948B-1728B52AA6E4}">
+                <adec:decorative xmlns:adec="http://schemas.microsoft.com/office/drawing/2017/decorative" val="1"/>
+              </a:ext>
+            </a:extLst>
+          </p:cNvPr>
+          <p:cNvSpPr>
+            <a:spLocks noGrp="1" noRot="1" noChangeAspect="1" noMove="1" noResize="1" noEditPoints="1" noAdjustHandles="1" noChangeArrowheads="1" noChangeShapeType="1" noTextEdit="1"/>
+          </p:cNvSpPr>
+          <p:nvPr>
+            <p:extLst>
+              <p:ext uri="{386F3935-93C4-4BCD-93E2-E3B085C9AB24}">
+                <p16:designElem xmlns:p16="http://schemas.microsoft.com/office/powerpoint/2015/main" val="1"/>
+              </p:ext>
+            </p:extLst>
+          </p:nvPr>
+        </p:nvSpPr>
+        <p:spPr>
+          <a:xfrm flipH="1">
+            <a:off x="8115300" y="6406115"/>
+            <a:ext cx="4076698" cy="464399"/>
+          </a:xfrm>
+          <a:prstGeom prst="rect">
+            <a:avLst/>
+          </a:prstGeom>
+          <a:gradFill>
+            <a:gsLst>
+              <a:gs pos="19000">
+                <a:srgbClr val="000000">
+                  <a:alpha val="46000"/>
+                </a:srgbClr>
+              </a:gs>
+              <a:gs pos="99000">
+                <a:schemeClr val="accent1"/>
+              </a:gs>
+            </a:gsLst>
+            <a:lin ang="13200000" scaled="0"/>
+          </a:gradFill>
+          <a:ln>
+            <a:noFill/>
+          </a:ln>
+        </p:spPr>
+        <p:style>
+          <a:lnRef idx="2">
+            <a:schemeClr val="accent1">
+              <a:shade val="50000"/>
+            </a:schemeClr>
+          </a:lnRef>
+          <a:fillRef idx="1">
+            <a:schemeClr val="accent1"/>
+          </a:fillRef>
+          <a:effectRef idx="0">
+            <a:schemeClr val="accent1"/>
+          </a:effectRef>
+          <a:fontRef idx="minor">
+            <a:schemeClr val="lt1"/>
+          </a:fontRef>
+        </p:style>
+        <p:txBody>
+          <a:bodyPr rtlCol="0" anchor="ctr"/>
+          <a:lstStyle/>
+          <a:p>
+            <a:pPr algn="ctr"/>
+            <a:endParaRPr lang="en-US"/>
+          </a:p>
+        </p:txBody>
+      </p:sp>
+      <p:pic>
+        <p:nvPicPr>
+          <p:cNvPr id="3" name="Imagen 2">
+            <a:extLst>
+              <a:ext uri="{FF2B5EF4-FFF2-40B4-BE49-F238E27FC236}">
+                <a16:creationId xmlns:a16="http://schemas.microsoft.com/office/drawing/2014/main" id="{989A6D6C-8B0B-A6B5-B1B3-C4BEB4480F1D}"/>
+              </a:ext>
+            </a:extLst>
+          </p:cNvPr>
+          <p:cNvPicPr>
+            <a:picLocks noChangeAspect="1"/>
+          </p:cNvPicPr>
+          <p:nvPr/>
+        </p:nvPicPr>
+        <p:blipFill>
+          <a:blip r:embed="rId2" cstate="print">
+            <a:extLst>
+              <a:ext uri="{28A0092B-C50C-407E-A947-70E740481C1C}">
+                <a14:useLocalDpi xmlns:a14="http://schemas.microsoft.com/office/drawing/2010/main" val="0"/>
+              </a:ext>
+            </a:extLst>
+          </a:blip>
+          <a:stretch>
+            <a:fillRect/>
+          </a:stretch>
+        </p:blipFill>
+        <p:spPr>
+          <a:xfrm>
+            <a:off x="7805057" y="-3376"/>
+            <a:ext cx="4386941" cy="6409492"/>
+          </a:xfrm>
+          <a:prstGeom prst="rect">
+            <a:avLst/>
+          </a:prstGeom>
+        </p:spPr>
+      </p:pic>
+      <p:sp>
+        <p:nvSpPr>
+          <p:cNvPr id="4" name="Content Placeholder 14">
+            <a:extLst>
+              <a:ext uri="{FF2B5EF4-FFF2-40B4-BE49-F238E27FC236}">
+                <a16:creationId xmlns:a16="http://schemas.microsoft.com/office/drawing/2014/main" id="{5D3AD3ED-9DFD-A9DC-3AD0-A87461C840C3}"/>
+              </a:ext>
+            </a:extLst>
+          </p:cNvPr>
+          <p:cNvSpPr>
+            <a:spLocks noGrp="1"/>
+          </p:cNvSpPr>
+          <p:nvPr>
+            <p:ph idx="1"/>
+          </p:nvPr>
+        </p:nvSpPr>
+        <p:spPr>
+          <a:xfrm>
+            <a:off x="1136397" y="2930979"/>
+            <a:ext cx="6173262" cy="1077685"/>
+          </a:xfrm>
+        </p:spPr>
+        <p:txBody>
+          <a:bodyPr>
+            <a:normAutofit/>
+          </a:bodyPr>
+          <a:lstStyle/>
+          <a:p>
+            <a:pPr marL="0" indent="0" algn="just">
+              <a:buNone/>
+            </a:pPr>
+            <a:r>
+              <a:rPr lang="es-GT" sz="2000" noProof="0" dirty="0"/>
+              <a:t>Se puede observar que las estaciones cercanas al centro del mapa son en las que más se devuelven bicicletas.</a:t>
+            </a:r>
+          </a:p>
+        </p:txBody>
+      </p:sp>
+    </p:spTree>
+    <p:extLst>
+      <p:ext uri="{BB962C8B-B14F-4D97-AF65-F5344CB8AC3E}">
+        <p14:creationId xmlns:p14="http://schemas.microsoft.com/office/powerpoint/2010/main" val="2875470859"/>
+      </p:ext>
+    </p:extLst>
+  </p:cSld>
+  <p:clrMapOvr>
+    <a:masterClrMapping/>
+  </p:clrMapOvr>
+</p:sld>
+</file>
+
+<file path=ppt/slides/slide6.xml><?xml version="1.0" encoding="utf-8"?>
+<p:sld xmlns:a="http://schemas.openxmlformats.org/drawingml/2006/main" xmlns:r="http://schemas.openxmlformats.org/officeDocument/2006/relationships" xmlns:p="http://schemas.openxmlformats.org/presentationml/2006/main">
+  <p:cSld>
+    <p:bg>
+      <p:bgPr>
+        <a:solidFill>
+          <a:schemeClr val="bg1"/>
+        </a:solidFill>
+        <a:effectLst/>
+      </p:bgPr>
+    </p:bg>
+    <p:spTree>
+      <p:nvGrpSpPr>
+        <p:cNvPr id="1" name="">
+          <a:extLst>
+            <a:ext uri="{FF2B5EF4-FFF2-40B4-BE49-F238E27FC236}">
+              <a16:creationId xmlns:a16="http://schemas.microsoft.com/office/drawing/2014/main" id="{6069E8E4-E84C-7FA8-19D1-901CCEBE8506}"/>
+            </a:ext>
+          </a:extLst>
+        </p:cNvPr>
+        <p:cNvGrpSpPr/>
+        <p:nvPr/>
+      </p:nvGrpSpPr>
+      <p:grpSpPr>
+        <a:xfrm>
+          <a:off x="0" y="0"/>
+          <a:ext cx="0" cy="0"/>
+          <a:chOff x="0" y="0"/>
+          <a:chExt cx="0" cy="0"/>
+        </a:xfrm>
+      </p:grpSpPr>
+      <p:sp>
+        <p:nvSpPr>
+          <p:cNvPr id="18" name="Down Arrow 7">
+            <a:extLst>
+              <a:ext uri="{FF2B5EF4-FFF2-40B4-BE49-F238E27FC236}">
+                <a16:creationId xmlns:a16="http://schemas.microsoft.com/office/drawing/2014/main" id="{D4771268-CB57-404A-9271-370EB28F6090}"/>
+              </a:ext>
+              <a:ext uri="{C183D7F6-B498-43B3-948B-1728B52AA6E4}">
+                <adec:decorative xmlns:adec="http://schemas.microsoft.com/office/drawing/2017/decorative" val="1"/>
+              </a:ext>
+            </a:extLst>
+          </p:cNvPr>
+          <p:cNvSpPr>
+            <a:spLocks noGrp="1" noRot="1" noChangeAspect="1" noMove="1" noResize="1" noEditPoints="1" noAdjustHandles="1" noChangeArrowheads="1" noChangeShapeType="1" noTextEdit="1"/>
+          </p:cNvSpPr>
+          <p:nvPr>
+            <p:extLst>
+              <p:ext uri="{386F3935-93C4-4BCD-93E2-E3B085C9AB24}">
+                <p16:designElem xmlns:p16="http://schemas.microsoft.com/office/powerpoint/2015/main" val="1"/>
+              </p:ext>
+            </p:extLst>
+          </p:nvPr>
+        </p:nvSpPr>
+        <p:spPr>
+          <a:xfrm rot="16200000">
+            <a:off x="800100" y="1491343"/>
+            <a:ext cx="3333749" cy="3499103"/>
+          </a:xfrm>
+          <a:prstGeom prst="downArrow">
+            <a:avLst>
+              <a:gd name="adj1" fmla="val 100000"/>
+              <a:gd name="adj2" fmla="val 15788"/>
+            </a:avLst>
+          </a:prstGeom>
+          <a:solidFill>
+            <a:srgbClr val="404040"/>
+          </a:solidFill>
+          <a:ln w="53975">
+            <a:noFill/>
+          </a:ln>
+        </p:spPr>
+        <p:style>
+          <a:lnRef idx="2">
+            <a:schemeClr val="accent1">
+              <a:shade val="50000"/>
+            </a:schemeClr>
+          </a:lnRef>
+          <a:fillRef idx="1">
+            <a:schemeClr val="accent1"/>
+          </a:fillRef>
+          <a:effectRef idx="0">
+            <a:schemeClr val="accent1"/>
+          </a:effectRef>
+          <a:fontRef idx="minor">
+            <a:schemeClr val="lt1"/>
+          </a:fontRef>
+        </p:style>
+        <p:txBody>
+          <a:bodyPr rtlCol="0" anchor="ctr"/>
+          <a:lstStyle/>
+          <a:p>
+            <a:pPr algn="ctr"/>
+            <a:endParaRPr lang="en-US"/>
+          </a:p>
+        </p:txBody>
+      </p:sp>
+      <p:sp>
+        <p:nvSpPr>
+          <p:cNvPr id="2" name="Title 1">
+            <a:extLst>
+              <a:ext uri="{FF2B5EF4-FFF2-40B4-BE49-F238E27FC236}">
+                <a16:creationId xmlns:a16="http://schemas.microsoft.com/office/drawing/2014/main" id="{FB5A98CF-A2F3-BA10-A7B9-E689F37583CC}"/>
+              </a:ext>
+            </a:extLst>
+          </p:cNvPr>
+          <p:cNvSpPr>
+            <a:spLocks noGrp="1"/>
+          </p:cNvSpPr>
+          <p:nvPr>
+            <p:ph type="title"/>
+          </p:nvPr>
+        </p:nvSpPr>
+        <p:spPr>
+          <a:xfrm>
+            <a:off x="1028700" y="1967266"/>
+            <a:ext cx="2628900" cy="2547257"/>
+          </a:xfrm>
+          <a:noFill/>
+        </p:spPr>
+        <p:txBody>
+          <a:bodyPr vert="horz" lIns="91440" tIns="45720" rIns="91440" bIns="45720" rtlCol="0" anchor="ctr">
+            <a:normAutofit/>
+          </a:bodyPr>
+          <a:lstStyle/>
+          <a:p>
+            <a:pPr algn="ctr"/>
+            <a:r>
+              <a:rPr lang="en-US" sz="3300" kern="1200">
+                <a:solidFill>
+                  <a:srgbClr val="FFFFFF"/>
+                </a:solidFill>
+                <a:latin typeface="+mj-lt"/>
+                <a:ea typeface="+mj-ea"/>
+                <a:cs typeface="+mj-cs"/>
+              </a:rPr>
+              <a:t>Top 10 estaciones que más prestan bicicletas</a:t>
+            </a:r>
+          </a:p>
+        </p:txBody>
+      </p:sp>
+      <p:pic>
+        <p:nvPicPr>
+          <p:cNvPr id="7" name="Marcador de contenido 6">
+            <a:extLst>
+              <a:ext uri="{FF2B5EF4-FFF2-40B4-BE49-F238E27FC236}">
+                <a16:creationId xmlns:a16="http://schemas.microsoft.com/office/drawing/2014/main" id="{EB0F486F-57CF-A794-7E72-A137EA005FAD}"/>
+              </a:ext>
+            </a:extLst>
+          </p:cNvPr>
+          <p:cNvPicPr>
+            <a:picLocks noGrp="1" noChangeAspect="1"/>
+          </p:cNvPicPr>
+          <p:nvPr>
+            <p:ph idx="1"/>
+          </p:nvPr>
+        </p:nvPicPr>
+        <p:blipFill>
+          <a:blip r:embed="rId2">
+            <a:extLst>
+              <a:ext uri="{28A0092B-C50C-407E-A947-70E740481C1C}">
+                <a14:useLocalDpi xmlns:a14="http://schemas.microsoft.com/office/drawing/2010/main" val="0"/>
+              </a:ext>
+            </a:extLst>
+          </a:blip>
+          <a:stretch>
+            <a:fillRect/>
+          </a:stretch>
+        </p:blipFill>
+        <p:spPr>
+          <a:xfrm>
+            <a:off x="4777316" y="1105446"/>
+            <a:ext cx="6780700" cy="4644779"/>
+          </a:xfrm>
+          <a:prstGeom prst="rect">
+            <a:avLst/>
+          </a:prstGeom>
+        </p:spPr>
+      </p:pic>
+    </p:spTree>
+    <p:extLst>
+      <p:ext uri="{BB962C8B-B14F-4D97-AF65-F5344CB8AC3E}">
+        <p14:creationId xmlns:p14="http://schemas.microsoft.com/office/powerpoint/2010/main" val="3477424395"/>
+      </p:ext>
+    </p:extLst>
+  </p:cSld>
+  <p:clrMapOvr>
+    <a:masterClrMapping/>
+  </p:clrMapOvr>
+</p:sld>
+</file>
+
+<file path=ppt/slides/slide7.xml><?xml version="1.0" encoding="utf-8"?>
+<p:sld xmlns:a="http://schemas.openxmlformats.org/drawingml/2006/main" xmlns:r="http://schemas.openxmlformats.org/officeDocument/2006/relationships" xmlns:p="http://schemas.openxmlformats.org/presentationml/2006/main">
+  <p:cSld>
+    <p:bg>
+      <p:bgPr>
+        <a:solidFill>
+          <a:schemeClr val="bg1"/>
+        </a:solidFill>
+        <a:effectLst/>
+      </p:bgPr>
+    </p:bg>
+    <p:spTree>
+      <p:nvGrpSpPr>
+        <p:cNvPr id="1" name="">
+          <a:extLst>
+            <a:ext uri="{FF2B5EF4-FFF2-40B4-BE49-F238E27FC236}">
+              <a16:creationId xmlns:a16="http://schemas.microsoft.com/office/drawing/2014/main" id="{F622F346-2673-83F5-B2F0-7A1AA239D3C7}"/>
+            </a:ext>
+          </a:extLst>
+        </p:cNvPr>
+        <p:cNvGrpSpPr/>
+        <p:nvPr/>
+      </p:nvGrpSpPr>
+      <p:grpSpPr>
+        <a:xfrm>
+          <a:off x="0" y="0"/>
+          <a:ext cx="0" cy="0"/>
+          <a:chOff x="0" y="0"/>
+          <a:chExt cx="0" cy="0"/>
+        </a:xfrm>
+      </p:grpSpPr>
+      <p:sp>
+        <p:nvSpPr>
+          <p:cNvPr id="18" name="Down Arrow 7">
+            <a:extLst>
+              <a:ext uri="{FF2B5EF4-FFF2-40B4-BE49-F238E27FC236}">
+                <a16:creationId xmlns:a16="http://schemas.microsoft.com/office/drawing/2014/main" id="{D4771268-CB57-404A-9271-370EB28F6090}"/>
+              </a:ext>
+              <a:ext uri="{C183D7F6-B498-43B3-948B-1728B52AA6E4}">
+                <adec:decorative xmlns:adec="http://schemas.microsoft.com/office/drawing/2017/decorative" val="1"/>
+              </a:ext>
+            </a:extLst>
+          </p:cNvPr>
+          <p:cNvSpPr>
+            <a:spLocks noGrp="1" noRot="1" noChangeAspect="1" noMove="1" noResize="1" noEditPoints="1" noAdjustHandles="1" noChangeArrowheads="1" noChangeShapeType="1" noTextEdit="1"/>
+          </p:cNvSpPr>
+          <p:nvPr>
+            <p:extLst>
+              <p:ext uri="{386F3935-93C4-4BCD-93E2-E3B085C9AB24}">
+                <p16:designElem xmlns:p16="http://schemas.microsoft.com/office/powerpoint/2015/main" val="1"/>
+              </p:ext>
+            </p:extLst>
+          </p:nvPr>
+        </p:nvSpPr>
+        <p:spPr>
+          <a:xfrm rot="16200000">
+            <a:off x="800100" y="1491343"/>
+            <a:ext cx="3333749" cy="3499103"/>
+          </a:xfrm>
+          <a:prstGeom prst="downArrow">
+            <a:avLst>
+              <a:gd name="adj1" fmla="val 100000"/>
+              <a:gd name="adj2" fmla="val 15788"/>
+            </a:avLst>
+          </a:prstGeom>
+          <a:solidFill>
+            <a:srgbClr val="404040"/>
+          </a:solidFill>
+          <a:ln w="53975">
+            <a:noFill/>
+          </a:ln>
+        </p:spPr>
+        <p:style>
+          <a:lnRef idx="2">
+            <a:schemeClr val="accent1">
+              <a:shade val="50000"/>
+            </a:schemeClr>
+          </a:lnRef>
+          <a:fillRef idx="1">
+            <a:schemeClr val="accent1"/>
+          </a:fillRef>
+          <a:effectRef idx="0">
+            <a:schemeClr val="accent1"/>
+          </a:effectRef>
+          <a:fontRef idx="minor">
+            <a:schemeClr val="lt1"/>
+          </a:fontRef>
+        </p:style>
+        <p:txBody>
+          <a:bodyPr rtlCol="0" anchor="ctr"/>
+          <a:lstStyle/>
+          <a:p>
+            <a:pPr algn="ctr"/>
+            <a:endParaRPr lang="en-US"/>
+          </a:p>
+        </p:txBody>
+      </p:sp>
+      <p:sp>
+        <p:nvSpPr>
+          <p:cNvPr id="2" name="Title 1">
+            <a:extLst>
+              <a:ext uri="{FF2B5EF4-FFF2-40B4-BE49-F238E27FC236}">
+                <a16:creationId xmlns:a16="http://schemas.microsoft.com/office/drawing/2014/main" id="{7E6ED641-86CD-C092-48EF-C2D99637478C}"/>
+              </a:ext>
+            </a:extLst>
+          </p:cNvPr>
+          <p:cNvSpPr>
+            <a:spLocks noGrp="1"/>
+          </p:cNvSpPr>
+          <p:nvPr>
+            <p:ph type="title"/>
+          </p:nvPr>
+        </p:nvSpPr>
+        <p:spPr>
+          <a:xfrm>
+            <a:off x="1028700" y="1967266"/>
+            <a:ext cx="2628900" cy="2547257"/>
+          </a:xfrm>
+          <a:noFill/>
+        </p:spPr>
+        <p:txBody>
+          <a:bodyPr vert="horz" lIns="91440" tIns="45720" rIns="91440" bIns="45720" rtlCol="0" anchor="ctr">
+            <a:normAutofit/>
+          </a:bodyPr>
+          <a:lstStyle/>
+          <a:p>
+            <a:pPr algn="ctr"/>
+            <a:r>
+              <a:rPr lang="en-US" sz="3300" kern="1200">
+                <a:solidFill>
+                  <a:srgbClr val="FFFFFF"/>
+                </a:solidFill>
+                <a:latin typeface="+mj-lt"/>
+                <a:ea typeface="+mj-ea"/>
+                <a:cs typeface="+mj-cs"/>
+              </a:rPr>
+              <a:t>Top 10 estaciones que más reciben bicicletas</a:t>
+            </a:r>
+          </a:p>
+        </p:txBody>
+      </p:sp>
+      <p:pic>
+        <p:nvPicPr>
+          <p:cNvPr id="10" name="Marcador de contenido 9">
+            <a:extLst>
+              <a:ext uri="{FF2B5EF4-FFF2-40B4-BE49-F238E27FC236}">
+                <a16:creationId xmlns:a16="http://schemas.microsoft.com/office/drawing/2014/main" id="{68341914-EB2E-63E0-A74D-2164693A6198}"/>
+              </a:ext>
+            </a:extLst>
+          </p:cNvPr>
+          <p:cNvPicPr>
+            <a:picLocks noGrp="1" noChangeAspect="1"/>
+          </p:cNvPicPr>
+          <p:nvPr>
+            <p:ph idx="1"/>
+          </p:nvPr>
+        </p:nvPicPr>
+        <p:blipFill>
+          <a:blip r:embed="rId2">
+            <a:extLst>
+              <a:ext uri="{28A0092B-C50C-407E-A947-70E740481C1C}">
+                <a14:useLocalDpi xmlns:a14="http://schemas.microsoft.com/office/drawing/2010/main" val="0"/>
+              </a:ext>
+            </a:extLst>
+          </a:blip>
+          <a:stretch>
+            <a:fillRect/>
+          </a:stretch>
+        </p:blipFill>
+        <p:spPr>
+          <a:xfrm>
+            <a:off x="4777316" y="1317343"/>
+            <a:ext cx="6780700" cy="4220984"/>
+          </a:xfrm>
+          <a:prstGeom prst="rect">
+            <a:avLst/>
+          </a:prstGeom>
+        </p:spPr>
+      </p:pic>
+    </p:spTree>
+    <p:extLst>
+      <p:ext uri="{BB962C8B-B14F-4D97-AF65-F5344CB8AC3E}">
+        <p14:creationId xmlns:p14="http://schemas.microsoft.com/office/powerpoint/2010/main" val="197505737"/>
+      </p:ext>
+    </p:extLst>
+  </p:cSld>
+  <p:clrMapOvr>
+    <a:masterClrMapping/>
+  </p:clrMapOvr>
+</p:sld>
+</file>
+
+<file path=ppt/slides/slide8.xml><?xml version="1.0" encoding="utf-8"?>
+<p:sld xmlns:a="http://schemas.openxmlformats.org/drawingml/2006/main" xmlns:r="http://schemas.openxmlformats.org/officeDocument/2006/relationships" xmlns:p="http://schemas.openxmlformats.org/presentationml/2006/main">
+  <p:cSld>
+    <p:bg>
+      <p:bgPr>
+        <a:solidFill>
+          <a:schemeClr val="bg1"/>
+        </a:solidFill>
+        <a:effectLst/>
+      </p:bgPr>
+    </p:bg>
+    <p:spTree>
+      <p:nvGrpSpPr>
+        <p:cNvPr id="1" name=""/>
+        <p:cNvGrpSpPr/>
+        <p:nvPr/>
+      </p:nvGrpSpPr>
+      <p:grpSpPr>
+        <a:xfrm>
+          <a:off x="0" y="0"/>
+          <a:ext cx="0" cy="0"/>
+          <a:chOff x="0" y="0"/>
+          <a:chExt cx="0" cy="0"/>
+        </a:xfrm>
+      </p:grpSpPr>
+      <p:sp>
+        <p:nvSpPr>
+          <p:cNvPr id="2" name="Title 1">
+            <a:extLst>
+              <a:ext uri="{FF2B5EF4-FFF2-40B4-BE49-F238E27FC236}">
+                <a16:creationId xmlns:a16="http://schemas.microsoft.com/office/drawing/2014/main" id="{A13306C9-CE7A-23A0-872C-0E567F4F6EC3}"/>
+              </a:ext>
+            </a:extLst>
+          </p:cNvPr>
+          <p:cNvSpPr>
+            <a:spLocks noGrp="1"/>
+          </p:cNvSpPr>
+          <p:nvPr>
+            <p:ph type="title"/>
+          </p:nvPr>
+        </p:nvSpPr>
+        <p:spPr>
+          <a:xfrm>
+            <a:off x="876693" y="741391"/>
+            <a:ext cx="3455821" cy="1616203"/>
+          </a:xfrm>
+        </p:spPr>
+        <p:txBody>
+          <a:bodyPr anchor="b">
+            <a:normAutofit/>
+          </a:bodyPr>
+          <a:lstStyle/>
+          <a:p>
+            <a:r>
+              <a:rPr lang="en-US" sz="3200" dirty="0" err="1"/>
+              <a:t>Visualización</a:t>
+            </a:r>
+            <a:r>
+              <a:rPr lang="en-US" sz="3200" dirty="0"/>
+              <a:t> de </a:t>
+            </a:r>
+            <a:r>
+              <a:rPr lang="en-US" sz="3200" dirty="0" err="1"/>
+              <a:t>los</a:t>
+            </a:r>
+            <a:r>
+              <a:rPr lang="en-US" sz="3200" dirty="0"/>
+              <a:t> </a:t>
+            </a:r>
+            <a:r>
+              <a:rPr lang="en-US" sz="3200" dirty="0" err="1"/>
+              <a:t>datos</a:t>
+            </a:r>
+          </a:p>
+        </p:txBody>
+      </p:sp>
+      <p:sp>
+        <p:nvSpPr>
+          <p:cNvPr id="8" name="Content Placeholder 7">
+            <a:extLst>
+              <a:ext uri="{FF2B5EF4-FFF2-40B4-BE49-F238E27FC236}">
+                <a16:creationId xmlns:a16="http://schemas.microsoft.com/office/drawing/2014/main" id="{D9678DC7-FA19-384D-41F0-6533B55D0B65}"/>
+              </a:ext>
+            </a:extLst>
+          </p:cNvPr>
+          <p:cNvSpPr>
+            <a:spLocks noGrp="1"/>
+          </p:cNvSpPr>
+          <p:nvPr>
+            <p:ph idx="1"/>
+          </p:nvPr>
+        </p:nvSpPr>
+        <p:spPr>
+          <a:xfrm>
+            <a:off x="876693" y="2533476"/>
+            <a:ext cx="3455821" cy="3447832"/>
+          </a:xfrm>
+        </p:spPr>
+        <p:txBody>
+          <a:bodyPr anchor="t">
+            <a:normAutofit/>
+          </a:bodyPr>
+          <a:lstStyle/>
+          <a:p>
+            <a:r>
+              <a:rPr lang="en-US" sz="2000" dirty="0"/>
+              <a:t>Es </a:t>
+            </a:r>
+            <a:r>
+              <a:rPr lang="en-US" sz="2000" dirty="0" err="1"/>
+              <a:t>posible</a:t>
+            </a:r>
+            <a:r>
+              <a:rPr lang="en-US" sz="2000" dirty="0"/>
+              <a:t> </a:t>
+            </a:r>
+            <a:r>
+              <a:rPr lang="en-US" sz="2000" dirty="0" err="1"/>
+              <a:t>observar</a:t>
+            </a:r>
+            <a:r>
+              <a:rPr lang="en-US" sz="2000" dirty="0"/>
+              <a:t> </a:t>
+            </a:r>
+            <a:r>
+              <a:rPr lang="en-US" sz="2000" dirty="0" err="1"/>
+              <a:t>que</a:t>
+            </a:r>
+            <a:r>
+              <a:rPr lang="en-US" sz="2000" dirty="0"/>
+              <a:t> </a:t>
+            </a:r>
+            <a:r>
+              <a:rPr lang="en-US" sz="2000" dirty="0" err="1"/>
+              <a:t>los</a:t>
+            </a:r>
+            <a:r>
+              <a:rPr lang="en-US" sz="2000" dirty="0"/>
+              <a:t> </a:t>
+            </a:r>
+            <a:r>
+              <a:rPr lang="en-US" sz="2000" dirty="0" err="1"/>
+              <a:t>datos</a:t>
+            </a:r>
+            <a:r>
+              <a:rPr lang="en-US" sz="2000" dirty="0"/>
+              <a:t> se </a:t>
+            </a:r>
+            <a:r>
+              <a:rPr lang="en-US" sz="2000" dirty="0" err="1"/>
+              <a:t>dividen</a:t>
+            </a:r>
+            <a:r>
+              <a:rPr lang="en-US" sz="2000" dirty="0"/>
+              <a:t> </a:t>
+            </a:r>
+            <a:r>
+              <a:rPr lang="en-US" sz="2000" dirty="0" err="1"/>
+              <a:t>en</a:t>
+            </a:r>
+            <a:r>
+              <a:rPr lang="en-US" sz="2000" dirty="0"/>
+              <a:t> dos conjuntos bien </a:t>
+            </a:r>
+            <a:r>
+              <a:rPr lang="en-US" sz="2000" dirty="0" err="1"/>
+              <a:t>diferenciados</a:t>
+            </a:r>
+            <a:r>
+              <a:rPr lang="en-US" sz="2000" dirty="0"/>
+              <a:t>.</a:t>
+            </a:r>
+          </a:p>
+        </p:txBody>
+      </p:sp>
+      <p:pic>
+        <p:nvPicPr>
+          <p:cNvPr id="4" name="Content Placeholder 3">
+            <a:extLst>
+              <a:ext uri="{FF2B5EF4-FFF2-40B4-BE49-F238E27FC236}">
+                <a16:creationId xmlns:a16="http://schemas.microsoft.com/office/drawing/2014/main" id="{F20DAE6F-2E2D-B070-56D2-3B9743617C73}"/>
+              </a:ext>
+            </a:extLst>
+          </p:cNvPr>
+          <p:cNvPicPr>
+            <a:picLocks noChangeAspect="1"/>
+          </p:cNvPicPr>
+          <p:nvPr/>
+        </p:nvPicPr>
+        <p:blipFill>
+          <a:blip r:embed="rId2"/>
+          <a:stretch>
+            <a:fillRect/>
+          </a:stretch>
+        </p:blipFill>
+        <p:spPr>
+          <a:xfrm>
+            <a:off x="4987672" y="1013690"/>
+            <a:ext cx="6128388" cy="4662477"/>
+          </a:xfrm>
+          <a:prstGeom prst="rect">
+            <a:avLst/>
+          </a:prstGeom>
+        </p:spPr>
+      </p:pic>
+      <p:grpSp>
+        <p:nvGrpSpPr>
+          <p:cNvPr id="11" name="Group 10">
+            <a:extLst>
+              <a:ext uri="{FF2B5EF4-FFF2-40B4-BE49-F238E27FC236}">
+                <a16:creationId xmlns:a16="http://schemas.microsoft.com/office/drawing/2014/main" id="{6258F736-B256-8039-9DC6-F4E49A5C5AD5}"/>
+              </a:ext>
+              <a:ext uri="{C183D7F6-B498-43B3-948B-1728B52AA6E4}">
+                <adec:decorative xmlns:adec="http://schemas.microsoft.com/office/drawing/2017/decorative" val="1"/>
+              </a:ext>
+            </a:extLst>
+          </p:cNvPr>
+          <p:cNvGrpSpPr>
+            <a:grpSpLocks noGrp="1" noUngrp="1" noRot="1" noChangeAspect="1" noMove="1" noResize="1"/>
+          </p:cNvGrpSpPr>
+          <p:nvPr>
+            <p:extLst>
+              <p:ext uri="{386F3935-93C4-4BCD-93E2-E3B085C9AB24}">
+                <p16:designElem xmlns:p16="http://schemas.microsoft.com/office/powerpoint/2015/main" val="1"/>
+              </p:ext>
+            </p:extLst>
+          </p:nvPr>
+        </p:nvGrpSpPr>
+        <p:grpSpPr>
+          <a:xfrm flipH="1">
+            <a:off x="12068638" y="0"/>
+            <a:ext cx="123362" cy="6858000"/>
+            <a:chOff x="12068638" y="0"/>
+            <a:chExt cx="123362" cy="6858000"/>
+          </a:xfrm>
+        </p:grpSpPr>
+        <p:sp>
+          <p:nvSpPr>
+            <p:cNvPr id="12" name="Rectangle 11">
+              <a:extLst>
+                <a:ext uri="{FF2B5EF4-FFF2-40B4-BE49-F238E27FC236}">
+                  <a16:creationId xmlns:a16="http://schemas.microsoft.com/office/drawing/2014/main" id="{10B4520A-996E-330C-99DA-69CA4D89E906}"/>
+                </a:ext>
+                <a:ext uri="{C183D7F6-B498-43B3-948B-1728B52AA6E4}">
+                  <adec:decorative xmlns:adec="http://schemas.microsoft.com/office/drawing/2017/decorative" val="1"/>
+                </a:ext>
+              </a:extLst>
+            </p:cNvPr>
+            <p:cNvSpPr/>
+            <p:nvPr>
+              <p:extLst>
+                <p:ext uri="{386F3935-93C4-4BCD-93E2-E3B085C9AB24}">
+                  <p16:designElem xmlns:p16="http://schemas.microsoft.com/office/powerpoint/2015/main" val="1"/>
+                </p:ext>
+              </p:extLst>
+            </p:nvPr>
+          </p:nvSpPr>
+          <p:spPr>
+            <a:xfrm>
+              <a:off x="12068638" y="0"/>
+              <a:ext cx="123362" cy="6858000"/>
+            </a:xfrm>
+            <a:prstGeom prst="rect">
+              <a:avLst/>
+            </a:prstGeom>
+            <a:gradFill>
+              <a:gsLst>
+                <a:gs pos="0">
+                  <a:schemeClr val="accent2"/>
+                </a:gs>
+                <a:gs pos="100000">
+                  <a:schemeClr val="accent5"/>
+                </a:gs>
+              </a:gsLst>
+              <a:lin ang="1800000" scaled="0"/>
+            </a:gradFill>
+            <a:ln>
+              <a:noFill/>
+            </a:ln>
+          </p:spPr>
+          <p:style>
+            <a:lnRef idx="2">
+              <a:schemeClr val="accent1">
+                <a:shade val="50000"/>
+              </a:schemeClr>
+            </a:lnRef>
+            <a:fillRef idx="1">
+              <a:schemeClr val="accent1"/>
+            </a:fillRef>
+            <a:effectRef idx="0">
+              <a:schemeClr val="accent1"/>
+            </a:effectRef>
+            <a:fontRef idx="minor">
+              <a:schemeClr val="lt1"/>
+            </a:fontRef>
+          </p:style>
+          <p:txBody>
+            <a:bodyPr rtlCol="0" anchor="ctr"/>
+            <a:lstStyle/>
+            <a:p>
+              <a:pPr algn="ctr"/>
+              <a:endParaRPr lang="en-US"/>
+            </a:p>
+          </p:txBody>
+        </p:sp>
+        <p:sp>
+          <p:nvSpPr>
+            <p:cNvPr id="13" name="Rectangle 12">
+              <a:extLst>
+                <a:ext uri="{FF2B5EF4-FFF2-40B4-BE49-F238E27FC236}">
+                  <a16:creationId xmlns:a16="http://schemas.microsoft.com/office/drawing/2014/main" id="{EC8FA945-E356-695F-18D6-CAD4EF34FE4A}"/>
+                </a:ext>
+                <a:ext uri="{C183D7F6-B498-43B3-948B-1728B52AA6E4}">
+                  <adec:decorative xmlns:adec="http://schemas.microsoft.com/office/drawing/2017/decorative" val="1"/>
+                </a:ext>
+              </a:extLst>
+            </p:cNvPr>
+            <p:cNvSpPr/>
+            <p:nvPr>
+              <p:extLst>
+                <p:ext uri="{386F3935-93C4-4BCD-93E2-E3B085C9AB24}">
+                  <p16:designElem xmlns:p16="http://schemas.microsoft.com/office/powerpoint/2015/main" val="1"/>
+                </p:ext>
+              </p:extLst>
+            </p:nvPr>
+          </p:nvSpPr>
+          <p:spPr>
+            <a:xfrm>
+              <a:off x="12068638" y="3527553"/>
+              <a:ext cx="123362" cy="3330447"/>
+            </a:xfrm>
+            <a:prstGeom prst="rect">
+              <a:avLst/>
+            </a:prstGeom>
+            <a:gradFill>
+              <a:gsLst>
+                <a:gs pos="19000">
+                  <a:schemeClr val="accent5">
+                    <a:lumMod val="60000"/>
+                    <a:lumOff val="40000"/>
+                    <a:alpha val="0"/>
+                  </a:schemeClr>
+                </a:gs>
+                <a:gs pos="100000">
+                  <a:schemeClr val="accent5">
+                    <a:lumMod val="60000"/>
+                    <a:lumOff val="40000"/>
+                  </a:schemeClr>
+                </a:gs>
+              </a:gsLst>
+              <a:lin ang="600000" scaled="0"/>
+            </a:gradFill>
+            <a:ln>
+              <a:noFill/>
+            </a:ln>
+          </p:spPr>
+          <p:style>
+            <a:lnRef idx="2">
+              <a:schemeClr val="accent1">
+                <a:shade val="50000"/>
+              </a:schemeClr>
+            </a:lnRef>
+            <a:fillRef idx="1">
+              <a:schemeClr val="accent1"/>
+            </a:fillRef>
+            <a:effectRef idx="0">
+              <a:schemeClr val="accent1"/>
+            </a:effectRef>
+            <a:fontRef idx="minor">
+              <a:schemeClr val="lt1"/>
+            </a:fontRef>
+          </p:style>
+          <p:txBody>
+            <a:bodyPr rtlCol="0" anchor="ctr"/>
+            <a:lstStyle/>
+            <a:p>
+              <a:pPr algn="ctr"/>
+              <a:endParaRPr lang="en-US"/>
+            </a:p>
+          </p:txBody>
+        </p:sp>
+      </p:grpSp>
+      <p:sp>
+        <p:nvSpPr>
+          <p:cNvPr id="5" name="TextBox 4">
+            <a:extLst>
+              <a:ext uri="{FF2B5EF4-FFF2-40B4-BE49-F238E27FC236}">
+                <a16:creationId xmlns:a16="http://schemas.microsoft.com/office/drawing/2014/main" id="{F11294EC-74C2-68D6-F7FD-3E33FDF18C9F}"/>
+              </a:ext>
+            </a:extLst>
+          </p:cNvPr>
+          <p:cNvSpPr txBox="1"/>
+          <p:nvPr/>
+        </p:nvSpPr>
+        <p:spPr>
+          <a:xfrm>
+            <a:off x="5425230" y="5681379"/>
+            <a:ext cx="4897400" cy="584775"/>
+          </a:xfrm>
+          <a:prstGeom prst="rect">
+            <a:avLst/>
+          </a:prstGeom>
+          <a:noFill/>
+        </p:spPr>
+        <p:txBody>
+          <a:bodyPr rot="0" spcFirstLastPara="0" vertOverflow="overflow" horzOverflow="overflow" vert="horz" wrap="square" lIns="91440" tIns="45720" rIns="91440" bIns="45720" numCol="1" spcCol="0" rtlCol="0" fromWordArt="0" anchor="t" anchorCtr="0" forceAA="0" compatLnSpc="1">
+            <a:prstTxWarp prst="textNoShape">
+              <a:avLst/>
+            </a:prstTxWarp>
+            <a:spAutoFit/>
+          </a:bodyPr>
+          <a:lstStyle/>
+          <a:p>
+            <a:r>
+              <a:rPr lang="en-US" sz="1600" dirty="0"/>
+              <a:t>Figura1. </a:t>
+            </a:r>
+            <a:r>
+              <a:rPr lang="en-US" sz="1600" dirty="0" err="1"/>
+              <a:t>Visualización</a:t>
+            </a:r>
+            <a:r>
+              <a:rPr lang="en-US" sz="1600" dirty="0"/>
+              <a:t> con PCA del conjunto de </a:t>
+            </a:r>
+            <a:r>
+              <a:rPr lang="en-US" sz="1600" dirty="0" err="1"/>
+              <a:t>datos</a:t>
+            </a:r>
+            <a:r>
+              <a:rPr lang="en-US" sz="1600" dirty="0"/>
+              <a:t> </a:t>
+            </a:r>
+            <a:r>
+              <a:rPr lang="en-US" sz="1600" dirty="0" err="1"/>
+              <a:t>usado</a:t>
+            </a:r>
+            <a:endParaRPr lang="en-US" sz="1600" dirty="0"/>
+          </a:p>
+        </p:txBody>
+      </p:sp>
+    </p:spTree>
+    <p:extLst>
+      <p:ext uri="{BB962C8B-B14F-4D97-AF65-F5344CB8AC3E}">
+        <p14:creationId xmlns:p14="http://schemas.microsoft.com/office/powerpoint/2010/main" val="2239044825"/>
+      </p:ext>
+    </p:extLst>
+  </p:cSld>
+  <p:clrMapOvr>
+    <a:masterClrMapping/>
+  </p:clrMapOvr>
+</p:sld>
+</file>
+
+<file path=ppt/slides/slide9.xml><?xml version="1.0" encoding="utf-8"?>
+<p:sld xmlns:a="http://schemas.openxmlformats.org/drawingml/2006/main" xmlns:r="http://schemas.openxmlformats.org/officeDocument/2006/relationships" xmlns:p="http://schemas.openxmlformats.org/presentationml/2006/main">
+  <p:cSld>
+    <p:bg>
+      <p:bgPr>
+        <a:solidFill>
+          <a:schemeClr val="bg1"/>
+        </a:solidFill>
+        <a:effectLst/>
+      </p:bgPr>
+    </p:bg>
+    <p:spTree>
+      <p:nvGrpSpPr>
+        <p:cNvPr id="1" name=""/>
+        <p:cNvGrpSpPr/>
+        <p:nvPr/>
+      </p:nvGrpSpPr>
+      <p:grpSpPr>
+        <a:xfrm>
+          <a:off x="0" y="0"/>
+          <a:ext cx="0" cy="0"/>
+          <a:chOff x="0" y="0"/>
+          <a:chExt cx="0" cy="0"/>
+        </a:xfrm>
+      </p:grpSpPr>
+      <p:sp useBgFill="1">
+        <p:nvSpPr>
+          <p:cNvPr id="21" name="Rectangle 20">
+            <a:extLst>
+              <a:ext uri="{FF2B5EF4-FFF2-40B4-BE49-F238E27FC236}">
+                <a16:creationId xmlns:a16="http://schemas.microsoft.com/office/drawing/2014/main" id="{0B9EE3F3-89B7-43C3-8651-C4C96830993D}"/>
+              </a:ext>
+              <a:ext uri="{C183D7F6-B498-43B3-948B-1728B52AA6E4}">
+                <adec:decorative xmlns:adec="http://schemas.microsoft.com/office/drawing/2017/decorative" val="1"/>
+              </a:ext>
+            </a:extLst>
+          </p:cNvPr>
+          <p:cNvSpPr>
+            <a:spLocks noGrp="1" noRot="1" noChangeAspect="1" noMove="1" noResize="1" noEditPoints="1" noAdjustHandles="1" noChangeArrowheads="1" noChangeShapeType="1" noTextEdit="1"/>
+          </p:cNvSpPr>
+          <p:nvPr>
+            <p:extLst>
+              <p:ext uri="{386F3935-93C4-4BCD-93E2-E3B085C9AB24}">
+                <p16:designElem xmlns:p16="http://schemas.microsoft.com/office/powerpoint/2015/main" val="1"/>
+              </p:ext>
+            </p:extLst>
+          </p:nvPr>
+        </p:nvSpPr>
+        <p:spPr>
+          <a:xfrm>
+            <a:off x="0" y="0"/>
+            <a:ext cx="12192000" cy="6858000"/>
+          </a:xfrm>
+          <a:prstGeom prst="rect">
+            <a:avLst/>
+          </a:prstGeom>
+          <a:ln>
+            <a:noFill/>
+          </a:ln>
+        </p:spPr>
+        <p:style>
+          <a:lnRef idx="2">
+            <a:schemeClr val="accent1">
+              <a:shade val="50000"/>
+            </a:schemeClr>
+          </a:lnRef>
+          <a:fillRef idx="1">
+            <a:schemeClr val="accent1"/>
+          </a:fillRef>
+          <a:effectRef idx="0">
+            <a:schemeClr val="accent1"/>
+          </a:effectRef>
+          <a:fontRef idx="minor">
+            <a:schemeClr val="lt1"/>
+          </a:fontRef>
+        </p:style>
+        <p:txBody>
+          <a:bodyPr rtlCol="0" anchor="ctr"/>
+          <a:lstStyle/>
+          <a:p>
+            <a:pPr algn="ctr"/>
+            <a:endParaRPr lang="en-US"/>
+          </a:p>
+        </p:txBody>
+      </p:sp>
+      <p:sp>
+        <p:nvSpPr>
+          <p:cNvPr id="2" name="Título 1">
+            <a:extLst>
+              <a:ext uri="{FF2B5EF4-FFF2-40B4-BE49-F238E27FC236}">
+                <a16:creationId xmlns:a16="http://schemas.microsoft.com/office/drawing/2014/main" id="{357B8F08-64E1-BDCA-745A-0D80ABE25C62}"/>
+              </a:ext>
+            </a:extLst>
+          </p:cNvPr>
+          <p:cNvSpPr>
+            <a:spLocks noGrp="1"/>
+          </p:cNvSpPr>
+          <p:nvPr>
+            <p:ph type="title"/>
+          </p:nvPr>
+        </p:nvSpPr>
+        <p:spPr>
+          <a:xfrm>
+            <a:off x="411480" y="991443"/>
+            <a:ext cx="4443154" cy="1087819"/>
+          </a:xfrm>
+        </p:spPr>
+        <p:txBody>
+          <a:bodyPr anchor="b">
+            <a:normAutofit/>
+          </a:bodyPr>
+          <a:lstStyle/>
+          <a:p>
+            <a:r>
+              <a:rPr lang="es-GT" sz="3100" dirty="0"/>
+              <a:t>Influencia de la pandemia en el uso de bicicletas</a:t>
+            </a:r>
+          </a:p>
+        </p:txBody>
+      </p:sp>
+      <p:sp>
+        <p:nvSpPr>
+          <p:cNvPr id="23" name="Rectangle 22">
+            <a:extLst>
+              <a:ext uri="{FF2B5EF4-FFF2-40B4-BE49-F238E27FC236}">
+                <a16:creationId xmlns:a16="http://schemas.microsoft.com/office/drawing/2014/main" id="{33AE4636-AEEC-45D6-84D4-7AC2DA48ECF8}"/>
+              </a:ext>
+              <a:ext uri="{C183D7F6-B498-43B3-948B-1728B52AA6E4}">
+                <adec:decorative xmlns:adec="http://schemas.microsoft.com/office/drawing/2017/decorative" val="1"/>
+              </a:ext>
+            </a:extLst>
+          </p:cNvPr>
+          <p:cNvSpPr>
+            <a:spLocks noGrp="1" noRot="1" noChangeAspect="1" noMove="1" noResize="1" noEditPoints="1" noAdjustHandles="1" noChangeArrowheads="1" noChangeShapeType="1" noTextEdit="1"/>
+          </p:cNvSpPr>
+          <p:nvPr>
+            <p:extLst>
+              <p:ext uri="{386F3935-93C4-4BCD-93E2-E3B085C9AB24}">
+                <p16:designElem xmlns:p16="http://schemas.microsoft.com/office/powerpoint/2015/main" val="1"/>
+              </p:ext>
+            </p:extLst>
+          </p:nvPr>
+        </p:nvSpPr>
+        <p:spPr>
+          <a:xfrm rot="5400000">
+            <a:off x="649223" y="387939"/>
+            <a:ext cx="73152" cy="548640"/>
+          </a:xfrm>
+          <a:prstGeom prst="rect">
+            <a:avLst/>
+          </a:prstGeom>
+          <a:solidFill>
+            <a:schemeClr val="accent2"/>
+          </a:solidFill>
+          <a:ln>
+            <a:noFill/>
+          </a:ln>
+        </p:spPr>
+        <p:style>
+          <a:lnRef idx="2">
+            <a:schemeClr val="accent1">
+              <a:shade val="50000"/>
+            </a:schemeClr>
+          </a:lnRef>
+          <a:fillRef idx="1">
+            <a:schemeClr val="accent1"/>
+          </a:fillRef>
+          <a:effectRef idx="0">
+            <a:schemeClr val="accent1"/>
+          </a:effectRef>
+          <a:fontRef idx="minor">
+            <a:schemeClr val="lt1"/>
+          </a:fontRef>
+        </p:style>
+        <p:txBody>
+          <a:bodyPr rtlCol="0" anchor="ctr"/>
+          <a:lstStyle/>
+          <a:p>
+            <a:pPr algn="ctr"/>
+            <a:endParaRPr lang="en-US">
+              <a:solidFill>
+                <a:prstClr val="white"/>
+              </a:solidFill>
+              <a:latin typeface="Calibri" panose="020F0502020204030204"/>
+            </a:endParaRPr>
+          </a:p>
+        </p:txBody>
+      </p:sp>
+      <p:sp>
+        <p:nvSpPr>
+          <p:cNvPr id="25" name="Rectangle 24">
+            <a:extLst>
+              <a:ext uri="{FF2B5EF4-FFF2-40B4-BE49-F238E27FC236}">
+                <a16:creationId xmlns:a16="http://schemas.microsoft.com/office/drawing/2014/main" id="{8D9CE0F4-2EB2-4F1F-8AAC-DB3571D9FE10}"/>
+              </a:ext>
+              <a:ext uri="{C183D7F6-B498-43B3-948B-1728B52AA6E4}">
+                <adec:decorative xmlns:adec="http://schemas.microsoft.com/office/drawing/2017/decorative" val="1"/>
+              </a:ext>
+            </a:extLst>
+          </p:cNvPr>
+          <p:cNvSpPr>
+            <a:spLocks noGrp="1" noRot="1" noChangeAspect="1" noMove="1" noResize="1" noEditPoints="1" noAdjustHandles="1" noChangeArrowheads="1" noChangeShapeType="1" noTextEdit="1"/>
+          </p:cNvSpPr>
+          <p:nvPr>
+            <p:extLst>
+              <p:ext uri="{386F3935-93C4-4BCD-93E2-E3B085C9AB24}">
+                <p16:designElem xmlns:p16="http://schemas.microsoft.com/office/powerpoint/2015/main" val="1"/>
+              </p:ext>
+            </p:extLst>
+          </p:nvPr>
+        </p:nvSpPr>
+        <p:spPr>
+          <a:xfrm>
+            <a:off x="411480" y="2285541"/>
+            <a:ext cx="4389120" cy="18288"/>
+          </a:xfrm>
+          <a:prstGeom prst="rect">
+            <a:avLst/>
+          </a:prstGeom>
+          <a:solidFill>
+            <a:srgbClr val="D5D5D5"/>
+          </a:solidFill>
+          <a:ln w="3175">
+            <a:noFill/>
+          </a:ln>
+          <a:effectLst/>
+        </p:spPr>
+        <p:style>
+          <a:lnRef idx="2">
+            <a:schemeClr val="accent1">
+              <a:shade val="50000"/>
+            </a:schemeClr>
+          </a:lnRef>
+          <a:fillRef idx="1">
+            <a:schemeClr val="accent1"/>
+          </a:fillRef>
+          <a:effectRef idx="0">
+            <a:schemeClr val="accent1"/>
+          </a:effectRef>
+          <a:fontRef idx="minor">
+            <a:schemeClr val="lt1"/>
+          </a:fontRef>
+        </p:style>
+        <p:txBody>
+          <a:bodyPr rtlCol="0" anchor="ctr"/>
+          <a:lstStyle/>
+          <a:p>
+            <a:pPr algn="ctr"/>
+            <a:endParaRPr lang="en-US">
+              <a:solidFill>
+                <a:prstClr val="white"/>
+              </a:solidFill>
+              <a:latin typeface="Calibri" panose="020F0502020204030204"/>
+            </a:endParaRPr>
+          </a:p>
+        </p:txBody>
+      </p:sp>
+      <p:sp>
+        <p:nvSpPr>
+          <p:cNvPr id="9" name="Content Placeholder 8">
+            <a:extLst>
+              <a:ext uri="{FF2B5EF4-FFF2-40B4-BE49-F238E27FC236}">
+                <a16:creationId xmlns:a16="http://schemas.microsoft.com/office/drawing/2014/main" id="{FBC19EE0-9B19-4047-66B9-58DA7010886F}"/>
+              </a:ext>
+            </a:extLst>
+          </p:cNvPr>
+          <p:cNvSpPr>
+            <a:spLocks noGrp="1"/>
+          </p:cNvSpPr>
+          <p:nvPr>
+            <p:ph idx="1"/>
+          </p:nvPr>
+        </p:nvSpPr>
+        <p:spPr>
+          <a:xfrm>
+            <a:off x="411480" y="2684095"/>
+            <a:ext cx="4443154" cy="3492868"/>
+          </a:xfrm>
+        </p:spPr>
+        <p:txBody>
+          <a:bodyPr>
+            <a:normAutofit/>
+          </a:bodyPr>
+          <a:lstStyle/>
+          <a:p>
+            <a:r>
+              <a:rPr lang="en-US" sz="1800" dirty="0"/>
+              <a:t>Se </a:t>
+            </a:r>
+            <a:r>
+              <a:rPr lang="en-US" sz="1800" dirty="0" err="1"/>
+              <a:t>observa</a:t>
+            </a:r>
+            <a:r>
+              <a:rPr lang="en-US" sz="1800" dirty="0"/>
+              <a:t> </a:t>
+            </a:r>
+            <a:r>
+              <a:rPr lang="en-US" sz="1800" dirty="0" err="1"/>
+              <a:t>en</a:t>
+            </a:r>
+            <a:r>
+              <a:rPr lang="en-US" sz="1800" dirty="0"/>
+              <a:t> la imagen </a:t>
+            </a:r>
+            <a:r>
+              <a:rPr lang="en-US" sz="1800" dirty="0" err="1"/>
+              <a:t>que</a:t>
+            </a:r>
+            <a:r>
+              <a:rPr lang="en-US" sz="1800" dirty="0"/>
+              <a:t> </a:t>
+            </a:r>
+            <a:r>
+              <a:rPr lang="en-US" sz="1800" dirty="0" err="1"/>
+              <a:t>el</a:t>
+            </a:r>
+            <a:r>
+              <a:rPr lang="en-US" sz="1800" dirty="0"/>
+              <a:t> </a:t>
+            </a:r>
+            <a:r>
+              <a:rPr lang="en-US" sz="1800" dirty="0" err="1"/>
+              <a:t>uso</a:t>
+            </a:r>
+            <a:r>
+              <a:rPr lang="en-US" sz="1800" dirty="0"/>
+              <a:t> de las </a:t>
+            </a:r>
+            <a:r>
+              <a:rPr lang="en-US" sz="1800" dirty="0" err="1"/>
+              <a:t>bicicletas</a:t>
+            </a:r>
+            <a:r>
+              <a:rPr lang="en-US" sz="1800" dirty="0"/>
+              <a:t> </a:t>
+            </a:r>
+            <a:r>
+              <a:rPr lang="en-US" sz="1800" dirty="0" err="1"/>
+              <a:t>fue</a:t>
+            </a:r>
+            <a:r>
+              <a:rPr lang="en-US" sz="1800" dirty="0"/>
+              <a:t> mayor </a:t>
+            </a:r>
+            <a:r>
+              <a:rPr lang="en-US" sz="1800" dirty="0" err="1"/>
+              <a:t>después</a:t>
+            </a:r>
+            <a:r>
+              <a:rPr lang="en-US" sz="1800" dirty="0"/>
+              <a:t> de la pandemia </a:t>
+            </a:r>
+            <a:r>
+              <a:rPr lang="en-US" sz="1800" dirty="0" err="1"/>
+              <a:t>que</a:t>
+            </a:r>
+            <a:r>
+              <a:rPr lang="en-US" sz="1800" dirty="0"/>
+              <a:t> antes de la </a:t>
+            </a:r>
+            <a:r>
+              <a:rPr lang="en-US" sz="1800" dirty="0" err="1"/>
+              <a:t>misma</a:t>
+            </a:r>
+            <a:r>
+              <a:rPr lang="en-US" sz="1800" dirty="0"/>
+              <a:t>.</a:t>
+            </a:r>
+          </a:p>
+        </p:txBody>
+      </p:sp>
+      <p:pic>
+        <p:nvPicPr>
+          <p:cNvPr id="5" name="Marcador de contenido 4">
+            <a:extLst>
+              <a:ext uri="{FF2B5EF4-FFF2-40B4-BE49-F238E27FC236}">
+                <a16:creationId xmlns:a16="http://schemas.microsoft.com/office/drawing/2014/main" id="{01EC1150-20D1-2C04-2018-215E831ACDA2}"/>
+              </a:ext>
+            </a:extLst>
+          </p:cNvPr>
+          <p:cNvPicPr>
+            <a:picLocks noChangeAspect="1"/>
+          </p:cNvPicPr>
+          <p:nvPr/>
+        </p:nvPicPr>
+        <p:blipFill>
+          <a:blip r:embed="rId2"/>
+          <a:stretch>
+            <a:fillRect/>
+          </a:stretch>
+        </p:blipFill>
+        <p:spPr>
+          <a:xfrm>
+            <a:off x="5385816" y="1742914"/>
+            <a:ext cx="6440424" cy="3316818"/>
+          </a:xfrm>
+          <a:prstGeom prst="rect">
+            <a:avLst/>
+          </a:prstGeom>
+        </p:spPr>
+      </p:pic>
+      <p:sp>
+        <p:nvSpPr>
+          <p:cNvPr id="6" name="TextBox 4">
+            <a:extLst>
+              <a:ext uri="{FF2B5EF4-FFF2-40B4-BE49-F238E27FC236}">
+                <a16:creationId xmlns:a16="http://schemas.microsoft.com/office/drawing/2014/main" id="{E15F4B84-8A57-CD3F-DD4D-A8F67E221A9E}"/>
+              </a:ext>
+            </a:extLst>
+          </p:cNvPr>
+          <p:cNvSpPr txBox="1"/>
+          <p:nvPr/>
+        </p:nvSpPr>
+        <p:spPr>
+          <a:xfrm>
+            <a:off x="6552281" y="5181649"/>
+            <a:ext cx="4897400" cy="584775"/>
+          </a:xfrm>
+          <a:prstGeom prst="rect">
+            <a:avLst/>
+          </a:prstGeom>
+          <a:noFill/>
+        </p:spPr>
+        <p:txBody>
+          <a:bodyPr rot="0" spcFirstLastPara="0" vertOverflow="overflow" horzOverflow="overflow" vert="horz" wrap="square" lIns="91440" tIns="45720" rIns="91440" bIns="45720" numCol="1" spcCol="0" rtlCol="0" fromWordArt="0" anchor="t" anchorCtr="0" forceAA="0" compatLnSpc="1">
+            <a:prstTxWarp prst="textNoShape">
+              <a:avLst/>
+            </a:prstTxWarp>
+            <a:spAutoFit/>
+          </a:bodyPr>
+          <a:lstStyle/>
+          <a:p>
+            <a:r>
+              <a:rPr lang="en-US" sz="1600" dirty="0"/>
+              <a:t>Figura2. </a:t>
+            </a:r>
+            <a:r>
+              <a:rPr lang="en-US" sz="1600" dirty="0" err="1"/>
+              <a:t>Tendencia</a:t>
+            </a:r>
+            <a:r>
+              <a:rPr lang="en-US" sz="1600" dirty="0"/>
+              <a:t> </a:t>
+            </a:r>
+            <a:r>
+              <a:rPr lang="en-US" sz="1600" dirty="0" err="1"/>
+              <a:t>en</a:t>
+            </a:r>
+            <a:r>
+              <a:rPr lang="en-US" sz="1600" dirty="0"/>
+              <a:t> </a:t>
+            </a:r>
+            <a:r>
+              <a:rPr lang="en-US" sz="1600" dirty="0" err="1"/>
+              <a:t>los</a:t>
+            </a:r>
+            <a:r>
+              <a:rPr lang="en-US" sz="1600" dirty="0"/>
+              <a:t> </a:t>
+            </a:r>
+            <a:r>
+              <a:rPr lang="en-US" sz="1600" dirty="0" err="1"/>
+              <a:t>préstamos</a:t>
+            </a:r>
+            <a:r>
+              <a:rPr lang="en-US" sz="1600" dirty="0"/>
+              <a:t> </a:t>
+            </a:r>
+            <a:r>
+              <a:rPr lang="en-US" sz="1600" dirty="0" err="1"/>
+              <a:t>promedio</a:t>
+            </a:r>
+            <a:r>
+              <a:rPr lang="en-US" sz="1600" dirty="0"/>
+              <a:t> de </a:t>
+            </a:r>
+            <a:r>
+              <a:rPr lang="en-US" sz="1600" dirty="0" err="1"/>
+              <a:t>bicicletas</a:t>
+            </a:r>
+            <a:r>
+              <a:rPr lang="en-US" sz="1600" dirty="0"/>
+              <a:t>.</a:t>
+            </a:r>
+          </a:p>
+        </p:txBody>
+      </p:sp>
+    </p:spTree>
+    <p:extLst>
+      <p:ext uri="{BB962C8B-B14F-4D97-AF65-F5344CB8AC3E}">
+        <p14:creationId xmlns:p14="http://schemas.microsoft.com/office/powerpoint/2010/main" val="3910698323"/>
       </p:ext>
     </p:extLst>
   </p:cSld>

--- a/Proyecto1_Seminario2.pptx
+++ b/Proyecto1_Seminario2.pptx
@@ -12,8 +12,9 @@
     <p:sldId id="261" r:id="rId6"/>
     <p:sldId id="263" r:id="rId7"/>
     <p:sldId id="265" r:id="rId8"/>
-    <p:sldId id="260" r:id="rId9"/>
-    <p:sldId id="262" r:id="rId10"/>
+    <p:sldId id="266" r:id="rId9"/>
+    <p:sldId id="260" r:id="rId10"/>
+    <p:sldId id="262" r:id="rId11"/>
   </p:sldIdLst>
   <p:sldSz cx="12192000" cy="6858000"/>
   <p:notesSz cx="6858000" cy="9144000"/>
@@ -3030,6 +3031,133 @@
 </p:sld>
 </file>
 
+<file path=ppt/slides/slide10.xml><?xml version="1.0" encoding="utf-8"?>
+<p:sld xmlns:a="http://schemas.openxmlformats.org/drawingml/2006/main" xmlns:r="http://schemas.openxmlformats.org/officeDocument/2006/relationships" xmlns:p="http://schemas.openxmlformats.org/presentationml/2006/main">
+  <p:cSld>
+    <p:spTree>
+      <p:nvGrpSpPr>
+        <p:cNvPr id="1" name=""/>
+        <p:cNvGrpSpPr/>
+        <p:nvPr/>
+      </p:nvGrpSpPr>
+      <p:grpSpPr>
+        <a:xfrm>
+          <a:off x="0" y="0"/>
+          <a:ext cx="0" cy="0"/>
+          <a:chOff x="0" y="0"/>
+          <a:chExt cx="0" cy="0"/>
+        </a:xfrm>
+      </p:grpSpPr>
+      <p:sp>
+        <p:nvSpPr>
+          <p:cNvPr id="2" name="Title 1">
+            <a:extLst>
+              <a:ext uri="{FF2B5EF4-FFF2-40B4-BE49-F238E27FC236}">
+                <a16:creationId xmlns:a16="http://schemas.microsoft.com/office/drawing/2014/main" id="{73EA76D5-C4F4-03CA-6137-3167E4F091FE}"/>
+              </a:ext>
+            </a:extLst>
+          </p:cNvPr>
+          <p:cNvSpPr>
+            <a:spLocks noGrp="1"/>
+          </p:cNvSpPr>
+          <p:nvPr>
+            <p:ph type="title"/>
+          </p:nvPr>
+        </p:nvSpPr>
+        <p:spPr/>
+        <p:txBody>
+          <a:bodyPr/>
+          <a:lstStyle/>
+          <a:p>
+            <a:r>
+              <a:rPr lang="en-US" dirty="0" err="1"/>
+              <a:t>Referencias</a:t>
+            </a:r>
+          </a:p>
+        </p:txBody>
+      </p:sp>
+      <p:sp>
+        <p:nvSpPr>
+          <p:cNvPr id="3" name="Content Placeholder 2">
+            <a:extLst>
+              <a:ext uri="{FF2B5EF4-FFF2-40B4-BE49-F238E27FC236}">
+                <a16:creationId xmlns:a16="http://schemas.microsoft.com/office/drawing/2014/main" id="{F5D557C2-1B29-775E-AE05-574ABC77B0C4}"/>
+              </a:ext>
+            </a:extLst>
+          </p:cNvPr>
+          <p:cNvSpPr>
+            <a:spLocks noGrp="1"/>
+          </p:cNvSpPr>
+          <p:nvPr>
+            <p:ph idx="1"/>
+          </p:nvPr>
+        </p:nvSpPr>
+        <p:spPr/>
+        <p:txBody>
+          <a:bodyPr/>
+          <a:lstStyle/>
+          <a:p>
+            <a:pPr lvl="0"/>
+            <a:r>
+              <a:rPr lang="es-GT" dirty="0"/>
+              <a:t>Procuraduría Federal de la Defensa del Trabajo. (2025, abril 8). </a:t>
+            </a:r>
+            <a:r>
+              <a:rPr lang="es-GT" i="1" dirty="0"/>
+              <a:t>Los días de Semana Santa 2025 ¿son días de descanso obligatorio?</a:t>
+            </a:r>
+            <a:r>
+              <a:rPr lang="es-GT" dirty="0"/>
+              <a:t> Gobierno de México. </a:t>
+            </a:r>
+            <a:r>
+              <a:rPr lang="es-GT" u="sng" dirty="0">
+                <a:hlinkClick r:id="rId2"/>
+              </a:rPr>
+              <a:t>https://www.gob.mx/profedet/articulos/los-dias-de-semana-santa-2025-son-dias-de-descanso-obligatorio</a:t>
+            </a:r>
+            <a:endParaRPr lang="es-GT" dirty="0"/>
+          </a:p>
+          <a:p>
+            <a:pPr lvl="0"/>
+            <a:r>
+              <a:rPr lang="es-GT" dirty="0"/>
+              <a:t>ECOBICI. (s.f.). </a:t>
+            </a:r>
+            <a:r>
+              <a:rPr lang="es-GT" i="1" dirty="0"/>
+              <a:t>Datos abiertos</a:t>
+            </a:r>
+            <a:r>
+              <a:rPr lang="es-GT" dirty="0"/>
+              <a:t>. Gobierno de la Ciudad de México. </a:t>
+            </a:r>
+            <a:r>
+              <a:rPr lang="es-GT" u="sng" dirty="0">
+                <a:hlinkClick r:id="rId3"/>
+              </a:rPr>
+              <a:t>https://ecobici.cdmx.gob.mx/datos-abiertos/</a:t>
+            </a:r>
+            <a:endParaRPr lang="es-GT" dirty="0"/>
+          </a:p>
+          <a:p>
+            <a:endParaRPr lang="en-US" dirty="0"/>
+          </a:p>
+        </p:txBody>
+      </p:sp>
+    </p:spTree>
+    <p:extLst>
+      <p:ext uri="{BB962C8B-B14F-4D97-AF65-F5344CB8AC3E}">
+        <p14:creationId xmlns:p14="http://schemas.microsoft.com/office/powerpoint/2010/main" val="2631313994"/>
+      </p:ext>
+    </p:extLst>
+  </p:cSld>
+  <p:clrMapOvr>
+    <a:masterClrMapping/>
+  </p:clrMapOvr>
+</p:sld>
+</file>
+
 <file path=ppt/slides/slide2.xml><?xml version="1.0" encoding="utf-8"?>
 <p:sld xmlns:a="http://schemas.openxmlformats.org/drawingml/2006/main" xmlns:r="http://schemas.openxmlformats.org/officeDocument/2006/relationships" xmlns:p="http://schemas.openxmlformats.org/presentationml/2006/main">
   <p:cSld>
@@ -3099,10 +3227,15 @@
             <p:ph idx="1"/>
           </p:nvPr>
         </p:nvSpPr>
-        <p:spPr/>
+        <p:spPr>
+          <a:xfrm>
+            <a:off x="838200" y="1825624"/>
+            <a:ext cx="10515600" cy="4411889"/>
+          </a:xfrm>
+        </p:spPr>
         <p:txBody>
           <a:bodyPr vert="horz" lIns="91440" tIns="45720" rIns="91440" bIns="45720" rtlCol="0" anchor="t">
-            <a:normAutofit/>
+            <a:normAutofit lnSpcReduction="10000"/>
           </a:bodyPr>
           <a:lstStyle/>
           <a:p>
@@ -3460,6 +3593,79 @@
             <a:r>
               <a:rPr lang="en-US" dirty="0"/>
               <a:t>?</a:t>
+            </a:r>
+          </a:p>
+          <a:p>
+            <a:pPr marL="514350" indent="-514350">
+              <a:buAutoNum type="arabicPeriod"/>
+            </a:pPr>
+            <a:r>
+              <a:rPr lang="en-US" dirty="0"/>
+              <a:t>¿Es </a:t>
+            </a:r>
+            <a:r>
+              <a:rPr lang="en-US" dirty="0" err="1"/>
+              <a:t>posible</a:t>
+            </a:r>
+            <a:r>
+              <a:rPr lang="en-US" dirty="0"/>
+              <a:t> </a:t>
+            </a:r>
+            <a:r>
+              <a:rPr lang="en-US" dirty="0" err="1"/>
+              <a:t>categorizar</a:t>
+            </a:r>
+            <a:r>
+              <a:rPr lang="en-US" dirty="0"/>
+              <a:t> la </a:t>
+            </a:r>
+            <a:r>
+              <a:rPr lang="en-US" dirty="0" err="1"/>
+              <a:t>época</a:t>
+            </a:r>
+            <a:r>
+              <a:rPr lang="en-US" dirty="0"/>
+              <a:t> post pandemia a </a:t>
+            </a:r>
+            <a:r>
+              <a:rPr lang="en-US" dirty="0" err="1"/>
+              <a:t>partir</a:t>
+            </a:r>
+            <a:r>
+              <a:rPr lang="en-US" dirty="0"/>
+              <a:t> de la </a:t>
+            </a:r>
+            <a:r>
+              <a:rPr lang="en-US" dirty="0" err="1"/>
+              <a:t>cantidad</a:t>
+            </a:r>
+            <a:r>
+              <a:rPr lang="en-US" dirty="0"/>
+              <a:t> de </a:t>
+            </a:r>
+            <a:r>
+              <a:rPr lang="en-US" dirty="0" err="1"/>
+              <a:t>viajes</a:t>
+            </a:r>
+            <a:r>
+              <a:rPr lang="en-US" dirty="0"/>
+              <a:t> y </a:t>
+            </a:r>
+            <a:r>
+              <a:rPr lang="en-US" dirty="0" err="1"/>
+              <a:t>el</a:t>
+            </a:r>
+            <a:r>
+              <a:rPr lang="en-US" dirty="0"/>
+              <a:t> </a:t>
+            </a:r>
+            <a:r>
+              <a:rPr lang="en-US" dirty="0" err="1"/>
+              <a:t>tipo</a:t>
+            </a:r>
+            <a:r>
+              <a:rPr lang="en-US" dirty="0"/>
+              <a:t> de día? </a:t>
             </a:r>
           </a:p>
         </p:txBody>
@@ -6601,9 +6807,23 @@
 <file path=ppt/slides/slide8.xml><?xml version="1.0" encoding="utf-8"?>
 <p:sld xmlns:a="http://schemas.openxmlformats.org/drawingml/2006/main" xmlns:r="http://schemas.openxmlformats.org/officeDocument/2006/relationships" xmlns:p="http://schemas.openxmlformats.org/presentationml/2006/main">
   <p:cSld>
+    <p:bg>
+      <p:bgPr>
+        <a:solidFill>
+          <a:schemeClr val="bg1"/>
+        </a:solidFill>
+        <a:effectLst/>
+      </p:bgPr>
+    </p:bg>
     <p:spTree>
       <p:nvGrpSpPr>
-        <p:cNvPr id="1" name=""/>
+        <p:cNvPr id="1" name="">
+          <a:extLst>
+            <a:ext uri="{FF2B5EF4-FFF2-40B4-BE49-F238E27FC236}">
+              <a16:creationId xmlns:a16="http://schemas.microsoft.com/office/drawing/2014/main" id="{2D0D7194-C290-E63C-01A6-CBD2B224FE16}"/>
+            </a:ext>
+          </a:extLst>
+        </p:cNvPr>
         <p:cNvGrpSpPr/>
         <p:nvPr/>
       </p:nvGrpSpPr>
@@ -6615,12 +6835,390 @@
           <a:chExt cx="0" cy="0"/>
         </a:xfrm>
       </p:grpSpPr>
+      <p:sp useBgFill="1">
+        <p:nvSpPr>
+          <p:cNvPr id="40" name="Rectangle 39">
+            <a:extLst>
+              <a:ext uri="{FF2B5EF4-FFF2-40B4-BE49-F238E27FC236}">
+                <a16:creationId xmlns:a16="http://schemas.microsoft.com/office/drawing/2014/main" id="{2151139A-886F-4B97-8815-729AD3831BBD}"/>
+              </a:ext>
+              <a:ext uri="{C183D7F6-B498-43B3-948B-1728B52AA6E4}">
+                <adec:decorative xmlns:adec="http://schemas.microsoft.com/office/drawing/2017/decorative" val="1"/>
+              </a:ext>
+            </a:extLst>
+          </p:cNvPr>
+          <p:cNvSpPr>
+            <a:spLocks noGrp="1" noRot="1" noChangeAspect="1" noMove="1" noResize="1" noEditPoints="1" noAdjustHandles="1" noChangeArrowheads="1" noChangeShapeType="1" noTextEdit="1"/>
+          </p:cNvSpPr>
+          <p:nvPr>
+            <p:extLst>
+              <p:ext uri="{386F3935-93C4-4BCD-93E2-E3B085C9AB24}">
+                <p16:designElem xmlns:p16="http://schemas.microsoft.com/office/powerpoint/2015/main" val="1"/>
+              </p:ext>
+            </p:extLst>
+          </p:nvPr>
+        </p:nvSpPr>
+        <p:spPr>
+          <a:xfrm>
+            <a:off x="0" y="0"/>
+            <a:ext cx="12192000" cy="6858000"/>
+          </a:xfrm>
+          <a:prstGeom prst="rect">
+            <a:avLst/>
+          </a:prstGeom>
+          <a:ln w="12700" cap="flat" cmpd="sng" algn="ctr">
+            <a:noFill/>
+            <a:prstDash val="solid"/>
+            <a:miter lim="800000"/>
+          </a:ln>
+          <a:effectLst/>
+          <a:extLst>
+            <a:ext uri="{91240B29-F687-4F45-9708-019B960494DF}">
+              <a14:hiddenLine xmlns:a14="http://schemas.microsoft.com/office/drawing/2010/main" w="12700" cap="flat" cmpd="sng" algn="ctr">
+                <a:solidFill>
+                  <a:schemeClr val="accent1">
+                    <a:shade val="50000"/>
+                  </a:schemeClr>
+                </a:solidFill>
+                <a:prstDash val="solid"/>
+                <a:miter lim="800000"/>
+              </a14:hiddenLine>
+            </a:ext>
+          </a:extLst>
+        </p:spPr>
+        <p:style>
+          <a:lnRef idx="2">
+            <a:schemeClr val="accent1">
+              <a:shade val="50000"/>
+            </a:schemeClr>
+          </a:lnRef>
+          <a:fillRef idx="1">
+            <a:schemeClr val="accent1"/>
+          </a:fillRef>
+          <a:effectRef idx="0">
+            <a:schemeClr val="accent1"/>
+          </a:effectRef>
+          <a:fontRef idx="minor">
+            <a:schemeClr val="lt1"/>
+          </a:fontRef>
+        </p:style>
+        <p:txBody>
+          <a:bodyPr rtlCol="0" anchor="ctr"/>
+          <a:lstStyle/>
+          <a:p>
+            <a:pPr algn="ctr"/>
+            <a:endParaRPr lang="en-US" sz="2000"/>
+          </a:p>
+        </p:txBody>
+      </p:sp>
+      <p:sp>
+        <p:nvSpPr>
+          <p:cNvPr id="42" name="Rectangle 41">
+            <a:extLst>
+              <a:ext uri="{FF2B5EF4-FFF2-40B4-BE49-F238E27FC236}">
+                <a16:creationId xmlns:a16="http://schemas.microsoft.com/office/drawing/2014/main" id="{AB5E08C4-8CDD-4623-A5B8-E998C6DEE3B7}"/>
+              </a:ext>
+              <a:ext uri="{C183D7F6-B498-43B3-948B-1728B52AA6E4}">
+                <adec:decorative xmlns:adec="http://schemas.microsoft.com/office/drawing/2017/decorative" val="1"/>
+              </a:ext>
+            </a:extLst>
+          </p:cNvPr>
+          <p:cNvSpPr>
+            <a:spLocks noGrp="1" noRot="1" noChangeAspect="1" noMove="1" noResize="1" noEditPoints="1" noAdjustHandles="1" noChangeArrowheads="1" noChangeShapeType="1" noTextEdit="1"/>
+          </p:cNvSpPr>
+          <p:nvPr>
+            <p:extLst>
+              <p:ext uri="{386F3935-93C4-4BCD-93E2-E3B085C9AB24}">
+                <p16:designElem xmlns:p16="http://schemas.microsoft.com/office/powerpoint/2015/main" val="1"/>
+              </p:ext>
+            </p:extLst>
+          </p:nvPr>
+        </p:nvSpPr>
+        <p:spPr>
+          <a:xfrm flipH="1">
+            <a:off x="2" y="492"/>
+            <a:ext cx="12191998" cy="1575955"/>
+          </a:xfrm>
+          <a:prstGeom prst="rect">
+            <a:avLst/>
+          </a:prstGeom>
+          <a:gradFill>
+            <a:gsLst>
+              <a:gs pos="0">
+                <a:schemeClr val="accent1">
+                  <a:lumMod val="50000"/>
+                </a:schemeClr>
+              </a:gs>
+              <a:gs pos="100000">
+                <a:schemeClr val="accent1">
+                  <a:lumMod val="75000"/>
+                </a:schemeClr>
+              </a:gs>
+            </a:gsLst>
+            <a:lin ang="8400000" scaled="0"/>
+          </a:gradFill>
+          <a:ln>
+            <a:noFill/>
+          </a:ln>
+        </p:spPr>
+        <p:style>
+          <a:lnRef idx="2">
+            <a:schemeClr val="accent1">
+              <a:shade val="50000"/>
+            </a:schemeClr>
+          </a:lnRef>
+          <a:fillRef idx="1">
+            <a:schemeClr val="accent1"/>
+          </a:fillRef>
+          <a:effectRef idx="0">
+            <a:schemeClr val="accent1"/>
+          </a:effectRef>
+          <a:fontRef idx="minor">
+            <a:schemeClr val="lt1"/>
+          </a:fontRef>
+        </p:style>
+        <p:txBody>
+          <a:bodyPr rtlCol="0" anchor="ctr"/>
+          <a:lstStyle/>
+          <a:p>
+            <a:pPr algn="ctr"/>
+            <a:endParaRPr lang="en-US"/>
+          </a:p>
+        </p:txBody>
+      </p:sp>
+      <p:sp>
+        <p:nvSpPr>
+          <p:cNvPr id="44" name="Rectangle 43">
+            <a:extLst>
+              <a:ext uri="{FF2B5EF4-FFF2-40B4-BE49-F238E27FC236}">
+                <a16:creationId xmlns:a16="http://schemas.microsoft.com/office/drawing/2014/main" id="{15F33878-D502-4FFA-8ACE-F2AECDB2A23F}"/>
+              </a:ext>
+              <a:ext uri="{C183D7F6-B498-43B3-948B-1728B52AA6E4}">
+                <adec:decorative xmlns:adec="http://schemas.microsoft.com/office/drawing/2017/decorative" val="1"/>
+              </a:ext>
+            </a:extLst>
+          </p:cNvPr>
+          <p:cNvSpPr>
+            <a:spLocks noGrp="1" noRot="1" noChangeAspect="1" noMove="1" noResize="1" noEditPoints="1" noAdjustHandles="1" noChangeArrowheads="1" noChangeShapeType="1" noTextEdit="1"/>
+          </p:cNvSpPr>
+          <p:nvPr>
+            <p:extLst>
+              <p:ext uri="{386F3935-93C4-4BCD-93E2-E3B085C9AB24}">
+                <p16:designElem xmlns:p16="http://schemas.microsoft.com/office/powerpoint/2015/main" val="1"/>
+              </p:ext>
+            </p:extLst>
+          </p:nvPr>
+        </p:nvSpPr>
+        <p:spPr>
+          <a:xfrm rot="10800000" flipH="1">
+            <a:off x="8128857" y="35"/>
+            <a:ext cx="4063143" cy="1576412"/>
+          </a:xfrm>
+          <a:prstGeom prst="rect">
+            <a:avLst/>
+          </a:prstGeom>
+          <a:gradFill>
+            <a:gsLst>
+              <a:gs pos="19000">
+                <a:schemeClr val="accent1">
+                  <a:lumMod val="50000"/>
+                  <a:alpha val="68000"/>
+                </a:schemeClr>
+              </a:gs>
+              <a:gs pos="100000">
+                <a:schemeClr val="accent1">
+                  <a:alpha val="79000"/>
+                </a:schemeClr>
+              </a:gs>
+            </a:gsLst>
+            <a:lin ang="19200000" scaled="0"/>
+          </a:gradFill>
+          <a:ln>
+            <a:noFill/>
+          </a:ln>
+        </p:spPr>
+        <p:style>
+          <a:lnRef idx="2">
+            <a:schemeClr val="accent1">
+              <a:shade val="50000"/>
+            </a:schemeClr>
+          </a:lnRef>
+          <a:fillRef idx="1">
+            <a:schemeClr val="accent1"/>
+          </a:fillRef>
+          <a:effectRef idx="0">
+            <a:schemeClr val="accent1"/>
+          </a:effectRef>
+          <a:fontRef idx="minor">
+            <a:schemeClr val="lt1"/>
+          </a:fontRef>
+        </p:style>
+        <p:txBody>
+          <a:bodyPr rtlCol="0" anchor="ctr"/>
+          <a:lstStyle/>
+          <a:p>
+            <a:pPr algn="ctr"/>
+            <a:endParaRPr lang="en-US"/>
+          </a:p>
+        </p:txBody>
+      </p:sp>
+      <p:sp>
+        <p:nvSpPr>
+          <p:cNvPr id="46" name="Rectangle 45">
+            <a:extLst>
+              <a:ext uri="{FF2B5EF4-FFF2-40B4-BE49-F238E27FC236}">
+                <a16:creationId xmlns:a16="http://schemas.microsoft.com/office/drawing/2014/main" id="{D3539FEE-81D3-4406-802E-60B20B16F4F6}"/>
+              </a:ext>
+              <a:ext uri="{C183D7F6-B498-43B3-948B-1728B52AA6E4}">
+                <adec:decorative xmlns:adec="http://schemas.microsoft.com/office/drawing/2017/decorative" val="1"/>
+              </a:ext>
+            </a:extLst>
+          </p:cNvPr>
+          <p:cNvSpPr>
+            <a:spLocks noGrp="1" noRot="1" noChangeAspect="1" noMove="1" noResize="1" noEditPoints="1" noAdjustHandles="1" noChangeArrowheads="1" noChangeShapeType="1" noTextEdit="1"/>
+          </p:cNvSpPr>
+          <p:nvPr>
+            <p:extLst>
+              <p:ext uri="{386F3935-93C4-4BCD-93E2-E3B085C9AB24}">
+                <p16:designElem xmlns:p16="http://schemas.microsoft.com/office/powerpoint/2015/main" val="1"/>
+              </p:ext>
+            </p:extLst>
+          </p:nvPr>
+        </p:nvSpPr>
+        <p:spPr>
+          <a:xfrm rot="5400000">
+            <a:off x="5307778" y="-5307777"/>
+            <a:ext cx="1576446" cy="12192001"/>
+          </a:xfrm>
+          <a:prstGeom prst="rect">
+            <a:avLst/>
+          </a:prstGeom>
+          <a:gradFill>
+            <a:gsLst>
+              <a:gs pos="16000">
+                <a:srgbClr val="000000">
+                  <a:alpha val="0"/>
+                </a:srgbClr>
+              </a:gs>
+              <a:gs pos="99000">
+                <a:srgbClr val="000000">
+                  <a:alpha val="87000"/>
+                </a:srgbClr>
+              </a:gs>
+            </a:gsLst>
+            <a:lin ang="11400000" scaled="0"/>
+          </a:gradFill>
+          <a:ln>
+            <a:noFill/>
+          </a:ln>
+        </p:spPr>
+        <p:style>
+          <a:lnRef idx="2">
+            <a:schemeClr val="accent1">
+              <a:shade val="50000"/>
+            </a:schemeClr>
+          </a:lnRef>
+          <a:fillRef idx="1">
+            <a:schemeClr val="accent1"/>
+          </a:fillRef>
+          <a:effectRef idx="0">
+            <a:schemeClr val="accent1"/>
+          </a:effectRef>
+          <a:fontRef idx="minor">
+            <a:schemeClr val="lt1"/>
+          </a:fontRef>
+        </p:style>
+        <p:txBody>
+          <a:bodyPr rtlCol="0" anchor="ctr"/>
+          <a:lstStyle/>
+          <a:p>
+            <a:pPr algn="ctr"/>
+            <a:endParaRPr lang="en-US" dirty="0"/>
+          </a:p>
+        </p:txBody>
+      </p:sp>
+      <p:sp>
+        <p:nvSpPr>
+          <p:cNvPr id="48" name="Rectangle 47">
+            <a:extLst>
+              <a:ext uri="{FF2B5EF4-FFF2-40B4-BE49-F238E27FC236}">
+                <a16:creationId xmlns:a16="http://schemas.microsoft.com/office/drawing/2014/main" id="{DC701763-729E-462F-A5A8-E0DEFEB1E2E4}"/>
+              </a:ext>
+              <a:ext uri="{C183D7F6-B498-43B3-948B-1728B52AA6E4}">
+                <adec:decorative xmlns:adec="http://schemas.microsoft.com/office/drawing/2017/decorative" val="1"/>
+              </a:ext>
+            </a:extLst>
+          </p:cNvPr>
+          <p:cNvSpPr>
+            <a:spLocks noGrp="1" noRot="1" noChangeAspect="1" noMove="1" noResize="1" noEditPoints="1" noAdjustHandles="1" noChangeArrowheads="1" noChangeShapeType="1" noTextEdit="1"/>
+          </p:cNvSpPr>
+          <p:nvPr>
+            <p:extLst>
+              <p:ext uri="{386F3935-93C4-4BCD-93E2-E3B085C9AB24}">
+                <p16:designElem xmlns:p16="http://schemas.microsoft.com/office/powerpoint/2015/main" val="1"/>
+              </p:ext>
+            </p:extLst>
+          </p:nvPr>
+        </p:nvSpPr>
+        <p:spPr>
+          <a:xfrm>
+            <a:off x="3825434" y="986"/>
+            <a:ext cx="4303422" cy="1575461"/>
+          </a:xfrm>
+          <a:prstGeom prst="rect">
+            <a:avLst/>
+          </a:prstGeom>
+          <a:gradFill>
+            <a:gsLst>
+              <a:gs pos="0">
+                <a:schemeClr val="accent1">
+                  <a:alpha val="17000"/>
+                </a:schemeClr>
+              </a:gs>
+              <a:gs pos="74000">
+                <a:schemeClr val="accent1">
+                  <a:lumMod val="50000"/>
+                  <a:alpha val="0"/>
+                </a:schemeClr>
+              </a:gs>
+            </a:gsLst>
+            <a:lin ang="14400000" scaled="0"/>
+          </a:gradFill>
+          <a:ln>
+            <a:noFill/>
+          </a:ln>
+        </p:spPr>
+        <p:style>
+          <a:lnRef idx="2">
+            <a:schemeClr val="accent1">
+              <a:shade val="50000"/>
+            </a:schemeClr>
+          </a:lnRef>
+          <a:fillRef idx="1">
+            <a:schemeClr val="accent1"/>
+          </a:fillRef>
+          <a:effectRef idx="0">
+            <a:schemeClr val="accent1"/>
+          </a:effectRef>
+          <a:fontRef idx="minor">
+            <a:schemeClr val="lt1"/>
+          </a:fontRef>
+        </p:style>
+        <p:txBody>
+          <a:bodyPr rtlCol="0" anchor="ctr"/>
+          <a:lstStyle/>
+          <a:p>
+            <a:pPr algn="ctr"/>
+            <a:endParaRPr lang="en-US"/>
+          </a:p>
+        </p:txBody>
+      </p:sp>
       <p:sp>
         <p:nvSpPr>
           <p:cNvPr id="2" name="Title 1">
             <a:extLst>
               <a:ext uri="{FF2B5EF4-FFF2-40B4-BE49-F238E27FC236}">
-                <a16:creationId xmlns:a16="http://schemas.microsoft.com/office/drawing/2014/main" id="{20456BE5-97D8-CCCC-3F24-0AC11A8201A2}"/>
+                <a16:creationId xmlns:a16="http://schemas.microsoft.com/office/drawing/2014/main" id="{6935D70A-D246-BA80-639B-F2AB3AE559DC}"/>
               </a:ext>
             </a:extLst>
           </p:cNvPr>
@@ -6631,283 +7229,93 @@
             <p:ph type="title"/>
           </p:nvPr>
         </p:nvSpPr>
-        <p:spPr/>
-        <p:txBody>
-          <a:bodyPr/>
-          <a:lstStyle/>
-          <a:p>
-            <a:r>
-              <a:rPr lang="en-US" dirty="0" err="1"/>
-              <a:t>Conclusiones</a:t>
-            </a:r>
-          </a:p>
-        </p:txBody>
-      </p:sp>
-      <p:sp>
-        <p:nvSpPr>
-          <p:cNvPr id="3" name="Content Placeholder 2">
+        <p:spPr>
+          <a:xfrm>
+            <a:off x="699714" y="353160"/>
+            <a:ext cx="7091300" cy="898581"/>
+          </a:xfrm>
+        </p:spPr>
+        <p:txBody>
+          <a:bodyPr vert="horz" lIns="91440" tIns="45720" rIns="91440" bIns="45720" rtlCol="0" anchor="ctr">
+            <a:normAutofit/>
+          </a:bodyPr>
+          <a:lstStyle/>
+          <a:p>
+            <a:r>
+              <a:rPr lang="en-US" sz="4000">
+                <a:solidFill>
+                  <a:srgbClr val="FFFFFF"/>
+                </a:solidFill>
+              </a:rPr>
+              <a:t>K-Means</a:t>
+            </a:r>
+          </a:p>
+        </p:txBody>
+      </p:sp>
+      <p:pic>
+        <p:nvPicPr>
+          <p:cNvPr id="5" name="Imagen 4">
             <a:extLst>
               <a:ext uri="{FF2B5EF4-FFF2-40B4-BE49-F238E27FC236}">
-                <a16:creationId xmlns:a16="http://schemas.microsoft.com/office/drawing/2014/main" id="{CA47CDDB-12B6-8409-FF77-AE22AEF5D705}"/>
+                <a16:creationId xmlns:a16="http://schemas.microsoft.com/office/drawing/2014/main" id="{31FA8EA9-D8ED-A32D-02B9-C78F440C669A}"/>
               </a:ext>
             </a:extLst>
           </p:cNvPr>
-          <p:cNvSpPr>
-            <a:spLocks noGrp="1"/>
-          </p:cNvSpPr>
-          <p:nvPr>
-            <p:ph idx="1"/>
-          </p:nvPr>
-        </p:nvSpPr>
-        <p:spPr/>
-        <p:txBody>
-          <a:bodyPr vert="horz" lIns="91440" tIns="45720" rIns="91440" bIns="45720" rtlCol="0" anchor="t">
-            <a:normAutofit fontScale="92500"/>
-          </a:bodyPr>
-          <a:lstStyle/>
-          <a:p>
-            <a:r>
-              <a:rPr lang="en-US" dirty="0"/>
-              <a:t>Durante la Semana Santa, se </a:t>
-            </a:r>
-            <a:r>
-              <a:rPr lang="en-US" dirty="0" err="1"/>
-              <a:t>hacen</a:t>
-            </a:r>
-            <a:r>
-              <a:rPr lang="en-US" dirty="0"/>
-              <a:t> </a:t>
-            </a:r>
-            <a:r>
-              <a:rPr lang="en-US" dirty="0" err="1"/>
-              <a:t>menos</a:t>
-            </a:r>
-            <a:r>
-              <a:rPr lang="en-US" dirty="0"/>
-              <a:t> </a:t>
-            </a:r>
-            <a:r>
-              <a:rPr lang="en-US" dirty="0" err="1"/>
-              <a:t>retiros</a:t>
-            </a:r>
-            <a:r>
-              <a:rPr lang="en-US" dirty="0"/>
-              <a:t> </a:t>
-            </a:r>
-            <a:r>
-              <a:rPr lang="en-US" dirty="0" err="1"/>
-              <a:t>desde</a:t>
-            </a:r>
-            <a:r>
-              <a:rPr lang="en-US" dirty="0"/>
-              <a:t> </a:t>
-            </a:r>
-            <a:r>
-              <a:rPr lang="en-US" dirty="0" err="1"/>
-              <a:t>el</a:t>
-            </a:r>
-            <a:r>
-              <a:rPr lang="en-US" dirty="0"/>
-              <a:t> Jueves Santo a Domingo de </a:t>
-            </a:r>
-            <a:r>
-              <a:rPr lang="en-US" dirty="0" err="1"/>
-              <a:t>Resurección</a:t>
-            </a:r>
-            <a:r>
-              <a:rPr lang="en-US" dirty="0"/>
-              <a:t> </a:t>
-            </a:r>
-            <a:r>
-              <a:rPr lang="en-US" dirty="0" err="1"/>
-              <a:t>que</a:t>
-            </a:r>
-            <a:r>
-              <a:rPr lang="en-US" dirty="0"/>
-              <a:t> </a:t>
-            </a:r>
-            <a:r>
-              <a:rPr lang="en-US" dirty="0" err="1"/>
-              <a:t>en</a:t>
-            </a:r>
-            <a:r>
-              <a:rPr lang="en-US" dirty="0"/>
-              <a:t> </a:t>
-            </a:r>
-            <a:r>
-              <a:rPr lang="en-US" dirty="0" err="1"/>
-              <a:t>el</a:t>
-            </a:r>
-            <a:r>
-              <a:rPr lang="en-US" dirty="0"/>
-              <a:t> resto de la </a:t>
-            </a:r>
-            <a:r>
-              <a:rPr lang="en-US" dirty="0" err="1"/>
-              <a:t>semana</a:t>
-            </a:r>
-            <a:r>
-              <a:rPr lang="en-US" dirty="0"/>
-              <a:t>.</a:t>
-            </a:r>
-          </a:p>
-          <a:p>
-            <a:r>
-              <a:rPr lang="en-US" dirty="0"/>
-              <a:t>Se </a:t>
-            </a:r>
-            <a:r>
-              <a:rPr lang="en-US" dirty="0" err="1"/>
-              <a:t>tiene</a:t>
-            </a:r>
-            <a:r>
-              <a:rPr lang="en-US" dirty="0"/>
-              <a:t> </a:t>
-            </a:r>
-            <a:r>
-              <a:rPr lang="en-US" dirty="0" err="1"/>
-              <a:t>que</a:t>
-            </a:r>
-            <a:r>
-              <a:rPr lang="en-US" dirty="0"/>
-              <a:t> </a:t>
-            </a:r>
-            <a:r>
-              <a:rPr lang="en-US" dirty="0" err="1"/>
-              <a:t>el</a:t>
-            </a:r>
-            <a:r>
-              <a:rPr lang="en-US" dirty="0"/>
-              <a:t> </a:t>
-            </a:r>
-            <a:r>
-              <a:rPr lang="en-US" dirty="0" err="1"/>
-              <a:t>préstamo</a:t>
-            </a:r>
-            <a:r>
-              <a:rPr lang="en-US" dirty="0"/>
-              <a:t> de </a:t>
-            </a:r>
-            <a:r>
-              <a:rPr lang="en-US" dirty="0" err="1"/>
-              <a:t>bicicletas</a:t>
-            </a:r>
-            <a:r>
-              <a:rPr lang="en-US" dirty="0"/>
-              <a:t> ha </a:t>
-            </a:r>
-            <a:r>
-              <a:rPr lang="en-US" dirty="0" err="1"/>
-              <a:t>sido</a:t>
-            </a:r>
-            <a:r>
-              <a:rPr lang="en-US" dirty="0"/>
-              <a:t> </a:t>
-            </a:r>
-            <a:r>
-              <a:rPr lang="en-US" dirty="0" err="1"/>
-              <a:t>en</a:t>
-            </a:r>
-            <a:r>
-              <a:rPr lang="en-US" dirty="0"/>
-              <a:t> </a:t>
-            </a:r>
-            <a:r>
-              <a:rPr lang="en-US" dirty="0" err="1"/>
-              <a:t>los</a:t>
-            </a:r>
-            <a:r>
-              <a:rPr lang="en-US" dirty="0"/>
-              <a:t> </a:t>
-            </a:r>
-            <a:r>
-              <a:rPr lang="en-US" dirty="0" err="1"/>
-              <a:t>años</a:t>
-            </a:r>
-            <a:r>
-              <a:rPr lang="en-US" dirty="0"/>
-              <a:t> </a:t>
-            </a:r>
-            <a:r>
-              <a:rPr lang="en-US" dirty="0" err="1"/>
-              <a:t>siguientes</a:t>
-            </a:r>
-            <a:r>
-              <a:rPr lang="en-US" dirty="0"/>
-              <a:t> a la pandemia, </a:t>
-            </a:r>
-            <a:r>
-              <a:rPr lang="en-US" dirty="0" err="1"/>
-              <a:t>que</a:t>
-            </a:r>
-            <a:r>
-              <a:rPr lang="en-US" dirty="0"/>
-              <a:t> </a:t>
-            </a:r>
-            <a:r>
-              <a:rPr lang="en-US" dirty="0" err="1"/>
-              <a:t>en</a:t>
-            </a:r>
-            <a:r>
-              <a:rPr lang="en-US" dirty="0"/>
-              <a:t> </a:t>
-            </a:r>
-            <a:r>
-              <a:rPr lang="en-US" dirty="0" err="1"/>
-              <a:t>los</a:t>
-            </a:r>
-            <a:r>
-              <a:rPr lang="en-US" dirty="0"/>
-              <a:t> </a:t>
-            </a:r>
-            <a:r>
-              <a:rPr lang="en-US" dirty="0" err="1"/>
-              <a:t>años</a:t>
-            </a:r>
-            <a:r>
-              <a:rPr lang="en-US" dirty="0"/>
-              <a:t> </a:t>
-            </a:r>
-            <a:r>
-              <a:rPr lang="en-US" dirty="0" err="1"/>
-              <a:t>anteriores</a:t>
-            </a:r>
-            <a:r>
-              <a:rPr lang="en-US" dirty="0"/>
-              <a:t> a la </a:t>
-            </a:r>
-            <a:r>
-              <a:rPr lang="en-US" dirty="0" err="1"/>
-              <a:t>misma</a:t>
-            </a:r>
-            <a:r>
-              <a:rPr lang="en-US" dirty="0"/>
-              <a:t>.</a:t>
-            </a:r>
-          </a:p>
-          <a:p>
-            <a:pPr lvl="0"/>
-            <a:r>
-              <a:rPr lang="es-GT" dirty="0"/>
-              <a:t>La estación en Ciudad de México, desde la que se hace el mayor número de retiros de bicicletas durante Semana Santa es la estación en CE-271-272 Jesús García – Carlos J. Meneses con 8008 retiros.</a:t>
-            </a:r>
-          </a:p>
-          <a:p>
-            <a:pPr lvl="0"/>
-            <a:r>
-              <a:rPr lang="es-GT" dirty="0"/>
-              <a:t>La estación en Ciudad de México a la que arriba la mayor cantidad de bicicletas durante la Ciudad de México es la estación en CE-271-272 Jesús García – Carlos J. Meneses con 12213 arribos.</a:t>
-            </a:r>
-          </a:p>
-          <a:p>
-            <a:endParaRPr lang="en-US" dirty="0"/>
-          </a:p>
-        </p:txBody>
-      </p:sp>
+          <p:cNvPicPr>
+            <a:picLocks noChangeAspect="1"/>
+          </p:cNvPicPr>
+          <p:nvPr/>
+        </p:nvPicPr>
+        <p:blipFill>
+          <a:blip r:embed="rId2"/>
+          <a:stretch>
+            <a:fillRect/>
+          </a:stretch>
+        </p:blipFill>
+        <p:spPr>
+          <a:xfrm>
+            <a:off x="407403" y="2099797"/>
+            <a:ext cx="7169349" cy="4247840"/>
+          </a:xfrm>
+          <a:prstGeom prst="rect">
+            <a:avLst/>
+          </a:prstGeom>
+        </p:spPr>
+      </p:pic>
+      <p:pic>
+        <p:nvPicPr>
+          <p:cNvPr id="7" name="Imagen 6">
+            <a:extLst>
+              <a:ext uri="{FF2B5EF4-FFF2-40B4-BE49-F238E27FC236}">
+                <a16:creationId xmlns:a16="http://schemas.microsoft.com/office/drawing/2014/main" id="{09FB337F-20C3-C2D9-B0AB-3A0B6044A75E}"/>
+              </a:ext>
+            </a:extLst>
+          </p:cNvPr>
+          <p:cNvPicPr>
+            <a:picLocks noChangeAspect="1"/>
+          </p:cNvPicPr>
+          <p:nvPr/>
+        </p:nvPicPr>
+        <p:blipFill>
+          <a:blip r:embed="rId3"/>
+          <a:stretch>
+            <a:fillRect/>
+          </a:stretch>
+        </p:blipFill>
+        <p:spPr>
+          <a:xfrm>
+            <a:off x="7732665" y="2562448"/>
+            <a:ext cx="4303422" cy="3309550"/>
+          </a:xfrm>
+          <a:prstGeom prst="rect">
+            <a:avLst/>
+          </a:prstGeom>
+        </p:spPr>
+      </p:pic>
     </p:spTree>
     <p:extLst>
       <p:ext uri="{BB962C8B-B14F-4D97-AF65-F5344CB8AC3E}">
-        <p14:creationId xmlns:p14="http://schemas.microsoft.com/office/powerpoint/2010/main" val="3399263724"/>
+        <p14:creationId xmlns:p14="http://schemas.microsoft.com/office/powerpoint/2010/main" val="2089917364"/>
       </p:ext>
     </p:extLst>
   </p:cSld>
@@ -6939,7 +7347,7 @@
           <p:cNvPr id="2" name="Title 1">
             <a:extLst>
               <a:ext uri="{FF2B5EF4-FFF2-40B4-BE49-F238E27FC236}">
-                <a16:creationId xmlns:a16="http://schemas.microsoft.com/office/drawing/2014/main" id="{73EA76D5-C4F4-03CA-6137-3167E4F091FE}"/>
+                <a16:creationId xmlns:a16="http://schemas.microsoft.com/office/drawing/2014/main" id="{20456BE5-97D8-CCCC-3F24-0AC11A8201A2}"/>
               </a:ext>
             </a:extLst>
           </p:cNvPr>
@@ -6957,7 +7365,7 @@
           <a:p>
             <a:r>
               <a:rPr lang="en-US" dirty="0" err="1"/>
-              <a:t>Referencias</a:t>
+              <a:t>Conclusiones</a:t>
             </a:r>
           </a:p>
         </p:txBody>
@@ -6967,7 +7375,7 @@
           <p:cNvPr id="3" name="Content Placeholder 2">
             <a:extLst>
               <a:ext uri="{FF2B5EF4-FFF2-40B4-BE49-F238E27FC236}">
-                <a16:creationId xmlns:a16="http://schemas.microsoft.com/office/drawing/2014/main" id="{F5D557C2-1B29-775E-AE05-574ABC77B0C4}"/>
+                <a16:creationId xmlns:a16="http://schemas.microsoft.com/office/drawing/2014/main" id="{CA47CDDB-12B6-8409-FF77-AE22AEF5D705}"/>
               </a:ext>
             </a:extLst>
           </p:cNvPr>
@@ -6978,53 +7386,273 @@
             <p:ph idx="1"/>
           </p:nvPr>
         </p:nvSpPr>
-        <p:spPr/>
-        <p:txBody>
-          <a:bodyPr/>
-          <a:lstStyle/>
+        <p:spPr>
+          <a:xfrm>
+            <a:off x="838200" y="1825624"/>
+            <a:ext cx="10515600" cy="4526189"/>
+          </a:xfrm>
+        </p:spPr>
+        <p:txBody>
+          <a:bodyPr vert="horz" lIns="91440" tIns="45720" rIns="91440" bIns="45720" rtlCol="0" anchor="t">
+            <a:normAutofit fontScale="92500" lnSpcReduction="20000"/>
+          </a:bodyPr>
+          <a:lstStyle/>
+          <a:p>
+            <a:r>
+              <a:rPr lang="en-US" dirty="0"/>
+              <a:t>Durante la Semana Santa, se </a:t>
+            </a:r>
+            <a:r>
+              <a:rPr lang="en-US" dirty="0" err="1"/>
+              <a:t>hacen</a:t>
+            </a:r>
+            <a:r>
+              <a:rPr lang="en-US" dirty="0"/>
+              <a:t> </a:t>
+            </a:r>
+            <a:r>
+              <a:rPr lang="en-US" dirty="0" err="1"/>
+              <a:t>menos</a:t>
+            </a:r>
+            <a:r>
+              <a:rPr lang="en-US" dirty="0"/>
+              <a:t> </a:t>
+            </a:r>
+            <a:r>
+              <a:rPr lang="en-US" dirty="0" err="1"/>
+              <a:t>retiros</a:t>
+            </a:r>
+            <a:r>
+              <a:rPr lang="en-US" dirty="0"/>
+              <a:t> </a:t>
+            </a:r>
+            <a:r>
+              <a:rPr lang="en-US" dirty="0" err="1"/>
+              <a:t>desde</a:t>
+            </a:r>
+            <a:r>
+              <a:rPr lang="en-US" dirty="0"/>
+              <a:t> </a:t>
+            </a:r>
+            <a:r>
+              <a:rPr lang="en-US" dirty="0" err="1"/>
+              <a:t>el</a:t>
+            </a:r>
+            <a:r>
+              <a:rPr lang="en-US" dirty="0"/>
+              <a:t> Jueves Santo a Domingo de </a:t>
+            </a:r>
+            <a:r>
+              <a:rPr lang="en-US" dirty="0" err="1"/>
+              <a:t>Resurección</a:t>
+            </a:r>
+            <a:r>
+              <a:rPr lang="en-US" dirty="0"/>
+              <a:t> </a:t>
+            </a:r>
+            <a:r>
+              <a:rPr lang="en-US" dirty="0" err="1"/>
+              <a:t>que</a:t>
+            </a:r>
+            <a:r>
+              <a:rPr lang="en-US" dirty="0"/>
+              <a:t> </a:t>
+            </a:r>
+            <a:r>
+              <a:rPr lang="en-US" dirty="0" err="1"/>
+              <a:t>en</a:t>
+            </a:r>
+            <a:r>
+              <a:rPr lang="en-US" dirty="0"/>
+              <a:t> </a:t>
+            </a:r>
+            <a:r>
+              <a:rPr lang="en-US" dirty="0" err="1"/>
+              <a:t>el</a:t>
+            </a:r>
+            <a:r>
+              <a:rPr lang="en-US" dirty="0"/>
+              <a:t> resto de la </a:t>
+            </a:r>
+            <a:r>
+              <a:rPr lang="en-US" dirty="0" err="1"/>
+              <a:t>semana</a:t>
+            </a:r>
+            <a:r>
+              <a:rPr lang="en-US" dirty="0"/>
+              <a:t>.</a:t>
+            </a:r>
+          </a:p>
+          <a:p>
+            <a:r>
+              <a:rPr lang="en-US" dirty="0"/>
+              <a:t>Se </a:t>
+            </a:r>
+            <a:r>
+              <a:rPr lang="en-US" dirty="0" err="1"/>
+              <a:t>tiene</a:t>
+            </a:r>
+            <a:r>
+              <a:rPr lang="en-US" dirty="0"/>
+              <a:t> </a:t>
+            </a:r>
+            <a:r>
+              <a:rPr lang="en-US" dirty="0" err="1"/>
+              <a:t>que</a:t>
+            </a:r>
+            <a:r>
+              <a:rPr lang="en-US" dirty="0"/>
+              <a:t> </a:t>
+            </a:r>
+            <a:r>
+              <a:rPr lang="en-US" dirty="0" err="1"/>
+              <a:t>el</a:t>
+            </a:r>
+            <a:r>
+              <a:rPr lang="en-US" dirty="0"/>
+              <a:t> </a:t>
+            </a:r>
+            <a:r>
+              <a:rPr lang="en-US" dirty="0" err="1"/>
+              <a:t>préstamo</a:t>
+            </a:r>
+            <a:r>
+              <a:rPr lang="en-US" dirty="0"/>
+              <a:t> de </a:t>
+            </a:r>
+            <a:r>
+              <a:rPr lang="en-US" dirty="0" err="1"/>
+              <a:t>bicicletas</a:t>
+            </a:r>
+            <a:r>
+              <a:rPr lang="en-US" dirty="0"/>
+              <a:t> ha </a:t>
+            </a:r>
+            <a:r>
+              <a:rPr lang="en-US" dirty="0" err="1"/>
+              <a:t>sido</a:t>
+            </a:r>
+            <a:r>
+              <a:rPr lang="en-US" dirty="0"/>
+              <a:t> </a:t>
+            </a:r>
+            <a:r>
+              <a:rPr lang="en-US" dirty="0" err="1"/>
+              <a:t>en</a:t>
+            </a:r>
+            <a:r>
+              <a:rPr lang="en-US" dirty="0"/>
+              <a:t> </a:t>
+            </a:r>
+            <a:r>
+              <a:rPr lang="en-US" dirty="0" err="1"/>
+              <a:t>los</a:t>
+            </a:r>
+            <a:r>
+              <a:rPr lang="en-US" dirty="0"/>
+              <a:t> </a:t>
+            </a:r>
+            <a:r>
+              <a:rPr lang="en-US" dirty="0" err="1"/>
+              <a:t>años</a:t>
+            </a:r>
+            <a:r>
+              <a:rPr lang="en-US" dirty="0"/>
+              <a:t> </a:t>
+            </a:r>
+            <a:r>
+              <a:rPr lang="en-US" dirty="0" err="1"/>
+              <a:t>siguientes</a:t>
+            </a:r>
+            <a:r>
+              <a:rPr lang="en-US" dirty="0"/>
+              <a:t> a la pandemia, </a:t>
+            </a:r>
+            <a:r>
+              <a:rPr lang="en-US" dirty="0" err="1"/>
+              <a:t>que</a:t>
+            </a:r>
+            <a:r>
+              <a:rPr lang="en-US" dirty="0"/>
+              <a:t> </a:t>
+            </a:r>
+            <a:r>
+              <a:rPr lang="en-US" dirty="0" err="1"/>
+              <a:t>en</a:t>
+            </a:r>
+            <a:r>
+              <a:rPr lang="en-US" dirty="0"/>
+              <a:t> </a:t>
+            </a:r>
+            <a:r>
+              <a:rPr lang="en-US" dirty="0" err="1"/>
+              <a:t>los</a:t>
+            </a:r>
+            <a:r>
+              <a:rPr lang="en-US" dirty="0"/>
+              <a:t> </a:t>
+            </a:r>
+            <a:r>
+              <a:rPr lang="en-US" dirty="0" err="1"/>
+              <a:t>años</a:t>
+            </a:r>
+            <a:r>
+              <a:rPr lang="en-US" dirty="0"/>
+              <a:t> </a:t>
+            </a:r>
+            <a:r>
+              <a:rPr lang="en-US" dirty="0" err="1"/>
+              <a:t>anteriores</a:t>
+            </a:r>
+            <a:r>
+              <a:rPr lang="en-US" dirty="0"/>
+              <a:t> a la </a:t>
+            </a:r>
+            <a:r>
+              <a:rPr lang="en-US" dirty="0" err="1"/>
+              <a:t>misma</a:t>
+            </a:r>
+            <a:r>
+              <a:rPr lang="en-US" dirty="0"/>
+              <a:t>.</a:t>
+            </a:r>
+          </a:p>
           <a:p>
             <a:pPr lvl="0"/>
             <a:r>
               <a:rPr lang="es-GT" dirty="0"/>
-              <a:t>Procuraduría Federal de la Defensa del Trabajo. (2025, abril 8). </a:t>
-            </a:r>
-            <a:r>
-              <a:rPr lang="es-GT" i="1" dirty="0"/>
-              <a:t>Los días de Semana Santa 2025 ¿son días de descanso obligatorio?</a:t>
-            </a:r>
+              <a:t>La estación en Ciudad de México, desde la que se hace el mayor número de retiros de bicicletas durante Semana Santa es la estación en CE-271-272 Jesús García – Carlos J. Meneses con 8008 retiros.</a:t>
+            </a:r>
+          </a:p>
+          <a:p>
+            <a:pPr lvl="0"/>
             <a:r>
               <a:rPr lang="es-GT" dirty="0"/>
-              <a:t> Gobierno de México. </a:t>
-            </a:r>
-            <a:r>
-              <a:rPr lang="es-GT" u="sng" dirty="0">
-                <a:hlinkClick r:id="rId2"/>
-              </a:rPr>
-              <a:t>https://www.gob.mx/profedet/articulos/los-dias-de-semana-santa-2025-son-dias-de-descanso-obligatorio</a:t>
-            </a:r>
-            <a:endParaRPr lang="es-GT" dirty="0"/>
+              <a:t>La estación en Ciudad de México a la que arriba la mayor cantidad de bicicletas durante la Ciudad de México es la estación en CE-271-272 Jesús García – Carlos J. Meneses con 12213 arribos.</a:t>
+            </a:r>
           </a:p>
           <a:p>
             <a:pPr lvl="0"/>
             <a:r>
               <a:rPr lang="es-GT" dirty="0"/>
-              <a:t>ECOBICI. (s.f.). </a:t>
-            </a:r>
-            <a:r>
-              <a:rPr lang="es-GT" i="1" dirty="0"/>
-              <a:t>Datos abiertos</a:t>
+              <a:t>Después de la época post pandemia se tiene un aumento de los viajes que permite diferenciar en 2 </a:t>
+            </a:r>
+            <a:r>
+              <a:rPr lang="es-GT" dirty="0" err="1"/>
+              <a:t>cluster</a:t>
             </a:r>
             <a:r>
               <a:rPr lang="es-GT" dirty="0"/>
-              <a:t>. Gobierno de la Ciudad de México. </a:t>
-            </a:r>
-            <a:r>
-              <a:rPr lang="es-GT" u="sng" dirty="0">
-                <a:hlinkClick r:id="rId3"/>
-              </a:rPr>
-              <a:t>https://ecobici.cdmx.gob.mx/datos-abiertos/</a:t>
-            </a:r>
-            <a:endParaRPr lang="es-GT" dirty="0"/>
+              <a:t>, pero hay un claro traslape entre algunos </a:t>
+            </a:r>
+            <a:r>
+              <a:rPr lang="es-GT" dirty="0" err="1"/>
+              <a:t>clusters</a:t>
+            </a:r>
+            <a:r>
+              <a:rPr lang="es-GT" dirty="0"/>
+              <a:t>, lo cual se explica en el tiempo de recuperación que es alrededor de 2020 a 2022.</a:t>
+            </a:r>
           </a:p>
           <a:p>
             <a:endParaRPr lang="en-US" dirty="0"/>
@@ -7034,7 +7662,7 @@
     </p:spTree>
     <p:extLst>
       <p:ext uri="{BB962C8B-B14F-4D97-AF65-F5344CB8AC3E}">
-        <p14:creationId xmlns:p14="http://schemas.microsoft.com/office/powerpoint/2010/main" val="2631313994"/>
+        <p14:creationId xmlns:p14="http://schemas.microsoft.com/office/powerpoint/2010/main" val="3399263724"/>
       </p:ext>
     </p:extLst>
   </p:cSld>

--- a/Proyecto1_Seminario2.pptx
+++ b/Proyecto1_Seminario2.pptx
@@ -7635,23 +7635,7 @@
             <a:pPr lvl="0"/>
             <a:r>
               <a:rPr lang="es-GT" dirty="0"/>
-              <a:t>Después de la época post pandemia se tiene un aumento de los viajes que permite diferenciar en 2 </a:t>
-            </a:r>
-            <a:r>
-              <a:rPr lang="es-GT" dirty="0" err="1"/>
-              <a:t>cluster</a:t>
-            </a:r>
-            <a:r>
-              <a:rPr lang="es-GT" dirty="0"/>
-              <a:t>, pero hay un claro traslape entre algunos </a:t>
-            </a:r>
-            <a:r>
-              <a:rPr lang="es-GT" dirty="0" err="1"/>
-              <a:t>clusters</a:t>
-            </a:r>
-            <a:r>
-              <a:rPr lang="es-GT" dirty="0"/>
-              <a:t>, lo cual se explica en el tiempo de recuperación que es alrededor de 2020 a 2022.</a:t>
+              <a:t>Después de la época post pandemia se tiene un aumento de los viajes que permite diferenciar en 2 clúster, pero hay un claro traslape entre algunos clústeres, lo cual se explica en el tiempo de recuperación que es alrededor de 2020 a 2022.</a:t>
             </a:r>
           </a:p>
           <a:p>

--- a/Proyecto1_Seminario2.pptx
+++ b/Proyecto1_Seminario2.pptx
@@ -9,12 +9,13 @@
     <p:sldId id="257" r:id="rId3"/>
     <p:sldId id="258" r:id="rId4"/>
     <p:sldId id="264" r:id="rId5"/>
-    <p:sldId id="261" r:id="rId6"/>
-    <p:sldId id="263" r:id="rId7"/>
-    <p:sldId id="265" r:id="rId8"/>
-    <p:sldId id="266" r:id="rId9"/>
-    <p:sldId id="260" r:id="rId10"/>
-    <p:sldId id="262" r:id="rId11"/>
+    <p:sldId id="266" r:id="rId6"/>
+    <p:sldId id="261" r:id="rId7"/>
+    <p:sldId id="263" r:id="rId8"/>
+    <p:sldId id="265" r:id="rId9"/>
+    <p:sldId id="267" r:id="rId10"/>
+    <p:sldId id="260" r:id="rId11"/>
+    <p:sldId id="262" r:id="rId12"/>
   </p:sldIdLst>
   <p:sldSz cx="12192000" cy="6858000"/>
   <p:notesSz cx="6858000" cy="9144000"/>
@@ -3053,6 +3054,450 @@
           <p:cNvPr id="2" name="Title 1">
             <a:extLst>
               <a:ext uri="{FF2B5EF4-FFF2-40B4-BE49-F238E27FC236}">
+                <a16:creationId xmlns:a16="http://schemas.microsoft.com/office/drawing/2014/main" id="{20456BE5-97D8-CCCC-3F24-0AC11A8201A2}"/>
+              </a:ext>
+            </a:extLst>
+          </p:cNvPr>
+          <p:cNvSpPr>
+            <a:spLocks noGrp="1"/>
+          </p:cNvSpPr>
+          <p:nvPr>
+            <p:ph type="title"/>
+          </p:nvPr>
+        </p:nvSpPr>
+        <p:spPr/>
+        <p:txBody>
+          <a:bodyPr/>
+          <a:lstStyle/>
+          <a:p>
+            <a:r>
+              <a:rPr lang="en-US" dirty="0" err="1"/>
+              <a:t>Conclusiones</a:t>
+            </a:r>
+          </a:p>
+        </p:txBody>
+      </p:sp>
+      <p:sp>
+        <p:nvSpPr>
+          <p:cNvPr id="3" name="Content Placeholder 2">
+            <a:extLst>
+              <a:ext uri="{FF2B5EF4-FFF2-40B4-BE49-F238E27FC236}">
+                <a16:creationId xmlns:a16="http://schemas.microsoft.com/office/drawing/2014/main" id="{CA47CDDB-12B6-8409-FF77-AE22AEF5D705}"/>
+              </a:ext>
+            </a:extLst>
+          </p:cNvPr>
+          <p:cNvSpPr>
+            <a:spLocks noGrp="1"/>
+          </p:cNvSpPr>
+          <p:nvPr>
+            <p:ph idx="1"/>
+          </p:nvPr>
+        </p:nvSpPr>
+        <p:spPr/>
+        <p:txBody>
+          <a:bodyPr vert="horz" lIns="91440" tIns="45720" rIns="91440" bIns="45720" rtlCol="0" anchor="t">
+            <a:normAutofit fontScale="77500" lnSpcReduction="20000"/>
+          </a:bodyPr>
+          <a:lstStyle/>
+          <a:p>
+            <a:r>
+              <a:rPr lang="en-US" dirty="0"/>
+              <a:t>Durante la Semana Santa, se </a:t>
+            </a:r>
+            <a:r>
+              <a:rPr lang="en-US" dirty="0" err="1"/>
+              <a:t>hacen</a:t>
+            </a:r>
+            <a:r>
+              <a:rPr lang="en-US" dirty="0"/>
+              <a:t> </a:t>
+            </a:r>
+            <a:r>
+              <a:rPr lang="en-US" dirty="0" err="1"/>
+              <a:t>menos</a:t>
+            </a:r>
+            <a:r>
+              <a:rPr lang="en-US" dirty="0"/>
+              <a:t> </a:t>
+            </a:r>
+            <a:r>
+              <a:rPr lang="en-US" dirty="0" err="1"/>
+              <a:t>retiros</a:t>
+            </a:r>
+            <a:r>
+              <a:rPr lang="en-US" dirty="0"/>
+              <a:t> </a:t>
+            </a:r>
+            <a:r>
+              <a:rPr lang="en-US" dirty="0" err="1"/>
+              <a:t>desde</a:t>
+            </a:r>
+            <a:r>
+              <a:rPr lang="en-US" dirty="0"/>
+              <a:t> </a:t>
+            </a:r>
+            <a:r>
+              <a:rPr lang="en-US" dirty="0" err="1"/>
+              <a:t>el</a:t>
+            </a:r>
+            <a:r>
+              <a:rPr lang="en-US" dirty="0"/>
+              <a:t> Jueves Santo a Domingo de </a:t>
+            </a:r>
+            <a:r>
+              <a:rPr lang="en-US" dirty="0" err="1"/>
+              <a:t>Resurección</a:t>
+            </a:r>
+            <a:r>
+              <a:rPr lang="en-US" dirty="0"/>
+              <a:t> </a:t>
+            </a:r>
+            <a:r>
+              <a:rPr lang="en-US" dirty="0" err="1"/>
+              <a:t>que</a:t>
+            </a:r>
+            <a:r>
+              <a:rPr lang="en-US" dirty="0"/>
+              <a:t> </a:t>
+            </a:r>
+            <a:r>
+              <a:rPr lang="en-US" dirty="0" err="1"/>
+              <a:t>en</a:t>
+            </a:r>
+            <a:r>
+              <a:rPr lang="en-US" dirty="0"/>
+              <a:t> </a:t>
+            </a:r>
+            <a:r>
+              <a:rPr lang="en-US" dirty="0" err="1"/>
+              <a:t>el</a:t>
+            </a:r>
+            <a:r>
+              <a:rPr lang="en-US" dirty="0"/>
+              <a:t> resto de la </a:t>
+            </a:r>
+            <a:r>
+              <a:rPr lang="en-US" dirty="0" err="1"/>
+              <a:t>semana</a:t>
+            </a:r>
+            <a:r>
+              <a:rPr lang="en-US" dirty="0"/>
+              <a:t>.</a:t>
+            </a:r>
+          </a:p>
+          <a:p>
+            <a:r>
+              <a:rPr lang="en-US" dirty="0"/>
+              <a:t>Ha </a:t>
+            </a:r>
+            <a:r>
+              <a:rPr lang="en-US" dirty="0" err="1"/>
+              <a:t>sido</a:t>
+            </a:r>
+            <a:r>
+              <a:rPr lang="en-US" dirty="0"/>
+              <a:t> </a:t>
+            </a:r>
+            <a:r>
+              <a:rPr lang="en-US" dirty="0" err="1"/>
+              <a:t>posible</a:t>
+            </a:r>
+            <a:r>
+              <a:rPr lang="en-US" dirty="0"/>
+              <a:t> </a:t>
+            </a:r>
+            <a:r>
+              <a:rPr lang="en-US" dirty="0" err="1"/>
+              <a:t>separar</a:t>
+            </a:r>
+            <a:r>
+              <a:rPr lang="en-US" dirty="0"/>
+              <a:t> </a:t>
+            </a:r>
+            <a:r>
+              <a:rPr lang="en-US" dirty="0" err="1"/>
+              <a:t>los</a:t>
+            </a:r>
+            <a:r>
+              <a:rPr lang="en-US" dirty="0"/>
+              <a:t> </a:t>
+            </a:r>
+            <a:r>
+              <a:rPr lang="en-US" dirty="0" err="1"/>
+              <a:t>datos</a:t>
+            </a:r>
+            <a:r>
+              <a:rPr lang="en-US" dirty="0"/>
+              <a:t> del </a:t>
+            </a:r>
+            <a:r>
+              <a:rPr lang="en-US" dirty="0" err="1"/>
+              <a:t>promedio</a:t>
+            </a:r>
+            <a:r>
+              <a:rPr lang="en-US" dirty="0"/>
+              <a:t> de </a:t>
+            </a:r>
+            <a:r>
+              <a:rPr lang="en-US" dirty="0" err="1"/>
+              <a:t>retiros</a:t>
+            </a:r>
+            <a:r>
+              <a:rPr lang="en-US" dirty="0"/>
+              <a:t> </a:t>
+            </a:r>
+            <a:r>
+              <a:rPr lang="en-US" dirty="0" err="1"/>
+              <a:t>en</a:t>
+            </a:r>
+            <a:r>
+              <a:rPr lang="en-US" dirty="0"/>
+              <a:t> </a:t>
+            </a:r>
+            <a:r>
+              <a:rPr lang="en-US" dirty="0" err="1"/>
+              <a:t>función</a:t>
+            </a:r>
+            <a:r>
+              <a:rPr lang="en-US" dirty="0"/>
+              <a:t> del día de la </a:t>
+            </a:r>
+            <a:r>
+              <a:rPr lang="en-US" dirty="0" err="1"/>
+              <a:t>semana</a:t>
+            </a:r>
+            <a:r>
+              <a:rPr lang="en-US" dirty="0"/>
+              <a:t> </a:t>
+            </a:r>
+            <a:r>
+              <a:rPr lang="en-US" dirty="0" err="1"/>
+              <a:t>en</a:t>
+            </a:r>
+            <a:r>
+              <a:rPr lang="en-US" dirty="0"/>
+              <a:t> días de mayor y </a:t>
+            </a:r>
+            <a:r>
+              <a:rPr lang="en-US" dirty="0" err="1"/>
+              <a:t>menor</a:t>
+            </a:r>
+            <a:r>
+              <a:rPr lang="en-US" dirty="0"/>
+              <a:t> </a:t>
+            </a:r>
+            <a:r>
+              <a:rPr lang="en-US" dirty="0" err="1"/>
+              <a:t>cantidad</a:t>
+            </a:r>
+            <a:r>
+              <a:rPr lang="en-US" dirty="0"/>
+              <a:t> de </a:t>
+            </a:r>
+            <a:r>
+              <a:rPr lang="en-US" dirty="0" err="1"/>
+              <a:t>retiros</a:t>
+            </a:r>
+            <a:r>
+              <a:rPr lang="en-US" dirty="0"/>
+              <a:t>.</a:t>
+            </a:r>
+          </a:p>
+          <a:p>
+            <a:r>
+              <a:rPr lang="en-US" dirty="0"/>
+              <a:t>Se </a:t>
+            </a:r>
+            <a:r>
+              <a:rPr lang="en-US" dirty="0" err="1"/>
+              <a:t>tiene</a:t>
+            </a:r>
+            <a:r>
+              <a:rPr lang="en-US" dirty="0"/>
+              <a:t> </a:t>
+            </a:r>
+            <a:r>
+              <a:rPr lang="en-US" dirty="0" err="1"/>
+              <a:t>que</a:t>
+            </a:r>
+            <a:r>
+              <a:rPr lang="en-US" dirty="0"/>
+              <a:t> </a:t>
+            </a:r>
+            <a:r>
+              <a:rPr lang="en-US" dirty="0" err="1"/>
+              <a:t>el</a:t>
+            </a:r>
+            <a:r>
+              <a:rPr lang="en-US" dirty="0"/>
+              <a:t> </a:t>
+            </a:r>
+            <a:r>
+              <a:rPr lang="en-US" dirty="0" err="1"/>
+              <a:t>préstamo</a:t>
+            </a:r>
+            <a:r>
+              <a:rPr lang="en-US" dirty="0"/>
+              <a:t> de </a:t>
+            </a:r>
+            <a:r>
+              <a:rPr lang="en-US" dirty="0" err="1"/>
+              <a:t>bicicletas</a:t>
+            </a:r>
+            <a:r>
+              <a:rPr lang="en-US" dirty="0"/>
+              <a:t> ha </a:t>
+            </a:r>
+            <a:r>
+              <a:rPr lang="en-US" dirty="0" err="1"/>
+              <a:t>sido</a:t>
+            </a:r>
+            <a:r>
+              <a:rPr lang="en-US" dirty="0"/>
+              <a:t> </a:t>
+            </a:r>
+            <a:r>
+              <a:rPr lang="en-US" dirty="0" err="1"/>
+              <a:t>en</a:t>
+            </a:r>
+            <a:r>
+              <a:rPr lang="en-US" dirty="0"/>
+              <a:t> </a:t>
+            </a:r>
+            <a:r>
+              <a:rPr lang="en-US" dirty="0" err="1"/>
+              <a:t>los</a:t>
+            </a:r>
+            <a:r>
+              <a:rPr lang="en-US" dirty="0"/>
+              <a:t> </a:t>
+            </a:r>
+            <a:r>
+              <a:rPr lang="en-US" dirty="0" err="1"/>
+              <a:t>años</a:t>
+            </a:r>
+            <a:r>
+              <a:rPr lang="en-US" dirty="0"/>
+              <a:t> </a:t>
+            </a:r>
+            <a:r>
+              <a:rPr lang="en-US" dirty="0" err="1"/>
+              <a:t>siguientes</a:t>
+            </a:r>
+            <a:r>
+              <a:rPr lang="en-US" dirty="0"/>
+              <a:t> a la pandemia, </a:t>
+            </a:r>
+            <a:r>
+              <a:rPr lang="en-US" dirty="0" err="1"/>
+              <a:t>que</a:t>
+            </a:r>
+            <a:r>
+              <a:rPr lang="en-US" dirty="0"/>
+              <a:t> </a:t>
+            </a:r>
+            <a:r>
+              <a:rPr lang="en-US" dirty="0" err="1"/>
+              <a:t>en</a:t>
+            </a:r>
+            <a:r>
+              <a:rPr lang="en-US" dirty="0"/>
+              <a:t> </a:t>
+            </a:r>
+            <a:r>
+              <a:rPr lang="en-US" dirty="0" err="1"/>
+              <a:t>los</a:t>
+            </a:r>
+            <a:r>
+              <a:rPr lang="en-US" dirty="0"/>
+              <a:t> </a:t>
+            </a:r>
+            <a:r>
+              <a:rPr lang="en-US" dirty="0" err="1"/>
+              <a:t>años</a:t>
+            </a:r>
+            <a:r>
+              <a:rPr lang="en-US" dirty="0"/>
+              <a:t> </a:t>
+            </a:r>
+            <a:r>
+              <a:rPr lang="en-US" dirty="0" err="1"/>
+              <a:t>anteriores</a:t>
+            </a:r>
+            <a:r>
+              <a:rPr lang="en-US" dirty="0"/>
+              <a:t> a la </a:t>
+            </a:r>
+            <a:r>
+              <a:rPr lang="en-US" dirty="0" err="1"/>
+              <a:t>misma</a:t>
+            </a:r>
+            <a:r>
+              <a:rPr lang="en-US" dirty="0"/>
+              <a:t>.</a:t>
+            </a:r>
+          </a:p>
+          <a:p>
+            <a:pPr lvl="0"/>
+            <a:r>
+              <a:rPr lang="es-GT" dirty="0"/>
+              <a:t>La estación en Ciudad de México, desde la que se hace el mayor número de retiros de bicicletas durante Semana Santa es la estación en CE-271-272 Jesús García – Carlos J. Meneses con 8008 retiros.</a:t>
+            </a:r>
+          </a:p>
+          <a:p>
+            <a:pPr lvl="0"/>
+            <a:r>
+              <a:rPr lang="es-GT" dirty="0"/>
+              <a:t>La estación en Ciudad de México a la que arriba la mayor cantidad de bicicletas durante la Ciudad de México es la estación en CE-271-272 Jesús García – Carlos J. Meneses con 12213 arribos.</a:t>
+            </a:r>
+          </a:p>
+          <a:p>
+            <a:pPr lvl="0"/>
+            <a:r>
+              <a:rPr lang="es-GT" dirty="0"/>
+              <a:t>Después de la época post pandemia se tiene un aumento de los viajes que permite diferenciar en 2 clúster, pero hay un claro traslape entre algunos clústeres, lo cual se explica en el tiempo de recuperación que es alrededor de 2020 a 2022</a:t>
+            </a:r>
+          </a:p>
+          <a:p>
+            <a:endParaRPr lang="en-US" dirty="0"/>
+          </a:p>
+        </p:txBody>
+      </p:sp>
+    </p:spTree>
+    <p:extLst>
+      <p:ext uri="{BB962C8B-B14F-4D97-AF65-F5344CB8AC3E}">
+        <p14:creationId xmlns:p14="http://schemas.microsoft.com/office/powerpoint/2010/main" val="3399263724"/>
+      </p:ext>
+    </p:extLst>
+  </p:cSld>
+  <p:clrMapOvr>
+    <a:masterClrMapping/>
+  </p:clrMapOvr>
+</p:sld>
+</file>
+
+<file path=ppt/slides/slide11.xml><?xml version="1.0" encoding="utf-8"?>
+<p:sld xmlns:a="http://schemas.openxmlformats.org/drawingml/2006/main" xmlns:r="http://schemas.openxmlformats.org/officeDocument/2006/relationships" xmlns:p="http://schemas.openxmlformats.org/presentationml/2006/main">
+  <p:cSld>
+    <p:spTree>
+      <p:nvGrpSpPr>
+        <p:cNvPr id="1" name=""/>
+        <p:cNvGrpSpPr/>
+        <p:nvPr/>
+      </p:nvGrpSpPr>
+      <p:grpSpPr>
+        <a:xfrm>
+          <a:off x="0" y="0"/>
+          <a:ext cx="0" cy="0"/>
+          <a:chOff x="0" y="0"/>
+          <a:chExt cx="0" cy="0"/>
+        </a:xfrm>
+      </p:grpSpPr>
+      <p:sp>
+        <p:nvSpPr>
+          <p:cNvPr id="2" name="Title 1">
+            <a:extLst>
+              <a:ext uri="{FF2B5EF4-FFF2-40B4-BE49-F238E27FC236}">
                 <a16:creationId xmlns:a16="http://schemas.microsoft.com/office/drawing/2014/main" id="{73EA76D5-C4F4-03CA-6137-3167E4F091FE}"/>
               </a:ext>
             </a:extLst>
@@ -3229,13 +3674,13 @@
         </p:nvSpPr>
         <p:spPr>
           <a:xfrm>
-            <a:off x="838200" y="1825624"/>
-            <a:ext cx="10515600" cy="4411889"/>
+            <a:off x="838200" y="1492898"/>
+            <a:ext cx="10515600" cy="4684065"/>
           </a:xfrm>
         </p:spPr>
         <p:txBody>
           <a:bodyPr vert="horz" lIns="91440" tIns="45720" rIns="91440" bIns="45720" rtlCol="0" anchor="t">
-            <a:normAutofit lnSpcReduction="10000"/>
+            <a:normAutofit fontScale="92500" lnSpcReduction="20000"/>
           </a:bodyPr>
           <a:lstStyle/>
           <a:p>
@@ -3317,15 +3762,47 @@
             </a:pPr>
             <a:r>
               <a:rPr lang="en-US" dirty="0"/>
-              <a:t>¿</a:t>
-            </a:r>
-            <a:r>
-              <a:rPr lang="en-US" dirty="0" err="1"/>
-              <a:t>Cuáles</a:t>
-            </a:r>
-            <a:r>
-              <a:rPr lang="en-US" dirty="0"/>
-              <a:t> días son </a:t>
+              <a:t>¿Es possible </a:t>
+            </a:r>
+            <a:r>
+              <a:rPr lang="en-US" dirty="0" err="1"/>
+              <a:t>hacer</a:t>
+            </a:r>
+            <a:r>
+              <a:rPr lang="en-US" dirty="0"/>
+              <a:t> </a:t>
+            </a:r>
+            <a:r>
+              <a:rPr lang="en-US" dirty="0" err="1"/>
+              <a:t>una</a:t>
+            </a:r>
+            <a:r>
+              <a:rPr lang="en-US" dirty="0"/>
+              <a:t> </a:t>
+            </a:r>
+            <a:r>
+              <a:rPr lang="en-US" dirty="0" err="1"/>
+              <a:t>diferenciación</a:t>
+            </a:r>
+            <a:r>
+              <a:rPr lang="en-US" dirty="0"/>
+              <a:t> </a:t>
+            </a:r>
+            <a:r>
+              <a:rPr lang="en-US" dirty="0" err="1"/>
+              <a:t>evidente</a:t>
+            </a:r>
+            <a:r>
+              <a:rPr lang="en-US" dirty="0"/>
+              <a:t> de </a:t>
+            </a:r>
+            <a:r>
+              <a:rPr lang="en-US" dirty="0" err="1"/>
+              <a:t>los</a:t>
+            </a:r>
+            <a:r>
+              <a:rPr lang="en-US" dirty="0"/>
+              <a:t> días </a:t>
             </a:r>
             <a:r>
               <a:rPr lang="en-US" dirty="0" err="1"/>
@@ -3349,27 +3826,123 @@
             </a:r>
             <a:r>
               <a:rPr lang="en-US" dirty="0"/>
-              <a:t> se </a:t>
-            </a:r>
-            <a:r>
-              <a:rPr lang="en-US" dirty="0" err="1"/>
-              <a:t>prestan</a:t>
-            </a:r>
-            <a:r>
-              <a:rPr lang="en-US" dirty="0"/>
-              <a:t> </a:t>
-            </a:r>
-            <a:r>
-              <a:rPr lang="en-US" dirty="0" err="1"/>
-              <a:t>más</a:t>
-            </a:r>
-            <a:r>
-              <a:rPr lang="en-US" dirty="0"/>
               <a:t> </a:t>
             </a:r>
             <a:r>
               <a:rPr lang="en-US" dirty="0" err="1"/>
-              <a:t>bicicletas</a:t>
+              <a:t>hubo</a:t>
+            </a:r>
+            <a:r>
+              <a:rPr lang="en-US" dirty="0"/>
+              <a:t> </a:t>
+            </a:r>
+            <a:r>
+              <a:rPr lang="en-US" dirty="0" err="1"/>
+              <a:t>mayores</a:t>
+            </a:r>
+            <a:r>
+              <a:rPr lang="en-US" dirty="0"/>
+              <a:t> </a:t>
+            </a:r>
+            <a:r>
+              <a:rPr lang="en-US" dirty="0" err="1"/>
+              <a:t>retiros</a:t>
+            </a:r>
+            <a:r>
+              <a:rPr lang="en-US" dirty="0"/>
+              <a:t> de </a:t>
+            </a:r>
+            <a:r>
+              <a:rPr lang="en-US" dirty="0" err="1"/>
+              <a:t>aquellos</a:t>
+            </a:r>
+            <a:r>
+              <a:rPr lang="en-US" dirty="0"/>
+              <a:t> </a:t>
+            </a:r>
+            <a:r>
+              <a:rPr lang="en-US" dirty="0" err="1"/>
+              <a:t>en</a:t>
+            </a:r>
+            <a:r>
+              <a:rPr lang="en-US" dirty="0"/>
+              <a:t> </a:t>
+            </a:r>
+            <a:r>
+              <a:rPr lang="en-US" dirty="0" err="1"/>
+              <a:t>los</a:t>
+            </a:r>
+            <a:r>
+              <a:rPr lang="en-US" dirty="0"/>
+              <a:t> </a:t>
+            </a:r>
+            <a:r>
+              <a:rPr lang="en-US" dirty="0" err="1"/>
+              <a:t>que</a:t>
+            </a:r>
+            <a:r>
+              <a:rPr lang="en-US" dirty="0"/>
+              <a:t> </a:t>
+            </a:r>
+            <a:r>
+              <a:rPr lang="en-US" dirty="0" err="1"/>
+              <a:t>hubo</a:t>
+            </a:r>
+            <a:r>
+              <a:rPr lang="en-US" dirty="0"/>
+              <a:t> </a:t>
+            </a:r>
+            <a:r>
+              <a:rPr lang="en-US" dirty="0" err="1"/>
+              <a:t>menos</a:t>
+            </a:r>
+            <a:r>
+              <a:rPr lang="en-US" dirty="0"/>
+              <a:t> o </a:t>
+            </a:r>
+            <a:r>
+              <a:rPr lang="en-US" dirty="0" err="1"/>
+              <a:t>todos</a:t>
+            </a:r>
+            <a:r>
+              <a:rPr lang="en-US" dirty="0"/>
+              <a:t> </a:t>
+            </a:r>
+            <a:r>
+              <a:rPr lang="en-US" dirty="0" err="1"/>
+              <a:t>los</a:t>
+            </a:r>
+            <a:r>
+              <a:rPr lang="en-US" dirty="0"/>
+              <a:t> días hay </a:t>
+            </a:r>
+            <a:r>
+              <a:rPr lang="en-US" dirty="0" err="1"/>
+              <a:t>una</a:t>
+            </a:r>
+            <a:r>
+              <a:rPr lang="en-US" dirty="0"/>
+              <a:t> </a:t>
+            </a:r>
+            <a:r>
+              <a:rPr lang="en-US" dirty="0" err="1"/>
+              <a:t>cantidad</a:t>
+            </a:r>
+            <a:r>
+              <a:rPr lang="en-US" dirty="0"/>
+              <a:t> de </a:t>
+            </a:r>
+            <a:r>
+              <a:rPr lang="en-US" dirty="0" err="1"/>
+              <a:t>retiros</a:t>
+            </a:r>
+            <a:r>
+              <a:rPr lang="en-US" dirty="0"/>
+              <a:t> </a:t>
+            </a:r>
+            <a:r>
+              <a:rPr lang="en-US" dirty="0" err="1"/>
+              <a:t>parecida</a:t>
             </a:r>
             <a:r>
               <a:rPr lang="en-US" dirty="0"/>
@@ -3382,11 +3955,35 @@
             </a:pPr>
             <a:r>
               <a:rPr lang="en-US" dirty="0"/>
-              <a:t>¿Las </a:t>
-            </a:r>
-            <a:r>
-              <a:rPr lang="en-US" dirty="0" err="1"/>
-              <a:t>frecuencias</a:t>
+              <a:t>Si es possible </a:t>
+            </a:r>
+            <a:r>
+              <a:rPr lang="en-US" dirty="0" err="1"/>
+              <a:t>separar</a:t>
+            </a:r>
+            <a:r>
+              <a:rPr lang="en-US" dirty="0"/>
+              <a:t> </a:t>
+            </a:r>
+            <a:r>
+              <a:rPr lang="en-US" dirty="0" err="1"/>
+              <a:t>los</a:t>
+            </a:r>
+            <a:r>
+              <a:rPr lang="en-US" dirty="0"/>
+              <a:t> días de </a:t>
+            </a:r>
+            <a:r>
+              <a:rPr lang="en-US" dirty="0" err="1"/>
+              <a:t>más</a:t>
+            </a:r>
+            <a:r>
+              <a:rPr lang="en-US" dirty="0"/>
+              <a:t> </a:t>
+            </a:r>
+            <a:r>
+              <a:rPr lang="en-US" dirty="0" err="1"/>
+              <a:t>retiros</a:t>
             </a:r>
             <a:r>
               <a:rPr lang="en-US" dirty="0"/>
@@ -3394,15 +3991,15 @@
             </a:r>
             <a:r>
               <a:rPr lang="en-US" dirty="0" err="1"/>
-              <a:t>arribo</a:t>
-            </a:r>
-            <a:r>
-              <a:rPr lang="en-US" dirty="0"/>
-              <a:t> y </a:t>
-            </a:r>
-            <a:r>
-              <a:rPr lang="en-US" dirty="0" err="1"/>
-              <a:t>retiro</a:t>
+              <a:t>los</a:t>
+            </a:r>
+            <a:r>
+              <a:rPr lang="en-US" dirty="0"/>
+              <a:t> de </a:t>
+            </a:r>
+            <a:r>
+              <a:rPr lang="en-US" dirty="0" err="1"/>
+              <a:t>menor</a:t>
             </a:r>
             <a:r>
               <a:rPr lang="en-US" dirty="0"/>
@@ -3410,7 +4007,23 @@
             </a:r>
             <a:r>
               <a:rPr lang="en-US" dirty="0" err="1"/>
-              <a:t>serán</a:t>
+              <a:t>retiros</a:t>
+            </a:r>
+            <a:r>
+              <a:rPr lang="en-US" dirty="0"/>
+              <a:t>, ¿</a:t>
+            </a:r>
+            <a:r>
+              <a:rPr lang="en-US" dirty="0" err="1"/>
+              <a:t>Cuáles</a:t>
+            </a:r>
+            <a:r>
+              <a:rPr lang="en-US" dirty="0"/>
+              <a:t> días son </a:t>
+            </a:r>
+            <a:r>
+              <a:rPr lang="en-US" dirty="0" err="1"/>
+              <a:t>en</a:t>
             </a:r>
             <a:r>
               <a:rPr lang="en-US" dirty="0"/>
@@ -3418,7 +4031,7 @@
             </a:r>
             <a:r>
               <a:rPr lang="en-US" dirty="0" err="1"/>
-              <a:t>mayores</a:t>
+              <a:t>los</a:t>
             </a:r>
             <a:r>
               <a:rPr lang="en-US" dirty="0"/>
@@ -3426,7 +4039,23 @@
             </a:r>
             <a:r>
               <a:rPr lang="en-US" dirty="0" err="1"/>
-              <a:t>en</a:t>
+              <a:t>que</a:t>
+            </a:r>
+            <a:r>
+              <a:rPr lang="en-US" dirty="0"/>
+              <a:t> se </a:t>
+            </a:r>
+            <a:r>
+              <a:rPr lang="en-US" dirty="0" err="1"/>
+              <a:t>prestan</a:t>
+            </a:r>
+            <a:r>
+              <a:rPr lang="en-US" dirty="0"/>
+              <a:t> </a:t>
+            </a:r>
+            <a:r>
+              <a:rPr lang="en-US" dirty="0" err="1"/>
+              <a:t>más</a:t>
             </a:r>
             <a:r>
               <a:rPr lang="en-US" dirty="0"/>
@@ -3434,7 +4063,7 @@
             </a:r>
             <a:r>
               <a:rPr lang="en-US" dirty="0" err="1"/>
-              <a:t>el</a:t>
+              <a:t>bicicletas</a:t>
             </a:r>
             <a:r>
               <a:rPr lang="en-US" dirty="0"/>
@@ -3442,27 +4071,11 @@
             </a:r>
             <a:r>
               <a:rPr lang="en-US" dirty="0" err="1"/>
-              <a:t>centro</a:t>
-            </a:r>
-            <a:r>
-              <a:rPr lang="en-US" dirty="0"/>
-              <a:t> del </a:t>
-            </a:r>
-            <a:r>
-              <a:rPr lang="en-US" dirty="0" err="1"/>
-              <a:t>mapa</a:t>
-            </a:r>
-            <a:r>
-              <a:rPr lang="en-US" dirty="0"/>
-              <a:t> de </a:t>
-            </a:r>
-            <a:r>
-              <a:rPr lang="en-US" dirty="0" err="1"/>
-              <a:t>estaciones</a:t>
-            </a:r>
-            <a:r>
-              <a:rPr lang="en-US" dirty="0"/>
-              <a:t> de ECOBICI?</a:t>
+              <a:t>durante</a:t>
+            </a:r>
+            <a:r>
+              <a:rPr lang="en-US" dirty="0"/>
+              <a:t> Semana Santa?</a:t>
             </a:r>
           </a:p>
           <a:p>
@@ -3471,15 +4084,79 @@
             </a:pPr>
             <a:r>
               <a:rPr lang="en-US" dirty="0"/>
-              <a:t>¿</a:t>
-            </a:r>
-            <a:r>
-              <a:rPr lang="en-US" dirty="0" err="1"/>
-              <a:t>Cuáles</a:t>
-            </a:r>
-            <a:r>
-              <a:rPr lang="en-US" dirty="0"/>
-              <a:t> son las </a:t>
+              <a:t>¿Las </a:t>
+            </a:r>
+            <a:r>
+              <a:rPr lang="en-US" dirty="0" err="1"/>
+              <a:t>frecuencias</a:t>
+            </a:r>
+            <a:r>
+              <a:rPr lang="en-US" dirty="0"/>
+              <a:t> de </a:t>
+            </a:r>
+            <a:r>
+              <a:rPr lang="en-US" dirty="0" err="1"/>
+              <a:t>arribo</a:t>
+            </a:r>
+            <a:r>
+              <a:rPr lang="en-US" dirty="0"/>
+              <a:t> y </a:t>
+            </a:r>
+            <a:r>
+              <a:rPr lang="en-US" dirty="0" err="1"/>
+              <a:t>retiro</a:t>
+            </a:r>
+            <a:r>
+              <a:rPr lang="en-US" dirty="0"/>
+              <a:t> </a:t>
+            </a:r>
+            <a:r>
+              <a:rPr lang="en-US" dirty="0" err="1"/>
+              <a:t>serán</a:t>
+            </a:r>
+            <a:r>
+              <a:rPr lang="en-US" dirty="0"/>
+              <a:t> </a:t>
+            </a:r>
+            <a:r>
+              <a:rPr lang="en-US" dirty="0" err="1"/>
+              <a:t>mayores</a:t>
+            </a:r>
+            <a:r>
+              <a:rPr lang="en-US" dirty="0"/>
+              <a:t> </a:t>
+            </a:r>
+            <a:r>
+              <a:rPr lang="en-US" dirty="0" err="1"/>
+              <a:t>en</a:t>
+            </a:r>
+            <a:r>
+              <a:rPr lang="en-US" dirty="0"/>
+              <a:t> </a:t>
+            </a:r>
+            <a:r>
+              <a:rPr lang="en-US" dirty="0" err="1"/>
+              <a:t>el</a:t>
+            </a:r>
+            <a:r>
+              <a:rPr lang="en-US" dirty="0"/>
+              <a:t> </a:t>
+            </a:r>
+            <a:r>
+              <a:rPr lang="en-US" dirty="0" err="1"/>
+              <a:t>centro</a:t>
+            </a:r>
+            <a:r>
+              <a:rPr lang="en-US" dirty="0"/>
+              <a:t> del </a:t>
+            </a:r>
+            <a:r>
+              <a:rPr lang="en-US" dirty="0" err="1"/>
+              <a:t>mapa</a:t>
+            </a:r>
+            <a:r>
+              <a:rPr lang="en-US" dirty="0"/>
+              <a:t> de </a:t>
             </a:r>
             <a:r>
               <a:rPr lang="en-US" dirty="0" err="1"/>
@@ -3487,47 +4164,7 @@
             </a:r>
             <a:r>
               <a:rPr lang="en-US" dirty="0"/>
-              <a:t> </a:t>
-            </a:r>
-            <a:r>
-              <a:rPr lang="en-US" dirty="0" err="1"/>
-              <a:t>en</a:t>
-            </a:r>
-            <a:r>
-              <a:rPr lang="en-US" dirty="0"/>
-              <a:t> las </a:t>
-            </a:r>
-            <a:r>
-              <a:rPr lang="en-US" dirty="0" err="1"/>
-              <a:t>que</a:t>
-            </a:r>
-            <a:r>
-              <a:rPr lang="en-US" dirty="0"/>
-              <a:t> </a:t>
-            </a:r>
-            <a:r>
-              <a:rPr lang="en-US" dirty="0" err="1"/>
-              <a:t>más</a:t>
-            </a:r>
-            <a:r>
-              <a:rPr lang="en-US" dirty="0"/>
-              <a:t> se </a:t>
-            </a:r>
-            <a:r>
-              <a:rPr lang="en-US" dirty="0" err="1"/>
-              <a:t>prestan</a:t>
-            </a:r>
-            <a:r>
-              <a:rPr lang="en-US" dirty="0"/>
-              <a:t> </a:t>
-            </a:r>
-            <a:r>
-              <a:rPr lang="en-US" dirty="0" err="1"/>
-              <a:t>bicicletas</a:t>
-            </a:r>
-            <a:r>
-              <a:rPr lang="en-US" dirty="0"/>
-              <a:t>?</a:t>
+              <a:t> de ECOBICI?</a:t>
             </a:r>
           </a:p>
           <a:p>
@@ -3552,35 +4189,35 @@
             </a:r>
             <a:r>
               <a:rPr lang="en-US" dirty="0"/>
+              <a:t> </a:t>
+            </a:r>
+            <a:r>
+              <a:rPr lang="en-US" dirty="0" err="1"/>
+              <a:t>en</a:t>
+            </a:r>
+            <a:r>
+              <a:rPr lang="en-US" dirty="0"/>
+              <a:t> las </a:t>
+            </a:r>
+            <a:r>
+              <a:rPr lang="en-US" dirty="0" err="1"/>
+              <a:t>que</a:t>
+            </a:r>
+            <a:r>
+              <a:rPr lang="en-US" dirty="0"/>
               <a:t> </a:t>
             </a:r>
             <a:r>
               <a:rPr lang="en-US" dirty="0" err="1"/>
-              <a:t>en</a:t>
-            </a:r>
-            <a:r>
-              <a:rPr lang="en-US" dirty="0"/>
-              <a:t> la </a:t>
-            </a:r>
-            <a:r>
-              <a:rPr lang="en-US" dirty="0" err="1"/>
-              <a:t>que</a:t>
-            </a:r>
-            <a:r>
-              <a:rPr lang="en-US" dirty="0"/>
-              <a:t> </a:t>
-            </a:r>
-            <a:r>
-              <a:rPr lang="en-US" dirty="0" err="1"/>
               <a:t>más</a:t>
             </a:r>
             <a:r>
               <a:rPr lang="en-US" dirty="0"/>
-              <a:t> </a:t>
-            </a:r>
-            <a:r>
-              <a:rPr lang="en-US" dirty="0" err="1"/>
-              <a:t>dejan</a:t>
+              <a:t> se </a:t>
+            </a:r>
+            <a:r>
+              <a:rPr lang="en-US" dirty="0" err="1"/>
+              <a:t>prestan</a:t>
             </a:r>
             <a:r>
               <a:rPr lang="en-US" dirty="0"/>
@@ -3601,6 +4238,72 @@
             </a:pPr>
             <a:r>
               <a:rPr lang="en-US" dirty="0"/>
+              <a:t>¿</a:t>
+            </a:r>
+            <a:r>
+              <a:rPr lang="en-US" dirty="0" err="1"/>
+              <a:t>Cuáles</a:t>
+            </a:r>
+            <a:r>
+              <a:rPr lang="en-US" dirty="0"/>
+              <a:t> son las </a:t>
+            </a:r>
+            <a:r>
+              <a:rPr lang="en-US" dirty="0" err="1"/>
+              <a:t>estaciones</a:t>
+            </a:r>
+            <a:r>
+              <a:rPr lang="en-US" dirty="0"/>
+              <a:t> </a:t>
+            </a:r>
+            <a:r>
+              <a:rPr lang="en-US" dirty="0" err="1"/>
+              <a:t>en</a:t>
+            </a:r>
+            <a:r>
+              <a:rPr lang="en-US" dirty="0"/>
+              <a:t> la </a:t>
+            </a:r>
+            <a:r>
+              <a:rPr lang="en-US" dirty="0" err="1"/>
+              <a:t>que</a:t>
+            </a:r>
+            <a:r>
+              <a:rPr lang="en-US" dirty="0"/>
+              <a:t> </a:t>
+            </a:r>
+            <a:r>
+              <a:rPr lang="en-US" dirty="0" err="1"/>
+              <a:t>más</a:t>
+            </a:r>
+            <a:r>
+              <a:rPr lang="en-US" dirty="0"/>
+              <a:t> </a:t>
+            </a:r>
+            <a:r>
+              <a:rPr lang="en-US" dirty="0" err="1"/>
+              <a:t>dejan</a:t>
+            </a:r>
+            <a:r>
+              <a:rPr lang="en-US" dirty="0"/>
+              <a:t> </a:t>
+            </a:r>
+            <a:r>
+              <a:rPr lang="en-US" dirty="0" err="1"/>
+              <a:t>bicicletas</a:t>
+            </a:r>
+            <a:r>
+              <a:rPr lang="en-US" dirty="0"/>
+              <a:t>?</a:t>
+            </a:r>
+          </a:p>
+          <a:p>
+            <a:pPr marL="514350" indent="-514350">
+              <a:buFont typeface="Arial" panose="020B0604020202020204" pitchFamily="34" charset="0"/>
+              <a:buAutoNum type="arabicPeriod"/>
+            </a:pPr>
+            <a:r>
+              <a:rPr lang="en-US" dirty="0"/>
               <a:t>¿Es </a:t>
             </a:r>
             <a:r>
@@ -3667,6 +4370,19 @@
               <a:rPr lang="en-US" dirty="0"/>
               <a:t> de día? </a:t>
             </a:r>
+          </a:p>
+          <a:p>
+            <a:pPr marL="514350" indent="-514350">
+              <a:buFont typeface="Arial" panose="020B0604020202020204" pitchFamily="34" charset="0"/>
+              <a:buAutoNum type="arabicPeriod"/>
+            </a:pPr>
+            <a:endParaRPr lang="en-US" dirty="0"/>
+          </a:p>
+          <a:p>
+            <a:pPr marL="514350" indent="-514350">
+              <a:buAutoNum type="arabicPeriod"/>
+            </a:pPr>
+            <a:endParaRPr lang="en-US" dirty="0"/>
           </a:p>
         </p:txBody>
       </p:sp>
@@ -4740,13 +5456,7 @@
     </p:bg>
     <p:spTree>
       <p:nvGrpSpPr>
-        <p:cNvPr id="1" name="">
-          <a:extLst>
-            <a:ext uri="{FF2B5EF4-FFF2-40B4-BE49-F238E27FC236}">
-              <a16:creationId xmlns:a16="http://schemas.microsoft.com/office/drawing/2014/main" id="{3785D9FD-4EA7-988D-B7B1-75994B58FDD1}"/>
-            </a:ext>
-          </a:extLst>
-        </p:cNvPr>
+        <p:cNvPr id="1" name=""/>
         <p:cNvGrpSpPr/>
         <p:nvPr/>
       </p:nvGrpSpPr>
@@ -4760,7 +5470,7 @@
       </p:grpSpPr>
       <p:sp useBgFill="1">
         <p:nvSpPr>
-          <p:cNvPr id="18" name="Rectangle 17">
+          <p:cNvPr id="12" name="Rectangle 11">
             <a:extLst>
               <a:ext uri="{FF2B5EF4-FFF2-40B4-BE49-F238E27FC236}">
                 <a16:creationId xmlns:a16="http://schemas.microsoft.com/office/drawing/2014/main" id="{2B97F24A-32CE-4C1C-A50D-3016B394DCFB}"/>
@@ -4820,10 +5530,10 @@
       </p:sp>
       <p:sp>
         <p:nvSpPr>
-          <p:cNvPr id="2" name="Title 1">
+          <p:cNvPr id="2" name="Título 1">
             <a:extLst>
               <a:ext uri="{FF2B5EF4-FFF2-40B4-BE49-F238E27FC236}">
-                <a16:creationId xmlns:a16="http://schemas.microsoft.com/office/drawing/2014/main" id="{410101C2-4733-925E-AF79-6E887E439155}"/>
+                <a16:creationId xmlns:a16="http://schemas.microsoft.com/office/drawing/2014/main" id="{7D5DFBC4-93ED-BC0A-AFF0-AD661E51E060}"/>
               </a:ext>
             </a:extLst>
           </p:cNvPr>
@@ -4837,49 +5547,25 @@
         <p:spPr>
           <a:xfrm>
             <a:off x="630936" y="639520"/>
-            <a:ext cx="3989716" cy="1719072"/>
+            <a:ext cx="3774809" cy="1719072"/>
           </a:xfrm>
         </p:spPr>
         <p:txBody>
           <a:bodyPr anchor="b">
-            <a:normAutofit/>
+            <a:normAutofit fontScale="90000"/>
           </a:bodyPr>
           <a:lstStyle/>
           <a:p>
             <a:r>
-              <a:rPr lang="en-US" sz="3800" dirty="0" err="1"/>
-              <a:t>Préstamos</a:t>
-            </a:r>
-            <a:r>
-              <a:rPr lang="en-US" sz="3800" dirty="0"/>
-              <a:t> de </a:t>
-            </a:r>
-            <a:r>
-              <a:rPr lang="en-US" sz="3800" dirty="0" err="1"/>
-              <a:t>bicicletas</a:t>
-            </a:r>
-            <a:r>
-              <a:rPr lang="en-US" sz="3800" dirty="0"/>
-              <a:t> </a:t>
-            </a:r>
-            <a:r>
-              <a:rPr lang="en-US" sz="3800" dirty="0" err="1"/>
-              <a:t>durante</a:t>
-            </a:r>
-            <a:r>
-              <a:rPr lang="en-US" sz="3800" dirty="0"/>
-              <a:t> la </a:t>
-            </a:r>
-            <a:r>
-              <a:rPr lang="en-US" sz="3800" dirty="0" err="1"/>
-              <a:t>semana</a:t>
-            </a:r>
-          </a:p>
-        </p:txBody>
-      </p:sp>
-      <p:sp>
-        <p:nvSpPr>
-          <p:cNvPr id="20" name="sketch line">
+              <a:rPr lang="es-GT" sz="5400" dirty="0"/>
+              <a:t>PCA de retiros promedio </a:t>
+            </a:r>
+          </a:p>
+        </p:txBody>
+      </p:sp>
+      <p:sp>
+        <p:nvSpPr>
+          <p:cNvPr id="14" name="sketch line">
             <a:extLst>
               <a:ext uri="{FF2B5EF4-FFF2-40B4-BE49-F238E27FC236}">
                 <a16:creationId xmlns:a16="http://schemas.microsoft.com/office/drawing/2014/main" id="{CD8B4F24-440B-49E9-B85D-733523DC064B}"/>
@@ -5150,6 +5836,568 @@
           </a:p>
         </p:txBody>
       </p:sp>
+      <p:sp>
+        <p:nvSpPr>
+          <p:cNvPr id="9" name="Content Placeholder 8">
+            <a:extLst>
+              <a:ext uri="{FF2B5EF4-FFF2-40B4-BE49-F238E27FC236}">
+                <a16:creationId xmlns:a16="http://schemas.microsoft.com/office/drawing/2014/main" id="{DE8BDAF8-EDB7-3234-2EA0-CCD9F657281A}"/>
+              </a:ext>
+            </a:extLst>
+          </p:cNvPr>
+          <p:cNvSpPr>
+            <a:spLocks noGrp="1"/>
+          </p:cNvSpPr>
+          <p:nvPr>
+            <p:ph idx="1"/>
+          </p:nvPr>
+        </p:nvSpPr>
+        <p:spPr>
+          <a:xfrm>
+            <a:off x="630936" y="2807208"/>
+            <a:ext cx="3429000" cy="3410712"/>
+          </a:xfrm>
+        </p:spPr>
+        <p:txBody>
+          <a:bodyPr anchor="t">
+            <a:normAutofit/>
+          </a:bodyPr>
+          <a:lstStyle/>
+          <a:p>
+            <a:r>
+              <a:rPr lang="en-US" sz="2200" dirty="0"/>
+              <a:t>En </a:t>
+            </a:r>
+            <a:r>
+              <a:rPr lang="en-US" sz="2200" dirty="0" err="1"/>
+              <a:t>el</a:t>
+            </a:r>
+            <a:r>
+              <a:rPr lang="en-US" sz="2200" dirty="0"/>
+              <a:t> </a:t>
+            </a:r>
+            <a:r>
+              <a:rPr lang="en-US" sz="2200" dirty="0" err="1"/>
+              <a:t>gráfico</a:t>
+            </a:r>
+            <a:r>
+              <a:rPr lang="en-US" sz="2200" dirty="0"/>
+              <a:t> se </a:t>
+            </a:r>
+            <a:r>
+              <a:rPr lang="en-US" sz="2200" dirty="0" err="1"/>
+              <a:t>tienen</a:t>
+            </a:r>
+            <a:r>
+              <a:rPr lang="en-US" sz="2200" dirty="0"/>
+              <a:t> </a:t>
+            </a:r>
+            <a:r>
+              <a:rPr lang="en-US" sz="2200" dirty="0" err="1"/>
+              <a:t>los</a:t>
+            </a:r>
+            <a:r>
+              <a:rPr lang="en-US" sz="2200" dirty="0"/>
+              <a:t> </a:t>
+            </a:r>
+            <a:r>
+              <a:rPr lang="en-US" sz="2200" dirty="0" err="1"/>
+              <a:t>retiros</a:t>
+            </a:r>
+            <a:r>
+              <a:rPr lang="en-US" sz="2200" dirty="0"/>
+              <a:t> </a:t>
+            </a:r>
+            <a:r>
+              <a:rPr lang="en-US" sz="2200" dirty="0" err="1"/>
+              <a:t>promedio</a:t>
+            </a:r>
+            <a:r>
+              <a:rPr lang="en-US" sz="2200" dirty="0"/>
+              <a:t> </a:t>
+            </a:r>
+            <a:r>
+              <a:rPr lang="en-US" sz="2200" dirty="0" err="1"/>
+              <a:t>por</a:t>
+            </a:r>
+            <a:r>
+              <a:rPr lang="en-US" sz="2200" dirty="0"/>
+              <a:t> día de la </a:t>
+            </a:r>
+            <a:r>
+              <a:rPr lang="en-US" sz="2200" dirty="0" err="1"/>
+              <a:t>semana</a:t>
+            </a:r>
+            <a:endParaRPr lang="en-US" sz="2200" dirty="0"/>
+          </a:p>
+        </p:txBody>
+      </p:sp>
+      <p:pic>
+        <p:nvPicPr>
+          <p:cNvPr id="5" name="Marcador de contenido 4">
+            <a:extLst>
+              <a:ext uri="{FF2B5EF4-FFF2-40B4-BE49-F238E27FC236}">
+                <a16:creationId xmlns:a16="http://schemas.microsoft.com/office/drawing/2014/main" id="{255E5A5E-A1A9-6953-D01F-91D9C894137F}"/>
+              </a:ext>
+            </a:extLst>
+          </p:cNvPr>
+          <p:cNvPicPr>
+            <a:picLocks noChangeAspect="1"/>
+          </p:cNvPicPr>
+          <p:nvPr/>
+        </p:nvPicPr>
+        <p:blipFill>
+          <a:blip r:embed="rId2"/>
+          <a:stretch>
+            <a:fillRect/>
+          </a:stretch>
+        </p:blipFill>
+        <p:spPr>
+          <a:xfrm>
+            <a:off x="4654296" y="745179"/>
+            <a:ext cx="6903720" cy="5367641"/>
+          </a:xfrm>
+          <a:prstGeom prst="rect">
+            <a:avLst/>
+          </a:prstGeom>
+        </p:spPr>
+      </p:pic>
+    </p:spTree>
+    <p:extLst>
+      <p:ext uri="{BB962C8B-B14F-4D97-AF65-F5344CB8AC3E}">
+        <p14:creationId xmlns:p14="http://schemas.microsoft.com/office/powerpoint/2010/main" val="2111643974"/>
+      </p:ext>
+    </p:extLst>
+  </p:cSld>
+  <p:clrMapOvr>
+    <a:masterClrMapping/>
+  </p:clrMapOvr>
+</p:sld>
+</file>
+
+<file path=ppt/slides/slide6.xml><?xml version="1.0" encoding="utf-8"?>
+<p:sld xmlns:a="http://schemas.openxmlformats.org/drawingml/2006/main" xmlns:r="http://schemas.openxmlformats.org/officeDocument/2006/relationships" xmlns:p="http://schemas.openxmlformats.org/presentationml/2006/main">
+  <p:cSld>
+    <p:bg>
+      <p:bgPr>
+        <a:solidFill>
+          <a:schemeClr val="bg1"/>
+        </a:solidFill>
+        <a:effectLst/>
+      </p:bgPr>
+    </p:bg>
+    <p:spTree>
+      <p:nvGrpSpPr>
+        <p:cNvPr id="1" name="">
+          <a:extLst>
+            <a:ext uri="{FF2B5EF4-FFF2-40B4-BE49-F238E27FC236}">
+              <a16:creationId xmlns:a16="http://schemas.microsoft.com/office/drawing/2014/main" id="{3785D9FD-4EA7-988D-B7B1-75994B58FDD1}"/>
+            </a:ext>
+          </a:extLst>
+        </p:cNvPr>
+        <p:cNvGrpSpPr/>
+        <p:nvPr/>
+      </p:nvGrpSpPr>
+      <p:grpSpPr>
+        <a:xfrm>
+          <a:off x="0" y="0"/>
+          <a:ext cx="0" cy="0"/>
+          <a:chOff x="0" y="0"/>
+          <a:chExt cx="0" cy="0"/>
+        </a:xfrm>
+      </p:grpSpPr>
+      <p:sp useBgFill="1">
+        <p:nvSpPr>
+          <p:cNvPr id="18" name="Rectangle 17">
+            <a:extLst>
+              <a:ext uri="{FF2B5EF4-FFF2-40B4-BE49-F238E27FC236}">
+                <a16:creationId xmlns:a16="http://schemas.microsoft.com/office/drawing/2014/main" id="{2B97F24A-32CE-4C1C-A50D-3016B394DCFB}"/>
+              </a:ext>
+              <a:ext uri="{C183D7F6-B498-43B3-948B-1728B52AA6E4}">
+                <adec:decorative xmlns:adec="http://schemas.microsoft.com/office/drawing/2017/decorative" val="1"/>
+              </a:ext>
+            </a:extLst>
+          </p:cNvPr>
+          <p:cNvSpPr>
+            <a:spLocks noGrp="1" noRot="1" noChangeAspect="1" noMove="1" noResize="1" noEditPoints="1" noAdjustHandles="1" noChangeArrowheads="1" noChangeShapeType="1" noTextEdit="1"/>
+          </p:cNvSpPr>
+          <p:nvPr>
+            <p:extLst>
+              <p:ext uri="{386F3935-93C4-4BCD-93E2-E3B085C9AB24}">
+                <p16:designElem xmlns:p16="http://schemas.microsoft.com/office/powerpoint/2015/main" val="1"/>
+              </p:ext>
+            </p:extLst>
+          </p:nvPr>
+        </p:nvSpPr>
+        <p:spPr>
+          <a:xfrm>
+            <a:off x="0" y="0"/>
+            <a:ext cx="12192000" cy="6858000"/>
+          </a:xfrm>
+          <a:prstGeom prst="rect">
+            <a:avLst/>
+          </a:prstGeom>
+          <a:ln>
+            <a:noFill/>
+          </a:ln>
+        </p:spPr>
+        <p:style>
+          <a:lnRef idx="2">
+            <a:schemeClr val="accent1">
+              <a:shade val="50000"/>
+            </a:schemeClr>
+          </a:lnRef>
+          <a:fillRef idx="1">
+            <a:schemeClr val="accent1"/>
+          </a:fillRef>
+          <a:effectRef idx="0">
+            <a:schemeClr val="accent1"/>
+          </a:effectRef>
+          <a:fontRef idx="minor">
+            <a:schemeClr val="lt1"/>
+          </a:fontRef>
+        </p:style>
+        <p:txBody>
+          <a:bodyPr rtlCol="0" anchor="ctr"/>
+          <a:lstStyle/>
+          <a:p>
+            <a:pPr algn="ctr"/>
+            <a:endParaRPr lang="en-US"/>
+          </a:p>
+        </p:txBody>
+      </p:sp>
+      <p:sp>
+        <p:nvSpPr>
+          <p:cNvPr id="2" name="Title 1">
+            <a:extLst>
+              <a:ext uri="{FF2B5EF4-FFF2-40B4-BE49-F238E27FC236}">
+                <a16:creationId xmlns:a16="http://schemas.microsoft.com/office/drawing/2014/main" id="{410101C2-4733-925E-AF79-6E887E439155}"/>
+              </a:ext>
+            </a:extLst>
+          </p:cNvPr>
+          <p:cNvSpPr>
+            <a:spLocks noGrp="1"/>
+          </p:cNvSpPr>
+          <p:nvPr>
+            <p:ph type="title"/>
+          </p:nvPr>
+        </p:nvSpPr>
+        <p:spPr>
+          <a:xfrm>
+            <a:off x="630936" y="639520"/>
+            <a:ext cx="3989716" cy="1719072"/>
+          </a:xfrm>
+        </p:spPr>
+        <p:txBody>
+          <a:bodyPr anchor="b">
+            <a:normAutofit/>
+          </a:bodyPr>
+          <a:lstStyle/>
+          <a:p>
+            <a:r>
+              <a:rPr lang="en-US" sz="3800" dirty="0" err="1"/>
+              <a:t>Préstamos</a:t>
+            </a:r>
+            <a:r>
+              <a:rPr lang="en-US" sz="3800" dirty="0"/>
+              <a:t> de </a:t>
+            </a:r>
+            <a:r>
+              <a:rPr lang="en-US" sz="3800" dirty="0" err="1"/>
+              <a:t>bicicletas</a:t>
+            </a:r>
+            <a:r>
+              <a:rPr lang="en-US" sz="3800" dirty="0"/>
+              <a:t> </a:t>
+            </a:r>
+            <a:r>
+              <a:rPr lang="en-US" sz="3800" dirty="0" err="1"/>
+              <a:t>durante</a:t>
+            </a:r>
+            <a:r>
+              <a:rPr lang="en-US" sz="3800" dirty="0"/>
+              <a:t> la </a:t>
+            </a:r>
+            <a:r>
+              <a:rPr lang="en-US" sz="3800" dirty="0" err="1"/>
+              <a:t>semana</a:t>
+            </a:r>
+          </a:p>
+        </p:txBody>
+      </p:sp>
+      <p:sp>
+        <p:nvSpPr>
+          <p:cNvPr id="20" name="sketch line">
+            <a:extLst>
+              <a:ext uri="{FF2B5EF4-FFF2-40B4-BE49-F238E27FC236}">
+                <a16:creationId xmlns:a16="http://schemas.microsoft.com/office/drawing/2014/main" id="{CD8B4F24-440B-49E9-B85D-733523DC064B}"/>
+              </a:ext>
+              <a:ext uri="{C183D7F6-B498-43B3-948B-1728B52AA6E4}">
+                <adec:decorative xmlns:adec="http://schemas.microsoft.com/office/drawing/2017/decorative" val="1"/>
+              </a:ext>
+            </a:extLst>
+          </p:cNvPr>
+          <p:cNvSpPr>
+            <a:spLocks noGrp="1" noRot="1" noChangeAspect="1" noMove="1" noResize="1" noEditPoints="1" noAdjustHandles="1" noChangeArrowheads="1" noChangeShapeType="1" noTextEdit="1"/>
+          </p:cNvSpPr>
+          <p:nvPr>
+            <p:extLst>
+              <p:ext uri="{386F3935-93C4-4BCD-93E2-E3B085C9AB24}">
+                <p16:designElem xmlns:p16="http://schemas.microsoft.com/office/powerpoint/2015/main" val="1"/>
+              </p:ext>
+            </p:extLst>
+          </p:nvPr>
+        </p:nvSpPr>
+        <p:spPr>
+          <a:xfrm>
+            <a:off x="643278" y="2573756"/>
+            <a:ext cx="3255095" cy="18288"/>
+          </a:xfrm>
+          <a:custGeom>
+            <a:avLst/>
+            <a:gdLst>
+              <a:gd name="csX0" fmla="*/ 0 w 3255095"/>
+              <a:gd name="csY0" fmla="*/ 0 h 18288"/>
+              <a:gd name="csX1" fmla="*/ 618468 w 3255095"/>
+              <a:gd name="csY1" fmla="*/ 0 h 18288"/>
+              <a:gd name="csX2" fmla="*/ 1269487 w 3255095"/>
+              <a:gd name="csY2" fmla="*/ 0 h 18288"/>
+              <a:gd name="csX3" fmla="*/ 1953057 w 3255095"/>
+              <a:gd name="csY3" fmla="*/ 0 h 18288"/>
+              <a:gd name="csX4" fmla="*/ 2636627 w 3255095"/>
+              <a:gd name="csY4" fmla="*/ 0 h 18288"/>
+              <a:gd name="csX5" fmla="*/ 3255095 w 3255095"/>
+              <a:gd name="csY5" fmla="*/ 0 h 18288"/>
+              <a:gd name="csX6" fmla="*/ 3255095 w 3255095"/>
+              <a:gd name="csY6" fmla="*/ 18288 h 18288"/>
+              <a:gd name="csX7" fmla="*/ 2538974 w 3255095"/>
+              <a:gd name="csY7" fmla="*/ 18288 h 18288"/>
+              <a:gd name="csX8" fmla="*/ 1822853 w 3255095"/>
+              <a:gd name="csY8" fmla="*/ 18288 h 18288"/>
+              <a:gd name="csX9" fmla="*/ 1171834 w 3255095"/>
+              <a:gd name="csY9" fmla="*/ 18288 h 18288"/>
+              <a:gd name="csX10" fmla="*/ 0 w 3255095"/>
+              <a:gd name="csY10" fmla="*/ 18288 h 18288"/>
+              <a:gd name="csX11" fmla="*/ 0 w 3255095"/>
+              <a:gd name="csY11" fmla="*/ 0 h 18288"/>
+            </a:gdLst>
+            <a:ahLst/>
+            <a:cxnLst>
+              <a:cxn ang="0">
+                <a:pos x="csX0" y="csY0"/>
+              </a:cxn>
+              <a:cxn ang="0">
+                <a:pos x="csX1" y="csY1"/>
+              </a:cxn>
+              <a:cxn ang="0">
+                <a:pos x="csX2" y="csY2"/>
+              </a:cxn>
+              <a:cxn ang="0">
+                <a:pos x="csX3" y="csY3"/>
+              </a:cxn>
+              <a:cxn ang="0">
+                <a:pos x="csX4" y="csY4"/>
+              </a:cxn>
+              <a:cxn ang="0">
+                <a:pos x="csX5" y="csY5"/>
+              </a:cxn>
+              <a:cxn ang="0">
+                <a:pos x="csX6" y="csY6"/>
+              </a:cxn>
+              <a:cxn ang="0">
+                <a:pos x="csX7" y="csY7"/>
+              </a:cxn>
+              <a:cxn ang="0">
+                <a:pos x="csX8" y="csY8"/>
+              </a:cxn>
+              <a:cxn ang="0">
+                <a:pos x="csX9" y="csY9"/>
+              </a:cxn>
+              <a:cxn ang="0">
+                <a:pos x="csX10" y="csY10"/>
+              </a:cxn>
+              <a:cxn ang="0">
+                <a:pos x="csX11" y="csY11"/>
+              </a:cxn>
+            </a:cxnLst>
+            <a:rect l="l" t="t" r="r" b="b"/>
+            <a:pathLst>
+              <a:path w="3255095" h="18288" fill="none" extrusionOk="0">
+                <a:moveTo>
+                  <a:pt x="0" y="0"/>
+                </a:moveTo>
+                <a:cubicBezTo>
+                  <a:pt x="240201" y="-22123"/>
+                  <a:pt x="462021" y="-19623"/>
+                  <a:pt x="618468" y="0"/>
+                </a:cubicBezTo>
+                <a:cubicBezTo>
+                  <a:pt x="774915" y="19623"/>
+                  <a:pt x="974734" y="2035"/>
+                  <a:pt x="1269487" y="0"/>
+                </a:cubicBezTo>
+                <a:cubicBezTo>
+                  <a:pt x="1564240" y="-2035"/>
+                  <a:pt x="1733579" y="10639"/>
+                  <a:pt x="1953057" y="0"/>
+                </a:cubicBezTo>
+                <a:cubicBezTo>
+                  <a:pt x="2172535" y="-10639"/>
+                  <a:pt x="2453962" y="14018"/>
+                  <a:pt x="2636627" y="0"/>
+                </a:cubicBezTo>
+                <a:cubicBezTo>
+                  <a:pt x="2819292" y="-14018"/>
+                  <a:pt x="3121375" y="5399"/>
+                  <a:pt x="3255095" y="0"/>
+                </a:cubicBezTo>
+                <a:cubicBezTo>
+                  <a:pt x="3254386" y="8157"/>
+                  <a:pt x="3254682" y="12125"/>
+                  <a:pt x="3255095" y="18288"/>
+                </a:cubicBezTo>
+                <a:cubicBezTo>
+                  <a:pt x="3088545" y="23203"/>
+                  <a:pt x="2687475" y="7419"/>
+                  <a:pt x="2538974" y="18288"/>
+                </a:cubicBezTo>
+                <a:cubicBezTo>
+                  <a:pt x="2390473" y="29157"/>
+                  <a:pt x="2137381" y="-8959"/>
+                  <a:pt x="1822853" y="18288"/>
+                </a:cubicBezTo>
+                <a:cubicBezTo>
+                  <a:pt x="1508325" y="45535"/>
+                  <a:pt x="1466437" y="20385"/>
+                  <a:pt x="1171834" y="18288"/>
+                </a:cubicBezTo>
+                <a:cubicBezTo>
+                  <a:pt x="877231" y="16191"/>
+                  <a:pt x="561097" y="37643"/>
+                  <a:pt x="0" y="18288"/>
+                </a:cubicBezTo>
+                <a:cubicBezTo>
+                  <a:pt x="-46" y="12483"/>
+                  <a:pt x="-203" y="6491"/>
+                  <a:pt x="0" y="0"/>
+                </a:cubicBezTo>
+                <a:close/>
+              </a:path>
+              <a:path w="3255095" h="18288" stroke="0" extrusionOk="0">
+                <a:moveTo>
+                  <a:pt x="0" y="0"/>
+                </a:moveTo>
+                <a:cubicBezTo>
+                  <a:pt x="291965" y="19429"/>
+                  <a:pt x="363155" y="8568"/>
+                  <a:pt x="618468" y="0"/>
+                </a:cubicBezTo>
+                <a:cubicBezTo>
+                  <a:pt x="873781" y="-8568"/>
+                  <a:pt x="904459" y="-19505"/>
+                  <a:pt x="1171834" y="0"/>
+                </a:cubicBezTo>
+                <a:cubicBezTo>
+                  <a:pt x="1439209" y="19505"/>
+                  <a:pt x="1744369" y="9790"/>
+                  <a:pt x="1887955" y="0"/>
+                </a:cubicBezTo>
+                <a:cubicBezTo>
+                  <a:pt x="2031541" y="-9790"/>
+                  <a:pt x="2346378" y="21240"/>
+                  <a:pt x="2506423" y="0"/>
+                </a:cubicBezTo>
+                <a:cubicBezTo>
+                  <a:pt x="2666468" y="-21240"/>
+                  <a:pt x="2990257" y="30414"/>
+                  <a:pt x="3255095" y="0"/>
+                </a:cubicBezTo>
+                <a:cubicBezTo>
+                  <a:pt x="3254831" y="4493"/>
+                  <a:pt x="3255479" y="9472"/>
+                  <a:pt x="3255095" y="18288"/>
+                </a:cubicBezTo>
+                <a:cubicBezTo>
+                  <a:pt x="3120743" y="16690"/>
+                  <a:pt x="2759628" y="42462"/>
+                  <a:pt x="2604076" y="18288"/>
+                </a:cubicBezTo>
+                <a:cubicBezTo>
+                  <a:pt x="2448524" y="-5886"/>
+                  <a:pt x="2184336" y="19599"/>
+                  <a:pt x="1887955" y="18288"/>
+                </a:cubicBezTo>
+                <a:cubicBezTo>
+                  <a:pt x="1591574" y="16977"/>
+                  <a:pt x="1548845" y="6870"/>
+                  <a:pt x="1334589" y="18288"/>
+                </a:cubicBezTo>
+                <a:cubicBezTo>
+                  <a:pt x="1120333" y="29706"/>
+                  <a:pt x="996014" y="9662"/>
+                  <a:pt x="683570" y="18288"/>
+                </a:cubicBezTo>
+                <a:cubicBezTo>
+                  <a:pt x="371126" y="26914"/>
+                  <a:pt x="198687" y="16167"/>
+                  <a:pt x="0" y="18288"/>
+                </a:cubicBezTo>
+                <a:cubicBezTo>
+                  <a:pt x="843" y="9577"/>
+                  <a:pt x="371" y="6900"/>
+                  <a:pt x="0" y="0"/>
+                </a:cubicBezTo>
+                <a:close/>
+              </a:path>
+            </a:pathLst>
+          </a:custGeom>
+          <a:solidFill>
+            <a:schemeClr val="accent2"/>
+          </a:solidFill>
+          <a:ln w="38100" cap="rnd">
+            <a:solidFill>
+              <a:schemeClr val="accent2"/>
+            </a:solidFill>
+            <a:round/>
+            <a:extLst>
+              <a:ext uri="{C807C97D-BFC1-408E-A445-0C87EB9F89A2}">
+                <ask:lineSketchStyleProps xmlns:ask="http://schemas.microsoft.com/office/drawing/2018/sketchyshapes" sd="1219033472">
+                  <a:prstGeom prst="rect">
+                    <a:avLst/>
+                  </a:prstGeom>
+                  <ask:type>
+                    <ask:lineSketchFreehand/>
+                  </ask:type>
+                </ask:lineSketchStyleProps>
+              </a:ext>
+            </a:extLst>
+          </a:ln>
+        </p:spPr>
+        <p:style>
+          <a:lnRef idx="2">
+            <a:schemeClr val="accent1">
+              <a:shade val="50000"/>
+            </a:schemeClr>
+          </a:lnRef>
+          <a:fillRef idx="1">
+            <a:schemeClr val="accent1"/>
+          </a:fillRef>
+          <a:effectRef idx="0">
+            <a:schemeClr val="accent1"/>
+          </a:effectRef>
+          <a:fontRef idx="minor">
+            <a:schemeClr val="lt1"/>
+          </a:fontRef>
+        </p:style>
+        <p:txBody>
+          <a:bodyPr rtlCol="0" anchor="ctr"/>
+          <a:lstStyle/>
+          <a:p>
+            <a:pPr algn="ctr"/>
+            <a:endParaRPr lang="en-US"/>
+          </a:p>
+        </p:txBody>
+      </p:sp>
       <p:pic>
         <p:nvPicPr>
           <p:cNvPr id="3" name="Picture 2">
@@ -5386,7 +6634,7 @@
 </p:sld>
 </file>
 
-<file path=ppt/slides/slide6.xml><?xml version="1.0" encoding="utf-8"?>
+<file path=ppt/slides/slide7.xml><?xml version="1.0" encoding="utf-8"?>
 <p:sld xmlns:a="http://schemas.openxmlformats.org/drawingml/2006/main" xmlns:r="http://schemas.openxmlformats.org/officeDocument/2006/relationships" xmlns:p="http://schemas.openxmlformats.org/presentationml/2006/main">
   <p:cSld>
     <p:bg>
@@ -6068,7 +7316,7 @@
 </p:sld>
 </file>
 
-<file path=ppt/slides/slide7.xml><?xml version="1.0" encoding="utf-8"?>
+<file path=ppt/slides/slide8.xml><?xml version="1.0" encoding="utf-8"?>
 <p:sld xmlns:a="http://schemas.openxmlformats.org/drawingml/2006/main" xmlns:r="http://schemas.openxmlformats.org/officeDocument/2006/relationships" xmlns:p="http://schemas.openxmlformats.org/presentationml/2006/main">
   <p:cSld>
     <p:bg>
@@ -6804,7 +8052,7 @@
 </p:sld>
 </file>
 
-<file path=ppt/slides/slide8.xml><?xml version="1.0" encoding="utf-8"?>
+<file path=ppt/slides/slide9.xml><?xml version="1.0" encoding="utf-8"?>
 <p:sld xmlns:a="http://schemas.openxmlformats.org/drawingml/2006/main" xmlns:r="http://schemas.openxmlformats.org/officeDocument/2006/relationships" xmlns:p="http://schemas.openxmlformats.org/presentationml/2006/main">
   <p:cSld>
     <p:bg>
@@ -6820,7 +8068,7 @@
         <p:cNvPr id="1" name="">
           <a:extLst>
             <a:ext uri="{FF2B5EF4-FFF2-40B4-BE49-F238E27FC236}">
-              <a16:creationId xmlns:a16="http://schemas.microsoft.com/office/drawing/2014/main" id="{2D0D7194-C290-E63C-01A6-CBD2B224FE16}"/>
+              <a16:creationId xmlns:a16="http://schemas.microsoft.com/office/drawing/2014/main" id="{2D5E637C-4386-5F90-87D7-D8BF9FBB549A}"/>
             </a:ext>
           </a:extLst>
         </p:cNvPr>
@@ -6837,10 +8085,10 @@
       </p:grpSpPr>
       <p:sp useBgFill="1">
         <p:nvSpPr>
-          <p:cNvPr id="40" name="Rectangle 39">
+          <p:cNvPr id="27" name="Rectangle 26">
             <a:extLst>
               <a:ext uri="{FF2B5EF4-FFF2-40B4-BE49-F238E27FC236}">
-                <a16:creationId xmlns:a16="http://schemas.microsoft.com/office/drawing/2014/main" id="{2151139A-886F-4B97-8815-729AD3831BBD}"/>
+                <a16:creationId xmlns:a16="http://schemas.microsoft.com/office/drawing/2014/main" id="{289F0BD7-9D78-E216-FCD7-47638771B948}"/>
               </a:ext>
               <a:ext uri="{C183D7F6-B498-43B3-948B-1728B52AA6E4}">
                 <adec:decorative xmlns:adec="http://schemas.microsoft.com/office/drawing/2017/decorative" val="1"/>
@@ -6913,10 +8161,10 @@
       </p:sp>
       <p:sp>
         <p:nvSpPr>
-          <p:cNvPr id="42" name="Rectangle 41">
+          <p:cNvPr id="29" name="Rectangle 28">
             <a:extLst>
               <a:ext uri="{FF2B5EF4-FFF2-40B4-BE49-F238E27FC236}">
-                <a16:creationId xmlns:a16="http://schemas.microsoft.com/office/drawing/2014/main" id="{AB5E08C4-8CDD-4623-A5B8-E998C6DEE3B7}"/>
+                <a16:creationId xmlns:a16="http://schemas.microsoft.com/office/drawing/2014/main" id="{F0C8E499-8153-0441-6DFD-7D77480BC95A}"/>
               </a:ext>
               <a:ext uri="{C183D7F6-B498-43B3-948B-1728B52AA6E4}">
                 <adec:decorative xmlns:adec="http://schemas.microsoft.com/office/drawing/2017/decorative" val="1"/>
@@ -6988,10 +8236,10 @@
       </p:sp>
       <p:sp>
         <p:nvSpPr>
-          <p:cNvPr id="44" name="Rectangle 43">
+          <p:cNvPr id="31" name="Rectangle 30">
             <a:extLst>
               <a:ext uri="{FF2B5EF4-FFF2-40B4-BE49-F238E27FC236}">
-                <a16:creationId xmlns:a16="http://schemas.microsoft.com/office/drawing/2014/main" id="{15F33878-D502-4FFA-8ACE-F2AECDB2A23F}"/>
+                <a16:creationId xmlns:a16="http://schemas.microsoft.com/office/drawing/2014/main" id="{83812A62-AF02-50E3-0929-3B36B0F8B2CF}"/>
               </a:ext>
               <a:ext uri="{C183D7F6-B498-43B3-948B-1728B52AA6E4}">
                 <adec:decorative xmlns:adec="http://schemas.microsoft.com/office/drawing/2017/decorative" val="1"/>
@@ -7064,10 +8312,10 @@
       </p:sp>
       <p:sp>
         <p:nvSpPr>
-          <p:cNvPr id="46" name="Rectangle 45">
+          <p:cNvPr id="33" name="Rectangle 32">
             <a:extLst>
               <a:ext uri="{FF2B5EF4-FFF2-40B4-BE49-F238E27FC236}">
-                <a16:creationId xmlns:a16="http://schemas.microsoft.com/office/drawing/2014/main" id="{D3539FEE-81D3-4406-802E-60B20B16F4F6}"/>
+                <a16:creationId xmlns:a16="http://schemas.microsoft.com/office/drawing/2014/main" id="{530493F5-9BA7-C0B5-5876-57F9590BD2BC}"/>
               </a:ext>
               <a:ext uri="{C183D7F6-B498-43B3-948B-1728B52AA6E4}">
                 <adec:decorative xmlns:adec="http://schemas.microsoft.com/office/drawing/2017/decorative" val="1"/>
@@ -7139,10 +8387,10 @@
       </p:sp>
       <p:sp>
         <p:nvSpPr>
-          <p:cNvPr id="48" name="Rectangle 47">
+          <p:cNvPr id="35" name="Rectangle 34">
             <a:extLst>
               <a:ext uri="{FF2B5EF4-FFF2-40B4-BE49-F238E27FC236}">
-                <a16:creationId xmlns:a16="http://schemas.microsoft.com/office/drawing/2014/main" id="{DC701763-729E-462F-A5A8-E0DEFEB1E2E4}"/>
+                <a16:creationId xmlns:a16="http://schemas.microsoft.com/office/drawing/2014/main" id="{60F5B301-0B83-B3C0-6A71-8ED8C93D447E}"/>
               </a:ext>
               <a:ext uri="{C183D7F6-B498-43B3-948B-1728B52AA6E4}">
                 <adec:decorative xmlns:adec="http://schemas.microsoft.com/office/drawing/2017/decorative" val="1"/>
@@ -7218,7 +8466,7 @@
           <p:cNvPr id="2" name="Title 1">
             <a:extLst>
               <a:ext uri="{FF2B5EF4-FFF2-40B4-BE49-F238E27FC236}">
-                <a16:creationId xmlns:a16="http://schemas.microsoft.com/office/drawing/2014/main" id="{6935D70A-D246-BA80-639B-F2AB3AE559DC}"/>
+                <a16:creationId xmlns:a16="http://schemas.microsoft.com/office/drawing/2014/main" id="{B12E318B-F2CB-765D-072A-96D7F7399775}"/>
               </a:ext>
             </a:extLst>
           </p:cNvPr>
@@ -7242,7 +8490,7 @@
           <a:lstStyle/>
           <a:p>
             <a:r>
-              <a:rPr lang="en-US" sz="4000">
+              <a:rPr lang="en-US" sz="3400" dirty="0">
                 <a:solidFill>
                   <a:srgbClr val="FFFFFF"/>
                 </a:solidFill>
@@ -7254,10 +8502,10 @@
       </p:sp>
       <p:pic>
         <p:nvPicPr>
-          <p:cNvPr id="5" name="Imagen 4">
+          <p:cNvPr id="3" name="Imagen 2">
             <a:extLst>
               <a:ext uri="{FF2B5EF4-FFF2-40B4-BE49-F238E27FC236}">
-                <a16:creationId xmlns:a16="http://schemas.microsoft.com/office/drawing/2014/main" id="{31FA8EA9-D8ED-A32D-02B9-C78F440C669A}"/>
+                <a16:creationId xmlns:a16="http://schemas.microsoft.com/office/drawing/2014/main" id="{86BDDB2C-92BD-9C5A-8147-A1723B48F7FE}"/>
               </a:ext>
             </a:extLst>
           </p:cNvPr>
@@ -7274,7 +8522,7 @@
         </p:blipFill>
         <p:spPr>
           <a:xfrm>
-            <a:off x="407403" y="2099797"/>
+            <a:off x="621665" y="1928621"/>
             <a:ext cx="7169349" cy="4247840"/>
           </a:xfrm>
           <a:prstGeom prst="rect">
@@ -7284,10 +8532,10 @@
       </p:pic>
       <p:pic>
         <p:nvPicPr>
-          <p:cNvPr id="7" name="Imagen 6">
+          <p:cNvPr id="5" name="Imagen 4">
             <a:extLst>
               <a:ext uri="{FF2B5EF4-FFF2-40B4-BE49-F238E27FC236}">
-                <a16:creationId xmlns:a16="http://schemas.microsoft.com/office/drawing/2014/main" id="{09FB337F-20C3-C2D9-B0AB-3A0B6044A75E}"/>
+                <a16:creationId xmlns:a16="http://schemas.microsoft.com/office/drawing/2014/main" id="{CB1B2297-CD28-8055-405C-014C3F4538CB}"/>
               </a:ext>
             </a:extLst>
           </p:cNvPr>
@@ -7315,338 +8563,7 @@
     </p:spTree>
     <p:extLst>
       <p:ext uri="{BB962C8B-B14F-4D97-AF65-F5344CB8AC3E}">
-        <p14:creationId xmlns:p14="http://schemas.microsoft.com/office/powerpoint/2010/main" val="2089917364"/>
-      </p:ext>
-    </p:extLst>
-  </p:cSld>
-  <p:clrMapOvr>
-    <a:masterClrMapping/>
-  </p:clrMapOvr>
-</p:sld>
-</file>
-
-<file path=ppt/slides/slide9.xml><?xml version="1.0" encoding="utf-8"?>
-<p:sld xmlns:a="http://schemas.openxmlformats.org/drawingml/2006/main" xmlns:r="http://schemas.openxmlformats.org/officeDocument/2006/relationships" xmlns:p="http://schemas.openxmlformats.org/presentationml/2006/main">
-  <p:cSld>
-    <p:spTree>
-      <p:nvGrpSpPr>
-        <p:cNvPr id="1" name=""/>
-        <p:cNvGrpSpPr/>
-        <p:nvPr/>
-      </p:nvGrpSpPr>
-      <p:grpSpPr>
-        <a:xfrm>
-          <a:off x="0" y="0"/>
-          <a:ext cx="0" cy="0"/>
-          <a:chOff x="0" y="0"/>
-          <a:chExt cx="0" cy="0"/>
-        </a:xfrm>
-      </p:grpSpPr>
-      <p:sp>
-        <p:nvSpPr>
-          <p:cNvPr id="2" name="Title 1">
-            <a:extLst>
-              <a:ext uri="{FF2B5EF4-FFF2-40B4-BE49-F238E27FC236}">
-                <a16:creationId xmlns:a16="http://schemas.microsoft.com/office/drawing/2014/main" id="{20456BE5-97D8-CCCC-3F24-0AC11A8201A2}"/>
-              </a:ext>
-            </a:extLst>
-          </p:cNvPr>
-          <p:cNvSpPr>
-            <a:spLocks noGrp="1"/>
-          </p:cNvSpPr>
-          <p:nvPr>
-            <p:ph type="title"/>
-          </p:nvPr>
-        </p:nvSpPr>
-        <p:spPr/>
-        <p:txBody>
-          <a:bodyPr/>
-          <a:lstStyle/>
-          <a:p>
-            <a:r>
-              <a:rPr lang="en-US" dirty="0" err="1"/>
-              <a:t>Conclusiones</a:t>
-            </a:r>
-          </a:p>
-        </p:txBody>
-      </p:sp>
-      <p:sp>
-        <p:nvSpPr>
-          <p:cNvPr id="3" name="Content Placeholder 2">
-            <a:extLst>
-              <a:ext uri="{FF2B5EF4-FFF2-40B4-BE49-F238E27FC236}">
-                <a16:creationId xmlns:a16="http://schemas.microsoft.com/office/drawing/2014/main" id="{CA47CDDB-12B6-8409-FF77-AE22AEF5D705}"/>
-              </a:ext>
-            </a:extLst>
-          </p:cNvPr>
-          <p:cNvSpPr>
-            <a:spLocks noGrp="1"/>
-          </p:cNvSpPr>
-          <p:nvPr>
-            <p:ph idx="1"/>
-          </p:nvPr>
-        </p:nvSpPr>
-        <p:spPr>
-          <a:xfrm>
-            <a:off x="838200" y="1825624"/>
-            <a:ext cx="10515600" cy="4526189"/>
-          </a:xfrm>
-        </p:spPr>
-        <p:txBody>
-          <a:bodyPr vert="horz" lIns="91440" tIns="45720" rIns="91440" bIns="45720" rtlCol="0" anchor="t">
-            <a:normAutofit fontScale="92500" lnSpcReduction="20000"/>
-          </a:bodyPr>
-          <a:lstStyle/>
-          <a:p>
-            <a:r>
-              <a:rPr lang="en-US" dirty="0"/>
-              <a:t>Durante la Semana Santa, se </a:t>
-            </a:r>
-            <a:r>
-              <a:rPr lang="en-US" dirty="0" err="1"/>
-              <a:t>hacen</a:t>
-            </a:r>
-            <a:r>
-              <a:rPr lang="en-US" dirty="0"/>
-              <a:t> </a:t>
-            </a:r>
-            <a:r>
-              <a:rPr lang="en-US" dirty="0" err="1"/>
-              <a:t>menos</a:t>
-            </a:r>
-            <a:r>
-              <a:rPr lang="en-US" dirty="0"/>
-              <a:t> </a:t>
-            </a:r>
-            <a:r>
-              <a:rPr lang="en-US" dirty="0" err="1"/>
-              <a:t>retiros</a:t>
-            </a:r>
-            <a:r>
-              <a:rPr lang="en-US" dirty="0"/>
-              <a:t> </a:t>
-            </a:r>
-            <a:r>
-              <a:rPr lang="en-US" dirty="0" err="1"/>
-              <a:t>desde</a:t>
-            </a:r>
-            <a:r>
-              <a:rPr lang="en-US" dirty="0"/>
-              <a:t> </a:t>
-            </a:r>
-            <a:r>
-              <a:rPr lang="en-US" dirty="0" err="1"/>
-              <a:t>el</a:t>
-            </a:r>
-            <a:r>
-              <a:rPr lang="en-US" dirty="0"/>
-              <a:t> Jueves Santo a Domingo de </a:t>
-            </a:r>
-            <a:r>
-              <a:rPr lang="en-US" dirty="0" err="1"/>
-              <a:t>Resurección</a:t>
-            </a:r>
-            <a:r>
-              <a:rPr lang="en-US" dirty="0"/>
-              <a:t> </a:t>
-            </a:r>
-            <a:r>
-              <a:rPr lang="en-US" dirty="0" err="1"/>
-              <a:t>que</a:t>
-            </a:r>
-            <a:r>
-              <a:rPr lang="en-US" dirty="0"/>
-              <a:t> </a:t>
-            </a:r>
-            <a:r>
-              <a:rPr lang="en-US" dirty="0" err="1"/>
-              <a:t>en</a:t>
-            </a:r>
-            <a:r>
-              <a:rPr lang="en-US" dirty="0"/>
-              <a:t> </a:t>
-            </a:r>
-            <a:r>
-              <a:rPr lang="en-US" dirty="0" err="1"/>
-              <a:t>el</a:t>
-            </a:r>
-            <a:r>
-              <a:rPr lang="en-US" dirty="0"/>
-              <a:t> resto de la </a:t>
-            </a:r>
-            <a:r>
-              <a:rPr lang="en-US" dirty="0" err="1"/>
-              <a:t>semana</a:t>
-            </a:r>
-            <a:r>
-              <a:rPr lang="en-US" dirty="0"/>
-              <a:t>.</a:t>
-            </a:r>
-          </a:p>
-          <a:p>
-            <a:r>
-              <a:rPr lang="en-US" dirty="0"/>
-              <a:t>Se </a:t>
-            </a:r>
-            <a:r>
-              <a:rPr lang="en-US" dirty="0" err="1"/>
-              <a:t>tiene</a:t>
-            </a:r>
-            <a:r>
-              <a:rPr lang="en-US" dirty="0"/>
-              <a:t> </a:t>
-            </a:r>
-            <a:r>
-              <a:rPr lang="en-US" dirty="0" err="1"/>
-              <a:t>que</a:t>
-            </a:r>
-            <a:r>
-              <a:rPr lang="en-US" dirty="0"/>
-              <a:t> </a:t>
-            </a:r>
-            <a:r>
-              <a:rPr lang="en-US" dirty="0" err="1"/>
-              <a:t>el</a:t>
-            </a:r>
-            <a:r>
-              <a:rPr lang="en-US" dirty="0"/>
-              <a:t> </a:t>
-            </a:r>
-            <a:r>
-              <a:rPr lang="en-US" dirty="0" err="1"/>
-              <a:t>préstamo</a:t>
-            </a:r>
-            <a:r>
-              <a:rPr lang="en-US" dirty="0"/>
-              <a:t> de </a:t>
-            </a:r>
-            <a:r>
-              <a:rPr lang="en-US" dirty="0" err="1"/>
-              <a:t>bicicletas</a:t>
-            </a:r>
-            <a:r>
-              <a:rPr lang="en-US" dirty="0"/>
-              <a:t> ha </a:t>
-            </a:r>
-            <a:r>
-              <a:rPr lang="en-US" dirty="0" err="1"/>
-              <a:t>sido</a:t>
-            </a:r>
-            <a:r>
-              <a:rPr lang="en-US" dirty="0"/>
-              <a:t> </a:t>
-            </a:r>
-            <a:r>
-              <a:rPr lang="en-US" dirty="0" err="1"/>
-              <a:t>en</a:t>
-            </a:r>
-            <a:r>
-              <a:rPr lang="en-US" dirty="0"/>
-              <a:t> </a:t>
-            </a:r>
-            <a:r>
-              <a:rPr lang="en-US" dirty="0" err="1"/>
-              <a:t>los</a:t>
-            </a:r>
-            <a:r>
-              <a:rPr lang="en-US" dirty="0"/>
-              <a:t> </a:t>
-            </a:r>
-            <a:r>
-              <a:rPr lang="en-US" dirty="0" err="1"/>
-              <a:t>años</a:t>
-            </a:r>
-            <a:r>
-              <a:rPr lang="en-US" dirty="0"/>
-              <a:t> </a:t>
-            </a:r>
-            <a:r>
-              <a:rPr lang="en-US" dirty="0" err="1"/>
-              <a:t>siguientes</a:t>
-            </a:r>
-            <a:r>
-              <a:rPr lang="en-US" dirty="0"/>
-              <a:t> a la pandemia, </a:t>
-            </a:r>
-            <a:r>
-              <a:rPr lang="en-US" dirty="0" err="1"/>
-              <a:t>que</a:t>
-            </a:r>
-            <a:r>
-              <a:rPr lang="en-US" dirty="0"/>
-              <a:t> </a:t>
-            </a:r>
-            <a:r>
-              <a:rPr lang="en-US" dirty="0" err="1"/>
-              <a:t>en</a:t>
-            </a:r>
-            <a:r>
-              <a:rPr lang="en-US" dirty="0"/>
-              <a:t> </a:t>
-            </a:r>
-            <a:r>
-              <a:rPr lang="en-US" dirty="0" err="1"/>
-              <a:t>los</a:t>
-            </a:r>
-            <a:r>
-              <a:rPr lang="en-US" dirty="0"/>
-              <a:t> </a:t>
-            </a:r>
-            <a:r>
-              <a:rPr lang="en-US" dirty="0" err="1"/>
-              <a:t>años</a:t>
-            </a:r>
-            <a:r>
-              <a:rPr lang="en-US" dirty="0"/>
-              <a:t> </a:t>
-            </a:r>
-            <a:r>
-              <a:rPr lang="en-US" dirty="0" err="1"/>
-              <a:t>anteriores</a:t>
-            </a:r>
-            <a:r>
-              <a:rPr lang="en-US" dirty="0"/>
-              <a:t> a la </a:t>
-            </a:r>
-            <a:r>
-              <a:rPr lang="en-US" dirty="0" err="1"/>
-              <a:t>misma</a:t>
-            </a:r>
-            <a:r>
-              <a:rPr lang="en-US" dirty="0"/>
-              <a:t>.</a:t>
-            </a:r>
-          </a:p>
-          <a:p>
-            <a:pPr lvl="0"/>
-            <a:r>
-              <a:rPr lang="es-GT" dirty="0"/>
-              <a:t>La estación en Ciudad de México, desde la que se hace el mayor número de retiros de bicicletas durante Semana Santa es la estación en CE-271-272 Jesús García – Carlos J. Meneses con 8008 retiros.</a:t>
-            </a:r>
-          </a:p>
-          <a:p>
-            <a:pPr lvl="0"/>
-            <a:r>
-              <a:rPr lang="es-GT" dirty="0"/>
-              <a:t>La estación en Ciudad de México a la que arriba la mayor cantidad de bicicletas durante la Ciudad de México es la estación en CE-271-272 Jesús García – Carlos J. Meneses con 12213 arribos.</a:t>
-            </a:r>
-          </a:p>
-          <a:p>
-            <a:pPr lvl="0"/>
-            <a:r>
-              <a:rPr lang="es-GT" dirty="0"/>
-              <a:t>Después de la época post pandemia se tiene un aumento de los viajes que permite diferenciar en 2 clúster, pero hay un claro traslape entre algunos clústeres, lo cual se explica en el tiempo de recuperación que es alrededor de 2020 a 2022.</a:t>
-            </a:r>
-          </a:p>
-          <a:p>
-            <a:endParaRPr lang="en-US" dirty="0"/>
-          </a:p>
-        </p:txBody>
-      </p:sp>
-    </p:spTree>
-    <p:extLst>
-      <p:ext uri="{BB962C8B-B14F-4D97-AF65-F5344CB8AC3E}">
-        <p14:creationId xmlns:p14="http://schemas.microsoft.com/office/powerpoint/2010/main" val="3399263724"/>
+        <p14:creationId xmlns:p14="http://schemas.microsoft.com/office/powerpoint/2010/main" val="232392608"/>
       </p:ext>
     </p:extLst>
   </p:cSld>
